--- a/docs/LIVE_SPOtCH_構造チャート.pptx
+++ b/docs/LIVE_SPOtCH_構造チャート.pptx
@@ -5,10 +5,9 @@
     <p:sldMasterId id="2147483648" r:id="rId1"/>
   </p:sldMasterIdLst>
   <p:sldIdLst>
-    <p:sldId id="262" r:id="rId2"/>
-    <p:sldId id="261" r:id="rId3"/>
+    <p:sldId id="256" r:id="rId7"/>
   </p:sldIdLst>
-  <p:sldSz cx="12192000" cy="6858000"/>
+  <p:sldSz cx="12191695" cy="6858000" type="screen4x3"/>
   <p:notesSz cx="6858000" cy="9144000"/>
   <p:defaultTextStyle>
     <a:defPPr>
@@ -105,22 +104,6 @@
       </a:defRPr>
     </a:lvl9pPr>
   </p:defaultTextStyle>
-  <p:extLst>
-    <p:ext uri="{EFAFB233-063F-42B5-8137-9DF3F51BA10A}">
-      <p15:sldGuideLst xmlns:p15="http://schemas.microsoft.com/office/powerpoint/2012/main">
-        <p15:guide id="1" orient="horz" pos="2160">
-          <p15:clr>
-            <a:srgbClr val="A4A3A4"/>
-          </p15:clr>
-        </p15:guide>
-        <p15:guide id="2" pos="2880">
-          <p15:clr>
-            <a:srgbClr val="A4A3A4"/>
-          </p15:clr>
-        </p15:guide>
-      </p15:sldGuideLst>
-    </p:ext>
-  </p:extLst>
 </p:presentation>
 </file>
 
@@ -162,9 +145,10 @@
           <a:lstStyle/>
           <a:p>
             <a:r>
-              <a:rPr lang="en-US"/>
+              <a:rPr lang="en-US" smtClean="0"/>
               <a:t>Click to edit Master title style</a:t>
             </a:r>
+            <a:endParaRPr lang="en-US"/>
           </a:p>
         </p:txBody>
       </p:sp>
@@ -280,9 +264,10 @@
           </a:lstStyle>
           <a:p>
             <a:r>
-              <a:rPr lang="en-US"/>
+              <a:rPr lang="en-US" smtClean="0"/>
               <a:t>Click to edit Master subtitle style</a:t>
             </a:r>
+            <a:endParaRPr lang="en-US"/>
           </a:p>
         </p:txBody>
       </p:sp>
@@ -303,7 +288,7 @@
           <a:p>
             <a:fld id="{5BCAD085-E8A6-8845-BD4E-CB4CCA059FC4}" type="datetimeFigureOut">
               <a:rPr lang="en-US" smtClean="0"/>
-              <a:t>4/18/26</a:t>
+              <a:t>1/27/13</a:t>
             </a:fld>
             <a:endParaRPr lang="en-US"/>
           </a:p>
@@ -397,9 +382,10 @@
           <a:lstStyle/>
           <a:p>
             <a:r>
-              <a:rPr lang="en-US"/>
+              <a:rPr lang="en-US" smtClean="0"/>
               <a:t>Click to edit Master title style</a:t>
             </a:r>
+            <a:endParaRPr lang="en-US"/>
           </a:p>
         </p:txBody>
       </p:sp>
@@ -420,37 +406,38 @@
           <a:p>
             <a:pPr lvl="0"/>
             <a:r>
-              <a:rPr lang="en-US"/>
+              <a:rPr lang="en-US" smtClean="0"/>
               <a:t>Click to edit Master text styles</a:t>
             </a:r>
           </a:p>
           <a:p>
             <a:pPr lvl="1"/>
             <a:r>
-              <a:rPr lang="en-US"/>
+              <a:rPr lang="en-US" smtClean="0"/>
               <a:t>Second level</a:t>
             </a:r>
           </a:p>
           <a:p>
             <a:pPr lvl="2"/>
             <a:r>
-              <a:rPr lang="en-US"/>
+              <a:rPr lang="en-US" smtClean="0"/>
               <a:t>Third level</a:t>
             </a:r>
           </a:p>
           <a:p>
             <a:pPr lvl="3"/>
             <a:r>
-              <a:rPr lang="en-US"/>
+              <a:rPr lang="en-US" smtClean="0"/>
               <a:t>Fourth level</a:t>
             </a:r>
           </a:p>
           <a:p>
             <a:pPr lvl="4"/>
             <a:r>
-              <a:rPr lang="en-US"/>
+              <a:rPr lang="en-US" smtClean="0"/>
               <a:t>Fifth level</a:t>
             </a:r>
+            <a:endParaRPr lang="en-US"/>
           </a:p>
         </p:txBody>
       </p:sp>
@@ -471,7 +458,7 @@
           <a:p>
             <a:fld id="{5BCAD085-E8A6-8845-BD4E-CB4CCA059FC4}" type="datetimeFigureOut">
               <a:rPr lang="en-US" smtClean="0"/>
-              <a:t>4/18/26</a:t>
+              <a:t>1/27/13</a:t>
             </a:fld>
             <a:endParaRPr lang="en-US"/>
           </a:p>
@@ -570,9 +557,10 @@
           <a:lstStyle/>
           <a:p>
             <a:r>
-              <a:rPr lang="en-US"/>
+              <a:rPr lang="en-US" smtClean="0"/>
               <a:t>Click to edit Master title style</a:t>
             </a:r>
+            <a:endParaRPr lang="en-US"/>
           </a:p>
         </p:txBody>
       </p:sp>
@@ -598,37 +586,38 @@
           <a:p>
             <a:pPr lvl="0"/>
             <a:r>
-              <a:rPr lang="en-US"/>
+              <a:rPr lang="en-US" smtClean="0"/>
               <a:t>Click to edit Master text styles</a:t>
             </a:r>
           </a:p>
           <a:p>
             <a:pPr lvl="1"/>
             <a:r>
-              <a:rPr lang="en-US"/>
+              <a:rPr lang="en-US" smtClean="0"/>
               <a:t>Second level</a:t>
             </a:r>
           </a:p>
           <a:p>
             <a:pPr lvl="2"/>
             <a:r>
-              <a:rPr lang="en-US"/>
+              <a:rPr lang="en-US" smtClean="0"/>
               <a:t>Third level</a:t>
             </a:r>
           </a:p>
           <a:p>
             <a:pPr lvl="3"/>
             <a:r>
-              <a:rPr lang="en-US"/>
+              <a:rPr lang="en-US" smtClean="0"/>
               <a:t>Fourth level</a:t>
             </a:r>
           </a:p>
           <a:p>
             <a:pPr lvl="4"/>
             <a:r>
-              <a:rPr lang="en-US"/>
+              <a:rPr lang="en-US" smtClean="0"/>
               <a:t>Fifth level</a:t>
             </a:r>
+            <a:endParaRPr lang="en-US"/>
           </a:p>
         </p:txBody>
       </p:sp>
@@ -649,7 +638,7 @@
           <a:p>
             <a:fld id="{5BCAD085-E8A6-8845-BD4E-CB4CCA059FC4}" type="datetimeFigureOut">
               <a:rPr lang="en-US" smtClean="0"/>
-              <a:t>4/18/26</a:t>
+              <a:t>1/27/13</a:t>
             </a:fld>
             <a:endParaRPr lang="en-US"/>
           </a:p>
@@ -743,9 +732,10 @@
           <a:lstStyle/>
           <a:p>
             <a:r>
-              <a:rPr lang="en-US"/>
+              <a:rPr lang="en-US" smtClean="0"/>
               <a:t>Click to edit Master title style</a:t>
             </a:r>
+            <a:endParaRPr lang="en-US"/>
           </a:p>
         </p:txBody>
       </p:sp>
@@ -766,37 +756,38 @@
           <a:p>
             <a:pPr lvl="0"/>
             <a:r>
-              <a:rPr lang="en-US"/>
+              <a:rPr lang="en-US" smtClean="0"/>
               <a:t>Click to edit Master text styles</a:t>
             </a:r>
           </a:p>
           <a:p>
             <a:pPr lvl="1"/>
             <a:r>
-              <a:rPr lang="en-US"/>
+              <a:rPr lang="en-US" smtClean="0"/>
               <a:t>Second level</a:t>
             </a:r>
           </a:p>
           <a:p>
             <a:pPr lvl="2"/>
             <a:r>
-              <a:rPr lang="en-US"/>
+              <a:rPr lang="en-US" smtClean="0"/>
               <a:t>Third level</a:t>
             </a:r>
           </a:p>
           <a:p>
             <a:pPr lvl="3"/>
             <a:r>
-              <a:rPr lang="en-US"/>
+              <a:rPr lang="en-US" smtClean="0"/>
               <a:t>Fourth level</a:t>
             </a:r>
           </a:p>
           <a:p>
             <a:pPr lvl="4"/>
             <a:r>
-              <a:rPr lang="en-US"/>
+              <a:rPr lang="en-US" smtClean="0"/>
               <a:t>Fifth level</a:t>
             </a:r>
+            <a:endParaRPr lang="en-US"/>
           </a:p>
         </p:txBody>
       </p:sp>
@@ -817,7 +808,7 @@
           <a:p>
             <a:fld id="{5BCAD085-E8A6-8845-BD4E-CB4CCA059FC4}" type="datetimeFigureOut">
               <a:rPr lang="en-US" smtClean="0"/>
-              <a:t>4/18/26</a:t>
+              <a:t>1/27/13</a:t>
             </a:fld>
             <a:endParaRPr lang="en-US"/>
           </a:p>
@@ -920,9 +911,10 @@
           </a:lstStyle>
           <a:p>
             <a:r>
-              <a:rPr lang="en-US"/>
+              <a:rPr lang="en-US" smtClean="0"/>
               <a:t>Click to edit Master title style</a:t>
             </a:r>
+            <a:endParaRPr lang="en-US"/>
           </a:p>
         </p:txBody>
       </p:sp>
@@ -1039,7 +1031,7 @@
           <a:p>
             <a:pPr lvl="0"/>
             <a:r>
-              <a:rPr lang="en-US"/>
+              <a:rPr lang="en-US" smtClean="0"/>
               <a:t>Click to edit Master text styles</a:t>
             </a:r>
           </a:p>
@@ -1062,7 +1054,7 @@
           <a:p>
             <a:fld id="{5BCAD085-E8A6-8845-BD4E-CB4CCA059FC4}" type="datetimeFigureOut">
               <a:rPr lang="en-US" smtClean="0"/>
-              <a:t>4/18/26</a:t>
+              <a:t>1/27/13</a:t>
             </a:fld>
             <a:endParaRPr lang="en-US"/>
           </a:p>
@@ -1156,9 +1148,10 @@
           <a:lstStyle/>
           <a:p>
             <a:r>
-              <a:rPr lang="en-US"/>
+              <a:rPr lang="en-US" smtClean="0"/>
               <a:t>Click to edit Master title style</a:t>
             </a:r>
+            <a:endParaRPr lang="en-US"/>
           </a:p>
         </p:txBody>
       </p:sp>
@@ -1212,37 +1205,38 @@
           <a:p>
             <a:pPr lvl="0"/>
             <a:r>
-              <a:rPr lang="en-US"/>
+              <a:rPr lang="en-US" smtClean="0"/>
               <a:t>Click to edit Master text styles</a:t>
             </a:r>
           </a:p>
           <a:p>
             <a:pPr lvl="1"/>
             <a:r>
-              <a:rPr lang="en-US"/>
+              <a:rPr lang="en-US" smtClean="0"/>
               <a:t>Second level</a:t>
             </a:r>
           </a:p>
           <a:p>
             <a:pPr lvl="2"/>
             <a:r>
-              <a:rPr lang="en-US"/>
+              <a:rPr lang="en-US" smtClean="0"/>
               <a:t>Third level</a:t>
             </a:r>
           </a:p>
           <a:p>
             <a:pPr lvl="3"/>
             <a:r>
-              <a:rPr lang="en-US"/>
+              <a:rPr lang="en-US" smtClean="0"/>
               <a:t>Fourth level</a:t>
             </a:r>
           </a:p>
           <a:p>
             <a:pPr lvl="4"/>
             <a:r>
-              <a:rPr lang="en-US"/>
+              <a:rPr lang="en-US" smtClean="0"/>
               <a:t>Fifth level</a:t>
             </a:r>
+            <a:endParaRPr lang="en-US"/>
           </a:p>
         </p:txBody>
       </p:sp>
@@ -1296,37 +1290,38 @@
           <a:p>
             <a:pPr lvl="0"/>
             <a:r>
-              <a:rPr lang="en-US"/>
+              <a:rPr lang="en-US" smtClean="0"/>
               <a:t>Click to edit Master text styles</a:t>
             </a:r>
           </a:p>
           <a:p>
             <a:pPr lvl="1"/>
             <a:r>
-              <a:rPr lang="en-US"/>
+              <a:rPr lang="en-US" smtClean="0"/>
               <a:t>Second level</a:t>
             </a:r>
           </a:p>
           <a:p>
             <a:pPr lvl="2"/>
             <a:r>
-              <a:rPr lang="en-US"/>
+              <a:rPr lang="en-US" smtClean="0"/>
               <a:t>Third level</a:t>
             </a:r>
           </a:p>
           <a:p>
             <a:pPr lvl="3"/>
             <a:r>
-              <a:rPr lang="en-US"/>
+              <a:rPr lang="en-US" smtClean="0"/>
               <a:t>Fourth level</a:t>
             </a:r>
           </a:p>
           <a:p>
             <a:pPr lvl="4"/>
             <a:r>
-              <a:rPr lang="en-US"/>
+              <a:rPr lang="en-US" smtClean="0"/>
               <a:t>Fifth level</a:t>
             </a:r>
+            <a:endParaRPr lang="en-US"/>
           </a:p>
         </p:txBody>
       </p:sp>
@@ -1347,7 +1342,7 @@
           <a:p>
             <a:fld id="{5BCAD085-E8A6-8845-BD4E-CB4CCA059FC4}" type="datetimeFigureOut">
               <a:rPr lang="en-US" smtClean="0"/>
-              <a:t>4/18/26</a:t>
+              <a:t>1/27/13</a:t>
             </a:fld>
             <a:endParaRPr lang="en-US"/>
           </a:p>
@@ -1445,9 +1440,10 @@
           </a:lstStyle>
           <a:p>
             <a:r>
-              <a:rPr lang="en-US"/>
+              <a:rPr lang="en-US" smtClean="0"/>
               <a:t>Click to edit Master title style</a:t>
             </a:r>
+            <a:endParaRPr lang="en-US"/>
           </a:p>
         </p:txBody>
       </p:sp>
@@ -1510,7 +1506,7 @@
           <a:p>
             <a:pPr lvl="0"/>
             <a:r>
-              <a:rPr lang="en-US"/>
+              <a:rPr lang="en-US" smtClean="0"/>
               <a:t>Click to edit Master text styles</a:t>
             </a:r>
           </a:p>
@@ -1566,37 +1562,38 @@
           <a:p>
             <a:pPr lvl="0"/>
             <a:r>
-              <a:rPr lang="en-US"/>
+              <a:rPr lang="en-US" smtClean="0"/>
               <a:t>Click to edit Master text styles</a:t>
             </a:r>
           </a:p>
           <a:p>
             <a:pPr lvl="1"/>
             <a:r>
-              <a:rPr lang="en-US"/>
+              <a:rPr lang="en-US" smtClean="0"/>
               <a:t>Second level</a:t>
             </a:r>
           </a:p>
           <a:p>
             <a:pPr lvl="2"/>
             <a:r>
-              <a:rPr lang="en-US"/>
+              <a:rPr lang="en-US" smtClean="0"/>
               <a:t>Third level</a:t>
             </a:r>
           </a:p>
           <a:p>
             <a:pPr lvl="3"/>
             <a:r>
-              <a:rPr lang="en-US"/>
+              <a:rPr lang="en-US" smtClean="0"/>
               <a:t>Fourth level</a:t>
             </a:r>
           </a:p>
           <a:p>
             <a:pPr lvl="4"/>
             <a:r>
-              <a:rPr lang="en-US"/>
+              <a:rPr lang="en-US" smtClean="0"/>
               <a:t>Fifth level</a:t>
             </a:r>
+            <a:endParaRPr lang="en-US"/>
           </a:p>
         </p:txBody>
       </p:sp>
@@ -1659,7 +1656,7 @@
           <a:p>
             <a:pPr lvl="0"/>
             <a:r>
-              <a:rPr lang="en-US"/>
+              <a:rPr lang="en-US" smtClean="0"/>
               <a:t>Click to edit Master text styles</a:t>
             </a:r>
           </a:p>
@@ -1715,37 +1712,38 @@
           <a:p>
             <a:pPr lvl="0"/>
             <a:r>
-              <a:rPr lang="en-US"/>
+              <a:rPr lang="en-US" smtClean="0"/>
               <a:t>Click to edit Master text styles</a:t>
             </a:r>
           </a:p>
           <a:p>
             <a:pPr lvl="1"/>
             <a:r>
-              <a:rPr lang="en-US"/>
+              <a:rPr lang="en-US" smtClean="0"/>
               <a:t>Second level</a:t>
             </a:r>
           </a:p>
           <a:p>
             <a:pPr lvl="2"/>
             <a:r>
-              <a:rPr lang="en-US"/>
+              <a:rPr lang="en-US" smtClean="0"/>
               <a:t>Third level</a:t>
             </a:r>
           </a:p>
           <a:p>
             <a:pPr lvl="3"/>
             <a:r>
-              <a:rPr lang="en-US"/>
+              <a:rPr lang="en-US" smtClean="0"/>
               <a:t>Fourth level</a:t>
             </a:r>
           </a:p>
           <a:p>
             <a:pPr lvl="4"/>
             <a:r>
-              <a:rPr lang="en-US"/>
+              <a:rPr lang="en-US" smtClean="0"/>
               <a:t>Fifth level</a:t>
             </a:r>
+            <a:endParaRPr lang="en-US"/>
           </a:p>
         </p:txBody>
       </p:sp>
@@ -1766,7 +1764,7 @@
           <a:p>
             <a:fld id="{5BCAD085-E8A6-8845-BD4E-CB4CCA059FC4}" type="datetimeFigureOut">
               <a:rPr lang="en-US" smtClean="0"/>
-              <a:t>4/18/26</a:t>
+              <a:t>1/27/13</a:t>
             </a:fld>
             <a:endParaRPr lang="en-US"/>
           </a:p>
@@ -1860,9 +1858,10 @@
           <a:lstStyle/>
           <a:p>
             <a:r>
-              <a:rPr lang="en-US"/>
+              <a:rPr lang="en-US" smtClean="0"/>
               <a:t>Click to edit Master title style</a:t>
             </a:r>
+            <a:endParaRPr lang="en-US"/>
           </a:p>
         </p:txBody>
       </p:sp>
@@ -1883,7 +1882,7 @@
           <a:p>
             <a:fld id="{5BCAD085-E8A6-8845-BD4E-CB4CCA059FC4}" type="datetimeFigureOut">
               <a:rPr lang="en-US" smtClean="0"/>
-              <a:t>4/18/26</a:t>
+              <a:t>1/27/13</a:t>
             </a:fld>
             <a:endParaRPr lang="en-US"/>
           </a:p>
@@ -1978,7 +1977,7 @@
           <a:p>
             <a:fld id="{5BCAD085-E8A6-8845-BD4E-CB4CCA059FC4}" type="datetimeFigureOut">
               <a:rPr lang="en-US" smtClean="0"/>
-              <a:t>4/18/26</a:t>
+              <a:t>1/27/13</a:t>
             </a:fld>
             <a:endParaRPr lang="en-US"/>
           </a:p>
@@ -2081,9 +2080,10 @@
           </a:lstStyle>
           <a:p>
             <a:r>
-              <a:rPr lang="en-US"/>
+              <a:rPr lang="en-US" smtClean="0"/>
               <a:t>Click to edit Master title style</a:t>
             </a:r>
+            <a:endParaRPr lang="en-US"/>
           </a:p>
         </p:txBody>
       </p:sp>
@@ -2137,37 +2137,38 @@
           <a:p>
             <a:pPr lvl="0"/>
             <a:r>
-              <a:rPr lang="en-US"/>
+              <a:rPr lang="en-US" smtClean="0"/>
               <a:t>Click to edit Master text styles</a:t>
             </a:r>
           </a:p>
           <a:p>
             <a:pPr lvl="1"/>
             <a:r>
-              <a:rPr lang="en-US"/>
+              <a:rPr lang="en-US" smtClean="0"/>
               <a:t>Second level</a:t>
             </a:r>
           </a:p>
           <a:p>
             <a:pPr lvl="2"/>
             <a:r>
-              <a:rPr lang="en-US"/>
+              <a:rPr lang="en-US" smtClean="0"/>
               <a:t>Third level</a:t>
             </a:r>
           </a:p>
           <a:p>
             <a:pPr lvl="3"/>
             <a:r>
-              <a:rPr lang="en-US"/>
+              <a:rPr lang="en-US" smtClean="0"/>
               <a:t>Fourth level</a:t>
             </a:r>
           </a:p>
           <a:p>
             <a:pPr lvl="4"/>
             <a:r>
-              <a:rPr lang="en-US"/>
+              <a:rPr lang="en-US" smtClean="0"/>
               <a:t>Fifth level</a:t>
             </a:r>
+            <a:endParaRPr lang="en-US"/>
           </a:p>
         </p:txBody>
       </p:sp>
@@ -2230,7 +2231,7 @@
           <a:p>
             <a:pPr lvl="0"/>
             <a:r>
-              <a:rPr lang="en-US"/>
+              <a:rPr lang="en-US" smtClean="0"/>
               <a:t>Click to edit Master text styles</a:t>
             </a:r>
           </a:p>
@@ -2253,7 +2254,7 @@
           <a:p>
             <a:fld id="{5BCAD085-E8A6-8845-BD4E-CB4CCA059FC4}" type="datetimeFigureOut">
               <a:rPr lang="en-US" smtClean="0"/>
-              <a:t>4/18/26</a:t>
+              <a:t>1/27/13</a:t>
             </a:fld>
             <a:endParaRPr lang="en-US"/>
           </a:p>
@@ -2356,9 +2357,10 @@
           </a:lstStyle>
           <a:p>
             <a:r>
-              <a:rPr lang="en-US"/>
+              <a:rPr lang="en-US" smtClean="0"/>
               <a:t>Click to edit Master title style</a:t>
             </a:r>
+            <a:endParaRPr lang="en-US"/>
           </a:p>
         </p:txBody>
       </p:sp>
@@ -2482,7 +2484,7 @@
           <a:p>
             <a:pPr lvl="0"/>
             <a:r>
-              <a:rPr lang="en-US"/>
+              <a:rPr lang="en-US" smtClean="0"/>
               <a:t>Click to edit Master text styles</a:t>
             </a:r>
           </a:p>
@@ -2505,7 +2507,7 @@
           <a:p>
             <a:fld id="{5BCAD085-E8A6-8845-BD4E-CB4CCA059FC4}" type="datetimeFigureOut">
               <a:rPr lang="en-US" smtClean="0"/>
-              <a:t>4/18/26</a:t>
+              <a:t>1/27/13</a:t>
             </a:fld>
             <a:endParaRPr lang="en-US"/>
           </a:p>
@@ -2614,9 +2616,10 @@
           <a:lstStyle/>
           <a:p>
             <a:r>
-              <a:rPr lang="en-US"/>
+              <a:rPr lang="en-US" smtClean="0"/>
               <a:t>Click to edit Master title style</a:t>
             </a:r>
+            <a:endParaRPr lang="en-US"/>
           </a:p>
         </p:txBody>
       </p:sp>
@@ -2647,37 +2650,38 @@
           <a:p>
             <a:pPr lvl="0"/>
             <a:r>
-              <a:rPr lang="en-US"/>
+              <a:rPr lang="en-US" smtClean="0"/>
               <a:t>Click to edit Master text styles</a:t>
             </a:r>
           </a:p>
           <a:p>
             <a:pPr lvl="1"/>
             <a:r>
-              <a:rPr lang="en-US"/>
+              <a:rPr lang="en-US" smtClean="0"/>
               <a:t>Second level</a:t>
             </a:r>
           </a:p>
           <a:p>
             <a:pPr lvl="2"/>
             <a:r>
-              <a:rPr lang="en-US"/>
+              <a:rPr lang="en-US" smtClean="0"/>
               <a:t>Third level</a:t>
             </a:r>
           </a:p>
           <a:p>
             <a:pPr lvl="3"/>
             <a:r>
-              <a:rPr lang="en-US"/>
+              <a:rPr lang="en-US" smtClean="0"/>
               <a:t>Fourth level</a:t>
             </a:r>
           </a:p>
           <a:p>
             <a:pPr lvl="4"/>
             <a:r>
-              <a:rPr lang="en-US"/>
+              <a:rPr lang="en-US" smtClean="0"/>
               <a:t>Fifth level</a:t>
             </a:r>
+            <a:endParaRPr lang="en-US"/>
           </a:p>
         </p:txBody>
       </p:sp>
@@ -2716,7 +2720,7 @@
           <a:p>
             <a:fld id="{5BCAD085-E8A6-8845-BD4E-CB4CCA059FC4}" type="datetimeFigureOut">
               <a:rPr lang="en-US" smtClean="0"/>
-              <a:t>4/18/26</a:t>
+              <a:t>1/27/13</a:t>
             </a:fld>
             <a:endParaRPr lang="en-US"/>
           </a:p>
@@ -3075,7 +3079,7 @@
 </file>
 
 <file path=ppt/slides/slide1.xml><?xml version="1.0" encoding="utf-8"?>
-<p:sld xmlns:a="http://schemas.openxmlformats.org/drawingml/2006/main" xmlns:r="http://schemas.openxmlformats.org/officeDocument/2006/relationships" xmlns:p="http://schemas.openxmlformats.org/presentationml/2006/main">
+<p:sld xmlns:a="http://schemas.openxmlformats.org/drawingml/2006/main" xmlns:p="http://schemas.openxmlformats.org/presentationml/2006/main" xmlns:r="http://schemas.openxmlformats.org/officeDocument/2006/relationships">
   <p:cSld>
     <p:bg>
       <p:bgPr>
@@ -3091,14 +3095,7 @@
         <p:cNvGrpSpPr/>
         <p:nvPr/>
       </p:nvGrpSpPr>
-      <p:grpSpPr>
-        <a:xfrm>
-          <a:off x="0" y="0"/>
-          <a:ext cx="0" cy="0"/>
-          <a:chOff x="0" y="0"/>
-          <a:chExt cx="0" cy="0"/>
-        </a:xfrm>
-      </p:grpSpPr>
+      <p:grpSpPr/>
       <p:sp>
         <p:nvSpPr>
           <p:cNvPr id="2" name="Rectangle 1"/>
@@ -3139,7 +3136,6 @@
           <a:lstStyle/>
           <a:p>
             <a:pPr algn="ctr"/>
-            <a:endParaRPr/>
           </a:p>
         </p:txBody>
       </p:sp>
@@ -3151,8 +3147,8 @@
         </p:nvSpPr>
         <p:spPr>
           <a:xfrm>
-            <a:off x="447040" y="228600"/>
-            <a:ext cx="11287760" cy="523220"/>
+            <a:off x="548640" y="228600"/>
+            <a:ext cx="6400800" cy="365760"/>
           </a:xfrm>
           <a:prstGeom prst="rect">
             <a:avLst/>
@@ -3166,22 +3162,14 @@
           <a:lstStyle/>
           <a:p>
             <a:pPr algn="l">
-              <a:defRPr sz="2800" b="1">
+              <a:defRPr sz="2200" b="1">
                 <a:solidFill>
                   <a:srgbClr val="0F172A"/>
                 </a:solidFill>
                 <a:latin typeface="Meiryo UI"/>
-                <a:ea typeface="Meiryo UI"/>
               </a:defRPr>
             </a:pPr>
             <a:r>
-              <a:rPr lang="ja-JP" altLang="en-US" sz="2800" b="1" dirty="0">
-                <a:solidFill>
-                  <a:srgbClr val="0F172A"/>
-                </a:solidFill>
-                <a:latin typeface="Meiryo UI"/>
-                <a:ea typeface="Meiryo UI"/>
-              </a:rPr>
               <a:t>LIVE SPOtCH — システム構造</a:t>
             </a:r>
           </a:p>
@@ -3195,8 +3183,8 @@
         </p:nvSpPr>
         <p:spPr>
           <a:xfrm>
-            <a:off x="447040" y="787400"/>
-            <a:ext cx="11287760" cy="307777"/>
+            <a:off x="548640" y="594360"/>
+            <a:ext cx="6400800" cy="228600"/>
           </a:xfrm>
           <a:prstGeom prst="rect">
             <a:avLst/>
@@ -3210,23 +3198,15 @@
           <a:lstStyle/>
           <a:p>
             <a:pPr algn="l">
-              <a:defRPr sz="1400" b="0">
+              <a:defRPr sz="1100" b="0">
                 <a:solidFill>
                   <a:srgbClr val="666680"/>
                 </a:solidFill>
                 <a:latin typeface="Meiryo UI"/>
-                <a:ea typeface="Meiryo UI"/>
               </a:defRPr>
             </a:pPr>
             <a:r>
-              <a:rPr lang="ja-JP" altLang="en-US" sz="1400" dirty="0">
-                <a:solidFill>
-                  <a:srgbClr val="666680"/>
-                </a:solidFill>
-                <a:latin typeface="Meiryo UI"/>
-                <a:ea typeface="Meiryo UI"/>
-              </a:rPr>
-              <a:t>現在の構成</a:t>
+              <a:t>現在の構成と将来の拡張ポイント</a:t>
             </a:r>
           </a:p>
         </p:txBody>
@@ -3239,8 +3219,8 @@
         </p:nvSpPr>
         <p:spPr>
           <a:xfrm>
-            <a:off x="447040" y="1117600"/>
-            <a:ext cx="1614170" cy="38100"/>
+            <a:off x="548640" y="868680"/>
+            <a:ext cx="914400" cy="38100"/>
           </a:xfrm>
           <a:prstGeom prst="rect">
             <a:avLst/>
@@ -3271,7 +3251,6 @@
           <a:lstStyle/>
           <a:p>
             <a:pPr algn="ctr"/>
-            <a:endParaRPr/>
           </a:p>
         </p:txBody>
       </p:sp>
@@ -3283,8 +3262,8 @@
         </p:nvSpPr>
         <p:spPr>
           <a:xfrm>
-            <a:off x="4191000" y="1270000"/>
-            <a:ext cx="3810000" cy="609600"/>
+            <a:off x="2286000" y="1097280"/>
+            <a:ext cx="2926080" cy="640080"/>
           </a:xfrm>
           <a:prstGeom prst="roundRect">
             <a:avLst/>
@@ -3317,11 +3296,6 @@
           <a:lstStyle/>
           <a:p>
             <a:pPr algn="ctr"/>
-            <a:endParaRPr>
-              <a:solidFill>
-                <a:srgbClr val="333333"/>
-              </a:solidFill>
-            </a:endParaRPr>
           </a:p>
         </p:txBody>
       </p:sp>
@@ -3333,8 +3307,8 @@
         </p:nvSpPr>
         <p:spPr>
           <a:xfrm>
-            <a:off x="4318000" y="1320800"/>
-            <a:ext cx="3556000" cy="279400"/>
+            <a:off x="2468880" y="1170432"/>
+            <a:ext cx="2560320" cy="228600"/>
           </a:xfrm>
           <a:prstGeom prst="rect">
             <a:avLst/>
@@ -3348,7 +3322,7 @@
           <a:lstStyle/>
           <a:p>
             <a:pPr algn="ctr">
-              <a:defRPr sz="1800" b="1">
+              <a:defRPr sz="1300" b="1">
                 <a:solidFill>
                   <a:srgbClr val="E63946"/>
                 </a:solidFill>
@@ -3369,8 +3343,8 @@
         </p:nvSpPr>
         <p:spPr>
           <a:xfrm>
-            <a:off x="4318000" y="1600200"/>
-            <a:ext cx="3556000" cy="228600"/>
+            <a:off x="2468880" y="1417320"/>
+            <a:ext cx="2560320" cy="182880"/>
           </a:xfrm>
           <a:prstGeom prst="rect">
             <a:avLst/>
@@ -3384,7 +3358,7 @@
           <a:lstStyle/>
           <a:p>
             <a:pPr algn="ctr">
-              <a:defRPr sz="1100" b="0">
+              <a:defRPr sz="800" b="0">
                 <a:solidFill>
                   <a:srgbClr val="666680"/>
                 </a:solidFill>
@@ -3405,8 +3379,8 @@
         </p:nvSpPr>
         <p:spPr>
           <a:xfrm>
-            <a:off x="5969000" y="1930400"/>
-            <a:ext cx="254000" cy="228600"/>
+            <a:off x="3566160" y="1783080"/>
+            <a:ext cx="320040" cy="320040"/>
           </a:xfrm>
           <a:prstGeom prst="downArrow">
             <a:avLst/>
@@ -3437,11 +3411,6 @@
           <a:lstStyle/>
           <a:p>
             <a:pPr algn="ctr"/>
-            <a:endParaRPr>
-              <a:solidFill>
-                <a:srgbClr val="333333"/>
-              </a:solidFill>
-            </a:endParaRPr>
           </a:p>
         </p:txBody>
       </p:sp>
@@ -3453,8 +3422,8 @@
         </p:nvSpPr>
         <p:spPr>
           <a:xfrm>
-            <a:off x="447040" y="2222500"/>
-            <a:ext cx="11287760" cy="2468880"/>
+            <a:off x="548640" y="2194560"/>
+            <a:ext cx="6400800" cy="2468880"/>
           </a:xfrm>
           <a:prstGeom prst="roundRect">
             <a:avLst/>
@@ -3487,11 +3456,6 @@
           <a:lstStyle/>
           <a:p>
             <a:pPr algn="ctr"/>
-            <a:endParaRPr>
-              <a:solidFill>
-                <a:srgbClr val="333333"/>
-              </a:solidFill>
-            </a:endParaRPr>
           </a:p>
         </p:txBody>
       </p:sp>
@@ -3503,8 +3467,8 @@
         </p:nvSpPr>
         <p:spPr>
           <a:xfrm>
-            <a:off x="711200" y="2286000"/>
-            <a:ext cx="10759440" cy="369332"/>
+            <a:off x="822960" y="2286000"/>
+            <a:ext cx="5852160" cy="274320"/>
           </a:xfrm>
           <a:prstGeom prst="rect">
             <a:avLst/>
@@ -3518,7 +3482,7 @@
           <a:lstStyle/>
           <a:p>
             <a:pPr algn="l">
-              <a:defRPr sz="1800" b="1">
+              <a:defRPr sz="1400" b="1">
                 <a:solidFill>
                   <a:srgbClr val="0F172A"/>
                 </a:solidFill>
@@ -3539,8 +3503,8 @@
         </p:nvSpPr>
         <p:spPr>
           <a:xfrm>
-            <a:off x="642619" y="2697480"/>
-            <a:ext cx="2057400" cy="1691640"/>
+            <a:off x="731520" y="2697480"/>
+            <a:ext cx="1078992" cy="1691640"/>
           </a:xfrm>
           <a:prstGeom prst="roundRect">
             <a:avLst/>
@@ -3573,11 +3537,6 @@
           <a:lstStyle/>
           <a:p>
             <a:pPr algn="ctr"/>
-            <a:endParaRPr>
-              <a:solidFill>
-                <a:srgbClr val="333333"/>
-              </a:solidFill>
-            </a:endParaRPr>
           </a:p>
         </p:txBody>
       </p:sp>
@@ -3589,8 +3548,8 @@
         </p:nvSpPr>
         <p:spPr>
           <a:xfrm>
-            <a:off x="642619" y="2697480"/>
-            <a:ext cx="2057400" cy="38100"/>
+            <a:off x="731520" y="2697480"/>
+            <a:ext cx="1078992" cy="38100"/>
           </a:xfrm>
           <a:prstGeom prst="rect">
             <a:avLst/>
@@ -3621,7 +3580,6 @@
           <a:lstStyle/>
           <a:p>
             <a:pPr algn="ctr"/>
-            <a:endParaRPr/>
           </a:p>
         </p:txBody>
       </p:sp>
@@ -3633,8 +3591,8 @@
         </p:nvSpPr>
         <p:spPr>
           <a:xfrm>
-            <a:off x="744219" y="2788920"/>
-            <a:ext cx="1854200" cy="307777"/>
+            <a:off x="804672" y="2788920"/>
+            <a:ext cx="932688" cy="182880"/>
           </a:xfrm>
           <a:prstGeom prst="rect">
             <a:avLst/>
@@ -3648,7 +3606,7 @@
           <a:lstStyle/>
           <a:p>
             <a:pPr algn="ctr">
-              <a:defRPr sz="1400" b="1">
+              <a:defRPr sz="1000" b="1">
                 <a:solidFill>
                   <a:srgbClr val="E63946"/>
                 </a:solidFill>
@@ -3669,8 +3627,8 @@
         </p:nvSpPr>
         <p:spPr>
           <a:xfrm>
-            <a:off x="744219" y="3122097"/>
-            <a:ext cx="1854200" cy="600164"/>
+            <a:off x="804672" y="3017520"/>
+            <a:ext cx="932688" cy="1188720"/>
           </a:xfrm>
           <a:prstGeom prst="rect">
             <a:avLst/>
@@ -3684,7 +3642,7 @@
           <a:lstStyle/>
           <a:p>
             <a:pPr algn="ctr">
-              <a:defRPr sz="1100" b="0">
+              <a:defRPr sz="800" b="0">
                 <a:solidFill>
                   <a:srgbClr val="666680"/>
                 </a:solidFill>
@@ -3713,8 +3671,8 @@
         </p:nvSpPr>
         <p:spPr>
           <a:xfrm>
-            <a:off x="2852419" y="2697480"/>
-            <a:ext cx="2057400" cy="1691640"/>
+            <a:off x="1975104" y="2697480"/>
+            <a:ext cx="1078992" cy="1691640"/>
           </a:xfrm>
           <a:prstGeom prst="roundRect">
             <a:avLst/>
@@ -3747,11 +3705,6 @@
           <a:lstStyle/>
           <a:p>
             <a:pPr algn="ctr"/>
-            <a:endParaRPr>
-              <a:solidFill>
-                <a:srgbClr val="333333"/>
-              </a:solidFill>
-            </a:endParaRPr>
           </a:p>
         </p:txBody>
       </p:sp>
@@ -3763,8 +3716,8 @@
         </p:nvSpPr>
         <p:spPr>
           <a:xfrm>
-            <a:off x="2852419" y="2697480"/>
-            <a:ext cx="2057400" cy="38100"/>
+            <a:off x="1975104" y="2697480"/>
+            <a:ext cx="1078992" cy="38100"/>
           </a:xfrm>
           <a:prstGeom prst="rect">
             <a:avLst/>
@@ -3795,7 +3748,6 @@
           <a:lstStyle/>
           <a:p>
             <a:pPr algn="ctr"/>
-            <a:endParaRPr/>
           </a:p>
         </p:txBody>
       </p:sp>
@@ -3807,8 +3759,8 @@
         </p:nvSpPr>
         <p:spPr>
           <a:xfrm>
-            <a:off x="2954019" y="2788920"/>
-            <a:ext cx="1854200" cy="307777"/>
+            <a:off x="2048256" y="2788920"/>
+            <a:ext cx="932688" cy="182880"/>
           </a:xfrm>
           <a:prstGeom prst="rect">
             <a:avLst/>
@@ -3822,7 +3774,7 @@
           <a:lstStyle/>
           <a:p>
             <a:pPr algn="ctr">
-              <a:defRPr sz="1400" b="1">
+              <a:defRPr sz="1000" b="1">
                 <a:solidFill>
                   <a:srgbClr val="2563EB"/>
                 </a:solidFill>
@@ -3843,8 +3795,8 @@
         </p:nvSpPr>
         <p:spPr>
           <a:xfrm>
-            <a:off x="2954019" y="3122097"/>
-            <a:ext cx="1854200" cy="600164"/>
+            <a:off x="2048256" y="3017520"/>
+            <a:ext cx="932688" cy="1188720"/>
           </a:xfrm>
           <a:prstGeom prst="rect">
             <a:avLst/>
@@ -3858,7 +3810,7 @@
           <a:lstStyle/>
           <a:p>
             <a:pPr algn="ctr">
-              <a:defRPr sz="1100" b="0">
+              <a:defRPr sz="800" b="0">
                 <a:solidFill>
                   <a:srgbClr val="666680"/>
                 </a:solidFill>
@@ -3887,8 +3839,8 @@
         </p:nvSpPr>
         <p:spPr>
           <a:xfrm>
-            <a:off x="5062220" y="2697480"/>
-            <a:ext cx="2057400" cy="1691640"/>
+            <a:off x="3218688" y="2697480"/>
+            <a:ext cx="1078992" cy="1691640"/>
           </a:xfrm>
           <a:prstGeom prst="roundRect">
             <a:avLst/>
@@ -3921,11 +3873,6 @@
           <a:lstStyle/>
           <a:p>
             <a:pPr algn="ctr"/>
-            <a:endParaRPr>
-              <a:solidFill>
-                <a:srgbClr val="333333"/>
-              </a:solidFill>
-            </a:endParaRPr>
           </a:p>
         </p:txBody>
       </p:sp>
@@ -3937,8 +3884,8 @@
         </p:nvSpPr>
         <p:spPr>
           <a:xfrm>
-            <a:off x="5062220" y="2697480"/>
-            <a:ext cx="2057400" cy="38100"/>
+            <a:off x="3218688" y="2697480"/>
+            <a:ext cx="1078992" cy="38100"/>
           </a:xfrm>
           <a:prstGeom prst="rect">
             <a:avLst/>
@@ -3969,7 +3916,6 @@
           <a:lstStyle/>
           <a:p>
             <a:pPr algn="ctr"/>
-            <a:endParaRPr/>
           </a:p>
         </p:txBody>
       </p:sp>
@@ -3981,8 +3927,8 @@
         </p:nvSpPr>
         <p:spPr>
           <a:xfrm>
-            <a:off x="5163820" y="2788920"/>
-            <a:ext cx="1854200" cy="307777"/>
+            <a:off x="3291840" y="2788920"/>
+            <a:ext cx="932688" cy="182880"/>
           </a:xfrm>
           <a:prstGeom prst="rect">
             <a:avLst/>
@@ -3996,7 +3942,7 @@
           <a:lstStyle/>
           <a:p>
             <a:pPr algn="ctr">
-              <a:defRPr sz="1400" b="1">
+              <a:defRPr sz="1000" b="1">
                 <a:solidFill>
                   <a:srgbClr val="16A34A"/>
                 </a:solidFill>
@@ -4017,8 +3963,8 @@
         </p:nvSpPr>
         <p:spPr>
           <a:xfrm>
-            <a:off x="5163820" y="3122097"/>
-            <a:ext cx="1854200" cy="600164"/>
+            <a:off x="3291840" y="3017520"/>
+            <a:ext cx="932688" cy="1188720"/>
           </a:xfrm>
           <a:prstGeom prst="rect">
             <a:avLst/>
@@ -4032,7 +3978,7 @@
           <a:lstStyle/>
           <a:p>
             <a:pPr algn="ctr">
-              <a:defRPr sz="1100" b="0">
+              <a:defRPr sz="800" b="0">
                 <a:solidFill>
                   <a:srgbClr val="666680"/>
                 </a:solidFill>
@@ -4061,8 +4007,8 @@
         </p:nvSpPr>
         <p:spPr>
           <a:xfrm>
-            <a:off x="7272020" y="2697480"/>
-            <a:ext cx="2057400" cy="1691640"/>
+            <a:off x="4462272" y="2697480"/>
+            <a:ext cx="1078992" cy="1691640"/>
           </a:xfrm>
           <a:prstGeom prst="roundRect">
             <a:avLst/>
@@ -4095,11 +4041,6 @@
           <a:lstStyle/>
           <a:p>
             <a:pPr algn="ctr"/>
-            <a:endParaRPr>
-              <a:solidFill>
-                <a:srgbClr val="333333"/>
-              </a:solidFill>
-            </a:endParaRPr>
           </a:p>
         </p:txBody>
       </p:sp>
@@ -4111,8 +4052,8 @@
         </p:nvSpPr>
         <p:spPr>
           <a:xfrm>
-            <a:off x="7272020" y="2697480"/>
-            <a:ext cx="2057400" cy="38100"/>
+            <a:off x="4462272" y="2697480"/>
+            <a:ext cx="1078992" cy="38100"/>
           </a:xfrm>
           <a:prstGeom prst="rect">
             <a:avLst/>
@@ -4143,7 +4084,6 @@
           <a:lstStyle/>
           <a:p>
             <a:pPr algn="ctr"/>
-            <a:endParaRPr/>
           </a:p>
         </p:txBody>
       </p:sp>
@@ -4155,8 +4095,8 @@
         </p:nvSpPr>
         <p:spPr>
           <a:xfrm>
-            <a:off x="7373620" y="2788920"/>
-            <a:ext cx="1854200" cy="307777"/>
+            <a:off x="4535424" y="2788920"/>
+            <a:ext cx="932688" cy="182880"/>
           </a:xfrm>
           <a:prstGeom prst="rect">
             <a:avLst/>
@@ -4170,7 +4110,7 @@
           <a:lstStyle/>
           <a:p>
             <a:pPr algn="ctr">
-              <a:defRPr sz="1400" b="1">
+              <a:defRPr sz="1000" b="1">
                 <a:solidFill>
                   <a:srgbClr val="EA880B"/>
                 </a:solidFill>
@@ -4191,8 +4131,8 @@
         </p:nvSpPr>
         <p:spPr>
           <a:xfrm>
-            <a:off x="7373620" y="3122097"/>
-            <a:ext cx="1854200" cy="600164"/>
+            <a:off x="4535424" y="3017520"/>
+            <a:ext cx="932688" cy="1188720"/>
           </a:xfrm>
           <a:prstGeom prst="rect">
             <a:avLst/>
@@ -4206,7 +4146,7 @@
           <a:lstStyle/>
           <a:p>
             <a:pPr algn="ctr">
-              <a:defRPr sz="1100" b="0">
+              <a:defRPr sz="800" b="0">
                 <a:solidFill>
                   <a:srgbClr val="666680"/>
                 </a:solidFill>
@@ -4235,8 +4175,8 @@
         </p:nvSpPr>
         <p:spPr>
           <a:xfrm>
-            <a:off x="9481820" y="2697480"/>
-            <a:ext cx="2057400" cy="1691640"/>
+            <a:off x="5705856" y="2697480"/>
+            <a:ext cx="1078992" cy="1691640"/>
           </a:xfrm>
           <a:prstGeom prst="roundRect">
             <a:avLst/>
@@ -4269,11 +4209,6 @@
           <a:lstStyle/>
           <a:p>
             <a:pPr algn="ctr"/>
-            <a:endParaRPr>
-              <a:solidFill>
-                <a:srgbClr val="333333"/>
-              </a:solidFill>
-            </a:endParaRPr>
           </a:p>
         </p:txBody>
       </p:sp>
@@ -4285,8 +4220,8 @@
         </p:nvSpPr>
         <p:spPr>
           <a:xfrm>
-            <a:off x="9481820" y="2697480"/>
-            <a:ext cx="2057400" cy="38100"/>
+            <a:off x="5705856" y="2697480"/>
+            <a:ext cx="1078992" cy="38100"/>
           </a:xfrm>
           <a:prstGeom prst="rect">
             <a:avLst/>
@@ -4317,7 +4252,6 @@
           <a:lstStyle/>
           <a:p>
             <a:pPr algn="ctr"/>
-            <a:endParaRPr/>
           </a:p>
         </p:txBody>
       </p:sp>
@@ -4329,8 +4263,8 @@
         </p:nvSpPr>
         <p:spPr>
           <a:xfrm>
-            <a:off x="9583420" y="2788920"/>
-            <a:ext cx="1854200" cy="307777"/>
+            <a:off x="5779008" y="2788920"/>
+            <a:ext cx="932688" cy="182880"/>
           </a:xfrm>
           <a:prstGeom prst="rect">
             <a:avLst/>
@@ -4344,7 +4278,7 @@
           <a:lstStyle/>
           <a:p>
             <a:pPr algn="ctr">
-              <a:defRPr sz="1400" b="1">
+              <a:defRPr sz="1000" b="1">
                 <a:solidFill>
                   <a:srgbClr val="7C3AED"/>
                 </a:solidFill>
@@ -4365,8 +4299,8 @@
         </p:nvSpPr>
         <p:spPr>
           <a:xfrm>
-            <a:off x="9583420" y="3122097"/>
-            <a:ext cx="1854200" cy="600164"/>
+            <a:off x="5779008" y="3017520"/>
+            <a:ext cx="932688" cy="1188720"/>
           </a:xfrm>
           <a:prstGeom prst="rect">
             <a:avLst/>
@@ -4380,7 +4314,7 @@
           <a:lstStyle/>
           <a:p>
             <a:pPr algn="ctr">
-              <a:defRPr sz="1100" b="0">
+              <a:defRPr sz="800" b="0">
                 <a:solidFill>
                   <a:srgbClr val="666680"/>
                 </a:solidFill>
@@ -4409,8 +4343,8 @@
         </p:nvSpPr>
         <p:spPr>
           <a:xfrm>
-            <a:off x="1652269" y="4663440"/>
-            <a:ext cx="38100" cy="228600"/>
+            <a:off x="1271016" y="4434840"/>
+            <a:ext cx="25400" cy="411480"/>
           </a:xfrm>
           <a:prstGeom prst="rect">
             <a:avLst/>
@@ -4441,7 +4375,6 @@
           <a:lstStyle/>
           <a:p>
             <a:pPr algn="ctr"/>
-            <a:endParaRPr/>
           </a:p>
         </p:txBody>
       </p:sp>
@@ -4453,8 +4386,8 @@
         </p:nvSpPr>
         <p:spPr>
           <a:xfrm>
-            <a:off x="3862069" y="4663440"/>
-            <a:ext cx="38100" cy="228600"/>
+            <a:off x="2514600" y="4434840"/>
+            <a:ext cx="25400" cy="411480"/>
           </a:xfrm>
           <a:prstGeom prst="rect">
             <a:avLst/>
@@ -4485,7 +4418,6 @@
           <a:lstStyle/>
           <a:p>
             <a:pPr algn="ctr"/>
-            <a:endParaRPr/>
           </a:p>
         </p:txBody>
       </p:sp>
@@ -4497,8 +4429,8 @@
         </p:nvSpPr>
         <p:spPr>
           <a:xfrm>
-            <a:off x="6071870" y="4663440"/>
-            <a:ext cx="38100" cy="228600"/>
+            <a:off x="3758184" y="4434840"/>
+            <a:ext cx="25400" cy="411480"/>
           </a:xfrm>
           <a:prstGeom prst="rect">
             <a:avLst/>
@@ -4529,7 +4461,6 @@
           <a:lstStyle/>
           <a:p>
             <a:pPr algn="ctr"/>
-            <a:endParaRPr/>
           </a:p>
         </p:txBody>
       </p:sp>
@@ -4541,8 +4472,8 @@
         </p:nvSpPr>
         <p:spPr>
           <a:xfrm>
-            <a:off x="8281670" y="4663440"/>
-            <a:ext cx="38100" cy="228600"/>
+            <a:off x="5001768" y="4434840"/>
+            <a:ext cx="25400" cy="411480"/>
           </a:xfrm>
           <a:prstGeom prst="rect">
             <a:avLst/>
@@ -4573,7 +4504,6 @@
           <a:lstStyle/>
           <a:p>
             <a:pPr algn="ctr"/>
-            <a:endParaRPr/>
           </a:p>
         </p:txBody>
       </p:sp>
@@ -4585,8 +4515,8 @@
         </p:nvSpPr>
         <p:spPr>
           <a:xfrm>
-            <a:off x="10491470" y="4663440"/>
-            <a:ext cx="38100" cy="228600"/>
+            <a:off x="5943600" y="4434840"/>
+            <a:ext cx="25400" cy="411480"/>
           </a:xfrm>
           <a:prstGeom prst="rect">
             <a:avLst/>
@@ -4617,7 +4547,6 @@
           <a:lstStyle/>
           <a:p>
             <a:pPr algn="ctr"/>
-            <a:endParaRPr/>
           </a:p>
         </p:txBody>
       </p:sp>
@@ -4629,8 +4558,8 @@
         </p:nvSpPr>
         <p:spPr>
           <a:xfrm>
-            <a:off x="642619" y="4892040"/>
-            <a:ext cx="2057400" cy="777240"/>
+            <a:off x="548640" y="4892040"/>
+            <a:ext cx="1133856" cy="777240"/>
           </a:xfrm>
           <a:prstGeom prst="roundRect">
             <a:avLst/>
@@ -4663,11 +4592,6 @@
           <a:lstStyle/>
           <a:p>
             <a:pPr algn="ctr"/>
-            <a:endParaRPr>
-              <a:solidFill>
-                <a:srgbClr val="333333"/>
-              </a:solidFill>
-            </a:endParaRPr>
           </a:p>
         </p:txBody>
       </p:sp>
@@ -4679,8 +4603,8 @@
         </p:nvSpPr>
         <p:spPr>
           <a:xfrm>
-            <a:off x="718819" y="4983480"/>
-            <a:ext cx="1905000" cy="307777"/>
+            <a:off x="603504" y="4983480"/>
+            <a:ext cx="1024128" cy="182880"/>
           </a:xfrm>
           <a:prstGeom prst="rect">
             <a:avLst/>
@@ -4694,7 +4618,7 @@
           <a:lstStyle/>
           <a:p>
             <a:pPr algn="ctr">
-              <a:defRPr sz="1400" b="1">
+              <a:defRPr sz="1000" b="1">
                 <a:solidFill>
                   <a:srgbClr val="E63946"/>
                 </a:solidFill>
@@ -4715,8 +4639,8 @@
         </p:nvSpPr>
         <p:spPr>
           <a:xfrm>
-            <a:off x="718819" y="5316657"/>
-            <a:ext cx="1905000" cy="261610"/>
+            <a:off x="603504" y="5239512"/>
+            <a:ext cx="1024128" cy="274320"/>
           </a:xfrm>
           <a:prstGeom prst="rect">
             <a:avLst/>
@@ -4730,7 +4654,7 @@
           <a:lstStyle/>
           <a:p>
             <a:pPr algn="ctr">
-              <a:defRPr sz="1100" b="0">
+              <a:defRPr sz="800" b="0">
                 <a:solidFill>
                   <a:srgbClr val="666680"/>
                 </a:solidFill>
@@ -4751,8 +4675,8 @@
         </p:nvSpPr>
         <p:spPr>
           <a:xfrm>
-            <a:off x="2852419" y="4892040"/>
-            <a:ext cx="2057400" cy="777240"/>
+            <a:off x="1847088" y="4892040"/>
+            <a:ext cx="1133856" cy="777240"/>
           </a:xfrm>
           <a:prstGeom prst="roundRect">
             <a:avLst/>
@@ -4785,11 +4709,6 @@
           <a:lstStyle/>
           <a:p>
             <a:pPr algn="ctr"/>
-            <a:endParaRPr>
-              <a:solidFill>
-                <a:srgbClr val="333333"/>
-              </a:solidFill>
-            </a:endParaRPr>
           </a:p>
         </p:txBody>
       </p:sp>
@@ -4801,8 +4720,8 @@
         </p:nvSpPr>
         <p:spPr>
           <a:xfrm>
-            <a:off x="2928619" y="4983480"/>
-            <a:ext cx="1905000" cy="307777"/>
+            <a:off x="1901952" y="4983480"/>
+            <a:ext cx="1024128" cy="182880"/>
           </a:xfrm>
           <a:prstGeom prst="rect">
             <a:avLst/>
@@ -4816,7 +4735,7 @@
           <a:lstStyle/>
           <a:p>
             <a:pPr algn="ctr">
-              <a:defRPr sz="1400" b="1">
+              <a:defRPr sz="1000" b="1">
                 <a:solidFill>
                   <a:srgbClr val="2563EB"/>
                 </a:solidFill>
@@ -4837,8 +4756,8 @@
         </p:nvSpPr>
         <p:spPr>
           <a:xfrm>
-            <a:off x="2928619" y="5316657"/>
-            <a:ext cx="1905000" cy="261610"/>
+            <a:off x="1901952" y="5239512"/>
+            <a:ext cx="1024128" cy="274320"/>
           </a:xfrm>
           <a:prstGeom prst="rect">
             <a:avLst/>
@@ -4852,7 +4771,7 @@
           <a:lstStyle/>
           <a:p>
             <a:pPr algn="ctr">
-              <a:defRPr sz="1100" b="0">
+              <a:defRPr sz="800" b="0">
                 <a:solidFill>
                   <a:srgbClr val="666680"/>
                 </a:solidFill>
@@ -4873,8 +4792,8 @@
         </p:nvSpPr>
         <p:spPr>
           <a:xfrm>
-            <a:off x="5062220" y="4892040"/>
-            <a:ext cx="2057400" cy="777240"/>
+            <a:off x="3145536" y="4892040"/>
+            <a:ext cx="1133856" cy="777240"/>
           </a:xfrm>
           <a:prstGeom prst="roundRect">
             <a:avLst/>
@@ -4907,11 +4826,6 @@
           <a:lstStyle/>
           <a:p>
             <a:pPr algn="ctr"/>
-            <a:endParaRPr>
-              <a:solidFill>
-                <a:srgbClr val="333333"/>
-              </a:solidFill>
-            </a:endParaRPr>
           </a:p>
         </p:txBody>
       </p:sp>
@@ -4923,8 +4837,8 @@
         </p:nvSpPr>
         <p:spPr>
           <a:xfrm>
-            <a:off x="5138420" y="4983480"/>
-            <a:ext cx="1905000" cy="307777"/>
+            <a:off x="3200400" y="4983480"/>
+            <a:ext cx="1024128" cy="182880"/>
           </a:xfrm>
           <a:prstGeom prst="rect">
             <a:avLst/>
@@ -4938,7 +4852,7 @@
           <a:lstStyle/>
           <a:p>
             <a:pPr algn="ctr">
-              <a:defRPr sz="1400" b="1">
+              <a:defRPr sz="1000" b="1">
                 <a:solidFill>
                   <a:srgbClr val="EA880B"/>
                 </a:solidFill>
@@ -4959,8 +4873,8 @@
         </p:nvSpPr>
         <p:spPr>
           <a:xfrm>
-            <a:off x="5138420" y="5316657"/>
-            <a:ext cx="1905000" cy="261610"/>
+            <a:off x="3200400" y="5239512"/>
+            <a:ext cx="1024128" cy="274320"/>
           </a:xfrm>
           <a:prstGeom prst="rect">
             <a:avLst/>
@@ -4974,7 +4888,7 @@
           <a:lstStyle/>
           <a:p>
             <a:pPr algn="ctr">
-              <a:defRPr sz="1100" b="0">
+              <a:defRPr sz="800" b="0">
                 <a:solidFill>
                   <a:srgbClr val="666680"/>
                 </a:solidFill>
@@ -4995,8 +4909,8 @@
         </p:nvSpPr>
         <p:spPr>
           <a:xfrm>
-            <a:off x="7272020" y="4892040"/>
-            <a:ext cx="2057400" cy="777240"/>
+            <a:off x="4443983" y="4892040"/>
+            <a:ext cx="1133856" cy="777240"/>
           </a:xfrm>
           <a:prstGeom prst="roundRect">
             <a:avLst/>
@@ -5029,11 +4943,6 @@
           <a:lstStyle/>
           <a:p>
             <a:pPr algn="ctr"/>
-            <a:endParaRPr>
-              <a:solidFill>
-                <a:srgbClr val="333333"/>
-              </a:solidFill>
-            </a:endParaRPr>
           </a:p>
         </p:txBody>
       </p:sp>
@@ -5045,8 +4954,8 @@
         </p:nvSpPr>
         <p:spPr>
           <a:xfrm>
-            <a:off x="7348220" y="4983480"/>
-            <a:ext cx="1905000" cy="307777"/>
+            <a:off x="4498847" y="4983480"/>
+            <a:ext cx="1024128" cy="182880"/>
           </a:xfrm>
           <a:prstGeom prst="rect">
             <a:avLst/>
@@ -5060,7 +4969,7 @@
           <a:lstStyle/>
           <a:p>
             <a:pPr algn="ctr">
-              <a:defRPr sz="1400" b="1">
+              <a:defRPr sz="1000" b="1">
                 <a:solidFill>
                   <a:srgbClr val="7C3AED"/>
                 </a:solidFill>
@@ -5081,8 +4990,8 @@
         </p:nvSpPr>
         <p:spPr>
           <a:xfrm>
-            <a:off x="7348220" y="5316657"/>
-            <a:ext cx="1905000" cy="261610"/>
+            <a:off x="4498847" y="5239512"/>
+            <a:ext cx="1024128" cy="274320"/>
           </a:xfrm>
           <a:prstGeom prst="rect">
             <a:avLst/>
@@ -5096,7 +5005,7 @@
           <a:lstStyle/>
           <a:p>
             <a:pPr algn="ctr">
-              <a:defRPr sz="1100" b="0">
+              <a:defRPr sz="800" b="0">
                 <a:solidFill>
                   <a:srgbClr val="666680"/>
                 </a:solidFill>
@@ -5117,8 +5026,8 @@
         </p:nvSpPr>
         <p:spPr>
           <a:xfrm>
-            <a:off x="9481820" y="4892040"/>
-            <a:ext cx="2057400" cy="777240"/>
+            <a:off x="5742431" y="4892040"/>
+            <a:ext cx="1133856" cy="777240"/>
           </a:xfrm>
           <a:prstGeom prst="roundRect">
             <a:avLst/>
@@ -5151,11 +5060,6 @@
           <a:lstStyle/>
           <a:p>
             <a:pPr algn="ctr"/>
-            <a:endParaRPr>
-              <a:solidFill>
-                <a:srgbClr val="333333"/>
-              </a:solidFill>
-            </a:endParaRPr>
           </a:p>
         </p:txBody>
       </p:sp>
@@ -5167,8 +5071,8 @@
         </p:nvSpPr>
         <p:spPr>
           <a:xfrm>
-            <a:off x="9558020" y="4983480"/>
-            <a:ext cx="1905000" cy="307777"/>
+            <a:off x="5797295" y="4983480"/>
+            <a:ext cx="1024128" cy="182880"/>
           </a:xfrm>
           <a:prstGeom prst="rect">
             <a:avLst/>
@@ -5182,7 +5086,7 @@
           <a:lstStyle/>
           <a:p>
             <a:pPr algn="ctr">
-              <a:defRPr sz="1400" b="1">
+              <a:defRPr sz="1000" b="1">
                 <a:solidFill>
                   <a:srgbClr val="16A34A"/>
                 </a:solidFill>
@@ -5203,8 +5107,8 @@
         </p:nvSpPr>
         <p:spPr>
           <a:xfrm>
-            <a:off x="9558020" y="5316657"/>
-            <a:ext cx="1905000" cy="261610"/>
+            <a:off x="5797295" y="5239512"/>
+            <a:ext cx="1024128" cy="274320"/>
           </a:xfrm>
           <a:prstGeom prst="rect">
             <a:avLst/>
@@ -5218,7 +5122,7 @@
           <a:lstStyle/>
           <a:p>
             <a:pPr algn="ctr">
-              <a:defRPr sz="1100" b="0">
+              <a:defRPr sz="800" b="0">
                 <a:solidFill>
                   <a:srgbClr val="666680"/>
                 </a:solidFill>
@@ -5239,8 +5143,8 @@
         </p:nvSpPr>
         <p:spPr>
           <a:xfrm>
-            <a:off x="3868419" y="4777740"/>
-            <a:ext cx="2235200" cy="25400"/>
+            <a:off x="2514600" y="4617720"/>
+            <a:ext cx="1243584" cy="25400"/>
           </a:xfrm>
           <a:prstGeom prst="rect">
             <a:avLst/>
@@ -5271,7 +5175,6 @@
           <a:lstStyle/>
           <a:p>
             <a:pPr algn="ctr"/>
-            <a:endParaRPr/>
           </a:p>
         </p:txBody>
       </p:sp>
@@ -5283,8 +5186,8 @@
         </p:nvSpPr>
         <p:spPr>
           <a:xfrm>
-            <a:off x="447040" y="5806440"/>
-            <a:ext cx="11287760" cy="246221"/>
+            <a:off x="548640" y="5806440"/>
+            <a:ext cx="6400800" cy="182880"/>
           </a:xfrm>
           <a:prstGeom prst="rect">
             <a:avLst/>
@@ -5298,7 +5201,7 @@
           <a:lstStyle/>
           <a:p>
             <a:pPr algn="l">
-              <a:defRPr sz="1000" b="0">
+              <a:defRPr sz="800" b="0">
                 <a:solidFill>
                   <a:srgbClr val="9CA3AF"/>
                 </a:solidFill>
@@ -5313,14 +5216,57 @@
       </p:sp>
       <p:sp>
         <p:nvSpPr>
-          <p:cNvPr id="108" name="TextBox 107"/>
+          <p:cNvPr id="54" name="Rounded Rectangle 53"/>
+          <p:cNvSpPr/>
+          <p:nvPr/>
+        </p:nvSpPr>
+        <p:spPr>
+          <a:xfrm>
+            <a:off x="7315200" y="1097280"/>
+            <a:ext cx="4572000" cy="457200"/>
+          </a:xfrm>
+          <a:prstGeom prst="roundRect">
+            <a:avLst/>
+          </a:prstGeom>
+          <a:solidFill>
+            <a:srgbClr val="0F172A"/>
+          </a:solidFill>
+          <a:ln>
+            <a:noFill/>
+          </a:ln>
+        </p:spPr>
+        <p:style>
+          <a:lnRef idx="1">
+            <a:schemeClr val="accent1"/>
+          </a:lnRef>
+          <a:fillRef idx="3">
+            <a:schemeClr val="accent1"/>
+          </a:fillRef>
+          <a:effectRef idx="2">
+            <a:schemeClr val="accent1"/>
+          </a:effectRef>
+          <a:fontRef idx="minor">
+            <a:schemeClr val="lt1"/>
+          </a:fontRef>
+        </p:style>
+        <p:txBody>
+          <a:bodyPr rtlCol="0" anchor="ctr"/>
+          <a:lstStyle/>
+          <a:p>
+            <a:pPr algn="ctr"/>
+          </a:p>
+        </p:txBody>
+      </p:sp>
+      <p:sp>
+        <p:nvSpPr>
+          <p:cNvPr id="55" name="TextBox 54"/>
           <p:cNvSpPr txBox="1"/>
           <p:nvPr/>
         </p:nvSpPr>
         <p:spPr>
           <a:xfrm>
-            <a:off x="447040" y="6583680"/>
-            <a:ext cx="11287760" cy="246221"/>
+            <a:off x="7498080" y="1143000"/>
+            <a:ext cx="4206240" cy="365760"/>
           </a:xfrm>
           <a:prstGeom prst="rect">
             <a:avLst/>
@@ -5334,61 +5280,76 @@
           <a:lstStyle/>
           <a:p>
             <a:pPr algn="l">
-              <a:defRPr sz="1000" b="0">
-                <a:solidFill>
-                  <a:srgbClr val="9CA3AF"/>
+              <a:defRPr sz="1500" b="1">
+                <a:solidFill>
+                  <a:srgbClr val="FFFFFF"/>
                 </a:solidFill>
                 <a:latin typeface="Meiryo UI"/>
               </a:defRPr>
             </a:pPr>
             <a:r>
-              <a:t>LIVE SPOtCH  |  LIN-NAH株式会社  |  2026年4月</a:t>
-            </a:r>
-          </a:p>
-        </p:txBody>
-      </p:sp>
-    </p:spTree>
-    <p:extLst>
-      <p:ext uri="{BB962C8B-B14F-4D97-AF65-F5344CB8AC3E}">
-        <p14:creationId xmlns:p14="http://schemas.microsoft.com/office/powerpoint/2010/main" val="1341349284"/>
-      </p:ext>
-    </p:extLst>
-  </p:cSld>
-  <p:clrMapOvr>
-    <a:masterClrMapping/>
-  </p:clrMapOvr>
-</p:sld>
-</file>
-
-<file path=ppt/slides/slide2.xml><?xml version="1.0" encoding="utf-8"?>
-<p:sld xmlns:a="http://schemas.openxmlformats.org/drawingml/2006/main" xmlns:r="http://schemas.openxmlformats.org/officeDocument/2006/relationships" xmlns:p="http://schemas.openxmlformats.org/presentationml/2006/main">
-  <p:cSld>
-    <p:spTree>
-      <p:nvGrpSpPr>
-        <p:cNvPr id="1" name=""/>
-        <p:cNvGrpSpPr/>
-        <p:nvPr/>
-      </p:nvGrpSpPr>
-      <p:grpSpPr>
-        <a:xfrm>
-          <a:off x="0" y="0"/>
-          <a:ext cx="0" cy="0"/>
-          <a:chOff x="0" y="0"/>
-          <a:chExt cx="0" cy="0"/>
-        </a:xfrm>
-      </p:grpSpPr>
-      <p:sp>
-        <p:nvSpPr>
-          <p:cNvPr id="200" name="LeftBar"/>
+              <a:t>将来の拡張ポイント &amp; 概算費用</a:t>
+            </a:r>
+          </a:p>
+        </p:txBody>
+      </p:sp>
+      <p:sp>
+        <p:nvSpPr>
+          <p:cNvPr id="56" name="Rounded Rectangle 55"/>
           <p:cNvSpPr/>
           <p:nvPr/>
         </p:nvSpPr>
         <p:spPr>
           <a:xfrm>
-            <a:off x="0" y="0"/>
-            <a:ext cx="63500" cy="6858000"/>
-          </a:xfrm>
-          <a:prstGeom prst="rect">
+            <a:off x="7315200" y="1691640"/>
+            <a:ext cx="4572000" cy="685800"/>
+          </a:xfrm>
+          <a:prstGeom prst="roundRect">
+            <a:avLst/>
+          </a:prstGeom>
+          <a:solidFill>
+            <a:srgbClr val="FDEBED"/>
+          </a:solidFill>
+          <a:ln w="19050">
+            <a:solidFill>
+              <a:srgbClr val="E63946"/>
+            </a:solidFill>
+          </a:ln>
+        </p:spPr>
+        <p:style>
+          <a:lnRef idx="1">
+            <a:schemeClr val="accent1"/>
+          </a:lnRef>
+          <a:fillRef idx="3">
+            <a:schemeClr val="accent1"/>
+          </a:fillRef>
+          <a:effectRef idx="2">
+            <a:schemeClr val="accent1"/>
+          </a:effectRef>
+          <a:fontRef idx="minor">
+            <a:schemeClr val="lt1"/>
+          </a:fontRef>
+        </p:style>
+        <p:txBody>
+          <a:bodyPr rtlCol="0" anchor="ctr"/>
+          <a:lstStyle/>
+          <a:p>
+            <a:pPr algn="ctr"/>
+          </a:p>
+        </p:txBody>
+      </p:sp>
+      <p:sp>
+        <p:nvSpPr>
+          <p:cNvPr id="57" name="Rounded Rectangle 56"/>
+          <p:cNvSpPr/>
+          <p:nvPr/>
+        </p:nvSpPr>
+        <p:spPr>
+          <a:xfrm>
+            <a:off x="7406640" y="1783080"/>
+            <a:ext cx="502920" cy="274320"/>
+          </a:xfrm>
+          <a:prstGeom prst="roundRect">
             <a:avLst/>
           </a:prstGeom>
           <a:solidFill>
@@ -5398,63 +5359,1553 @@
             <a:noFill/>
           </a:ln>
         </p:spPr>
-        <p:txBody>
-          <a:bodyPr/>
-          <a:lstStyle/>
-          <a:p>
-            <a:endParaRPr lang="ja-JP"/>
-          </a:p>
-        </p:txBody>
-      </p:sp>
-      <p:sp>
-        <p:nvSpPr>
-          <p:cNvPr id="201" name="Title"/>
+        <p:style>
+          <a:lnRef idx="1">
+            <a:schemeClr val="accent1"/>
+          </a:lnRef>
+          <a:fillRef idx="3">
+            <a:schemeClr val="accent1"/>
+          </a:fillRef>
+          <a:effectRef idx="2">
+            <a:schemeClr val="accent1"/>
+          </a:effectRef>
+          <a:fontRef idx="minor">
+            <a:schemeClr val="lt1"/>
+          </a:fontRef>
+        </p:style>
+        <p:txBody>
+          <a:bodyPr rtlCol="0" anchor="ctr"/>
+          <a:lstStyle/>
+          <a:p>
+            <a:pPr algn="ctr"/>
+          </a:p>
+        </p:txBody>
+      </p:sp>
+      <p:sp>
+        <p:nvSpPr>
+          <p:cNvPr id="58" name="TextBox 57"/>
+          <p:cNvSpPr txBox="1"/>
+          <p:nvPr/>
+        </p:nvSpPr>
+        <p:spPr>
+          <a:xfrm>
+            <a:off x="7406640" y="1783080"/>
+            <a:ext cx="502920" cy="274320"/>
+          </a:xfrm>
+          <a:prstGeom prst="rect">
+            <a:avLst/>
+          </a:prstGeom>
+          <a:noFill/>
+        </p:spPr>
+        <p:txBody>
+          <a:bodyPr wrap="square">
+            <a:spAutoFit/>
+          </a:bodyPr>
+          <a:lstStyle/>
+          <a:p>
+            <a:pPr algn="ctr">
+              <a:defRPr sz="1000" b="1">
+                <a:solidFill>
+                  <a:srgbClr val="FFFFFF"/>
+                </a:solidFill>
+                <a:latin typeface="Meiryo UI"/>
+              </a:defRPr>
+            </a:pPr>
+            <a:r>
+              <a:t>v1.0</a:t>
+            </a:r>
+          </a:p>
+        </p:txBody>
+      </p:sp>
+      <p:sp>
+        <p:nvSpPr>
+          <p:cNvPr id="59" name="TextBox 58"/>
+          <p:cNvSpPr txBox="1"/>
+          <p:nvPr/>
+        </p:nvSpPr>
+        <p:spPr>
+          <a:xfrm>
+            <a:off x="8001000" y="1764792"/>
+            <a:ext cx="1371600" cy="228600"/>
+          </a:xfrm>
+          <a:prstGeom prst="rect">
+            <a:avLst/>
+          </a:prstGeom>
+          <a:noFill/>
+        </p:spPr>
+        <p:txBody>
+          <a:bodyPr wrap="square">
+            <a:spAutoFit/>
+          </a:bodyPr>
+          <a:lstStyle/>
+          <a:p>
+            <a:pPr algn="l">
+              <a:defRPr sz="1200" b="1">
+                <a:solidFill>
+                  <a:srgbClr val="0F172A"/>
+                </a:solidFill>
+                <a:latin typeface="Meiryo UI"/>
+              </a:defRPr>
+            </a:pPr>
+            <a:r>
+              <a:t>得点リモコン</a:t>
+            </a:r>
+          </a:p>
+        </p:txBody>
+      </p:sp>
+      <p:sp>
+        <p:nvSpPr>
+          <p:cNvPr id="60" name="TextBox 59"/>
+          <p:cNvSpPr txBox="1"/>
+          <p:nvPr/>
+        </p:nvSpPr>
+        <p:spPr>
+          <a:xfrm>
+            <a:off x="8001000" y="2011680"/>
+            <a:ext cx="1371600" cy="457200"/>
+          </a:xfrm>
+          <a:prstGeom prst="rect">
+            <a:avLst/>
+          </a:prstGeom>
+          <a:noFill/>
+        </p:spPr>
+        <p:txBody>
+          <a:bodyPr wrap="square">
+            <a:spAutoFit/>
+          </a:bodyPr>
+          <a:lstStyle/>
+          <a:p>
+            <a:pPr algn="l">
+              <a:defRPr sz="800" b="0">
+                <a:solidFill>
+                  <a:srgbClr val="666680"/>
+                </a:solidFill>
+                <a:latin typeface="Meiryo UI"/>
+              </a:defRPr>
+            </a:pPr>
+            <a:r>
+              <a:t>別デバイスからスコア操作</a:t>
+            </a:r>
+            <a:br/>
+            <a:r>
+              <a:t>撮影者は撮影に集中</a:t>
+            </a:r>
+          </a:p>
+        </p:txBody>
+      </p:sp>
+      <p:sp>
+        <p:nvSpPr>
+          <p:cNvPr id="61" name="TextBox 60"/>
+          <p:cNvSpPr txBox="1"/>
+          <p:nvPr/>
+        </p:nvSpPr>
+        <p:spPr>
+          <a:xfrm>
+            <a:off x="9509760" y="1764792"/>
+            <a:ext cx="1188720" cy="182880"/>
+          </a:xfrm>
+          <a:prstGeom prst="rect">
+            <a:avLst/>
+          </a:prstGeom>
+          <a:noFill/>
+        </p:spPr>
+        <p:txBody>
+          <a:bodyPr wrap="square">
+            <a:spAutoFit/>
+          </a:bodyPr>
+          <a:lstStyle/>
+          <a:p>
+            <a:pPr algn="l">
+              <a:defRPr sz="700" b="0">
+                <a:solidFill>
+                  <a:srgbClr val="9CA3AF"/>
+                </a:solidFill>
+                <a:latin typeface="Meiryo UI"/>
+              </a:defRPr>
+            </a:pPr>
+            <a:r>
+              <a:t>技術:</a:t>
+            </a:r>
+          </a:p>
+        </p:txBody>
+      </p:sp>
+      <p:sp>
+        <p:nvSpPr>
+          <p:cNvPr id="62" name="TextBox 61"/>
+          <p:cNvSpPr txBox="1"/>
+          <p:nvPr/>
+        </p:nvSpPr>
+        <p:spPr>
+          <a:xfrm>
+            <a:off x="9509760" y="1920240"/>
+            <a:ext cx="1188720" cy="274320"/>
+          </a:xfrm>
+          <a:prstGeom prst="rect">
+            <a:avLst/>
+          </a:prstGeom>
+          <a:noFill/>
+        </p:spPr>
+        <p:txBody>
+          <a:bodyPr wrap="square">
+            <a:spAutoFit/>
+          </a:bodyPr>
+          <a:lstStyle/>
+          <a:p>
+            <a:pPr algn="l">
+              <a:defRPr sz="800" b="0">
+                <a:solidFill>
+                  <a:srgbClr val="1A1A2E"/>
+                </a:solidFill>
+                <a:latin typeface="Meiryo UI"/>
+              </a:defRPr>
+            </a:pPr>
+            <a:r>
+              <a:t>WebSocket / Supabase Realtime</a:t>
+            </a:r>
+          </a:p>
+        </p:txBody>
+      </p:sp>
+      <p:sp>
+        <p:nvSpPr>
+          <p:cNvPr id="63" name="Rounded Rectangle 62"/>
           <p:cNvSpPr/>
           <p:nvPr/>
         </p:nvSpPr>
         <p:spPr>
           <a:xfrm>
-            <a:off x="457200" y="228600"/>
-            <a:ext cx="11277600" cy="457200"/>
+            <a:off x="10789920" y="1783080"/>
+            <a:ext cx="960120" cy="502920"/>
+          </a:xfrm>
+          <a:prstGeom prst="roundRect">
+            <a:avLst/>
+          </a:prstGeom>
+          <a:solidFill>
+            <a:srgbClr val="FFFFFF"/>
+          </a:solidFill>
+          <a:ln w="19050">
+            <a:solidFill>
+              <a:srgbClr val="E0E0E8"/>
+            </a:solidFill>
+          </a:ln>
+        </p:spPr>
+        <p:style>
+          <a:lnRef idx="1">
+            <a:schemeClr val="accent1"/>
+          </a:lnRef>
+          <a:fillRef idx="3">
+            <a:schemeClr val="accent1"/>
+          </a:fillRef>
+          <a:effectRef idx="2">
+            <a:schemeClr val="accent1"/>
+          </a:effectRef>
+          <a:fontRef idx="minor">
+            <a:schemeClr val="lt1"/>
+          </a:fontRef>
+        </p:style>
+        <p:txBody>
+          <a:bodyPr rtlCol="0" anchor="ctr"/>
+          <a:lstStyle/>
+          <a:p>
+            <a:pPr algn="ctr"/>
+          </a:p>
+        </p:txBody>
+      </p:sp>
+      <p:sp>
+        <p:nvSpPr>
+          <p:cNvPr id="64" name="TextBox 63"/>
+          <p:cNvSpPr txBox="1"/>
+          <p:nvPr/>
+        </p:nvSpPr>
+        <p:spPr>
+          <a:xfrm>
+            <a:off x="10835640" y="1801368"/>
+            <a:ext cx="868680" cy="228600"/>
           </a:xfrm>
           <a:prstGeom prst="rect">
             <a:avLst/>
           </a:prstGeom>
           <a:noFill/>
+        </p:spPr>
+        <p:txBody>
+          <a:bodyPr wrap="square">
+            <a:spAutoFit/>
+          </a:bodyPr>
+          <a:lstStyle/>
+          <a:p>
+            <a:pPr algn="ctr">
+              <a:defRPr sz="1000" b="1">
+                <a:solidFill>
+                  <a:srgbClr val="E63946"/>
+                </a:solidFill>
+                <a:latin typeface="Meiryo UI"/>
+              </a:defRPr>
+            </a:pPr>
+            <a:r>
+              <a:t>約30〜50万円</a:t>
+            </a:r>
+          </a:p>
+        </p:txBody>
+      </p:sp>
+      <p:sp>
+        <p:nvSpPr>
+          <p:cNvPr id="65" name="TextBox 64"/>
+          <p:cNvSpPr txBox="1"/>
+          <p:nvPr/>
+        </p:nvSpPr>
+        <p:spPr>
+          <a:xfrm>
+            <a:off x="10835640" y="2057400"/>
+            <a:ext cx="868680" cy="182880"/>
+          </a:xfrm>
+          <a:prstGeom prst="rect">
+            <a:avLst/>
+          </a:prstGeom>
+          <a:noFill/>
+        </p:spPr>
+        <p:txBody>
+          <a:bodyPr wrap="square">
+            <a:spAutoFit/>
+          </a:bodyPr>
+          <a:lstStyle/>
+          <a:p>
+            <a:pPr algn="ctr">
+              <a:defRPr sz="800" b="0">
+                <a:solidFill>
+                  <a:srgbClr val="666680"/>
+                </a:solidFill>
+                <a:latin typeface="Meiryo UI"/>
+              </a:defRPr>
+            </a:pPr>
+            <a:r>
+              <a:t>2-3週間</a:t>
+            </a:r>
+          </a:p>
+        </p:txBody>
+      </p:sp>
+      <p:sp>
+        <p:nvSpPr>
+          <p:cNvPr id="66" name="Rounded Rectangle 65"/>
+          <p:cNvSpPr/>
+          <p:nvPr/>
+        </p:nvSpPr>
+        <p:spPr>
+          <a:xfrm>
+            <a:off x="7315200" y="2496312"/>
+            <a:ext cx="4572000" cy="685800"/>
+          </a:xfrm>
+          <a:prstGeom prst="roundRect">
+            <a:avLst/>
+          </a:prstGeom>
+          <a:solidFill>
+            <a:srgbClr val="EBF0FF"/>
+          </a:solidFill>
+          <a:ln w="19050">
+            <a:solidFill>
+              <a:srgbClr val="2563EB"/>
+            </a:solidFill>
+          </a:ln>
+        </p:spPr>
+        <p:style>
+          <a:lnRef idx="1">
+            <a:schemeClr val="accent1"/>
+          </a:lnRef>
+          <a:fillRef idx="3">
+            <a:schemeClr val="accent1"/>
+          </a:fillRef>
+          <a:effectRef idx="2">
+            <a:schemeClr val="accent1"/>
+          </a:effectRef>
+          <a:fontRef idx="minor">
+            <a:schemeClr val="lt1"/>
+          </a:fontRef>
+        </p:style>
+        <p:txBody>
+          <a:bodyPr rtlCol="0" anchor="ctr"/>
+          <a:lstStyle/>
+          <a:p>
+            <a:pPr algn="ctr"/>
+          </a:p>
+        </p:txBody>
+      </p:sp>
+      <p:sp>
+        <p:nvSpPr>
+          <p:cNvPr id="67" name="Rounded Rectangle 66"/>
+          <p:cNvSpPr/>
+          <p:nvPr/>
+        </p:nvSpPr>
+        <p:spPr>
+          <a:xfrm>
+            <a:off x="7406640" y="2587752"/>
+            <a:ext cx="502920" cy="274320"/>
+          </a:xfrm>
+          <a:prstGeom prst="roundRect">
+            <a:avLst/>
+          </a:prstGeom>
+          <a:solidFill>
+            <a:srgbClr val="2563EB"/>
+          </a:solidFill>
           <a:ln>
             <a:noFill/>
           </a:ln>
         </p:spPr>
-        <p:txBody>
-          <a:bodyPr wrap="square" lIns="0" tIns="0" rIns="0" bIns="0" anchor="t"/>
-          <a:lstStyle/>
-          <a:p>
-            <a:pPr algn="l"/>
-            <a:r>
-              <a:rPr lang="ja-JP" altLang="en-US" sz="2800" b="1" dirty="0">
+        <p:style>
+          <a:lnRef idx="1">
+            <a:schemeClr val="accent1"/>
+          </a:lnRef>
+          <a:fillRef idx="3">
+            <a:schemeClr val="accent1"/>
+          </a:fillRef>
+          <a:effectRef idx="2">
+            <a:schemeClr val="accent1"/>
+          </a:effectRef>
+          <a:fontRef idx="minor">
+            <a:schemeClr val="lt1"/>
+          </a:fontRef>
+        </p:style>
+        <p:txBody>
+          <a:bodyPr rtlCol="0" anchor="ctr"/>
+          <a:lstStyle/>
+          <a:p>
+            <a:pPr algn="ctr"/>
+          </a:p>
+        </p:txBody>
+      </p:sp>
+      <p:sp>
+        <p:nvSpPr>
+          <p:cNvPr id="68" name="TextBox 67"/>
+          <p:cNvSpPr txBox="1"/>
+          <p:nvPr/>
+        </p:nvSpPr>
+        <p:spPr>
+          <a:xfrm>
+            <a:off x="7406640" y="2587752"/>
+            <a:ext cx="502920" cy="274320"/>
+          </a:xfrm>
+          <a:prstGeom prst="rect">
+            <a:avLst/>
+          </a:prstGeom>
+          <a:noFill/>
+        </p:spPr>
+        <p:txBody>
+          <a:bodyPr wrap="square">
+            <a:spAutoFit/>
+          </a:bodyPr>
+          <a:lstStyle/>
+          <a:p>
+            <a:pPr algn="ctr">
+              <a:defRPr sz="1000" b="1">
+                <a:solidFill>
+                  <a:srgbClr val="FFFFFF"/>
+                </a:solidFill>
+                <a:latin typeface="Meiryo UI"/>
+              </a:defRPr>
+            </a:pPr>
+            <a:r>
+              <a:t>v1.5</a:t>
+            </a:r>
+          </a:p>
+        </p:txBody>
+      </p:sp>
+      <p:sp>
+        <p:nvSpPr>
+          <p:cNvPr id="69" name="TextBox 68"/>
+          <p:cNvSpPr txBox="1"/>
+          <p:nvPr/>
+        </p:nvSpPr>
+        <p:spPr>
+          <a:xfrm>
+            <a:off x="8001000" y="2569464"/>
+            <a:ext cx="1371600" cy="228600"/>
+          </a:xfrm>
+          <a:prstGeom prst="rect">
+            <a:avLst/>
+          </a:prstGeom>
+          <a:noFill/>
+        </p:spPr>
+        <p:txBody>
+          <a:bodyPr wrap="square">
+            <a:spAutoFit/>
+          </a:bodyPr>
+          <a:lstStyle/>
+          <a:p>
+            <a:pPr algn="l">
+              <a:defRPr sz="1200" b="1">
                 <a:solidFill>
                   <a:srgbClr val="0F172A"/>
                 </a:solidFill>
                 <a:latin typeface="Meiryo UI"/>
-                <a:ea typeface="Meiryo UI"/>
-              </a:rPr>
-              <a:t>LIVE SPOtCH — 将来の拡張ポイント &amp; 概算費用</a:t>
-            </a:r>
-          </a:p>
-        </p:txBody>
-      </p:sp>
-      <p:sp>
-        <p:nvSpPr>
-          <p:cNvPr id="202" name="AccentLine"/>
+              </a:defRPr>
+            </a:pPr>
+            <a:r>
+              <a:t>マルチカメラ手動切替</a:t>
+            </a:r>
+          </a:p>
+        </p:txBody>
+      </p:sp>
+      <p:sp>
+        <p:nvSpPr>
+          <p:cNvPr id="70" name="TextBox 69"/>
+          <p:cNvSpPr txBox="1"/>
+          <p:nvPr/>
+        </p:nvSpPr>
+        <p:spPr>
+          <a:xfrm>
+            <a:off x="8001000" y="2816352"/>
+            <a:ext cx="1371600" cy="457200"/>
+          </a:xfrm>
+          <a:prstGeom prst="rect">
+            <a:avLst/>
+          </a:prstGeom>
+          <a:noFill/>
+        </p:spPr>
+        <p:txBody>
+          <a:bodyPr wrap="square">
+            <a:spAutoFit/>
+          </a:bodyPr>
+          <a:lstStyle/>
+          <a:p>
+            <a:pPr algn="l">
+              <a:defRPr sz="800" b="0">
+                <a:solidFill>
+                  <a:srgbClr val="666680"/>
+                </a:solidFill>
+                <a:latin typeface="Meiryo UI"/>
+              </a:defRPr>
+            </a:pPr>
+            <a:r>
+              <a:t>複数スマホの映像を</a:t>
+            </a:r>
+            <a:br/>
+            <a:r>
+              <a:t>手動で切り替え表示</a:t>
+            </a:r>
+          </a:p>
+        </p:txBody>
+      </p:sp>
+      <p:sp>
+        <p:nvSpPr>
+          <p:cNvPr id="71" name="TextBox 70"/>
+          <p:cNvSpPr txBox="1"/>
+          <p:nvPr/>
+        </p:nvSpPr>
+        <p:spPr>
+          <a:xfrm>
+            <a:off x="9509760" y="2569464"/>
+            <a:ext cx="1188720" cy="182880"/>
+          </a:xfrm>
+          <a:prstGeom prst="rect">
+            <a:avLst/>
+          </a:prstGeom>
+          <a:noFill/>
+        </p:spPr>
+        <p:txBody>
+          <a:bodyPr wrap="square">
+            <a:spAutoFit/>
+          </a:bodyPr>
+          <a:lstStyle/>
+          <a:p>
+            <a:pPr algn="l">
+              <a:defRPr sz="700" b="0">
+                <a:solidFill>
+                  <a:srgbClr val="9CA3AF"/>
+                </a:solidFill>
+                <a:latin typeface="Meiryo UI"/>
+              </a:defRPr>
+            </a:pPr>
+            <a:r>
+              <a:t>技術:</a:t>
+            </a:r>
+          </a:p>
+        </p:txBody>
+      </p:sp>
+      <p:sp>
+        <p:nvSpPr>
+          <p:cNvPr id="72" name="TextBox 71"/>
+          <p:cNvSpPr txBox="1"/>
+          <p:nvPr/>
+        </p:nvSpPr>
+        <p:spPr>
+          <a:xfrm>
+            <a:off x="9509760" y="2724912"/>
+            <a:ext cx="1188720" cy="274320"/>
+          </a:xfrm>
+          <a:prstGeom prst="rect">
+            <a:avLst/>
+          </a:prstGeom>
+          <a:noFill/>
+        </p:spPr>
+        <p:txBody>
+          <a:bodyPr wrap="square">
+            <a:spAutoFit/>
+          </a:bodyPr>
+          <a:lstStyle/>
+          <a:p>
+            <a:pPr algn="l">
+              <a:defRPr sz="800" b="0">
+                <a:solidFill>
+                  <a:srgbClr val="1A1A2E"/>
+                </a:solidFill>
+                <a:latin typeface="Meiryo UI"/>
+              </a:defRPr>
+            </a:pPr>
+            <a:r>
+              <a:t>LiveKit マルチトラック</a:t>
+            </a:r>
+          </a:p>
+        </p:txBody>
+      </p:sp>
+      <p:sp>
+        <p:nvSpPr>
+          <p:cNvPr id="73" name="Rounded Rectangle 72"/>
           <p:cNvSpPr/>
           <p:nvPr/>
         </p:nvSpPr>
         <p:spPr>
           <a:xfrm>
-            <a:off x="457200" y="762000"/>
-            <a:ext cx="1524000" cy="38100"/>
-          </a:xfrm>
-          <a:prstGeom prst="rect">
+            <a:off x="10789920" y="2587752"/>
+            <a:ext cx="960120" cy="502920"/>
+          </a:xfrm>
+          <a:prstGeom prst="roundRect">
+            <a:avLst/>
+          </a:prstGeom>
+          <a:solidFill>
+            <a:srgbClr val="FFFFFF"/>
+          </a:solidFill>
+          <a:ln w="19050">
+            <a:solidFill>
+              <a:srgbClr val="E0E0E8"/>
+            </a:solidFill>
+          </a:ln>
+        </p:spPr>
+        <p:style>
+          <a:lnRef idx="1">
+            <a:schemeClr val="accent1"/>
+          </a:lnRef>
+          <a:fillRef idx="3">
+            <a:schemeClr val="accent1"/>
+          </a:fillRef>
+          <a:effectRef idx="2">
+            <a:schemeClr val="accent1"/>
+          </a:effectRef>
+          <a:fontRef idx="minor">
+            <a:schemeClr val="lt1"/>
+          </a:fontRef>
+        </p:style>
+        <p:txBody>
+          <a:bodyPr rtlCol="0" anchor="ctr"/>
+          <a:lstStyle/>
+          <a:p>
+            <a:pPr algn="ctr"/>
+          </a:p>
+        </p:txBody>
+      </p:sp>
+      <p:sp>
+        <p:nvSpPr>
+          <p:cNvPr id="74" name="TextBox 73"/>
+          <p:cNvSpPr txBox="1"/>
+          <p:nvPr/>
+        </p:nvSpPr>
+        <p:spPr>
+          <a:xfrm>
+            <a:off x="10835640" y="2606040"/>
+            <a:ext cx="868680" cy="228600"/>
+          </a:xfrm>
+          <a:prstGeom prst="rect">
+            <a:avLst/>
+          </a:prstGeom>
+          <a:noFill/>
+        </p:spPr>
+        <p:txBody>
+          <a:bodyPr wrap="square">
+            <a:spAutoFit/>
+          </a:bodyPr>
+          <a:lstStyle/>
+          <a:p>
+            <a:pPr algn="ctr">
+              <a:defRPr sz="1000" b="1">
+                <a:solidFill>
+                  <a:srgbClr val="E63946"/>
+                </a:solidFill>
+                <a:latin typeface="Meiryo UI"/>
+              </a:defRPr>
+            </a:pPr>
+            <a:r>
+              <a:t>約80〜120万円</a:t>
+            </a:r>
+          </a:p>
+        </p:txBody>
+      </p:sp>
+      <p:sp>
+        <p:nvSpPr>
+          <p:cNvPr id="75" name="TextBox 74"/>
+          <p:cNvSpPr txBox="1"/>
+          <p:nvPr/>
+        </p:nvSpPr>
+        <p:spPr>
+          <a:xfrm>
+            <a:off x="10835640" y="2862072"/>
+            <a:ext cx="868680" cy="182880"/>
+          </a:xfrm>
+          <a:prstGeom prst="rect">
+            <a:avLst/>
+          </a:prstGeom>
+          <a:noFill/>
+        </p:spPr>
+        <p:txBody>
+          <a:bodyPr wrap="square">
+            <a:spAutoFit/>
+          </a:bodyPr>
+          <a:lstStyle/>
+          <a:p>
+            <a:pPr algn="ctr">
+              <a:defRPr sz="800" b="0">
+                <a:solidFill>
+                  <a:srgbClr val="666680"/>
+                </a:solidFill>
+                <a:latin typeface="Meiryo UI"/>
+              </a:defRPr>
+            </a:pPr>
+            <a:r>
+              <a:t>1-2ヶ月</a:t>
+            </a:r>
+          </a:p>
+        </p:txBody>
+      </p:sp>
+      <p:sp>
+        <p:nvSpPr>
+          <p:cNvPr id="76" name="Rounded Rectangle 75"/>
+          <p:cNvSpPr/>
+          <p:nvPr/>
+        </p:nvSpPr>
+        <p:spPr>
+          <a:xfrm>
+            <a:off x="7315200" y="3300984"/>
+            <a:ext cx="4572000" cy="685800"/>
+          </a:xfrm>
+          <a:prstGeom prst="roundRect">
+            <a:avLst/>
+          </a:prstGeom>
+          <a:solidFill>
+            <a:srgbClr val="FFF3E0"/>
+          </a:solidFill>
+          <a:ln w="19050">
+            <a:solidFill>
+              <a:srgbClr val="EA880B"/>
+            </a:solidFill>
+          </a:ln>
+        </p:spPr>
+        <p:style>
+          <a:lnRef idx="1">
+            <a:schemeClr val="accent1"/>
+          </a:lnRef>
+          <a:fillRef idx="3">
+            <a:schemeClr val="accent1"/>
+          </a:fillRef>
+          <a:effectRef idx="2">
+            <a:schemeClr val="accent1"/>
+          </a:effectRef>
+          <a:fontRef idx="minor">
+            <a:schemeClr val="lt1"/>
+          </a:fontRef>
+        </p:style>
+        <p:txBody>
+          <a:bodyPr rtlCol="0" anchor="ctr"/>
+          <a:lstStyle/>
+          <a:p>
+            <a:pPr algn="ctr"/>
+          </a:p>
+        </p:txBody>
+      </p:sp>
+      <p:sp>
+        <p:nvSpPr>
+          <p:cNvPr id="77" name="Rounded Rectangle 76"/>
+          <p:cNvSpPr/>
+          <p:nvPr/>
+        </p:nvSpPr>
+        <p:spPr>
+          <a:xfrm>
+            <a:off x="7406640" y="3392424"/>
+            <a:ext cx="502920" cy="274320"/>
+          </a:xfrm>
+          <a:prstGeom prst="roundRect">
+            <a:avLst/>
+          </a:prstGeom>
+          <a:solidFill>
+            <a:srgbClr val="EA880B"/>
+          </a:solidFill>
+          <a:ln>
+            <a:noFill/>
+          </a:ln>
+        </p:spPr>
+        <p:style>
+          <a:lnRef idx="1">
+            <a:schemeClr val="accent1"/>
+          </a:lnRef>
+          <a:fillRef idx="3">
+            <a:schemeClr val="accent1"/>
+          </a:fillRef>
+          <a:effectRef idx="2">
+            <a:schemeClr val="accent1"/>
+          </a:effectRef>
+          <a:fontRef idx="minor">
+            <a:schemeClr val="lt1"/>
+          </a:fontRef>
+        </p:style>
+        <p:txBody>
+          <a:bodyPr rtlCol="0" anchor="ctr"/>
+          <a:lstStyle/>
+          <a:p>
+            <a:pPr algn="ctr"/>
+          </a:p>
+        </p:txBody>
+      </p:sp>
+      <p:sp>
+        <p:nvSpPr>
+          <p:cNvPr id="78" name="TextBox 77"/>
+          <p:cNvSpPr txBox="1"/>
+          <p:nvPr/>
+        </p:nvSpPr>
+        <p:spPr>
+          <a:xfrm>
+            <a:off x="7406640" y="3392424"/>
+            <a:ext cx="502920" cy="274320"/>
+          </a:xfrm>
+          <a:prstGeom prst="rect">
+            <a:avLst/>
+          </a:prstGeom>
+          <a:noFill/>
+        </p:spPr>
+        <p:txBody>
+          <a:bodyPr wrap="square">
+            <a:spAutoFit/>
+          </a:bodyPr>
+          <a:lstStyle/>
+          <a:p>
+            <a:pPr algn="ctr">
+              <a:defRPr sz="1000" b="1">
+                <a:solidFill>
+                  <a:srgbClr val="FFFFFF"/>
+                </a:solidFill>
+                <a:latin typeface="Meiryo UI"/>
+              </a:defRPr>
+            </a:pPr>
+            <a:r>
+              <a:t>v2.0</a:t>
+            </a:r>
+          </a:p>
+        </p:txBody>
+      </p:sp>
+      <p:sp>
+        <p:nvSpPr>
+          <p:cNvPr id="79" name="TextBox 78"/>
+          <p:cNvSpPr txBox="1"/>
+          <p:nvPr/>
+        </p:nvSpPr>
+        <p:spPr>
+          <a:xfrm>
+            <a:off x="8001000" y="3374136"/>
+            <a:ext cx="1371600" cy="228600"/>
+          </a:xfrm>
+          <a:prstGeom prst="rect">
+            <a:avLst/>
+          </a:prstGeom>
+          <a:noFill/>
+        </p:spPr>
+        <p:txBody>
+          <a:bodyPr wrap="square">
+            <a:spAutoFit/>
+          </a:bodyPr>
+          <a:lstStyle/>
+          <a:p>
+            <a:pPr algn="l">
+              <a:defRPr sz="1200" b="1">
+                <a:solidFill>
+                  <a:srgbClr val="0F172A"/>
+                </a:solidFill>
+                <a:latin typeface="Meiryo UI"/>
+              </a:defRPr>
+            </a:pPr>
+            <a:r>
+              <a:t>AI自動アングル切替</a:t>
+            </a:r>
+          </a:p>
+        </p:txBody>
+      </p:sp>
+      <p:sp>
+        <p:nvSpPr>
+          <p:cNvPr id="80" name="TextBox 79"/>
+          <p:cNvSpPr txBox="1"/>
+          <p:nvPr/>
+        </p:nvSpPr>
+        <p:spPr>
+          <a:xfrm>
+            <a:off x="8001000" y="3621024"/>
+            <a:ext cx="1371600" cy="457200"/>
+          </a:xfrm>
+          <a:prstGeom prst="rect">
+            <a:avLst/>
+          </a:prstGeom>
+          <a:noFill/>
+        </p:spPr>
+        <p:txBody>
+          <a:bodyPr wrap="square">
+            <a:spAutoFit/>
+          </a:bodyPr>
+          <a:lstStyle/>
+          <a:p>
+            <a:pPr algn="l">
+              <a:defRPr sz="800" b="0">
+                <a:solidFill>
+                  <a:srgbClr val="666680"/>
+                </a:solidFill>
+                <a:latin typeface="Meiryo UI"/>
+              </a:defRPr>
+            </a:pPr>
+            <a:r>
+              <a:t>AIがベストアングルを</a:t>
+            </a:r>
+            <a:br/>
+            <a:r>
+              <a:t>判断して自動切替</a:t>
+            </a:r>
+          </a:p>
+        </p:txBody>
+      </p:sp>
+      <p:sp>
+        <p:nvSpPr>
+          <p:cNvPr id="81" name="TextBox 80"/>
+          <p:cNvSpPr txBox="1"/>
+          <p:nvPr/>
+        </p:nvSpPr>
+        <p:spPr>
+          <a:xfrm>
+            <a:off x="9509760" y="3374136"/>
+            <a:ext cx="1188720" cy="182880"/>
+          </a:xfrm>
+          <a:prstGeom prst="rect">
+            <a:avLst/>
+          </a:prstGeom>
+          <a:noFill/>
+        </p:spPr>
+        <p:txBody>
+          <a:bodyPr wrap="square">
+            <a:spAutoFit/>
+          </a:bodyPr>
+          <a:lstStyle/>
+          <a:p>
+            <a:pPr algn="l">
+              <a:defRPr sz="700" b="0">
+                <a:solidFill>
+                  <a:srgbClr val="9CA3AF"/>
+                </a:solidFill>
+                <a:latin typeface="Meiryo UI"/>
+              </a:defRPr>
+            </a:pPr>
+            <a:r>
+              <a:t>技術:</a:t>
+            </a:r>
+          </a:p>
+        </p:txBody>
+      </p:sp>
+      <p:sp>
+        <p:nvSpPr>
+          <p:cNvPr id="82" name="TextBox 81"/>
+          <p:cNvSpPr txBox="1"/>
+          <p:nvPr/>
+        </p:nvSpPr>
+        <p:spPr>
+          <a:xfrm>
+            <a:off x="9509760" y="3529584"/>
+            <a:ext cx="1188720" cy="274320"/>
+          </a:xfrm>
+          <a:prstGeom prst="rect">
+            <a:avLst/>
+          </a:prstGeom>
+          <a:noFill/>
+        </p:spPr>
+        <p:txBody>
+          <a:bodyPr wrap="square">
+            <a:spAutoFit/>
+          </a:bodyPr>
+          <a:lstStyle/>
+          <a:p>
+            <a:pPr algn="l">
+              <a:defRPr sz="800" b="0">
+                <a:solidFill>
+                  <a:srgbClr val="1A1A2E"/>
+                </a:solidFill>
+                <a:latin typeface="Meiryo UI"/>
+              </a:defRPr>
+            </a:pPr>
+            <a:r>
+              <a:t>AI推論サーバー（GPU）</a:t>
+            </a:r>
+          </a:p>
+        </p:txBody>
+      </p:sp>
+      <p:sp>
+        <p:nvSpPr>
+          <p:cNvPr id="83" name="Rounded Rectangle 82"/>
+          <p:cNvSpPr/>
+          <p:nvPr/>
+        </p:nvSpPr>
+        <p:spPr>
+          <a:xfrm>
+            <a:off x="10789920" y="3392424"/>
+            <a:ext cx="960120" cy="502920"/>
+          </a:xfrm>
+          <a:prstGeom prst="roundRect">
+            <a:avLst/>
+          </a:prstGeom>
+          <a:solidFill>
+            <a:srgbClr val="FFFFFF"/>
+          </a:solidFill>
+          <a:ln w="19050">
+            <a:solidFill>
+              <a:srgbClr val="E0E0E8"/>
+            </a:solidFill>
+          </a:ln>
+        </p:spPr>
+        <p:style>
+          <a:lnRef idx="1">
+            <a:schemeClr val="accent1"/>
+          </a:lnRef>
+          <a:fillRef idx="3">
+            <a:schemeClr val="accent1"/>
+          </a:fillRef>
+          <a:effectRef idx="2">
+            <a:schemeClr val="accent1"/>
+          </a:effectRef>
+          <a:fontRef idx="minor">
+            <a:schemeClr val="lt1"/>
+          </a:fontRef>
+        </p:style>
+        <p:txBody>
+          <a:bodyPr rtlCol="0" anchor="ctr"/>
+          <a:lstStyle/>
+          <a:p>
+            <a:pPr algn="ctr"/>
+          </a:p>
+        </p:txBody>
+      </p:sp>
+      <p:sp>
+        <p:nvSpPr>
+          <p:cNvPr id="84" name="TextBox 83"/>
+          <p:cNvSpPr txBox="1"/>
+          <p:nvPr/>
+        </p:nvSpPr>
+        <p:spPr>
+          <a:xfrm>
+            <a:off x="10835640" y="3410712"/>
+            <a:ext cx="868680" cy="228600"/>
+          </a:xfrm>
+          <a:prstGeom prst="rect">
+            <a:avLst/>
+          </a:prstGeom>
+          <a:noFill/>
+        </p:spPr>
+        <p:txBody>
+          <a:bodyPr wrap="square">
+            <a:spAutoFit/>
+          </a:bodyPr>
+          <a:lstStyle/>
+          <a:p>
+            <a:pPr algn="ctr">
+              <a:defRPr sz="1000" b="1">
+                <a:solidFill>
+                  <a:srgbClr val="E63946"/>
+                </a:solidFill>
+                <a:latin typeface="Meiryo UI"/>
+              </a:defRPr>
+            </a:pPr>
+            <a:r>
+              <a:t>約200〜350万円</a:t>
+            </a:r>
+          </a:p>
+        </p:txBody>
+      </p:sp>
+      <p:sp>
+        <p:nvSpPr>
+          <p:cNvPr id="85" name="TextBox 84"/>
+          <p:cNvSpPr txBox="1"/>
+          <p:nvPr/>
+        </p:nvSpPr>
+        <p:spPr>
+          <a:xfrm>
+            <a:off x="10835640" y="3666744"/>
+            <a:ext cx="868680" cy="182880"/>
+          </a:xfrm>
+          <a:prstGeom prst="rect">
+            <a:avLst/>
+          </a:prstGeom>
+          <a:noFill/>
+        </p:spPr>
+        <p:txBody>
+          <a:bodyPr wrap="square">
+            <a:spAutoFit/>
+          </a:bodyPr>
+          <a:lstStyle/>
+          <a:p>
+            <a:pPr algn="ctr">
+              <a:defRPr sz="800" b="0">
+                <a:solidFill>
+                  <a:srgbClr val="666680"/>
+                </a:solidFill>
+                <a:latin typeface="Meiryo UI"/>
+              </a:defRPr>
+            </a:pPr>
+            <a:r>
+              <a:t>3-6ヶ月</a:t>
+            </a:r>
+          </a:p>
+        </p:txBody>
+      </p:sp>
+      <p:sp>
+        <p:nvSpPr>
+          <p:cNvPr id="86" name="Rounded Rectangle 85"/>
+          <p:cNvSpPr/>
+          <p:nvPr/>
+        </p:nvSpPr>
+        <p:spPr>
+          <a:xfrm>
+            <a:off x="7315200" y="4105656"/>
+            <a:ext cx="4572000" cy="685800"/>
+          </a:xfrm>
+          <a:prstGeom prst="roundRect">
+            <a:avLst/>
+          </a:prstGeom>
+          <a:solidFill>
+            <a:srgbClr val="E8F5EB"/>
+          </a:solidFill>
+          <a:ln w="19050">
+            <a:solidFill>
+              <a:srgbClr val="16A34A"/>
+            </a:solidFill>
+          </a:ln>
+        </p:spPr>
+        <p:style>
+          <a:lnRef idx="1">
+            <a:schemeClr val="accent1"/>
+          </a:lnRef>
+          <a:fillRef idx="3">
+            <a:schemeClr val="accent1"/>
+          </a:fillRef>
+          <a:effectRef idx="2">
+            <a:schemeClr val="accent1"/>
+          </a:effectRef>
+          <a:fontRef idx="minor">
+            <a:schemeClr val="lt1"/>
+          </a:fontRef>
+        </p:style>
+        <p:txBody>
+          <a:bodyPr rtlCol="0" anchor="ctr"/>
+          <a:lstStyle/>
+          <a:p>
+            <a:pPr algn="ctr"/>
+          </a:p>
+        </p:txBody>
+      </p:sp>
+      <p:sp>
+        <p:nvSpPr>
+          <p:cNvPr id="87" name="Rounded Rectangle 86"/>
+          <p:cNvSpPr/>
+          <p:nvPr/>
+        </p:nvSpPr>
+        <p:spPr>
+          <a:xfrm>
+            <a:off x="7406640" y="4197096"/>
+            <a:ext cx="502920" cy="274320"/>
+          </a:xfrm>
+          <a:prstGeom prst="roundRect">
+            <a:avLst/>
+          </a:prstGeom>
+          <a:solidFill>
+            <a:srgbClr val="16A34A"/>
+          </a:solidFill>
+          <a:ln>
+            <a:noFill/>
+          </a:ln>
+        </p:spPr>
+        <p:style>
+          <a:lnRef idx="1">
+            <a:schemeClr val="accent1"/>
+          </a:lnRef>
+          <a:fillRef idx="3">
+            <a:schemeClr val="accent1"/>
+          </a:fillRef>
+          <a:effectRef idx="2">
+            <a:schemeClr val="accent1"/>
+          </a:effectRef>
+          <a:fontRef idx="minor">
+            <a:schemeClr val="lt1"/>
+          </a:fontRef>
+        </p:style>
+        <p:txBody>
+          <a:bodyPr rtlCol="0" anchor="ctr"/>
+          <a:lstStyle/>
+          <a:p>
+            <a:pPr algn="ctr"/>
+          </a:p>
+        </p:txBody>
+      </p:sp>
+      <p:sp>
+        <p:nvSpPr>
+          <p:cNvPr id="88" name="TextBox 87"/>
+          <p:cNvSpPr txBox="1"/>
+          <p:nvPr/>
+        </p:nvSpPr>
+        <p:spPr>
+          <a:xfrm>
+            <a:off x="7406640" y="4197096"/>
+            <a:ext cx="502920" cy="274320"/>
+          </a:xfrm>
+          <a:prstGeom prst="rect">
+            <a:avLst/>
+          </a:prstGeom>
+          <a:noFill/>
+        </p:spPr>
+        <p:txBody>
+          <a:bodyPr wrap="square">
+            <a:spAutoFit/>
+          </a:bodyPr>
+          <a:lstStyle/>
+          <a:p>
+            <a:pPr algn="ctr">
+              <a:defRPr sz="1000" b="1">
+                <a:solidFill>
+                  <a:srgbClr val="FFFFFF"/>
+                </a:solidFill>
+                <a:latin typeface="Meiryo UI"/>
+              </a:defRPr>
+            </a:pPr>
+            <a:r>
+              <a:t>v2.5</a:t>
+            </a:r>
+          </a:p>
+        </p:txBody>
+      </p:sp>
+      <p:sp>
+        <p:nvSpPr>
+          <p:cNvPr id="89" name="TextBox 88"/>
+          <p:cNvSpPr txBox="1"/>
+          <p:nvPr/>
+        </p:nvSpPr>
+        <p:spPr>
+          <a:xfrm>
+            <a:off x="8001000" y="4178808"/>
+            <a:ext cx="1371600" cy="228600"/>
+          </a:xfrm>
+          <a:prstGeom prst="rect">
+            <a:avLst/>
+          </a:prstGeom>
+          <a:noFill/>
+        </p:spPr>
+        <p:txBody>
+          <a:bodyPr wrap="square">
+            <a:spAutoFit/>
+          </a:bodyPr>
+          <a:lstStyle/>
+          <a:p>
+            <a:pPr algn="l">
+              <a:defRPr sz="1200" b="1">
+                <a:solidFill>
+                  <a:srgbClr val="0F172A"/>
+                </a:solidFill>
+                <a:latin typeface="Meiryo UI"/>
+              </a:defRPr>
+            </a:pPr>
+            <a:r>
+              <a:t>AIハイライト自動生成</a:t>
+            </a:r>
+          </a:p>
+        </p:txBody>
+      </p:sp>
+      <p:sp>
+        <p:nvSpPr>
+          <p:cNvPr id="90" name="TextBox 89"/>
+          <p:cNvSpPr txBox="1"/>
+          <p:nvPr/>
+        </p:nvSpPr>
+        <p:spPr>
+          <a:xfrm>
+            <a:off x="8001000" y="4425696"/>
+            <a:ext cx="1371600" cy="457200"/>
+          </a:xfrm>
+          <a:prstGeom prst="rect">
+            <a:avLst/>
+          </a:prstGeom>
+          <a:noFill/>
+        </p:spPr>
+        <p:txBody>
+          <a:bodyPr wrap="square">
+            <a:spAutoFit/>
+          </a:bodyPr>
+          <a:lstStyle/>
+          <a:p>
+            <a:pPr algn="l">
+              <a:defRPr sz="800" b="0">
+                <a:solidFill>
+                  <a:srgbClr val="666680"/>
+                </a:solidFill>
+                <a:latin typeface="Meiryo UI"/>
+              </a:defRPr>
+            </a:pPr>
+            <a:r>
+              <a:t>試合のハイライトを</a:t>
+            </a:r>
+            <a:br/>
+            <a:r>
+              <a:t>AIが自動編集・生成</a:t>
+            </a:r>
+          </a:p>
+        </p:txBody>
+      </p:sp>
+      <p:sp>
+        <p:nvSpPr>
+          <p:cNvPr id="91" name="TextBox 90"/>
+          <p:cNvSpPr txBox="1"/>
+          <p:nvPr/>
+        </p:nvSpPr>
+        <p:spPr>
+          <a:xfrm>
+            <a:off x="9509760" y="4178808"/>
+            <a:ext cx="1188720" cy="182880"/>
+          </a:xfrm>
+          <a:prstGeom prst="rect">
+            <a:avLst/>
+          </a:prstGeom>
+          <a:noFill/>
+        </p:spPr>
+        <p:txBody>
+          <a:bodyPr wrap="square">
+            <a:spAutoFit/>
+          </a:bodyPr>
+          <a:lstStyle/>
+          <a:p>
+            <a:pPr algn="l">
+              <a:defRPr sz="700" b="0">
+                <a:solidFill>
+                  <a:srgbClr val="9CA3AF"/>
+                </a:solidFill>
+                <a:latin typeface="Meiryo UI"/>
+              </a:defRPr>
+            </a:pPr>
+            <a:r>
+              <a:t>技術:</a:t>
+            </a:r>
+          </a:p>
+        </p:txBody>
+      </p:sp>
+      <p:sp>
+        <p:nvSpPr>
+          <p:cNvPr id="92" name="TextBox 91"/>
+          <p:cNvSpPr txBox="1"/>
+          <p:nvPr/>
+        </p:nvSpPr>
+        <p:spPr>
+          <a:xfrm>
+            <a:off x="9509760" y="4334256"/>
+            <a:ext cx="1188720" cy="274320"/>
+          </a:xfrm>
+          <a:prstGeom prst="rect">
+            <a:avLst/>
+          </a:prstGeom>
+          <a:noFill/>
+        </p:spPr>
+        <p:txBody>
+          <a:bodyPr wrap="square">
+            <a:spAutoFit/>
+          </a:bodyPr>
+          <a:lstStyle/>
+          <a:p>
+            <a:pPr algn="l">
+              <a:defRPr sz="800" b="0">
+                <a:solidFill>
+                  <a:srgbClr val="1A1A2E"/>
+                </a:solidFill>
+                <a:latin typeface="Meiryo UI"/>
+              </a:defRPr>
+            </a:pPr>
+            <a:r>
+              <a:t>動画解析AI + FFmpeg</a:t>
+            </a:r>
+          </a:p>
+        </p:txBody>
+      </p:sp>
+      <p:sp>
+        <p:nvSpPr>
+          <p:cNvPr id="93" name="Rounded Rectangle 92"/>
+          <p:cNvSpPr/>
+          <p:nvPr/>
+        </p:nvSpPr>
+        <p:spPr>
+          <a:xfrm>
+            <a:off x="10789920" y="4197096"/>
+            <a:ext cx="960120" cy="502920"/>
+          </a:xfrm>
+          <a:prstGeom prst="roundRect">
+            <a:avLst/>
+          </a:prstGeom>
+          <a:solidFill>
+            <a:srgbClr val="FFFFFF"/>
+          </a:solidFill>
+          <a:ln w="19050">
+            <a:solidFill>
+              <a:srgbClr val="E0E0E8"/>
+            </a:solidFill>
+          </a:ln>
+        </p:spPr>
+        <p:style>
+          <a:lnRef idx="1">
+            <a:schemeClr val="accent1"/>
+          </a:lnRef>
+          <a:fillRef idx="3">
+            <a:schemeClr val="accent1"/>
+          </a:fillRef>
+          <a:effectRef idx="2">
+            <a:schemeClr val="accent1"/>
+          </a:effectRef>
+          <a:fontRef idx="minor">
+            <a:schemeClr val="lt1"/>
+          </a:fontRef>
+        </p:style>
+        <p:txBody>
+          <a:bodyPr rtlCol="0" anchor="ctr"/>
+          <a:lstStyle/>
+          <a:p>
+            <a:pPr algn="ctr"/>
+          </a:p>
+        </p:txBody>
+      </p:sp>
+      <p:sp>
+        <p:nvSpPr>
+          <p:cNvPr id="94" name="TextBox 93"/>
+          <p:cNvSpPr txBox="1"/>
+          <p:nvPr/>
+        </p:nvSpPr>
+        <p:spPr>
+          <a:xfrm>
+            <a:off x="10835640" y="4215384"/>
+            <a:ext cx="868680" cy="228600"/>
+          </a:xfrm>
+          <a:prstGeom prst="rect">
+            <a:avLst/>
+          </a:prstGeom>
+          <a:noFill/>
+        </p:spPr>
+        <p:txBody>
+          <a:bodyPr wrap="square">
+            <a:spAutoFit/>
+          </a:bodyPr>
+          <a:lstStyle/>
+          <a:p>
+            <a:pPr algn="ctr">
+              <a:defRPr sz="1000" b="1">
+                <a:solidFill>
+                  <a:srgbClr val="E63946"/>
+                </a:solidFill>
+                <a:latin typeface="Meiryo UI"/>
+              </a:defRPr>
+            </a:pPr>
+            <a:r>
+              <a:t>約150〜250万円</a:t>
+            </a:r>
+          </a:p>
+        </p:txBody>
+      </p:sp>
+      <p:sp>
+        <p:nvSpPr>
+          <p:cNvPr id="95" name="TextBox 94"/>
+          <p:cNvSpPr txBox="1"/>
+          <p:nvPr/>
+        </p:nvSpPr>
+        <p:spPr>
+          <a:xfrm>
+            <a:off x="10835640" y="4471416"/>
+            <a:ext cx="868680" cy="182880"/>
+          </a:xfrm>
+          <a:prstGeom prst="rect">
+            <a:avLst/>
+          </a:prstGeom>
+          <a:noFill/>
+        </p:spPr>
+        <p:txBody>
+          <a:bodyPr wrap="square">
+            <a:spAutoFit/>
+          </a:bodyPr>
+          <a:lstStyle/>
+          <a:p>
+            <a:pPr algn="ctr">
+              <a:defRPr sz="800" b="0">
+                <a:solidFill>
+                  <a:srgbClr val="666680"/>
+                </a:solidFill>
+                <a:latin typeface="Meiryo UI"/>
+              </a:defRPr>
+            </a:pPr>
+            <a:r>
+              <a:t>2-4ヶ月</a:t>
+            </a:r>
+          </a:p>
+        </p:txBody>
+      </p:sp>
+      <p:sp>
+        <p:nvSpPr>
+          <p:cNvPr id="96" name="Rounded Rectangle 95"/>
+          <p:cNvSpPr/>
+          <p:nvPr/>
+        </p:nvSpPr>
+        <p:spPr>
+          <a:xfrm>
+            <a:off x="7315200" y="4910328"/>
+            <a:ext cx="4572000" cy="685800"/>
+          </a:xfrm>
+          <a:prstGeom prst="roundRect">
+            <a:avLst/>
+          </a:prstGeom>
+          <a:solidFill>
+            <a:srgbClr val="FDEBED"/>
+          </a:solidFill>
+          <a:ln w="19050">
+            <a:solidFill>
+              <a:srgbClr val="E63946"/>
+            </a:solidFill>
+          </a:ln>
+        </p:spPr>
+        <p:style>
+          <a:lnRef idx="1">
+            <a:schemeClr val="accent1"/>
+          </a:lnRef>
+          <a:fillRef idx="3">
+            <a:schemeClr val="accent1"/>
+          </a:fillRef>
+          <a:effectRef idx="2">
+            <a:schemeClr val="accent1"/>
+          </a:effectRef>
+          <a:fontRef idx="minor">
+            <a:schemeClr val="lt1"/>
+          </a:fontRef>
+        </p:style>
+        <p:txBody>
+          <a:bodyPr rtlCol="0" anchor="ctr"/>
+          <a:lstStyle/>
+          <a:p>
+            <a:pPr algn="ctr"/>
+          </a:p>
+        </p:txBody>
+      </p:sp>
+      <p:sp>
+        <p:nvSpPr>
+          <p:cNvPr id="97" name="Rounded Rectangle 96"/>
+          <p:cNvSpPr/>
+          <p:nvPr/>
+        </p:nvSpPr>
+        <p:spPr>
+          <a:xfrm>
+            <a:off x="7406640" y="5001768"/>
+            <a:ext cx="502920" cy="274320"/>
+          </a:xfrm>
+          <a:prstGeom prst="roundRect">
             <a:avLst/>
           </a:prstGeom>
           <a:solidFill>
@@ -5464,1196 +6915,387 @@
             <a:noFill/>
           </a:ln>
         </p:spPr>
-        <p:txBody>
-          <a:bodyPr/>
-          <a:lstStyle/>
-          <a:p>
-            <a:endParaRPr lang="ja-JP"/>
-          </a:p>
-        </p:txBody>
-      </p:sp>
-      <p:sp>
-        <p:nvSpPr>
-          <p:cNvPr id="210" name="RowBg0"/>
+        <p:style>
+          <a:lnRef idx="1">
+            <a:schemeClr val="accent1"/>
+          </a:lnRef>
+          <a:fillRef idx="3">
+            <a:schemeClr val="accent1"/>
+          </a:fillRef>
+          <a:effectRef idx="2">
+            <a:schemeClr val="accent1"/>
+          </a:effectRef>
+          <a:fontRef idx="minor">
+            <a:schemeClr val="lt1"/>
+          </a:fontRef>
+        </p:style>
+        <p:txBody>
+          <a:bodyPr rtlCol="0" anchor="ctr"/>
+          <a:lstStyle/>
+          <a:p>
+            <a:pPr algn="ctr"/>
+          </a:p>
+        </p:txBody>
+      </p:sp>
+      <p:sp>
+        <p:nvSpPr>
+          <p:cNvPr id="98" name="TextBox 97"/>
+          <p:cNvSpPr txBox="1"/>
+          <p:nvPr/>
+        </p:nvSpPr>
+        <p:spPr>
+          <a:xfrm>
+            <a:off x="7406640" y="5001768"/>
+            <a:ext cx="502920" cy="274320"/>
+          </a:xfrm>
+          <a:prstGeom prst="rect">
+            <a:avLst/>
+          </a:prstGeom>
+          <a:noFill/>
+        </p:spPr>
+        <p:txBody>
+          <a:bodyPr wrap="square">
+            <a:spAutoFit/>
+          </a:bodyPr>
+          <a:lstStyle/>
+          <a:p>
+            <a:pPr algn="ctr">
+              <a:defRPr sz="1000" b="1">
+                <a:solidFill>
+                  <a:srgbClr val="FFFFFF"/>
+                </a:solidFill>
+                <a:latin typeface="Meiryo UI"/>
+              </a:defRPr>
+            </a:pPr>
+            <a:r>
+              <a:t>v3.0</a:t>
+            </a:r>
+          </a:p>
+        </p:txBody>
+      </p:sp>
+      <p:sp>
+        <p:nvSpPr>
+          <p:cNvPr id="99" name="TextBox 98"/>
+          <p:cNvSpPr txBox="1"/>
+          <p:nvPr/>
+        </p:nvSpPr>
+        <p:spPr>
+          <a:xfrm>
+            <a:off x="8001000" y="4983480"/>
+            <a:ext cx="1371600" cy="228600"/>
+          </a:xfrm>
+          <a:prstGeom prst="rect">
+            <a:avLst/>
+          </a:prstGeom>
+          <a:noFill/>
+        </p:spPr>
+        <p:txBody>
+          <a:bodyPr wrap="square">
+            <a:spAutoFit/>
+          </a:bodyPr>
+          <a:lstStyle/>
+          <a:p>
+            <a:pPr algn="l">
+              <a:defRPr sz="1200" b="1">
+                <a:solidFill>
+                  <a:srgbClr val="0F172A"/>
+                </a:solidFill>
+                <a:latin typeface="Meiryo UI"/>
+              </a:defRPr>
+            </a:pPr>
+            <a:r>
+              <a:t>AI得点検知</a:t>
+            </a:r>
+          </a:p>
+        </p:txBody>
+      </p:sp>
+      <p:sp>
+        <p:nvSpPr>
+          <p:cNvPr id="100" name="TextBox 99"/>
+          <p:cNvSpPr txBox="1"/>
+          <p:nvPr/>
+        </p:nvSpPr>
+        <p:spPr>
+          <a:xfrm>
+            <a:off x="8001000" y="5230368"/>
+            <a:ext cx="1371600" cy="457200"/>
+          </a:xfrm>
+          <a:prstGeom prst="rect">
+            <a:avLst/>
+          </a:prstGeom>
+          <a:noFill/>
+        </p:spPr>
+        <p:txBody>
+          <a:bodyPr wrap="square">
+            <a:spAutoFit/>
+          </a:bodyPr>
+          <a:lstStyle/>
+          <a:p>
+            <a:pPr algn="l">
+              <a:defRPr sz="800" b="0">
+                <a:solidFill>
+                  <a:srgbClr val="666680"/>
+                </a:solidFill>
+                <a:latin typeface="Meiryo UI"/>
+              </a:defRPr>
+            </a:pPr>
+            <a:r>
+              <a:t>映像・音声からAIが得点を</a:t>
+            </a:r>
+            <a:br/>
+            <a:r>
+              <a:t>検知しスコア自動更新</a:t>
+            </a:r>
+          </a:p>
+        </p:txBody>
+      </p:sp>
+      <p:sp>
+        <p:nvSpPr>
+          <p:cNvPr id="101" name="TextBox 100"/>
+          <p:cNvSpPr txBox="1"/>
+          <p:nvPr/>
+        </p:nvSpPr>
+        <p:spPr>
+          <a:xfrm>
+            <a:off x="9509760" y="4983480"/>
+            <a:ext cx="1188720" cy="182880"/>
+          </a:xfrm>
+          <a:prstGeom prst="rect">
+            <a:avLst/>
+          </a:prstGeom>
+          <a:noFill/>
+        </p:spPr>
+        <p:txBody>
+          <a:bodyPr wrap="square">
+            <a:spAutoFit/>
+          </a:bodyPr>
+          <a:lstStyle/>
+          <a:p>
+            <a:pPr algn="l">
+              <a:defRPr sz="700" b="0">
+                <a:solidFill>
+                  <a:srgbClr val="9CA3AF"/>
+                </a:solidFill>
+                <a:latin typeface="Meiryo UI"/>
+              </a:defRPr>
+            </a:pPr>
+            <a:r>
+              <a:t>技術:</a:t>
+            </a:r>
+          </a:p>
+        </p:txBody>
+      </p:sp>
+      <p:sp>
+        <p:nvSpPr>
+          <p:cNvPr id="102" name="TextBox 101"/>
+          <p:cNvSpPr txBox="1"/>
+          <p:nvPr/>
+        </p:nvSpPr>
+        <p:spPr>
+          <a:xfrm>
+            <a:off x="9509760" y="5138928"/>
+            <a:ext cx="1188720" cy="274320"/>
+          </a:xfrm>
+          <a:prstGeom prst="rect">
+            <a:avLst/>
+          </a:prstGeom>
+          <a:noFill/>
+        </p:spPr>
+        <p:txBody>
+          <a:bodyPr wrap="square">
+            <a:spAutoFit/>
+          </a:bodyPr>
+          <a:lstStyle/>
+          <a:p>
+            <a:pPr algn="l">
+              <a:defRPr sz="800" b="0">
+                <a:solidFill>
+                  <a:srgbClr val="1A1A2E"/>
+                </a:solidFill>
+                <a:latin typeface="Meiryo UI"/>
+              </a:defRPr>
+            </a:pPr>
+            <a:r>
+              <a:t>映像解析AI / 音声認識</a:t>
+            </a:r>
+          </a:p>
+        </p:txBody>
+      </p:sp>
+      <p:sp>
+        <p:nvSpPr>
+          <p:cNvPr id="103" name="Rounded Rectangle 102"/>
           <p:cNvSpPr/>
           <p:nvPr/>
         </p:nvSpPr>
         <p:spPr>
           <a:xfrm>
-            <a:off x="457200" y="1016000"/>
-            <a:ext cx="11277600" cy="990600"/>
+            <a:off x="10789920" y="5001768"/>
+            <a:ext cx="960120" cy="502920"/>
           </a:xfrm>
           <a:prstGeom prst="roundRect">
-            <a:avLst>
-              <a:gd name="adj" fmla="val 8000"/>
-            </a:avLst>
-          </a:prstGeom>
-          <a:solidFill>
-            <a:srgbClr val="FDEBED"/>
-          </a:solidFill>
-          <a:ln>
-            <a:noFill/>
-          </a:ln>
-        </p:spPr>
-        <p:txBody>
-          <a:bodyPr/>
-          <a:lstStyle/>
-          <a:p>
-            <a:endParaRPr lang="ja-JP"/>
-          </a:p>
-        </p:txBody>
-      </p:sp>
-      <p:sp>
-        <p:nvSpPr>
-          <p:cNvPr id="211" name="Badge0"/>
-          <p:cNvSpPr/>
-          <p:nvPr/>
-        </p:nvSpPr>
-        <p:spPr>
-          <a:xfrm>
-            <a:off x="584200" y="1333500"/>
-            <a:ext cx="762000" cy="355600"/>
-          </a:xfrm>
-          <a:prstGeom prst="roundRect">
-            <a:avLst>
-              <a:gd name="adj" fmla="val 16667"/>
-            </a:avLst>
-          </a:prstGeom>
-          <a:solidFill>
-            <a:srgbClr val="E63946"/>
-          </a:solidFill>
-          <a:ln>
-            <a:noFill/>
-          </a:ln>
-        </p:spPr>
-        <p:txBody>
-          <a:bodyPr wrap="square" lIns="0" tIns="0" rIns="0" bIns="0" anchor="ctr"/>
-          <a:lstStyle/>
-          <a:p>
-            <a:pPr algn="ctr"/>
-            <a:r>
-              <a:rPr lang="en-US" altLang="ja-JP" sz="1200" b="1" dirty="0">
-                <a:solidFill>
-                  <a:srgbClr val="FFFFFF"/>
-                </a:solidFill>
-                <a:latin typeface="Meiryo UI"/>
-                <a:ea typeface="Meiryo UI"/>
-              </a:rPr>
-              <a:t>v1.0</a:t>
-            </a:r>
-          </a:p>
-        </p:txBody>
-      </p:sp>
-      <p:sp>
-        <p:nvSpPr>
-          <p:cNvPr id="212" name="RowTitle0"/>
-          <p:cNvSpPr/>
-          <p:nvPr/>
-        </p:nvSpPr>
-        <p:spPr>
-          <a:xfrm>
-            <a:off x="1473200" y="1117600"/>
-            <a:ext cx="4064000" cy="304800"/>
-          </a:xfrm>
-          <a:prstGeom prst="rect">
-            <a:avLst/>
-          </a:prstGeom>
-          <a:noFill/>
-          <a:ln>
-            <a:noFill/>
-          </a:ln>
-        </p:spPr>
-        <p:txBody>
-          <a:bodyPr wrap="square" lIns="0" tIns="0" rIns="0" bIns="0" anchor="t"/>
-          <a:lstStyle/>
-          <a:p>
-            <a:pPr algn="l"/>
-            <a:r>
-              <a:rPr lang="ja-JP" altLang="en-US" sz="1600" b="1" dirty="0">
-                <a:solidFill>
-                  <a:srgbClr val="0F172A"/>
-                </a:solidFill>
-                <a:latin typeface="Meiryo UI"/>
-                <a:ea typeface="Meiryo UI"/>
-              </a:rPr>
-              <a:t>得点リモコン</a:t>
-            </a:r>
-          </a:p>
-        </p:txBody>
-      </p:sp>
-      <p:sp>
-        <p:nvSpPr>
-          <p:cNvPr id="213" name="RowDesc0"/>
-          <p:cNvSpPr/>
-          <p:nvPr/>
-        </p:nvSpPr>
-        <p:spPr>
-          <a:xfrm>
-            <a:off x="1473200" y="1447800"/>
-            <a:ext cx="4064000" cy="457200"/>
-          </a:xfrm>
-          <a:prstGeom prst="rect">
-            <a:avLst/>
-          </a:prstGeom>
-          <a:noFill/>
-          <a:ln>
-            <a:noFill/>
-          </a:ln>
-        </p:spPr>
-        <p:txBody>
-          <a:bodyPr wrap="square" lIns="0" tIns="0" rIns="0" bIns="0" anchor="t"/>
-          <a:lstStyle/>
-          <a:p>
-            <a:r>
-              <a:rPr lang="ja-JP" altLang="en-US" sz="1100" dirty="0">
-                <a:solidFill>
-                  <a:srgbClr val="666680"/>
-                </a:solidFill>
-                <a:latin typeface="Meiryo UI"/>
-                <a:ea typeface="Meiryo UI"/>
-              </a:rPr>
-              <a:t>別デバイスからスコア操作</a:t>
-            </a:r>
-            <a:br/>
-            <a:r>
-              <a:rPr lang="ja-JP" altLang="en-US" sz="1100" dirty="0">
-                <a:solidFill>
-                  <a:srgbClr val="666680"/>
-                </a:solidFill>
-                <a:latin typeface="Meiryo UI"/>
-                <a:ea typeface="Meiryo UI"/>
-              </a:rPr>
-              <a:t>撮影者は撮影に集中</a:t>
-            </a:r>
-          </a:p>
-        </p:txBody>
-      </p:sp>
-      <p:sp>
-        <p:nvSpPr>
-          <p:cNvPr id="214" name="TechLabel0"/>
-          <p:cNvSpPr/>
-          <p:nvPr/>
-        </p:nvSpPr>
-        <p:spPr>
-          <a:xfrm>
-            <a:off x="5918200" y="1117600"/>
-            <a:ext cx="2921000" cy="228600"/>
-          </a:xfrm>
-          <a:prstGeom prst="rect">
-            <a:avLst/>
-          </a:prstGeom>
-          <a:noFill/>
-          <a:ln>
-            <a:noFill/>
-          </a:ln>
-        </p:spPr>
-        <p:txBody>
-          <a:bodyPr wrap="square" lIns="0" tIns="0" rIns="0" bIns="0" anchor="t"/>
-          <a:lstStyle/>
-          <a:p>
-            <a:pPr algn="l"/>
-            <a:r>
-              <a:rPr lang="ja-JP" altLang="en-US" sz="900" dirty="0">
-                <a:solidFill>
-                  <a:srgbClr val="9CA3AF"/>
-                </a:solidFill>
-                <a:latin typeface="Meiryo UI"/>
-                <a:ea typeface="Meiryo UI"/>
-              </a:rPr>
-              <a:t>技術:</a:t>
-            </a:r>
-          </a:p>
-        </p:txBody>
-      </p:sp>
-      <p:sp>
-        <p:nvSpPr>
-          <p:cNvPr id="215" name="TechVal0"/>
-          <p:cNvSpPr/>
-          <p:nvPr/>
-        </p:nvSpPr>
-        <p:spPr>
-          <a:xfrm>
-            <a:off x="5918200" y="1371600"/>
-            <a:ext cx="2921000" cy="508000"/>
-          </a:xfrm>
-          <a:prstGeom prst="rect">
-            <a:avLst/>
-          </a:prstGeom>
-          <a:noFill/>
-          <a:ln>
-            <a:noFill/>
-          </a:ln>
-        </p:spPr>
-        <p:txBody>
-          <a:bodyPr wrap="square" lIns="0" tIns="0" rIns="0" bIns="0" anchor="t"/>
-          <a:lstStyle/>
-          <a:p>
-            <a:pPr algn="l"/>
-            <a:r>
-              <a:rPr lang="ja-JP" altLang="en-US" sz="1100" dirty="0">
-                <a:solidFill>
-                  <a:srgbClr val="0F172A"/>
-                </a:solidFill>
-                <a:latin typeface="Meiryo UI"/>
-                <a:ea typeface="Meiryo UI"/>
-              </a:rPr>
-              <a:t>WebSocket / Supabase Realtime</a:t>
-            </a:r>
-          </a:p>
-        </p:txBody>
-      </p:sp>
-      <p:sp>
-        <p:nvSpPr>
-          <p:cNvPr id="216" name="CostBox0"/>
-          <p:cNvSpPr/>
-          <p:nvPr/>
-        </p:nvSpPr>
-        <p:spPr>
-          <a:xfrm>
-            <a:off x="9347200" y="1193800"/>
-            <a:ext cx="2032000" cy="635000"/>
-          </a:xfrm>
-          <a:prstGeom prst="roundRect">
-            <a:avLst>
-              <a:gd name="adj" fmla="val 10000"/>
-            </a:avLst>
+            <a:avLst/>
           </a:prstGeom>
           <a:solidFill>
             <a:srgbClr val="FFFFFF"/>
           </a:solidFill>
-          <a:ln>
-            <a:noFill/>
+          <a:ln w="19050">
+            <a:solidFill>
+              <a:srgbClr val="E0E0E8"/>
+            </a:solidFill>
           </a:ln>
         </p:spPr>
-        <p:txBody>
-          <a:bodyPr wrap="square" lIns="0" tIns="0" rIns="0" bIns="0" anchor="ctr"/>
+        <p:style>
+          <a:lnRef idx="1">
+            <a:schemeClr val="accent1"/>
+          </a:lnRef>
+          <a:fillRef idx="3">
+            <a:schemeClr val="accent1"/>
+          </a:fillRef>
+          <a:effectRef idx="2">
+            <a:schemeClr val="accent1"/>
+          </a:effectRef>
+          <a:fontRef idx="minor">
+            <a:schemeClr val="lt1"/>
+          </a:fontRef>
+        </p:style>
+        <p:txBody>
+          <a:bodyPr rtlCol="0" anchor="ctr"/>
           <a:lstStyle/>
           <a:p>
             <a:pPr algn="ctr"/>
-            <a:r>
-              <a:rPr lang="ja-JP" altLang="en-US" sz="1400" b="1" dirty="0">
+          </a:p>
+        </p:txBody>
+      </p:sp>
+      <p:sp>
+        <p:nvSpPr>
+          <p:cNvPr id="104" name="TextBox 103"/>
+          <p:cNvSpPr txBox="1"/>
+          <p:nvPr/>
+        </p:nvSpPr>
+        <p:spPr>
+          <a:xfrm>
+            <a:off x="10835640" y="5020056"/>
+            <a:ext cx="868680" cy="228600"/>
+          </a:xfrm>
+          <a:prstGeom prst="rect">
+            <a:avLst/>
+          </a:prstGeom>
+          <a:noFill/>
+        </p:spPr>
+        <p:txBody>
+          <a:bodyPr wrap="square">
+            <a:spAutoFit/>
+          </a:bodyPr>
+          <a:lstStyle/>
+          <a:p>
+            <a:pPr algn="ctr">
+              <a:defRPr sz="1000" b="1">
                 <a:solidFill>
                   <a:srgbClr val="E63946"/>
                 </a:solidFill>
                 <a:latin typeface="Meiryo UI"/>
-                <a:ea typeface="Meiryo UI"/>
-              </a:rPr>
-              <a:t>約30〜50万円</a:t>
-            </a:r>
-          </a:p>
-          <a:p>
-            <a:pPr algn="ctr"/>
-            <a:r>
-              <a:rPr lang="ja-JP" altLang="en-US" sz="1000" dirty="0">
+              </a:defRPr>
+            </a:pPr>
+            <a:r>
+              <a:t>約100〜200万円</a:t>
+            </a:r>
+          </a:p>
+        </p:txBody>
+      </p:sp>
+      <p:sp>
+        <p:nvSpPr>
+          <p:cNvPr id="105" name="TextBox 104"/>
+          <p:cNvSpPr txBox="1"/>
+          <p:nvPr/>
+        </p:nvSpPr>
+        <p:spPr>
+          <a:xfrm>
+            <a:off x="10835640" y="5276088"/>
+            <a:ext cx="868680" cy="182880"/>
+          </a:xfrm>
+          <a:prstGeom prst="rect">
+            <a:avLst/>
+          </a:prstGeom>
+          <a:noFill/>
+        </p:spPr>
+        <p:txBody>
+          <a:bodyPr wrap="square">
+            <a:spAutoFit/>
+          </a:bodyPr>
+          <a:lstStyle/>
+          <a:p>
+            <a:pPr algn="ctr">
+              <a:defRPr sz="800" b="0">
                 <a:solidFill>
                   <a:srgbClr val="666680"/>
                 </a:solidFill>
                 <a:latin typeface="Meiryo UI"/>
-                <a:ea typeface="Meiryo UI"/>
-              </a:rPr>
-              <a:t>2-3週間</a:t>
-            </a:r>
-          </a:p>
-        </p:txBody>
-      </p:sp>
-      <p:sp>
-        <p:nvSpPr>
-          <p:cNvPr id="217" name="RowBg1"/>
+              </a:defRPr>
+            </a:pPr>
+            <a:r>
+              <a:t>3-6ヶ月</a:t>
+            </a:r>
+          </a:p>
+        </p:txBody>
+      </p:sp>
+      <p:sp>
+        <p:nvSpPr>
+          <p:cNvPr id="106" name="Rounded Rectangle 105"/>
           <p:cNvSpPr/>
           <p:nvPr/>
         </p:nvSpPr>
         <p:spPr>
           <a:xfrm>
-            <a:off x="457200" y="2082800"/>
-            <a:ext cx="11277600" cy="990600"/>
+            <a:off x="7315200" y="5715000"/>
+            <a:ext cx="4572000" cy="685800"/>
           </a:xfrm>
           <a:prstGeom prst="roundRect">
-            <a:avLst>
-              <a:gd name="adj" fmla="val 8000"/>
-            </a:avLst>
-          </a:prstGeom>
-          <a:solidFill>
-            <a:srgbClr val="EBF0FF"/>
-          </a:solidFill>
-          <a:ln>
-            <a:noFill/>
-          </a:ln>
-        </p:spPr>
-        <p:txBody>
-          <a:bodyPr/>
-          <a:lstStyle/>
-          <a:p>
-            <a:endParaRPr lang="ja-JP"/>
-          </a:p>
-        </p:txBody>
-      </p:sp>
-      <p:sp>
-        <p:nvSpPr>
-          <p:cNvPr id="218" name="Badge1"/>
-          <p:cNvSpPr/>
-          <p:nvPr/>
-        </p:nvSpPr>
-        <p:spPr>
-          <a:xfrm>
-            <a:off x="584200" y="2400300"/>
-            <a:ext cx="762000" cy="355600"/>
-          </a:xfrm>
-          <a:prstGeom prst="roundRect">
-            <a:avLst>
-              <a:gd name="adj" fmla="val 16667"/>
-            </a:avLst>
-          </a:prstGeom>
-          <a:solidFill>
-            <a:srgbClr val="2563EB"/>
-          </a:solidFill>
-          <a:ln>
-            <a:noFill/>
-          </a:ln>
-        </p:spPr>
-        <p:txBody>
-          <a:bodyPr wrap="square" lIns="0" tIns="0" rIns="0" bIns="0" anchor="ctr"/>
-          <a:lstStyle/>
-          <a:p>
-            <a:pPr algn="ctr"/>
-            <a:r>
-              <a:rPr lang="en-US" altLang="ja-JP" sz="1200" b="1" dirty="0">
-                <a:solidFill>
-                  <a:srgbClr val="FFFFFF"/>
-                </a:solidFill>
-                <a:latin typeface="Meiryo UI"/>
-                <a:ea typeface="Meiryo UI"/>
-              </a:rPr>
-              <a:t>v1.5</a:t>
-            </a:r>
-          </a:p>
-        </p:txBody>
-      </p:sp>
-      <p:sp>
-        <p:nvSpPr>
-          <p:cNvPr id="219" name="RowTitle1"/>
-          <p:cNvSpPr/>
-          <p:nvPr/>
-        </p:nvSpPr>
-        <p:spPr>
-          <a:xfrm>
-            <a:off x="1473200" y="2184400"/>
-            <a:ext cx="4064000" cy="304800"/>
-          </a:xfrm>
-          <a:prstGeom prst="rect">
-            <a:avLst/>
-          </a:prstGeom>
-          <a:noFill/>
-          <a:ln>
-            <a:noFill/>
-          </a:ln>
-        </p:spPr>
-        <p:txBody>
-          <a:bodyPr wrap="square" lIns="0" tIns="0" rIns="0" bIns="0" anchor="t"/>
-          <a:lstStyle/>
-          <a:p>
-            <a:pPr algn="l"/>
-            <a:r>
-              <a:rPr lang="ja-JP" altLang="en-US" sz="1600" b="1" dirty="0">
-                <a:solidFill>
-                  <a:srgbClr val="0F172A"/>
-                </a:solidFill>
-                <a:latin typeface="Meiryo UI"/>
-                <a:ea typeface="Meiryo UI"/>
-              </a:rPr>
-              <a:t>マルチカメラ手動切替</a:t>
-            </a:r>
-          </a:p>
-        </p:txBody>
-      </p:sp>
-      <p:sp>
-        <p:nvSpPr>
-          <p:cNvPr id="220" name="RowDesc1"/>
-          <p:cNvSpPr/>
-          <p:nvPr/>
-        </p:nvSpPr>
-        <p:spPr>
-          <a:xfrm>
-            <a:off x="1473200" y="2514600"/>
-            <a:ext cx="4064000" cy="457200"/>
-          </a:xfrm>
-          <a:prstGeom prst="rect">
-            <a:avLst/>
-          </a:prstGeom>
-          <a:noFill/>
-          <a:ln>
-            <a:noFill/>
-          </a:ln>
-        </p:spPr>
-        <p:txBody>
-          <a:bodyPr wrap="square" lIns="0" tIns="0" rIns="0" bIns="0" anchor="t"/>
-          <a:lstStyle/>
-          <a:p>
-            <a:r>
-              <a:rPr lang="ja-JP" altLang="en-US" sz="1100" dirty="0">
-                <a:solidFill>
-                  <a:srgbClr val="666680"/>
-                </a:solidFill>
-                <a:latin typeface="Meiryo UI"/>
-                <a:ea typeface="Meiryo UI"/>
-              </a:rPr>
-              <a:t>複数スマホの映像を</a:t>
-            </a:r>
-            <a:br/>
-            <a:r>
-              <a:rPr lang="ja-JP" altLang="en-US" sz="1100" dirty="0">
-                <a:solidFill>
-                  <a:srgbClr val="666680"/>
-                </a:solidFill>
-                <a:latin typeface="Meiryo UI"/>
-                <a:ea typeface="Meiryo UI"/>
-              </a:rPr>
-              <a:t>手動で切り替え表示</a:t>
-            </a:r>
-          </a:p>
-        </p:txBody>
-      </p:sp>
-      <p:sp>
-        <p:nvSpPr>
-          <p:cNvPr id="221" name="TechLabel1"/>
-          <p:cNvSpPr/>
-          <p:nvPr/>
-        </p:nvSpPr>
-        <p:spPr>
-          <a:xfrm>
-            <a:off x="5918200" y="2184400"/>
-            <a:ext cx="2921000" cy="228600"/>
-          </a:xfrm>
-          <a:prstGeom prst="rect">
-            <a:avLst/>
-          </a:prstGeom>
-          <a:noFill/>
-          <a:ln>
-            <a:noFill/>
-          </a:ln>
-        </p:spPr>
-        <p:txBody>
-          <a:bodyPr wrap="square" lIns="0" tIns="0" rIns="0" bIns="0" anchor="t"/>
-          <a:lstStyle/>
-          <a:p>
-            <a:pPr algn="l"/>
-            <a:r>
-              <a:rPr lang="ja-JP" altLang="en-US" sz="900" dirty="0">
-                <a:solidFill>
-                  <a:srgbClr val="9CA3AF"/>
-                </a:solidFill>
-                <a:latin typeface="Meiryo UI"/>
-                <a:ea typeface="Meiryo UI"/>
-              </a:rPr>
-              <a:t>技術:</a:t>
-            </a:r>
-          </a:p>
-        </p:txBody>
-      </p:sp>
-      <p:sp>
-        <p:nvSpPr>
-          <p:cNvPr id="222" name="TechVal1"/>
-          <p:cNvSpPr/>
-          <p:nvPr/>
-        </p:nvSpPr>
-        <p:spPr>
-          <a:xfrm>
-            <a:off x="5918200" y="2438400"/>
-            <a:ext cx="2921000" cy="508000"/>
-          </a:xfrm>
-          <a:prstGeom prst="rect">
-            <a:avLst/>
-          </a:prstGeom>
-          <a:noFill/>
-          <a:ln>
-            <a:noFill/>
-          </a:ln>
-        </p:spPr>
-        <p:txBody>
-          <a:bodyPr wrap="square" lIns="0" tIns="0" rIns="0" bIns="0" anchor="t"/>
-          <a:lstStyle/>
-          <a:p>
-            <a:pPr algn="l"/>
-            <a:r>
-              <a:rPr lang="ja-JP" altLang="en-US" sz="1100" dirty="0">
-                <a:solidFill>
-                  <a:srgbClr val="0F172A"/>
-                </a:solidFill>
-                <a:latin typeface="Meiryo UI"/>
-                <a:ea typeface="Meiryo UI"/>
-              </a:rPr>
-              <a:t>LiveKit マルチトラック</a:t>
-            </a:r>
-          </a:p>
-        </p:txBody>
-      </p:sp>
-      <p:sp>
-        <p:nvSpPr>
-          <p:cNvPr id="223" name="CostBox1"/>
-          <p:cNvSpPr/>
-          <p:nvPr/>
-        </p:nvSpPr>
-        <p:spPr>
-          <a:xfrm>
-            <a:off x="9347200" y="2260600"/>
-            <a:ext cx="2032000" cy="635000"/>
-          </a:xfrm>
-          <a:prstGeom prst="roundRect">
-            <a:avLst>
-              <a:gd name="adj" fmla="val 10000"/>
-            </a:avLst>
-          </a:prstGeom>
-          <a:solidFill>
-            <a:srgbClr val="FFFFFF"/>
-          </a:solidFill>
-          <a:ln>
-            <a:noFill/>
-          </a:ln>
-        </p:spPr>
-        <p:txBody>
-          <a:bodyPr wrap="square" lIns="0" tIns="0" rIns="0" bIns="0" anchor="ctr"/>
-          <a:lstStyle/>
-          <a:p>
-            <a:pPr algn="ctr"/>
-            <a:r>
-              <a:rPr lang="ja-JP" altLang="en-US" sz="1400" b="1" dirty="0">
-                <a:solidFill>
-                  <a:srgbClr val="E63946"/>
-                </a:solidFill>
-                <a:latin typeface="Meiryo UI"/>
-                <a:ea typeface="Meiryo UI"/>
-              </a:rPr>
-              <a:t>約80〜120万円</a:t>
-            </a:r>
-          </a:p>
-          <a:p>
-            <a:pPr algn="ctr"/>
-            <a:r>
-              <a:rPr lang="ja-JP" altLang="en-US" sz="1000" dirty="0">
-                <a:solidFill>
-                  <a:srgbClr val="666680"/>
-                </a:solidFill>
-                <a:latin typeface="Meiryo UI"/>
-                <a:ea typeface="Meiryo UI"/>
-              </a:rPr>
-              <a:t>1-2ヶ月</a:t>
-            </a:r>
-          </a:p>
-        </p:txBody>
-      </p:sp>
-      <p:sp>
-        <p:nvSpPr>
-          <p:cNvPr id="224" name="RowBg2"/>
-          <p:cNvSpPr/>
-          <p:nvPr/>
-        </p:nvSpPr>
-        <p:spPr>
-          <a:xfrm>
-            <a:off x="457200" y="3149600"/>
-            <a:ext cx="11277600" cy="990600"/>
-          </a:xfrm>
-          <a:prstGeom prst="roundRect">
-            <a:avLst>
-              <a:gd name="adj" fmla="val 8000"/>
-            </a:avLst>
-          </a:prstGeom>
-          <a:solidFill>
-            <a:srgbClr val="FFF3E0"/>
-          </a:solidFill>
-          <a:ln>
-            <a:noFill/>
-          </a:ln>
-        </p:spPr>
-        <p:txBody>
-          <a:bodyPr/>
-          <a:lstStyle/>
-          <a:p>
-            <a:endParaRPr lang="ja-JP"/>
-          </a:p>
-        </p:txBody>
-      </p:sp>
-      <p:sp>
-        <p:nvSpPr>
-          <p:cNvPr id="225" name="Badge2"/>
-          <p:cNvSpPr/>
-          <p:nvPr/>
-        </p:nvSpPr>
-        <p:spPr>
-          <a:xfrm>
-            <a:off x="584200" y="3467100"/>
-            <a:ext cx="762000" cy="355600"/>
-          </a:xfrm>
-          <a:prstGeom prst="roundRect">
-            <a:avLst>
-              <a:gd name="adj" fmla="val 16667"/>
-            </a:avLst>
-          </a:prstGeom>
-          <a:solidFill>
-            <a:srgbClr val="EA880B"/>
-          </a:solidFill>
-          <a:ln>
-            <a:noFill/>
-          </a:ln>
-        </p:spPr>
-        <p:txBody>
-          <a:bodyPr wrap="square" lIns="0" tIns="0" rIns="0" bIns="0" anchor="ctr"/>
-          <a:lstStyle/>
-          <a:p>
-            <a:pPr algn="ctr"/>
-            <a:r>
-              <a:rPr lang="en-US" altLang="ja-JP" sz="1200" b="1" dirty="0">
-                <a:solidFill>
-                  <a:srgbClr val="FFFFFF"/>
-                </a:solidFill>
-                <a:latin typeface="Meiryo UI"/>
-                <a:ea typeface="Meiryo UI"/>
-              </a:rPr>
-              <a:t>v2.0</a:t>
-            </a:r>
-          </a:p>
-        </p:txBody>
-      </p:sp>
-      <p:sp>
-        <p:nvSpPr>
-          <p:cNvPr id="226" name="RowTitle2"/>
-          <p:cNvSpPr/>
-          <p:nvPr/>
-        </p:nvSpPr>
-        <p:spPr>
-          <a:xfrm>
-            <a:off x="1473200" y="3251200"/>
-            <a:ext cx="4064000" cy="304800"/>
-          </a:xfrm>
-          <a:prstGeom prst="rect">
-            <a:avLst/>
-          </a:prstGeom>
-          <a:noFill/>
-          <a:ln>
-            <a:noFill/>
-          </a:ln>
-        </p:spPr>
-        <p:txBody>
-          <a:bodyPr wrap="square" lIns="0" tIns="0" rIns="0" bIns="0" anchor="t"/>
-          <a:lstStyle/>
-          <a:p>
-            <a:pPr algn="l"/>
-            <a:r>
-              <a:rPr lang="ja-JP" altLang="en-US" sz="1600" b="1" dirty="0">
-                <a:solidFill>
-                  <a:srgbClr val="0F172A"/>
-                </a:solidFill>
-                <a:latin typeface="Meiryo UI"/>
-                <a:ea typeface="Meiryo UI"/>
-              </a:rPr>
-              <a:t>AI自動アングル切替</a:t>
-            </a:r>
-          </a:p>
-        </p:txBody>
-      </p:sp>
-      <p:sp>
-        <p:nvSpPr>
-          <p:cNvPr id="227" name="RowDesc2"/>
-          <p:cNvSpPr/>
-          <p:nvPr/>
-        </p:nvSpPr>
-        <p:spPr>
-          <a:xfrm>
-            <a:off x="1473200" y="3581400"/>
-            <a:ext cx="4064000" cy="457200"/>
-          </a:xfrm>
-          <a:prstGeom prst="rect">
-            <a:avLst/>
-          </a:prstGeom>
-          <a:noFill/>
-          <a:ln>
-            <a:noFill/>
-          </a:ln>
-        </p:spPr>
-        <p:txBody>
-          <a:bodyPr wrap="square" lIns="0" tIns="0" rIns="0" bIns="0" anchor="t"/>
-          <a:lstStyle/>
-          <a:p>
-            <a:r>
-              <a:rPr lang="ja-JP" altLang="en-US" sz="1100" dirty="0">
-                <a:solidFill>
-                  <a:srgbClr val="666680"/>
-                </a:solidFill>
-                <a:latin typeface="Meiryo UI"/>
-                <a:ea typeface="Meiryo UI"/>
-              </a:rPr>
-              <a:t>AIがベストアングルを</a:t>
-            </a:r>
-            <a:br/>
-            <a:r>
-              <a:rPr lang="ja-JP" altLang="en-US" sz="1100" dirty="0">
-                <a:solidFill>
-                  <a:srgbClr val="666680"/>
-                </a:solidFill>
-                <a:latin typeface="Meiryo UI"/>
-                <a:ea typeface="Meiryo UI"/>
-              </a:rPr>
-              <a:t>判断して自動切替</a:t>
-            </a:r>
-          </a:p>
-        </p:txBody>
-      </p:sp>
-      <p:sp>
-        <p:nvSpPr>
-          <p:cNvPr id="228" name="TechLabel2"/>
-          <p:cNvSpPr/>
-          <p:nvPr/>
-        </p:nvSpPr>
-        <p:spPr>
-          <a:xfrm>
-            <a:off x="5918200" y="3251200"/>
-            <a:ext cx="2921000" cy="228600"/>
-          </a:xfrm>
-          <a:prstGeom prst="rect">
-            <a:avLst/>
-          </a:prstGeom>
-          <a:noFill/>
-          <a:ln>
-            <a:noFill/>
-          </a:ln>
-        </p:spPr>
-        <p:txBody>
-          <a:bodyPr wrap="square" lIns="0" tIns="0" rIns="0" bIns="0" anchor="t"/>
-          <a:lstStyle/>
-          <a:p>
-            <a:pPr algn="l"/>
-            <a:r>
-              <a:rPr lang="ja-JP" altLang="en-US" sz="900" dirty="0">
-                <a:solidFill>
-                  <a:srgbClr val="9CA3AF"/>
-                </a:solidFill>
-                <a:latin typeface="Meiryo UI"/>
-                <a:ea typeface="Meiryo UI"/>
-              </a:rPr>
-              <a:t>技術:</a:t>
-            </a:r>
-          </a:p>
-        </p:txBody>
-      </p:sp>
-      <p:sp>
-        <p:nvSpPr>
-          <p:cNvPr id="229" name="TechVal2"/>
-          <p:cNvSpPr/>
-          <p:nvPr/>
-        </p:nvSpPr>
-        <p:spPr>
-          <a:xfrm>
-            <a:off x="5918200" y="3505200"/>
-            <a:ext cx="2921000" cy="508000"/>
-          </a:xfrm>
-          <a:prstGeom prst="rect">
-            <a:avLst/>
-          </a:prstGeom>
-          <a:noFill/>
-          <a:ln>
-            <a:noFill/>
-          </a:ln>
-        </p:spPr>
-        <p:txBody>
-          <a:bodyPr wrap="square" lIns="0" tIns="0" rIns="0" bIns="0" anchor="t"/>
-          <a:lstStyle/>
-          <a:p>
-            <a:pPr algn="l"/>
-            <a:r>
-              <a:rPr lang="ja-JP" altLang="en-US" sz="1100" dirty="0">
-                <a:solidFill>
-                  <a:srgbClr val="0F172A"/>
-                </a:solidFill>
-                <a:latin typeface="Meiryo UI"/>
-                <a:ea typeface="Meiryo UI"/>
-              </a:rPr>
-              <a:t>AI推論サーバー（GPU）</a:t>
-            </a:r>
-          </a:p>
-        </p:txBody>
-      </p:sp>
-      <p:sp>
-        <p:nvSpPr>
-          <p:cNvPr id="230" name="CostBox2"/>
-          <p:cNvSpPr/>
-          <p:nvPr/>
-        </p:nvSpPr>
-        <p:spPr>
-          <a:xfrm>
-            <a:off x="9347200" y="3327400"/>
-            <a:ext cx="2032000" cy="635000"/>
-          </a:xfrm>
-          <a:prstGeom prst="roundRect">
-            <a:avLst>
-              <a:gd name="adj" fmla="val 10000"/>
-            </a:avLst>
-          </a:prstGeom>
-          <a:solidFill>
-            <a:srgbClr val="FFFFFF"/>
-          </a:solidFill>
-          <a:ln>
-            <a:noFill/>
-          </a:ln>
-        </p:spPr>
-        <p:txBody>
-          <a:bodyPr wrap="square" lIns="0" tIns="0" rIns="0" bIns="0" anchor="ctr"/>
-          <a:lstStyle/>
-          <a:p>
-            <a:pPr algn="ctr"/>
-            <a:r>
-              <a:rPr lang="ja-JP" altLang="en-US" sz="1400" b="1" dirty="0">
-                <a:solidFill>
-                  <a:srgbClr val="E63946"/>
-                </a:solidFill>
-                <a:latin typeface="Meiryo UI"/>
-                <a:ea typeface="Meiryo UI"/>
-              </a:rPr>
-              <a:t>約200〜350万円</a:t>
-            </a:r>
-          </a:p>
-          <a:p>
-            <a:pPr algn="ctr"/>
-            <a:r>
-              <a:rPr lang="ja-JP" altLang="en-US" sz="1000" dirty="0">
-                <a:solidFill>
-                  <a:srgbClr val="666680"/>
-                </a:solidFill>
-                <a:latin typeface="Meiryo UI"/>
-                <a:ea typeface="Meiryo UI"/>
-              </a:rPr>
-              <a:t>3-6ヶ月</a:t>
-            </a:r>
-          </a:p>
-        </p:txBody>
-      </p:sp>
-      <p:sp>
-        <p:nvSpPr>
-          <p:cNvPr id="231" name="RowBg3"/>
-          <p:cNvSpPr/>
-          <p:nvPr/>
-        </p:nvSpPr>
-        <p:spPr>
-          <a:xfrm>
-            <a:off x="457200" y="4216400"/>
-            <a:ext cx="11277600" cy="990600"/>
-          </a:xfrm>
-          <a:prstGeom prst="roundRect">
-            <a:avLst>
-              <a:gd name="adj" fmla="val 8000"/>
-            </a:avLst>
-          </a:prstGeom>
-          <a:solidFill>
-            <a:srgbClr val="E8F5EB"/>
-          </a:solidFill>
-          <a:ln>
-            <a:noFill/>
-          </a:ln>
-        </p:spPr>
-        <p:txBody>
-          <a:bodyPr/>
-          <a:lstStyle/>
-          <a:p>
-            <a:endParaRPr lang="ja-JP"/>
-          </a:p>
-        </p:txBody>
-      </p:sp>
-      <p:sp>
-        <p:nvSpPr>
-          <p:cNvPr id="232" name="Badge3"/>
-          <p:cNvSpPr/>
-          <p:nvPr/>
-        </p:nvSpPr>
-        <p:spPr>
-          <a:xfrm>
-            <a:off x="584200" y="4533900"/>
-            <a:ext cx="762000" cy="355600"/>
-          </a:xfrm>
-          <a:prstGeom prst="roundRect">
-            <a:avLst>
-              <a:gd name="adj" fmla="val 16667"/>
-            </a:avLst>
-          </a:prstGeom>
-          <a:solidFill>
-            <a:srgbClr val="16A34A"/>
-          </a:solidFill>
-          <a:ln>
-            <a:noFill/>
-          </a:ln>
-        </p:spPr>
-        <p:txBody>
-          <a:bodyPr wrap="square" lIns="0" tIns="0" rIns="0" bIns="0" anchor="ctr"/>
-          <a:lstStyle/>
-          <a:p>
-            <a:pPr algn="ctr"/>
-            <a:r>
-              <a:rPr lang="en-US" altLang="ja-JP" sz="1200" b="1" dirty="0">
-                <a:solidFill>
-                  <a:srgbClr val="FFFFFF"/>
-                </a:solidFill>
-                <a:latin typeface="Meiryo UI"/>
-                <a:ea typeface="Meiryo UI"/>
-              </a:rPr>
-              <a:t>v2.5</a:t>
-            </a:r>
-          </a:p>
-        </p:txBody>
-      </p:sp>
-      <p:sp>
-        <p:nvSpPr>
-          <p:cNvPr id="233" name="RowTitle3"/>
-          <p:cNvSpPr/>
-          <p:nvPr/>
-        </p:nvSpPr>
-        <p:spPr>
-          <a:xfrm>
-            <a:off x="1473200" y="4318000"/>
-            <a:ext cx="4064000" cy="304800"/>
-          </a:xfrm>
-          <a:prstGeom prst="rect">
-            <a:avLst/>
-          </a:prstGeom>
-          <a:noFill/>
-          <a:ln>
-            <a:noFill/>
-          </a:ln>
-        </p:spPr>
-        <p:txBody>
-          <a:bodyPr wrap="square" lIns="0" tIns="0" rIns="0" bIns="0" anchor="t"/>
-          <a:lstStyle/>
-          <a:p>
-            <a:pPr algn="l"/>
-            <a:r>
-              <a:rPr lang="ja-JP" altLang="en-US" sz="1600" b="1" dirty="0">
-                <a:solidFill>
-                  <a:srgbClr val="0F172A"/>
-                </a:solidFill>
-                <a:latin typeface="Meiryo UI"/>
-                <a:ea typeface="Meiryo UI"/>
-              </a:rPr>
-              <a:t>AIハイライト自動生成</a:t>
-            </a:r>
-          </a:p>
-        </p:txBody>
-      </p:sp>
-      <p:sp>
-        <p:nvSpPr>
-          <p:cNvPr id="234" name="RowDesc3"/>
-          <p:cNvSpPr/>
-          <p:nvPr/>
-        </p:nvSpPr>
-        <p:spPr>
-          <a:xfrm>
-            <a:off x="1473200" y="4648200"/>
-            <a:ext cx="4064000" cy="457200"/>
-          </a:xfrm>
-          <a:prstGeom prst="rect">
-            <a:avLst/>
-          </a:prstGeom>
-          <a:noFill/>
-          <a:ln>
-            <a:noFill/>
-          </a:ln>
-        </p:spPr>
-        <p:txBody>
-          <a:bodyPr wrap="square" lIns="0" tIns="0" rIns="0" bIns="0" anchor="t"/>
-          <a:lstStyle/>
-          <a:p>
-            <a:r>
-              <a:rPr lang="ja-JP" altLang="en-US" sz="1100" dirty="0">
-                <a:solidFill>
-                  <a:srgbClr val="666680"/>
-                </a:solidFill>
-                <a:latin typeface="Meiryo UI"/>
-                <a:ea typeface="Meiryo UI"/>
-              </a:rPr>
-              <a:t>試合のハイライトを</a:t>
-            </a:r>
-            <a:br/>
-            <a:r>
-              <a:rPr lang="ja-JP" altLang="en-US" sz="1100" dirty="0">
-                <a:solidFill>
-                  <a:srgbClr val="666680"/>
-                </a:solidFill>
-                <a:latin typeface="Meiryo UI"/>
-                <a:ea typeface="Meiryo UI"/>
-              </a:rPr>
-              <a:t>AIが自動編集・生成</a:t>
-            </a:r>
-          </a:p>
-        </p:txBody>
-      </p:sp>
-      <p:sp>
-        <p:nvSpPr>
-          <p:cNvPr id="235" name="TechLabel3"/>
-          <p:cNvSpPr/>
-          <p:nvPr/>
-        </p:nvSpPr>
-        <p:spPr>
-          <a:xfrm>
-            <a:off x="5918200" y="4318000"/>
-            <a:ext cx="2921000" cy="228600"/>
-          </a:xfrm>
-          <a:prstGeom prst="rect">
-            <a:avLst/>
-          </a:prstGeom>
-          <a:noFill/>
-          <a:ln>
-            <a:noFill/>
-          </a:ln>
-        </p:spPr>
-        <p:txBody>
-          <a:bodyPr wrap="square" lIns="0" tIns="0" rIns="0" bIns="0" anchor="t"/>
-          <a:lstStyle/>
-          <a:p>
-            <a:pPr algn="l"/>
-            <a:r>
-              <a:rPr lang="ja-JP" altLang="en-US" sz="900" dirty="0">
-                <a:solidFill>
-                  <a:srgbClr val="9CA3AF"/>
-                </a:solidFill>
-                <a:latin typeface="Meiryo UI"/>
-                <a:ea typeface="Meiryo UI"/>
-              </a:rPr>
-              <a:t>技術:</a:t>
-            </a:r>
-          </a:p>
-        </p:txBody>
-      </p:sp>
-      <p:sp>
-        <p:nvSpPr>
-          <p:cNvPr id="236" name="TechVal3"/>
-          <p:cNvSpPr/>
-          <p:nvPr/>
-        </p:nvSpPr>
-        <p:spPr>
-          <a:xfrm>
-            <a:off x="5918200" y="4572000"/>
-            <a:ext cx="2921000" cy="508000"/>
-          </a:xfrm>
-          <a:prstGeom prst="rect">
-            <a:avLst/>
-          </a:prstGeom>
-          <a:noFill/>
-          <a:ln>
-            <a:noFill/>
-          </a:ln>
-        </p:spPr>
-        <p:txBody>
-          <a:bodyPr wrap="square" lIns="0" tIns="0" rIns="0" bIns="0" anchor="t"/>
-          <a:lstStyle/>
-          <a:p>
-            <a:pPr algn="l"/>
-            <a:r>
-              <a:rPr lang="ja-JP" altLang="en-US" sz="1100" dirty="0">
-                <a:solidFill>
-                  <a:srgbClr val="0F172A"/>
-                </a:solidFill>
-                <a:latin typeface="Meiryo UI"/>
-                <a:ea typeface="Meiryo UI"/>
-              </a:rPr>
-              <a:t>動画解析AI + FFmpeg</a:t>
-            </a:r>
-          </a:p>
-        </p:txBody>
-      </p:sp>
-      <p:sp>
-        <p:nvSpPr>
-          <p:cNvPr id="237" name="CostBox3"/>
-          <p:cNvSpPr/>
-          <p:nvPr/>
-        </p:nvSpPr>
-        <p:spPr>
-          <a:xfrm>
-            <a:off x="9347200" y="4394200"/>
-            <a:ext cx="2032000" cy="635000"/>
-          </a:xfrm>
-          <a:prstGeom prst="roundRect">
-            <a:avLst>
-              <a:gd name="adj" fmla="val 10000"/>
-            </a:avLst>
-          </a:prstGeom>
-          <a:solidFill>
-            <a:srgbClr val="FFFFFF"/>
-          </a:solidFill>
-          <a:ln>
-            <a:noFill/>
-          </a:ln>
-        </p:spPr>
-        <p:txBody>
-          <a:bodyPr wrap="square" lIns="0" tIns="0" rIns="0" bIns="0" anchor="ctr"/>
-          <a:lstStyle/>
-          <a:p>
-            <a:pPr algn="ctr"/>
-            <a:r>
-              <a:rPr lang="ja-JP" altLang="en-US" sz="1400" b="1" dirty="0">
-                <a:solidFill>
-                  <a:srgbClr val="E63946"/>
-                </a:solidFill>
-                <a:latin typeface="Meiryo UI"/>
-                <a:ea typeface="Meiryo UI"/>
-              </a:rPr>
-              <a:t>約150〜250万円</a:t>
-            </a:r>
-          </a:p>
-          <a:p>
-            <a:pPr algn="ctr"/>
-            <a:r>
-              <a:rPr lang="ja-JP" altLang="en-US" sz="1000" dirty="0">
-                <a:solidFill>
-                  <a:srgbClr val="666680"/>
-                </a:solidFill>
-                <a:latin typeface="Meiryo UI"/>
-                <a:ea typeface="Meiryo UI"/>
-              </a:rPr>
-              <a:t>2-4ヶ月</a:t>
-            </a:r>
-          </a:p>
-        </p:txBody>
-      </p:sp>
-      <p:sp>
-        <p:nvSpPr>
-          <p:cNvPr id="238" name="RowBg4"/>
-          <p:cNvSpPr/>
-          <p:nvPr/>
-        </p:nvSpPr>
-        <p:spPr>
-          <a:xfrm>
-            <a:off x="457200" y="5283200"/>
-            <a:ext cx="11277600" cy="990600"/>
-          </a:xfrm>
-          <a:prstGeom prst="roundRect">
-            <a:avLst>
-              <a:gd name="adj" fmla="val 8000"/>
-            </a:avLst>
+            <a:avLst/>
           </a:prstGeom>
           <a:solidFill>
             <a:srgbClr val="F3EEFF"/>
           </a:solidFill>
-          <a:ln>
-            <a:noFill/>
+          <a:ln w="19050">
+            <a:solidFill>
+              <a:srgbClr val="7C3AED"/>
+            </a:solidFill>
           </a:ln>
         </p:spPr>
-        <p:txBody>
-          <a:bodyPr/>
-          <a:lstStyle/>
-          <a:p>
-            <a:endParaRPr lang="ja-JP"/>
-          </a:p>
-        </p:txBody>
-      </p:sp>
-      <p:sp>
-        <p:nvSpPr>
-          <p:cNvPr id="239" name="Badge4"/>
+        <p:style>
+          <a:lnRef idx="1">
+            <a:schemeClr val="accent1"/>
+          </a:lnRef>
+          <a:fillRef idx="3">
+            <a:schemeClr val="accent1"/>
+          </a:fillRef>
+          <a:effectRef idx="2">
+            <a:schemeClr val="accent1"/>
+          </a:effectRef>
+          <a:fontRef idx="minor">
+            <a:schemeClr val="lt1"/>
+          </a:fontRef>
+        </p:style>
+        <p:txBody>
+          <a:bodyPr rtlCol="0" anchor="ctr"/>
+          <a:lstStyle/>
+          <a:p>
+            <a:pPr algn="ctr"/>
+          </a:p>
+        </p:txBody>
+      </p:sp>
+      <p:sp>
+        <p:nvSpPr>
+          <p:cNvPr id="107" name="Rounded Rectangle 106"/>
           <p:cNvSpPr/>
           <p:nvPr/>
         </p:nvSpPr>
         <p:spPr>
           <a:xfrm>
-            <a:off x="584200" y="5600700"/>
-            <a:ext cx="762000" cy="355600"/>
+            <a:off x="7406640" y="5806440"/>
+            <a:ext cx="502920" cy="274320"/>
           </a:xfrm>
           <a:prstGeom prst="roundRect">
-            <a:avLst>
-              <a:gd name="adj" fmla="val 16667"/>
-            </a:avLst>
+            <a:avLst/>
           </a:prstGeom>
           <a:solidFill>
             <a:srgbClr val="7C3AED"/>
@@ -6662,231 +7304,324 @@
             <a:noFill/>
           </a:ln>
         </p:spPr>
-        <p:txBody>
-          <a:bodyPr wrap="square" lIns="0" tIns="0" rIns="0" bIns="0" anchor="ctr"/>
+        <p:style>
+          <a:lnRef idx="1">
+            <a:schemeClr val="accent1"/>
+          </a:lnRef>
+          <a:fillRef idx="3">
+            <a:schemeClr val="accent1"/>
+          </a:fillRef>
+          <a:effectRef idx="2">
+            <a:schemeClr val="accent1"/>
+          </a:effectRef>
+          <a:fontRef idx="minor">
+            <a:schemeClr val="lt1"/>
+          </a:fontRef>
+        </p:style>
+        <p:txBody>
+          <a:bodyPr rtlCol="0" anchor="ctr"/>
           <a:lstStyle/>
           <a:p>
             <a:pPr algn="ctr"/>
-            <a:r>
-              <a:rPr lang="en-US" altLang="ja-JP" sz="1200" b="1" dirty="0">
+          </a:p>
+        </p:txBody>
+      </p:sp>
+      <p:sp>
+        <p:nvSpPr>
+          <p:cNvPr id="108" name="TextBox 107"/>
+          <p:cNvSpPr txBox="1"/>
+          <p:nvPr/>
+        </p:nvSpPr>
+        <p:spPr>
+          <a:xfrm>
+            <a:off x="7406640" y="5806440"/>
+            <a:ext cx="502920" cy="274320"/>
+          </a:xfrm>
+          <a:prstGeom prst="rect">
+            <a:avLst/>
+          </a:prstGeom>
+          <a:noFill/>
+        </p:spPr>
+        <p:txBody>
+          <a:bodyPr wrap="square">
+            <a:spAutoFit/>
+          </a:bodyPr>
+          <a:lstStyle/>
+          <a:p>
+            <a:pPr algn="ctr">
+              <a:defRPr sz="1000" b="1">
                 <a:solidFill>
                   <a:srgbClr val="FFFFFF"/>
                 </a:solidFill>
                 <a:latin typeface="Meiryo UI"/>
-                <a:ea typeface="Meiryo UI"/>
-              </a:rPr>
-              <a:t>v3.0</a:t>
-            </a:r>
-          </a:p>
-        </p:txBody>
-      </p:sp>
-      <p:sp>
-        <p:nvSpPr>
-          <p:cNvPr id="240" name="RowTitle4"/>
+              </a:defRPr>
+            </a:pPr>
+            <a:r>
+              <a:t>v3.5</a:t>
+            </a:r>
+          </a:p>
+        </p:txBody>
+      </p:sp>
+      <p:sp>
+        <p:nvSpPr>
+          <p:cNvPr id="109" name="TextBox 108"/>
+          <p:cNvSpPr txBox="1"/>
+          <p:nvPr/>
+        </p:nvSpPr>
+        <p:spPr>
+          <a:xfrm>
+            <a:off x="8001000" y="5788152"/>
+            <a:ext cx="1371600" cy="228600"/>
+          </a:xfrm>
+          <a:prstGeom prst="rect">
+            <a:avLst/>
+          </a:prstGeom>
+          <a:noFill/>
+        </p:spPr>
+        <p:txBody>
+          <a:bodyPr wrap="square">
+            <a:spAutoFit/>
+          </a:bodyPr>
+          <a:lstStyle/>
+          <a:p>
+            <a:pPr algn="l">
+              <a:defRPr sz="1200" b="1">
+                <a:solidFill>
+                  <a:srgbClr val="0F172A"/>
+                </a:solidFill>
+                <a:latin typeface="Meiryo UI"/>
+              </a:defRPr>
+            </a:pPr>
+            <a:r>
+              <a:t>SNS自動投稿</a:t>
+            </a:r>
+          </a:p>
+        </p:txBody>
+      </p:sp>
+      <p:sp>
+        <p:nvSpPr>
+          <p:cNvPr id="110" name="TextBox 109"/>
+          <p:cNvSpPr txBox="1"/>
+          <p:nvPr/>
+        </p:nvSpPr>
+        <p:spPr>
+          <a:xfrm>
+            <a:off x="8001000" y="6035040"/>
+            <a:ext cx="1371600" cy="457200"/>
+          </a:xfrm>
+          <a:prstGeom prst="rect">
+            <a:avLst/>
+          </a:prstGeom>
+          <a:noFill/>
+        </p:spPr>
+        <p:txBody>
+          <a:bodyPr wrap="square">
+            <a:spAutoFit/>
+          </a:bodyPr>
+          <a:lstStyle/>
+          <a:p>
+            <a:pPr algn="l">
+              <a:defRPr sz="800" b="0">
+                <a:solidFill>
+                  <a:srgbClr val="666680"/>
+                </a:solidFill>
+                <a:latin typeface="Meiryo UI"/>
+              </a:defRPr>
+            </a:pPr>
+            <a:r>
+              <a:t>ハイライトをInstagram</a:t>
+            </a:r>
+            <a:br/>
+            <a:r>
+              <a:t>TikTokに自動投稿</a:t>
+            </a:r>
+          </a:p>
+        </p:txBody>
+      </p:sp>
+      <p:sp>
+        <p:nvSpPr>
+          <p:cNvPr id="111" name="TextBox 110"/>
+          <p:cNvSpPr txBox="1"/>
+          <p:nvPr/>
+        </p:nvSpPr>
+        <p:spPr>
+          <a:xfrm>
+            <a:off x="9509760" y="5788152"/>
+            <a:ext cx="1188720" cy="182880"/>
+          </a:xfrm>
+          <a:prstGeom prst="rect">
+            <a:avLst/>
+          </a:prstGeom>
+          <a:noFill/>
+        </p:spPr>
+        <p:txBody>
+          <a:bodyPr wrap="square">
+            <a:spAutoFit/>
+          </a:bodyPr>
+          <a:lstStyle/>
+          <a:p>
+            <a:pPr algn="l">
+              <a:defRPr sz="700" b="0">
+                <a:solidFill>
+                  <a:srgbClr val="9CA3AF"/>
+                </a:solidFill>
+                <a:latin typeface="Meiryo UI"/>
+              </a:defRPr>
+            </a:pPr>
+            <a:r>
+              <a:t>技術:</a:t>
+            </a:r>
+          </a:p>
+        </p:txBody>
+      </p:sp>
+      <p:sp>
+        <p:nvSpPr>
+          <p:cNvPr id="112" name="TextBox 111"/>
+          <p:cNvSpPr txBox="1"/>
+          <p:nvPr/>
+        </p:nvSpPr>
+        <p:spPr>
+          <a:xfrm>
+            <a:off x="9509760" y="5943600"/>
+            <a:ext cx="1188720" cy="274320"/>
+          </a:xfrm>
+          <a:prstGeom prst="rect">
+            <a:avLst/>
+          </a:prstGeom>
+          <a:noFill/>
+        </p:spPr>
+        <p:txBody>
+          <a:bodyPr wrap="square">
+            <a:spAutoFit/>
+          </a:bodyPr>
+          <a:lstStyle/>
+          <a:p>
+            <a:pPr algn="l">
+              <a:defRPr sz="800" b="0">
+                <a:solidFill>
+                  <a:srgbClr val="1A1A2E"/>
+                </a:solidFill>
+                <a:latin typeface="Meiryo UI"/>
+              </a:defRPr>
+            </a:pPr>
+            <a:r>
+              <a:t>各SNS API連携</a:t>
+            </a:r>
+          </a:p>
+        </p:txBody>
+      </p:sp>
+      <p:sp>
+        <p:nvSpPr>
+          <p:cNvPr id="113" name="Rounded Rectangle 112"/>
           <p:cNvSpPr/>
           <p:nvPr/>
         </p:nvSpPr>
         <p:spPr>
           <a:xfrm>
-            <a:off x="1473200" y="5384800"/>
-            <a:ext cx="4064000" cy="304800"/>
-          </a:xfrm>
-          <a:prstGeom prst="rect">
-            <a:avLst/>
-          </a:prstGeom>
-          <a:noFill/>
-          <a:ln>
-            <a:noFill/>
-          </a:ln>
-        </p:spPr>
-        <p:txBody>
-          <a:bodyPr wrap="square" lIns="0" tIns="0" rIns="0" bIns="0" anchor="t"/>
-          <a:lstStyle/>
-          <a:p>
-            <a:pPr algn="l"/>
-            <a:r>
-              <a:rPr lang="ja-JP" altLang="en-US" sz="1600" b="1" dirty="0">
-                <a:solidFill>
-                  <a:srgbClr val="0F172A"/>
-                </a:solidFill>
-                <a:latin typeface="Meiryo UI"/>
-                <a:ea typeface="Meiryo UI"/>
-              </a:rPr>
-              <a:t>SNS自動投稿</a:t>
-            </a:r>
-          </a:p>
-        </p:txBody>
-      </p:sp>
-      <p:sp>
-        <p:nvSpPr>
-          <p:cNvPr id="241" name="RowDesc4"/>
-          <p:cNvSpPr/>
-          <p:nvPr/>
-        </p:nvSpPr>
-        <p:spPr>
-          <a:xfrm>
-            <a:off x="1473200" y="5715000"/>
-            <a:ext cx="4064000" cy="457200"/>
-          </a:xfrm>
-          <a:prstGeom prst="rect">
-            <a:avLst/>
-          </a:prstGeom>
-          <a:noFill/>
-          <a:ln>
-            <a:noFill/>
-          </a:ln>
-        </p:spPr>
-        <p:txBody>
-          <a:bodyPr wrap="square" lIns="0" tIns="0" rIns="0" bIns="0" anchor="t"/>
-          <a:lstStyle/>
-          <a:p>
-            <a:r>
-              <a:rPr lang="ja-JP" altLang="en-US" sz="1100" dirty="0">
-                <a:solidFill>
-                  <a:srgbClr val="666680"/>
-                </a:solidFill>
-                <a:latin typeface="Meiryo UI"/>
-                <a:ea typeface="Meiryo UI"/>
-              </a:rPr>
-              <a:t>ハイライトをInstagram</a:t>
-            </a:r>
-            <a:br/>
-            <a:r>
-              <a:rPr lang="ja-JP" altLang="en-US" sz="1100" dirty="0">
-                <a:solidFill>
-                  <a:srgbClr val="666680"/>
-                </a:solidFill>
-                <a:latin typeface="Meiryo UI"/>
-                <a:ea typeface="Meiryo UI"/>
-              </a:rPr>
-              <a:t>TikTokに自動投稿</a:t>
-            </a:r>
-          </a:p>
-        </p:txBody>
-      </p:sp>
-      <p:sp>
-        <p:nvSpPr>
-          <p:cNvPr id="242" name="TechLabel4"/>
-          <p:cNvSpPr/>
-          <p:nvPr/>
-        </p:nvSpPr>
-        <p:spPr>
-          <a:xfrm>
-            <a:off x="5918200" y="5384800"/>
-            <a:ext cx="2921000" cy="228600"/>
-          </a:xfrm>
-          <a:prstGeom prst="rect">
-            <a:avLst/>
-          </a:prstGeom>
-          <a:noFill/>
-          <a:ln>
-            <a:noFill/>
-          </a:ln>
-        </p:spPr>
-        <p:txBody>
-          <a:bodyPr wrap="square" lIns="0" tIns="0" rIns="0" bIns="0" anchor="t"/>
-          <a:lstStyle/>
-          <a:p>
-            <a:pPr algn="l"/>
-            <a:r>
-              <a:rPr lang="ja-JP" altLang="en-US" sz="900" dirty="0">
-                <a:solidFill>
-                  <a:srgbClr val="9CA3AF"/>
-                </a:solidFill>
-                <a:latin typeface="Meiryo UI"/>
-                <a:ea typeface="Meiryo UI"/>
-              </a:rPr>
-              <a:t>技術:</a:t>
-            </a:r>
-          </a:p>
-        </p:txBody>
-      </p:sp>
-      <p:sp>
-        <p:nvSpPr>
-          <p:cNvPr id="243" name="TechVal4"/>
-          <p:cNvSpPr/>
-          <p:nvPr/>
-        </p:nvSpPr>
-        <p:spPr>
-          <a:xfrm>
-            <a:off x="5918200" y="5638800"/>
-            <a:ext cx="2921000" cy="508000"/>
-          </a:xfrm>
-          <a:prstGeom prst="rect">
-            <a:avLst/>
-          </a:prstGeom>
-          <a:noFill/>
-          <a:ln>
-            <a:noFill/>
-          </a:ln>
-        </p:spPr>
-        <p:txBody>
-          <a:bodyPr wrap="square" lIns="0" tIns="0" rIns="0" bIns="0" anchor="t"/>
-          <a:lstStyle/>
-          <a:p>
-            <a:pPr algn="l"/>
-            <a:r>
-              <a:rPr lang="ja-JP" altLang="en-US" sz="1100" dirty="0">
-                <a:solidFill>
-                  <a:srgbClr val="0F172A"/>
-                </a:solidFill>
-                <a:latin typeface="Meiryo UI"/>
-                <a:ea typeface="Meiryo UI"/>
-              </a:rPr>
-              <a:t>各SNS API連携</a:t>
-            </a:r>
-          </a:p>
-        </p:txBody>
-      </p:sp>
-      <p:sp>
-        <p:nvSpPr>
-          <p:cNvPr id="244" name="CostBox4"/>
-          <p:cNvSpPr/>
-          <p:nvPr/>
-        </p:nvSpPr>
-        <p:spPr>
-          <a:xfrm>
-            <a:off x="9347200" y="5461000"/>
-            <a:ext cx="2032000" cy="635000"/>
+            <a:off x="10789920" y="5806440"/>
+            <a:ext cx="960120" cy="502920"/>
           </a:xfrm>
           <a:prstGeom prst="roundRect">
-            <a:avLst>
-              <a:gd name="adj" fmla="val 10000"/>
-            </a:avLst>
+            <a:avLst/>
           </a:prstGeom>
           <a:solidFill>
             <a:srgbClr val="FFFFFF"/>
           </a:solidFill>
-          <a:ln>
-            <a:noFill/>
+          <a:ln w="19050">
+            <a:solidFill>
+              <a:srgbClr val="E0E0E8"/>
+            </a:solidFill>
           </a:ln>
         </p:spPr>
-        <p:txBody>
-          <a:bodyPr wrap="square" lIns="0" tIns="0" rIns="0" bIns="0" anchor="ctr"/>
+        <p:style>
+          <a:lnRef idx="1">
+            <a:schemeClr val="accent1"/>
+          </a:lnRef>
+          <a:fillRef idx="3">
+            <a:schemeClr val="accent1"/>
+          </a:fillRef>
+          <a:effectRef idx="2">
+            <a:schemeClr val="accent1"/>
+          </a:effectRef>
+          <a:fontRef idx="minor">
+            <a:schemeClr val="lt1"/>
+          </a:fontRef>
+        </p:style>
+        <p:txBody>
+          <a:bodyPr rtlCol="0" anchor="ctr"/>
           <a:lstStyle/>
           <a:p>
             <a:pPr algn="ctr"/>
-            <a:r>
-              <a:rPr lang="ja-JP" altLang="en-US" sz="1400" b="1" dirty="0">
+          </a:p>
+        </p:txBody>
+      </p:sp>
+      <p:sp>
+        <p:nvSpPr>
+          <p:cNvPr id="114" name="TextBox 113"/>
+          <p:cNvSpPr txBox="1"/>
+          <p:nvPr/>
+        </p:nvSpPr>
+        <p:spPr>
+          <a:xfrm>
+            <a:off x="10835640" y="5824728"/>
+            <a:ext cx="868680" cy="228600"/>
+          </a:xfrm>
+          <a:prstGeom prst="rect">
+            <a:avLst/>
+          </a:prstGeom>
+          <a:noFill/>
+        </p:spPr>
+        <p:txBody>
+          <a:bodyPr wrap="square">
+            <a:spAutoFit/>
+          </a:bodyPr>
+          <a:lstStyle/>
+          <a:p>
+            <a:pPr algn="ctr">
+              <a:defRPr sz="1000" b="1">
                 <a:solidFill>
                   <a:srgbClr val="E63946"/>
                 </a:solidFill>
                 <a:latin typeface="Meiryo UI"/>
-                <a:ea typeface="Meiryo UI"/>
-              </a:rPr>
+              </a:defRPr>
+            </a:pPr>
+            <a:r>
               <a:t>約50〜80万円</a:t>
             </a:r>
           </a:p>
-          <a:p>
-            <a:pPr algn="ctr"/>
-            <a:r>
-              <a:rPr lang="ja-JP" altLang="en-US" sz="1000" dirty="0">
+        </p:txBody>
+      </p:sp>
+      <p:sp>
+        <p:nvSpPr>
+          <p:cNvPr id="115" name="TextBox 114"/>
+          <p:cNvSpPr txBox="1"/>
+          <p:nvPr/>
+        </p:nvSpPr>
+        <p:spPr>
+          <a:xfrm>
+            <a:off x="10835640" y="6080760"/>
+            <a:ext cx="868680" cy="182880"/>
+          </a:xfrm>
+          <a:prstGeom prst="rect">
+            <a:avLst/>
+          </a:prstGeom>
+          <a:noFill/>
+        </p:spPr>
+        <p:txBody>
+          <a:bodyPr wrap="square">
+            <a:spAutoFit/>
+          </a:bodyPr>
+          <a:lstStyle/>
+          <a:p>
+            <a:pPr algn="ctr">
+              <a:defRPr sz="800" b="0">
                 <a:solidFill>
                   <a:srgbClr val="666680"/>
                 </a:solidFill>
                 <a:latin typeface="Meiryo UI"/>
-                <a:ea typeface="Meiryo UI"/>
-              </a:rPr>
+              </a:defRPr>
+            </a:pPr>
+            <a:r>
               <a:t>2-3週間</a:t>
             </a:r>
           </a:p>
@@ -6894,51 +7629,122 @@
       </p:sp>
       <p:sp>
         <p:nvSpPr>
-          <p:cNvPr id="245" name="SummaryBar"/>
+          <p:cNvPr id="116" name="Rounded Rectangle 115"/>
           <p:cNvSpPr/>
           <p:nvPr/>
         </p:nvSpPr>
         <p:spPr>
           <a:xfrm>
-            <a:off x="457200" y="6350000"/>
-            <a:ext cx="11277600" cy="381000"/>
+            <a:off x="7315200" y="6446520"/>
+            <a:ext cx="4572000" cy="320040"/>
           </a:xfrm>
           <a:prstGeom prst="roundRect">
-            <a:avLst>
-              <a:gd name="adj" fmla="val 16667"/>
-            </a:avLst>
+            <a:avLst/>
           </a:prstGeom>
           <a:solidFill>
             <a:srgbClr val="FDEBED"/>
           </a:solidFill>
-          <a:ln>
-            <a:noFill/>
+          <a:ln w="19050">
+            <a:solidFill>
+              <a:srgbClr val="E63946"/>
+            </a:solidFill>
           </a:ln>
         </p:spPr>
-        <p:txBody>
-          <a:bodyPr wrap="square" lIns="91440" tIns="0" rIns="91440" bIns="0" anchor="ctr"/>
-          <a:lstStyle/>
-          <a:p>
-            <a:pPr algn="l"/>
-            <a:r>
-              <a:rPr lang="ja-JP" altLang="en-US" sz="1400" b="1" dirty="0">
+        <p:style>
+          <a:lnRef idx="1">
+            <a:schemeClr val="accent1"/>
+          </a:lnRef>
+          <a:fillRef idx="3">
+            <a:schemeClr val="accent1"/>
+          </a:fillRef>
+          <a:effectRef idx="2">
+            <a:schemeClr val="accent1"/>
+          </a:effectRef>
+          <a:fontRef idx="minor">
+            <a:schemeClr val="lt1"/>
+          </a:fontRef>
+        </p:style>
+        <p:txBody>
+          <a:bodyPr rtlCol="0" anchor="ctr"/>
+          <a:lstStyle/>
+          <a:p>
+            <a:pPr algn="ctr"/>
+          </a:p>
+        </p:txBody>
+      </p:sp>
+      <p:sp>
+        <p:nvSpPr>
+          <p:cNvPr id="117" name="TextBox 116"/>
+          <p:cNvSpPr txBox="1"/>
+          <p:nvPr/>
+        </p:nvSpPr>
+        <p:spPr>
+          <a:xfrm>
+            <a:off x="7498080" y="6473952"/>
+            <a:ext cx="3200400" cy="274320"/>
+          </a:xfrm>
+          <a:prstGeom prst="rect">
+            <a:avLst/>
+          </a:prstGeom>
+          <a:noFill/>
+        </p:spPr>
+        <p:txBody>
+          <a:bodyPr wrap="square">
+            <a:spAutoFit/>
+          </a:bodyPr>
+          <a:lstStyle/>
+          <a:p>
+            <a:pPr algn="l">
+              <a:defRPr sz="1100" b="1">
                 <a:solidFill>
                   <a:srgbClr val="E63946"/>
                 </a:solidFill>
                 <a:latin typeface="Meiryo UI"/>
-                <a:ea typeface="Meiryo UI"/>
-              </a:rPr>
-              <a:t>全拡張の概算合計: 約510〜850万円（段階的に投資）</a:t>
+              </a:defRPr>
+            </a:pPr>
+            <a:r>
+              <a:t>全拡張の概算合計: 約610〜1,050万円（段階的に投資）</a:t>
+            </a:r>
+          </a:p>
+        </p:txBody>
+      </p:sp>
+      <p:sp>
+        <p:nvSpPr>
+          <p:cNvPr id="118" name="TextBox 117"/>
+          <p:cNvSpPr txBox="1"/>
+          <p:nvPr/>
+        </p:nvSpPr>
+        <p:spPr>
+          <a:xfrm>
+            <a:off x="548640" y="6583680"/>
+            <a:ext cx="6400800" cy="182880"/>
+          </a:xfrm>
+          <a:prstGeom prst="rect">
+            <a:avLst/>
+          </a:prstGeom>
+          <a:noFill/>
+        </p:spPr>
+        <p:txBody>
+          <a:bodyPr wrap="square">
+            <a:spAutoFit/>
+          </a:bodyPr>
+          <a:lstStyle/>
+          <a:p>
+            <a:pPr algn="l">
+              <a:defRPr sz="800" b="0">
+                <a:solidFill>
+                  <a:srgbClr val="9CA3AF"/>
+                </a:solidFill>
+                <a:latin typeface="Meiryo UI"/>
+              </a:defRPr>
+            </a:pPr>
+            <a:r>
+              <a:t>LIVE SPOtCH  |  LIN-NAH株式会社  |  2026年4月</a:t>
             </a:r>
           </a:p>
         </p:txBody>
       </p:sp>
     </p:spTree>
-    <p:extLst>
-      <p:ext uri="{BB962C8B-B14F-4D97-AF65-F5344CB8AC3E}">
-        <p14:creationId xmlns:p14="http://schemas.microsoft.com/office/powerpoint/2010/main" val="4080903403"/>
-      </p:ext>
-    </p:extLst>
   </p:cSld>
   <p:clrMapOvr>
     <a:masterClrMapping/>
@@ -7264,26 +8070,4 @@
   </a:objectDefaults>
   <a:extraClrSchemeLst/>
 </a:theme>
-</file>
-
-<file path=ppt/webextensions/taskpanes.xml><?xml version="1.0" encoding="utf-8"?>
-<wetp:taskpanes xmlns:wetp="http://schemas.microsoft.com/office/webextensions/taskpanes/2010/11">
-  <wetp:taskpane dockstate="right" visibility="0" width="350" row="0">
-    <wetp:webextensionref xmlns:r="http://schemas.openxmlformats.org/officeDocument/2006/relationships" r:id="rId1"/>
-  </wetp:taskpane>
-</wetp:taskpanes>
-</file>
-
-<file path=ppt/webextensions/webextension1.xml><?xml version="1.0" encoding="utf-8"?>
-<we:webextension xmlns:we="http://schemas.microsoft.com/office/webextensions/webextension/2010/11" id="{0D6B4372-B9BC-6542-851C-7D588F37B829}">
-  <we:reference id="wa200010001" version="1.0.0.1" store="ja-JP" storeType="OMEX"/>
-  <we:alternateReferences>
-    <we:reference id="WA200010001" version="1.0.0.1" store="WA200010001" storeType="OMEX"/>
-  </we:alternateReferences>
-  <we:properties>
-    <we:property name="claude.fileId" value="&quot;ee8ddc0f-84ec-4df3-8e56-b09171fa7f6e&quot;"/>
-  </we:properties>
-  <we:bindings/>
-  <we:snapshot xmlns:r="http://schemas.openxmlformats.org/officeDocument/2006/relationships"/>
-</we:webextension>
 </file>
--- a/docs/LIVE_SPOtCH_構造チャート.pptx
+++ b/docs/LIVE_SPOtCH_構造チャート.pptx
@@ -5,9 +5,10 @@
     <p:sldMasterId id="2147483648" r:id="rId1"/>
   </p:sldMasterIdLst>
   <p:sldIdLst>
-    <p:sldId id="256" r:id="rId7"/>
+    <p:sldId id="262" r:id="rId2"/>
+    <p:sldId id="261" r:id="rId3"/>
   </p:sldIdLst>
-  <p:sldSz cx="12191695" cy="6858000" type="screen4x3"/>
+  <p:sldSz cx="12192000" cy="6858000"/>
   <p:notesSz cx="6858000" cy="9144000"/>
   <p:defaultTextStyle>
     <a:defPPr>
@@ -104,6 +105,22 @@
       </a:defRPr>
     </a:lvl9pPr>
   </p:defaultTextStyle>
+  <p:extLst>
+    <p:ext uri="{EFAFB233-063F-42B5-8137-9DF3F51BA10A}">
+      <p15:sldGuideLst xmlns:p15="http://schemas.microsoft.com/office/powerpoint/2012/main">
+        <p15:guide id="1" orient="horz" pos="2160">
+          <p15:clr>
+            <a:srgbClr val="A4A3A4"/>
+          </p15:clr>
+        </p15:guide>
+        <p15:guide id="2" pos="2880">
+          <p15:clr>
+            <a:srgbClr val="A4A3A4"/>
+          </p15:clr>
+        </p15:guide>
+      </p15:sldGuideLst>
+    </p:ext>
+  </p:extLst>
 </p:presentation>
 </file>
 
@@ -145,10 +162,9 @@
           <a:lstStyle/>
           <a:p>
             <a:r>
-              <a:rPr lang="en-US" smtClean="0"/>
+              <a:rPr lang="en-US"/>
               <a:t>Click to edit Master title style</a:t>
             </a:r>
-            <a:endParaRPr lang="en-US"/>
           </a:p>
         </p:txBody>
       </p:sp>
@@ -264,10 +280,9 @@
           </a:lstStyle>
           <a:p>
             <a:r>
-              <a:rPr lang="en-US" smtClean="0"/>
+              <a:rPr lang="en-US"/>
               <a:t>Click to edit Master subtitle style</a:t>
             </a:r>
-            <a:endParaRPr lang="en-US"/>
           </a:p>
         </p:txBody>
       </p:sp>
@@ -288,7 +303,7 @@
           <a:p>
             <a:fld id="{5BCAD085-E8A6-8845-BD4E-CB4CCA059FC4}" type="datetimeFigureOut">
               <a:rPr lang="en-US" smtClean="0"/>
-              <a:t>1/27/13</a:t>
+              <a:t>4/18/26</a:t>
             </a:fld>
             <a:endParaRPr lang="en-US"/>
           </a:p>
@@ -382,10 +397,9 @@
           <a:lstStyle/>
           <a:p>
             <a:r>
-              <a:rPr lang="en-US" smtClean="0"/>
+              <a:rPr lang="en-US"/>
               <a:t>Click to edit Master title style</a:t>
             </a:r>
-            <a:endParaRPr lang="en-US"/>
           </a:p>
         </p:txBody>
       </p:sp>
@@ -406,38 +420,37 @@
           <a:p>
             <a:pPr lvl="0"/>
             <a:r>
-              <a:rPr lang="en-US" smtClean="0"/>
+              <a:rPr lang="en-US"/>
               <a:t>Click to edit Master text styles</a:t>
             </a:r>
           </a:p>
           <a:p>
             <a:pPr lvl="1"/>
             <a:r>
-              <a:rPr lang="en-US" smtClean="0"/>
+              <a:rPr lang="en-US"/>
               <a:t>Second level</a:t>
             </a:r>
           </a:p>
           <a:p>
             <a:pPr lvl="2"/>
             <a:r>
-              <a:rPr lang="en-US" smtClean="0"/>
+              <a:rPr lang="en-US"/>
               <a:t>Third level</a:t>
             </a:r>
           </a:p>
           <a:p>
             <a:pPr lvl="3"/>
             <a:r>
-              <a:rPr lang="en-US" smtClean="0"/>
+              <a:rPr lang="en-US"/>
               <a:t>Fourth level</a:t>
             </a:r>
           </a:p>
           <a:p>
             <a:pPr lvl="4"/>
             <a:r>
-              <a:rPr lang="en-US" smtClean="0"/>
+              <a:rPr lang="en-US"/>
               <a:t>Fifth level</a:t>
             </a:r>
-            <a:endParaRPr lang="en-US"/>
           </a:p>
         </p:txBody>
       </p:sp>
@@ -458,7 +471,7 @@
           <a:p>
             <a:fld id="{5BCAD085-E8A6-8845-BD4E-CB4CCA059FC4}" type="datetimeFigureOut">
               <a:rPr lang="en-US" smtClean="0"/>
-              <a:t>1/27/13</a:t>
+              <a:t>4/18/26</a:t>
             </a:fld>
             <a:endParaRPr lang="en-US"/>
           </a:p>
@@ -557,10 +570,9 @@
           <a:lstStyle/>
           <a:p>
             <a:r>
-              <a:rPr lang="en-US" smtClean="0"/>
+              <a:rPr lang="en-US"/>
               <a:t>Click to edit Master title style</a:t>
             </a:r>
-            <a:endParaRPr lang="en-US"/>
           </a:p>
         </p:txBody>
       </p:sp>
@@ -586,38 +598,37 @@
           <a:p>
             <a:pPr lvl="0"/>
             <a:r>
-              <a:rPr lang="en-US" smtClean="0"/>
+              <a:rPr lang="en-US"/>
               <a:t>Click to edit Master text styles</a:t>
             </a:r>
           </a:p>
           <a:p>
             <a:pPr lvl="1"/>
             <a:r>
-              <a:rPr lang="en-US" smtClean="0"/>
+              <a:rPr lang="en-US"/>
               <a:t>Second level</a:t>
             </a:r>
           </a:p>
           <a:p>
             <a:pPr lvl="2"/>
             <a:r>
-              <a:rPr lang="en-US" smtClean="0"/>
+              <a:rPr lang="en-US"/>
               <a:t>Third level</a:t>
             </a:r>
           </a:p>
           <a:p>
             <a:pPr lvl="3"/>
             <a:r>
-              <a:rPr lang="en-US" smtClean="0"/>
+              <a:rPr lang="en-US"/>
               <a:t>Fourth level</a:t>
             </a:r>
           </a:p>
           <a:p>
             <a:pPr lvl="4"/>
             <a:r>
-              <a:rPr lang="en-US" smtClean="0"/>
+              <a:rPr lang="en-US"/>
               <a:t>Fifth level</a:t>
             </a:r>
-            <a:endParaRPr lang="en-US"/>
           </a:p>
         </p:txBody>
       </p:sp>
@@ -638,7 +649,7 @@
           <a:p>
             <a:fld id="{5BCAD085-E8A6-8845-BD4E-CB4CCA059FC4}" type="datetimeFigureOut">
               <a:rPr lang="en-US" smtClean="0"/>
-              <a:t>1/27/13</a:t>
+              <a:t>4/18/26</a:t>
             </a:fld>
             <a:endParaRPr lang="en-US"/>
           </a:p>
@@ -732,10 +743,9 @@
           <a:lstStyle/>
           <a:p>
             <a:r>
-              <a:rPr lang="en-US" smtClean="0"/>
+              <a:rPr lang="en-US"/>
               <a:t>Click to edit Master title style</a:t>
             </a:r>
-            <a:endParaRPr lang="en-US"/>
           </a:p>
         </p:txBody>
       </p:sp>
@@ -756,38 +766,37 @@
           <a:p>
             <a:pPr lvl="0"/>
             <a:r>
-              <a:rPr lang="en-US" smtClean="0"/>
+              <a:rPr lang="en-US"/>
               <a:t>Click to edit Master text styles</a:t>
             </a:r>
           </a:p>
           <a:p>
             <a:pPr lvl="1"/>
             <a:r>
-              <a:rPr lang="en-US" smtClean="0"/>
+              <a:rPr lang="en-US"/>
               <a:t>Second level</a:t>
             </a:r>
           </a:p>
           <a:p>
             <a:pPr lvl="2"/>
             <a:r>
-              <a:rPr lang="en-US" smtClean="0"/>
+              <a:rPr lang="en-US"/>
               <a:t>Third level</a:t>
             </a:r>
           </a:p>
           <a:p>
             <a:pPr lvl="3"/>
             <a:r>
-              <a:rPr lang="en-US" smtClean="0"/>
+              <a:rPr lang="en-US"/>
               <a:t>Fourth level</a:t>
             </a:r>
           </a:p>
           <a:p>
             <a:pPr lvl="4"/>
             <a:r>
-              <a:rPr lang="en-US" smtClean="0"/>
+              <a:rPr lang="en-US"/>
               <a:t>Fifth level</a:t>
             </a:r>
-            <a:endParaRPr lang="en-US"/>
           </a:p>
         </p:txBody>
       </p:sp>
@@ -808,7 +817,7 @@
           <a:p>
             <a:fld id="{5BCAD085-E8A6-8845-BD4E-CB4CCA059FC4}" type="datetimeFigureOut">
               <a:rPr lang="en-US" smtClean="0"/>
-              <a:t>1/27/13</a:t>
+              <a:t>4/18/26</a:t>
             </a:fld>
             <a:endParaRPr lang="en-US"/>
           </a:p>
@@ -911,10 +920,9 @@
           </a:lstStyle>
           <a:p>
             <a:r>
-              <a:rPr lang="en-US" smtClean="0"/>
+              <a:rPr lang="en-US"/>
               <a:t>Click to edit Master title style</a:t>
             </a:r>
-            <a:endParaRPr lang="en-US"/>
           </a:p>
         </p:txBody>
       </p:sp>
@@ -1031,7 +1039,7 @@
           <a:p>
             <a:pPr lvl="0"/>
             <a:r>
-              <a:rPr lang="en-US" smtClean="0"/>
+              <a:rPr lang="en-US"/>
               <a:t>Click to edit Master text styles</a:t>
             </a:r>
           </a:p>
@@ -1054,7 +1062,7 @@
           <a:p>
             <a:fld id="{5BCAD085-E8A6-8845-BD4E-CB4CCA059FC4}" type="datetimeFigureOut">
               <a:rPr lang="en-US" smtClean="0"/>
-              <a:t>1/27/13</a:t>
+              <a:t>4/18/26</a:t>
             </a:fld>
             <a:endParaRPr lang="en-US"/>
           </a:p>
@@ -1148,10 +1156,9 @@
           <a:lstStyle/>
           <a:p>
             <a:r>
-              <a:rPr lang="en-US" smtClean="0"/>
+              <a:rPr lang="en-US"/>
               <a:t>Click to edit Master title style</a:t>
             </a:r>
-            <a:endParaRPr lang="en-US"/>
           </a:p>
         </p:txBody>
       </p:sp>
@@ -1205,38 +1212,37 @@
           <a:p>
             <a:pPr lvl="0"/>
             <a:r>
-              <a:rPr lang="en-US" smtClean="0"/>
+              <a:rPr lang="en-US"/>
               <a:t>Click to edit Master text styles</a:t>
             </a:r>
           </a:p>
           <a:p>
             <a:pPr lvl="1"/>
             <a:r>
-              <a:rPr lang="en-US" smtClean="0"/>
+              <a:rPr lang="en-US"/>
               <a:t>Second level</a:t>
             </a:r>
           </a:p>
           <a:p>
             <a:pPr lvl="2"/>
             <a:r>
-              <a:rPr lang="en-US" smtClean="0"/>
+              <a:rPr lang="en-US"/>
               <a:t>Third level</a:t>
             </a:r>
           </a:p>
           <a:p>
             <a:pPr lvl="3"/>
             <a:r>
-              <a:rPr lang="en-US" smtClean="0"/>
+              <a:rPr lang="en-US"/>
               <a:t>Fourth level</a:t>
             </a:r>
           </a:p>
           <a:p>
             <a:pPr lvl="4"/>
             <a:r>
-              <a:rPr lang="en-US" smtClean="0"/>
+              <a:rPr lang="en-US"/>
               <a:t>Fifth level</a:t>
             </a:r>
-            <a:endParaRPr lang="en-US"/>
           </a:p>
         </p:txBody>
       </p:sp>
@@ -1290,38 +1296,37 @@
           <a:p>
             <a:pPr lvl="0"/>
             <a:r>
-              <a:rPr lang="en-US" smtClean="0"/>
+              <a:rPr lang="en-US"/>
               <a:t>Click to edit Master text styles</a:t>
             </a:r>
           </a:p>
           <a:p>
             <a:pPr lvl="1"/>
             <a:r>
-              <a:rPr lang="en-US" smtClean="0"/>
+              <a:rPr lang="en-US"/>
               <a:t>Second level</a:t>
             </a:r>
           </a:p>
           <a:p>
             <a:pPr lvl="2"/>
             <a:r>
-              <a:rPr lang="en-US" smtClean="0"/>
+              <a:rPr lang="en-US"/>
               <a:t>Third level</a:t>
             </a:r>
           </a:p>
           <a:p>
             <a:pPr lvl="3"/>
             <a:r>
-              <a:rPr lang="en-US" smtClean="0"/>
+              <a:rPr lang="en-US"/>
               <a:t>Fourth level</a:t>
             </a:r>
           </a:p>
           <a:p>
             <a:pPr lvl="4"/>
             <a:r>
-              <a:rPr lang="en-US" smtClean="0"/>
+              <a:rPr lang="en-US"/>
               <a:t>Fifth level</a:t>
             </a:r>
-            <a:endParaRPr lang="en-US"/>
           </a:p>
         </p:txBody>
       </p:sp>
@@ -1342,7 +1347,7 @@
           <a:p>
             <a:fld id="{5BCAD085-E8A6-8845-BD4E-CB4CCA059FC4}" type="datetimeFigureOut">
               <a:rPr lang="en-US" smtClean="0"/>
-              <a:t>1/27/13</a:t>
+              <a:t>4/18/26</a:t>
             </a:fld>
             <a:endParaRPr lang="en-US"/>
           </a:p>
@@ -1440,10 +1445,9 @@
           </a:lstStyle>
           <a:p>
             <a:r>
-              <a:rPr lang="en-US" smtClean="0"/>
+              <a:rPr lang="en-US"/>
               <a:t>Click to edit Master title style</a:t>
             </a:r>
-            <a:endParaRPr lang="en-US"/>
           </a:p>
         </p:txBody>
       </p:sp>
@@ -1506,7 +1510,7 @@
           <a:p>
             <a:pPr lvl="0"/>
             <a:r>
-              <a:rPr lang="en-US" smtClean="0"/>
+              <a:rPr lang="en-US"/>
               <a:t>Click to edit Master text styles</a:t>
             </a:r>
           </a:p>
@@ -1562,38 +1566,37 @@
           <a:p>
             <a:pPr lvl="0"/>
             <a:r>
-              <a:rPr lang="en-US" smtClean="0"/>
+              <a:rPr lang="en-US"/>
               <a:t>Click to edit Master text styles</a:t>
             </a:r>
           </a:p>
           <a:p>
             <a:pPr lvl="1"/>
             <a:r>
-              <a:rPr lang="en-US" smtClean="0"/>
+              <a:rPr lang="en-US"/>
               <a:t>Second level</a:t>
             </a:r>
           </a:p>
           <a:p>
             <a:pPr lvl="2"/>
             <a:r>
-              <a:rPr lang="en-US" smtClean="0"/>
+              <a:rPr lang="en-US"/>
               <a:t>Third level</a:t>
             </a:r>
           </a:p>
           <a:p>
             <a:pPr lvl="3"/>
             <a:r>
-              <a:rPr lang="en-US" smtClean="0"/>
+              <a:rPr lang="en-US"/>
               <a:t>Fourth level</a:t>
             </a:r>
           </a:p>
           <a:p>
             <a:pPr lvl="4"/>
             <a:r>
-              <a:rPr lang="en-US" smtClean="0"/>
+              <a:rPr lang="en-US"/>
               <a:t>Fifth level</a:t>
             </a:r>
-            <a:endParaRPr lang="en-US"/>
           </a:p>
         </p:txBody>
       </p:sp>
@@ -1656,7 +1659,7 @@
           <a:p>
             <a:pPr lvl="0"/>
             <a:r>
-              <a:rPr lang="en-US" smtClean="0"/>
+              <a:rPr lang="en-US"/>
               <a:t>Click to edit Master text styles</a:t>
             </a:r>
           </a:p>
@@ -1712,38 +1715,37 @@
           <a:p>
             <a:pPr lvl="0"/>
             <a:r>
-              <a:rPr lang="en-US" smtClean="0"/>
+              <a:rPr lang="en-US"/>
               <a:t>Click to edit Master text styles</a:t>
             </a:r>
           </a:p>
           <a:p>
             <a:pPr lvl="1"/>
             <a:r>
-              <a:rPr lang="en-US" smtClean="0"/>
+              <a:rPr lang="en-US"/>
               <a:t>Second level</a:t>
             </a:r>
           </a:p>
           <a:p>
             <a:pPr lvl="2"/>
             <a:r>
-              <a:rPr lang="en-US" smtClean="0"/>
+              <a:rPr lang="en-US"/>
               <a:t>Third level</a:t>
             </a:r>
           </a:p>
           <a:p>
             <a:pPr lvl="3"/>
             <a:r>
-              <a:rPr lang="en-US" smtClean="0"/>
+              <a:rPr lang="en-US"/>
               <a:t>Fourth level</a:t>
             </a:r>
           </a:p>
           <a:p>
             <a:pPr lvl="4"/>
             <a:r>
-              <a:rPr lang="en-US" smtClean="0"/>
+              <a:rPr lang="en-US"/>
               <a:t>Fifth level</a:t>
             </a:r>
-            <a:endParaRPr lang="en-US"/>
           </a:p>
         </p:txBody>
       </p:sp>
@@ -1764,7 +1766,7 @@
           <a:p>
             <a:fld id="{5BCAD085-E8A6-8845-BD4E-CB4CCA059FC4}" type="datetimeFigureOut">
               <a:rPr lang="en-US" smtClean="0"/>
-              <a:t>1/27/13</a:t>
+              <a:t>4/18/26</a:t>
             </a:fld>
             <a:endParaRPr lang="en-US"/>
           </a:p>
@@ -1858,10 +1860,9 @@
           <a:lstStyle/>
           <a:p>
             <a:r>
-              <a:rPr lang="en-US" smtClean="0"/>
+              <a:rPr lang="en-US"/>
               <a:t>Click to edit Master title style</a:t>
             </a:r>
-            <a:endParaRPr lang="en-US"/>
           </a:p>
         </p:txBody>
       </p:sp>
@@ -1882,7 +1883,7 @@
           <a:p>
             <a:fld id="{5BCAD085-E8A6-8845-BD4E-CB4CCA059FC4}" type="datetimeFigureOut">
               <a:rPr lang="en-US" smtClean="0"/>
-              <a:t>1/27/13</a:t>
+              <a:t>4/18/26</a:t>
             </a:fld>
             <a:endParaRPr lang="en-US"/>
           </a:p>
@@ -1977,7 +1978,7 @@
           <a:p>
             <a:fld id="{5BCAD085-E8A6-8845-BD4E-CB4CCA059FC4}" type="datetimeFigureOut">
               <a:rPr lang="en-US" smtClean="0"/>
-              <a:t>1/27/13</a:t>
+              <a:t>4/18/26</a:t>
             </a:fld>
             <a:endParaRPr lang="en-US"/>
           </a:p>
@@ -2080,10 +2081,9 @@
           </a:lstStyle>
           <a:p>
             <a:r>
-              <a:rPr lang="en-US" smtClean="0"/>
+              <a:rPr lang="en-US"/>
               <a:t>Click to edit Master title style</a:t>
             </a:r>
-            <a:endParaRPr lang="en-US"/>
           </a:p>
         </p:txBody>
       </p:sp>
@@ -2137,38 +2137,37 @@
           <a:p>
             <a:pPr lvl="0"/>
             <a:r>
-              <a:rPr lang="en-US" smtClean="0"/>
+              <a:rPr lang="en-US"/>
               <a:t>Click to edit Master text styles</a:t>
             </a:r>
           </a:p>
           <a:p>
             <a:pPr lvl="1"/>
             <a:r>
-              <a:rPr lang="en-US" smtClean="0"/>
+              <a:rPr lang="en-US"/>
               <a:t>Second level</a:t>
             </a:r>
           </a:p>
           <a:p>
             <a:pPr lvl="2"/>
             <a:r>
-              <a:rPr lang="en-US" smtClean="0"/>
+              <a:rPr lang="en-US"/>
               <a:t>Third level</a:t>
             </a:r>
           </a:p>
           <a:p>
             <a:pPr lvl="3"/>
             <a:r>
-              <a:rPr lang="en-US" smtClean="0"/>
+              <a:rPr lang="en-US"/>
               <a:t>Fourth level</a:t>
             </a:r>
           </a:p>
           <a:p>
             <a:pPr lvl="4"/>
             <a:r>
-              <a:rPr lang="en-US" smtClean="0"/>
+              <a:rPr lang="en-US"/>
               <a:t>Fifth level</a:t>
             </a:r>
-            <a:endParaRPr lang="en-US"/>
           </a:p>
         </p:txBody>
       </p:sp>
@@ -2231,7 +2230,7 @@
           <a:p>
             <a:pPr lvl="0"/>
             <a:r>
-              <a:rPr lang="en-US" smtClean="0"/>
+              <a:rPr lang="en-US"/>
               <a:t>Click to edit Master text styles</a:t>
             </a:r>
           </a:p>
@@ -2254,7 +2253,7 @@
           <a:p>
             <a:fld id="{5BCAD085-E8A6-8845-BD4E-CB4CCA059FC4}" type="datetimeFigureOut">
               <a:rPr lang="en-US" smtClean="0"/>
-              <a:t>1/27/13</a:t>
+              <a:t>4/18/26</a:t>
             </a:fld>
             <a:endParaRPr lang="en-US"/>
           </a:p>
@@ -2357,10 +2356,9 @@
           </a:lstStyle>
           <a:p>
             <a:r>
-              <a:rPr lang="en-US" smtClean="0"/>
+              <a:rPr lang="en-US"/>
               <a:t>Click to edit Master title style</a:t>
             </a:r>
-            <a:endParaRPr lang="en-US"/>
           </a:p>
         </p:txBody>
       </p:sp>
@@ -2484,7 +2482,7 @@
           <a:p>
             <a:pPr lvl="0"/>
             <a:r>
-              <a:rPr lang="en-US" smtClean="0"/>
+              <a:rPr lang="en-US"/>
               <a:t>Click to edit Master text styles</a:t>
             </a:r>
           </a:p>
@@ -2507,7 +2505,7 @@
           <a:p>
             <a:fld id="{5BCAD085-E8A6-8845-BD4E-CB4CCA059FC4}" type="datetimeFigureOut">
               <a:rPr lang="en-US" smtClean="0"/>
-              <a:t>1/27/13</a:t>
+              <a:t>4/18/26</a:t>
             </a:fld>
             <a:endParaRPr lang="en-US"/>
           </a:p>
@@ -2616,10 +2614,9 @@
           <a:lstStyle/>
           <a:p>
             <a:r>
-              <a:rPr lang="en-US" smtClean="0"/>
+              <a:rPr lang="en-US"/>
               <a:t>Click to edit Master title style</a:t>
             </a:r>
-            <a:endParaRPr lang="en-US"/>
           </a:p>
         </p:txBody>
       </p:sp>
@@ -2650,38 +2647,37 @@
           <a:p>
             <a:pPr lvl="0"/>
             <a:r>
-              <a:rPr lang="en-US" smtClean="0"/>
+              <a:rPr lang="en-US"/>
               <a:t>Click to edit Master text styles</a:t>
             </a:r>
           </a:p>
           <a:p>
             <a:pPr lvl="1"/>
             <a:r>
-              <a:rPr lang="en-US" smtClean="0"/>
+              <a:rPr lang="en-US"/>
               <a:t>Second level</a:t>
             </a:r>
           </a:p>
           <a:p>
             <a:pPr lvl="2"/>
             <a:r>
-              <a:rPr lang="en-US" smtClean="0"/>
+              <a:rPr lang="en-US"/>
               <a:t>Third level</a:t>
             </a:r>
           </a:p>
           <a:p>
             <a:pPr lvl="3"/>
             <a:r>
-              <a:rPr lang="en-US" smtClean="0"/>
+              <a:rPr lang="en-US"/>
               <a:t>Fourth level</a:t>
             </a:r>
           </a:p>
           <a:p>
             <a:pPr lvl="4"/>
             <a:r>
-              <a:rPr lang="en-US" smtClean="0"/>
+              <a:rPr lang="en-US"/>
               <a:t>Fifth level</a:t>
             </a:r>
-            <a:endParaRPr lang="en-US"/>
           </a:p>
         </p:txBody>
       </p:sp>
@@ -2720,7 +2716,7 @@
           <a:p>
             <a:fld id="{5BCAD085-E8A6-8845-BD4E-CB4CCA059FC4}" type="datetimeFigureOut">
               <a:rPr lang="en-US" smtClean="0"/>
-              <a:t>1/27/13</a:t>
+              <a:t>4/18/26</a:t>
             </a:fld>
             <a:endParaRPr lang="en-US"/>
           </a:p>
@@ -3079,7 +3075,7 @@
 </file>
 
 <file path=ppt/slides/slide1.xml><?xml version="1.0" encoding="utf-8"?>
-<p:sld xmlns:a="http://schemas.openxmlformats.org/drawingml/2006/main" xmlns:p="http://schemas.openxmlformats.org/presentationml/2006/main" xmlns:r="http://schemas.openxmlformats.org/officeDocument/2006/relationships">
+<p:sld xmlns:a="http://schemas.openxmlformats.org/drawingml/2006/main" xmlns:r="http://schemas.openxmlformats.org/officeDocument/2006/relationships" xmlns:p="http://schemas.openxmlformats.org/presentationml/2006/main">
   <p:cSld>
     <p:bg>
       <p:bgPr>
@@ -3095,7 +3091,14 @@
         <p:cNvGrpSpPr/>
         <p:nvPr/>
       </p:nvGrpSpPr>
-      <p:grpSpPr/>
+      <p:grpSpPr>
+        <a:xfrm>
+          <a:off x="0" y="0"/>
+          <a:ext cx="0" cy="0"/>
+          <a:chOff x="0" y="0"/>
+          <a:chExt cx="0" cy="0"/>
+        </a:xfrm>
+      </p:grpSpPr>
       <p:sp>
         <p:nvSpPr>
           <p:cNvPr id="2" name="Rectangle 1"/>
@@ -3136,6 +3139,7 @@
           <a:lstStyle/>
           <a:p>
             <a:pPr algn="ctr"/>
+            <a:endParaRPr/>
           </a:p>
         </p:txBody>
       </p:sp>
@@ -3147,8 +3151,8 @@
         </p:nvSpPr>
         <p:spPr>
           <a:xfrm>
-            <a:off x="548640" y="228600"/>
-            <a:ext cx="6400800" cy="365760"/>
+            <a:off x="635000" y="177800"/>
+            <a:ext cx="10922000" cy="457200"/>
           </a:xfrm>
           <a:prstGeom prst="rect">
             <a:avLst/>
@@ -3162,7 +3166,7 @@
           <a:lstStyle/>
           <a:p>
             <a:pPr algn="l">
-              <a:defRPr sz="2200" b="1">
+              <a:defRPr sz="2600" b="1">
                 <a:solidFill>
                   <a:srgbClr val="0F172A"/>
                 </a:solidFill>
@@ -3183,8 +3187,8 @@
         </p:nvSpPr>
         <p:spPr>
           <a:xfrm>
-            <a:off x="548640" y="594360"/>
-            <a:ext cx="6400800" cy="228600"/>
+            <a:off x="635000" y="635000"/>
+            <a:ext cx="10922000" cy="279400"/>
           </a:xfrm>
           <a:prstGeom prst="rect">
             <a:avLst/>
@@ -3198,7 +3202,7 @@
           <a:lstStyle/>
           <a:p>
             <a:pPr algn="l">
-              <a:defRPr sz="1100" b="0">
+              <a:defRPr sz="1400" b="0">
                 <a:solidFill>
                   <a:srgbClr val="666680"/>
                 </a:solidFill>
@@ -3219,8 +3223,8 @@
         </p:nvSpPr>
         <p:spPr>
           <a:xfrm>
-            <a:off x="548640" y="868680"/>
-            <a:ext cx="914400" cy="38100"/>
+            <a:off x="635000" y="939800"/>
+            <a:ext cx="1016000" cy="38100"/>
           </a:xfrm>
           <a:prstGeom prst="rect">
             <a:avLst/>
@@ -3251,6 +3255,7 @@
           <a:lstStyle/>
           <a:p>
             <a:pPr algn="ctr"/>
+            <a:endParaRPr/>
           </a:p>
         </p:txBody>
       </p:sp>
@@ -3262,8 +3267,8 @@
         </p:nvSpPr>
         <p:spPr>
           <a:xfrm>
-            <a:off x="2286000" y="1097280"/>
-            <a:ext cx="2926080" cy="640080"/>
+            <a:off x="3429000" y="1066800"/>
+            <a:ext cx="5334000" cy="711200"/>
           </a:xfrm>
           <a:prstGeom prst="roundRect">
             <a:avLst/>
@@ -3296,6 +3301,7 @@
           <a:lstStyle/>
           <a:p>
             <a:pPr algn="ctr"/>
+            <a:endParaRPr/>
           </a:p>
         </p:txBody>
       </p:sp>
@@ -3307,8 +3313,8 @@
         </p:nvSpPr>
         <p:spPr>
           <a:xfrm>
-            <a:off x="2468880" y="1170432"/>
-            <a:ext cx="2560320" cy="228600"/>
+            <a:off x="3683000" y="1117600"/>
+            <a:ext cx="4826000" cy="330200"/>
           </a:xfrm>
           <a:prstGeom prst="rect">
             <a:avLst/>
@@ -3322,7 +3328,7 @@
           <a:lstStyle/>
           <a:p>
             <a:pPr algn="ctr">
-              <a:defRPr sz="1300" b="1">
+              <a:defRPr sz="1600" b="1">
                 <a:solidFill>
                   <a:srgbClr val="E63946"/>
                 </a:solidFill>
@@ -3343,8 +3349,8 @@
         </p:nvSpPr>
         <p:spPr>
           <a:xfrm>
-            <a:off x="2468880" y="1417320"/>
-            <a:ext cx="2560320" cy="182880"/>
+            <a:off x="3683000" y="1447800"/>
+            <a:ext cx="4826000" cy="254000"/>
           </a:xfrm>
           <a:prstGeom prst="rect">
             <a:avLst/>
@@ -3358,7 +3364,7 @@
           <a:lstStyle/>
           <a:p>
             <a:pPr algn="ctr">
-              <a:defRPr sz="800" b="0">
+              <a:defRPr sz="1100" b="0">
                 <a:solidFill>
                   <a:srgbClr val="666680"/>
                 </a:solidFill>
@@ -3379,8 +3385,8 @@
         </p:nvSpPr>
         <p:spPr>
           <a:xfrm>
-            <a:off x="3566160" y="1783080"/>
-            <a:ext cx="320040" cy="320040"/>
+            <a:off x="5867400" y="1828800"/>
+            <a:ext cx="457200" cy="355600"/>
           </a:xfrm>
           <a:prstGeom prst="downArrow">
             <a:avLst/>
@@ -3411,6 +3417,7 @@
           <a:lstStyle/>
           <a:p>
             <a:pPr algn="ctr"/>
+            <a:endParaRPr/>
           </a:p>
         </p:txBody>
       </p:sp>
@@ -3422,8 +3429,8 @@
         </p:nvSpPr>
         <p:spPr>
           <a:xfrm>
-            <a:off x="548640" y="2194560"/>
-            <a:ext cx="6400800" cy="2468880"/>
+            <a:off x="635000" y="2260600"/>
+            <a:ext cx="10922000" cy="2667000"/>
           </a:xfrm>
           <a:prstGeom prst="roundRect">
             <a:avLst/>
@@ -3456,6 +3463,7 @@
           <a:lstStyle/>
           <a:p>
             <a:pPr algn="ctr"/>
+            <a:endParaRPr/>
           </a:p>
         </p:txBody>
       </p:sp>
@@ -3467,8 +3475,8 @@
         </p:nvSpPr>
         <p:spPr>
           <a:xfrm>
-            <a:off x="822960" y="2286000"/>
-            <a:ext cx="5852160" cy="274320"/>
+            <a:off x="889000" y="2336800"/>
+            <a:ext cx="10414000" cy="355600"/>
           </a:xfrm>
           <a:prstGeom prst="rect">
             <a:avLst/>
@@ -3482,7 +3490,7 @@
           <a:lstStyle/>
           <a:p>
             <a:pPr algn="l">
-              <a:defRPr sz="1400" b="1">
+              <a:defRPr sz="1800" b="1">
                 <a:solidFill>
                   <a:srgbClr val="0F172A"/>
                 </a:solidFill>
@@ -3503,8 +3511,8 @@
         </p:nvSpPr>
         <p:spPr>
           <a:xfrm>
-            <a:off x="731520" y="2697480"/>
-            <a:ext cx="1078992" cy="1691640"/>
+            <a:off x="838200" y="2768600"/>
+            <a:ext cx="2006600" cy="1905000"/>
           </a:xfrm>
           <a:prstGeom prst="roundRect">
             <a:avLst/>
@@ -3537,6 +3545,7 @@
           <a:lstStyle/>
           <a:p>
             <a:pPr algn="ctr"/>
+            <a:endParaRPr/>
           </a:p>
         </p:txBody>
       </p:sp>
@@ -3548,8 +3557,8 @@
         </p:nvSpPr>
         <p:spPr>
           <a:xfrm>
-            <a:off x="731520" y="2697480"/>
-            <a:ext cx="1078992" cy="38100"/>
+            <a:off x="838200" y="2768600"/>
+            <a:ext cx="2006600" cy="50800"/>
           </a:xfrm>
           <a:prstGeom prst="rect">
             <a:avLst/>
@@ -3580,6 +3589,7 @@
           <a:lstStyle/>
           <a:p>
             <a:pPr algn="ctr"/>
+            <a:endParaRPr/>
           </a:p>
         </p:txBody>
       </p:sp>
@@ -3591,8 +3601,8 @@
         </p:nvSpPr>
         <p:spPr>
           <a:xfrm>
-            <a:off x="804672" y="2788920"/>
-            <a:ext cx="932688" cy="182880"/>
+            <a:off x="939800" y="2895600"/>
+            <a:ext cx="1803400" cy="279400"/>
           </a:xfrm>
           <a:prstGeom prst="rect">
             <a:avLst/>
@@ -3606,7 +3616,7 @@
           <a:lstStyle/>
           <a:p>
             <a:pPr algn="ctr">
-              <a:defRPr sz="1000" b="1">
+              <a:defRPr sz="1300" b="1">
                 <a:solidFill>
                   <a:srgbClr val="E63946"/>
                 </a:solidFill>
@@ -3627,8 +3637,8 @@
         </p:nvSpPr>
         <p:spPr>
           <a:xfrm>
-            <a:off x="804672" y="3017520"/>
-            <a:ext cx="932688" cy="1188720"/>
+            <a:off x="939800" y="3225800"/>
+            <a:ext cx="1803400" cy="1371600"/>
           </a:xfrm>
           <a:prstGeom prst="rect">
             <a:avLst/>
@@ -3642,7 +3652,7 @@
           <a:lstStyle/>
           <a:p>
             <a:pPr algn="ctr">
-              <a:defRPr sz="800" b="0">
+              <a:defRPr sz="1100" b="0">
                 <a:solidFill>
                   <a:srgbClr val="666680"/>
                 </a:solidFill>
@@ -3671,8 +3681,8 @@
         </p:nvSpPr>
         <p:spPr>
           <a:xfrm>
-            <a:off x="1975104" y="2697480"/>
-            <a:ext cx="1078992" cy="1691640"/>
+            <a:off x="3022600" y="2768600"/>
+            <a:ext cx="2006600" cy="1905000"/>
           </a:xfrm>
           <a:prstGeom prst="roundRect">
             <a:avLst/>
@@ -3705,6 +3715,7 @@
           <a:lstStyle/>
           <a:p>
             <a:pPr algn="ctr"/>
+            <a:endParaRPr/>
           </a:p>
         </p:txBody>
       </p:sp>
@@ -3716,8 +3727,8 @@
         </p:nvSpPr>
         <p:spPr>
           <a:xfrm>
-            <a:off x="1975104" y="2697480"/>
-            <a:ext cx="1078992" cy="38100"/>
+            <a:off x="3022600" y="2768600"/>
+            <a:ext cx="2006600" cy="50800"/>
           </a:xfrm>
           <a:prstGeom prst="rect">
             <a:avLst/>
@@ -3748,6 +3759,7 @@
           <a:lstStyle/>
           <a:p>
             <a:pPr algn="ctr"/>
+            <a:endParaRPr/>
           </a:p>
         </p:txBody>
       </p:sp>
@@ -3759,8 +3771,8 @@
         </p:nvSpPr>
         <p:spPr>
           <a:xfrm>
-            <a:off x="2048256" y="2788920"/>
-            <a:ext cx="932688" cy="182880"/>
+            <a:off x="3124200" y="2895600"/>
+            <a:ext cx="1803400" cy="279400"/>
           </a:xfrm>
           <a:prstGeom prst="rect">
             <a:avLst/>
@@ -3774,7 +3786,7 @@
           <a:lstStyle/>
           <a:p>
             <a:pPr algn="ctr">
-              <a:defRPr sz="1000" b="1">
+              <a:defRPr sz="1300" b="1">
                 <a:solidFill>
                   <a:srgbClr val="2563EB"/>
                 </a:solidFill>
@@ -3795,8 +3807,8 @@
         </p:nvSpPr>
         <p:spPr>
           <a:xfrm>
-            <a:off x="2048256" y="3017520"/>
-            <a:ext cx="932688" cy="1188720"/>
+            <a:off x="3124200" y="3225800"/>
+            <a:ext cx="1803400" cy="1371600"/>
           </a:xfrm>
           <a:prstGeom prst="rect">
             <a:avLst/>
@@ -3810,7 +3822,7 @@
           <a:lstStyle/>
           <a:p>
             <a:pPr algn="ctr">
-              <a:defRPr sz="800" b="0">
+              <a:defRPr sz="1100" b="0">
                 <a:solidFill>
                   <a:srgbClr val="666680"/>
                 </a:solidFill>
@@ -3839,8 +3851,8 @@
         </p:nvSpPr>
         <p:spPr>
           <a:xfrm>
-            <a:off x="3218688" y="2697480"/>
-            <a:ext cx="1078992" cy="1691640"/>
+            <a:off x="5207000" y="2768600"/>
+            <a:ext cx="2006600" cy="1905000"/>
           </a:xfrm>
           <a:prstGeom prst="roundRect">
             <a:avLst/>
@@ -3873,6 +3885,7 @@
           <a:lstStyle/>
           <a:p>
             <a:pPr algn="ctr"/>
+            <a:endParaRPr/>
           </a:p>
         </p:txBody>
       </p:sp>
@@ -3884,8 +3897,8 @@
         </p:nvSpPr>
         <p:spPr>
           <a:xfrm>
-            <a:off x="3218688" y="2697480"/>
-            <a:ext cx="1078992" cy="38100"/>
+            <a:off x="5207000" y="2768600"/>
+            <a:ext cx="2006600" cy="50800"/>
           </a:xfrm>
           <a:prstGeom prst="rect">
             <a:avLst/>
@@ -3916,6 +3929,7 @@
           <a:lstStyle/>
           <a:p>
             <a:pPr algn="ctr"/>
+            <a:endParaRPr/>
           </a:p>
         </p:txBody>
       </p:sp>
@@ -3927,8 +3941,8 @@
         </p:nvSpPr>
         <p:spPr>
           <a:xfrm>
-            <a:off x="3291840" y="2788920"/>
-            <a:ext cx="932688" cy="182880"/>
+            <a:off x="5308600" y="2895600"/>
+            <a:ext cx="1803400" cy="279400"/>
           </a:xfrm>
           <a:prstGeom prst="rect">
             <a:avLst/>
@@ -3942,7 +3956,7 @@
           <a:lstStyle/>
           <a:p>
             <a:pPr algn="ctr">
-              <a:defRPr sz="1000" b="1">
+              <a:defRPr sz="1300" b="1">
                 <a:solidFill>
                   <a:srgbClr val="16A34A"/>
                 </a:solidFill>
@@ -3963,8 +3977,8 @@
         </p:nvSpPr>
         <p:spPr>
           <a:xfrm>
-            <a:off x="3291840" y="3017520"/>
-            <a:ext cx="932688" cy="1188720"/>
+            <a:off x="5308600" y="3225800"/>
+            <a:ext cx="1803400" cy="1371600"/>
           </a:xfrm>
           <a:prstGeom prst="rect">
             <a:avLst/>
@@ -3978,7 +3992,7 @@
           <a:lstStyle/>
           <a:p>
             <a:pPr algn="ctr">
-              <a:defRPr sz="800" b="0">
+              <a:defRPr sz="1100" b="0">
                 <a:solidFill>
                   <a:srgbClr val="666680"/>
                 </a:solidFill>
@@ -4007,8 +4021,8 @@
         </p:nvSpPr>
         <p:spPr>
           <a:xfrm>
-            <a:off x="4462272" y="2697480"/>
-            <a:ext cx="1078992" cy="1691640"/>
+            <a:off x="7391400" y="2768600"/>
+            <a:ext cx="2006600" cy="1905000"/>
           </a:xfrm>
           <a:prstGeom prst="roundRect">
             <a:avLst/>
@@ -4041,6 +4055,7 @@
           <a:lstStyle/>
           <a:p>
             <a:pPr algn="ctr"/>
+            <a:endParaRPr/>
           </a:p>
         </p:txBody>
       </p:sp>
@@ -4052,8 +4067,8 @@
         </p:nvSpPr>
         <p:spPr>
           <a:xfrm>
-            <a:off x="4462272" y="2697480"/>
-            <a:ext cx="1078992" cy="38100"/>
+            <a:off x="7391400" y="2768600"/>
+            <a:ext cx="2006600" cy="50800"/>
           </a:xfrm>
           <a:prstGeom prst="rect">
             <a:avLst/>
@@ -4084,6 +4099,7 @@
           <a:lstStyle/>
           <a:p>
             <a:pPr algn="ctr"/>
+            <a:endParaRPr/>
           </a:p>
         </p:txBody>
       </p:sp>
@@ -4095,8 +4111,8 @@
         </p:nvSpPr>
         <p:spPr>
           <a:xfrm>
-            <a:off x="4535424" y="2788920"/>
-            <a:ext cx="932688" cy="182880"/>
+            <a:off x="7493000" y="2895600"/>
+            <a:ext cx="1803400" cy="279400"/>
           </a:xfrm>
           <a:prstGeom prst="rect">
             <a:avLst/>
@@ -4110,7 +4126,7 @@
           <a:lstStyle/>
           <a:p>
             <a:pPr algn="ctr">
-              <a:defRPr sz="1000" b="1">
+              <a:defRPr sz="1300" b="1">
                 <a:solidFill>
                   <a:srgbClr val="EA880B"/>
                 </a:solidFill>
@@ -4131,8 +4147,8 @@
         </p:nvSpPr>
         <p:spPr>
           <a:xfrm>
-            <a:off x="4535424" y="3017520"/>
-            <a:ext cx="932688" cy="1188720"/>
+            <a:off x="7493000" y="3225800"/>
+            <a:ext cx="1803400" cy="1371600"/>
           </a:xfrm>
           <a:prstGeom prst="rect">
             <a:avLst/>
@@ -4146,7 +4162,7 @@
           <a:lstStyle/>
           <a:p>
             <a:pPr algn="ctr">
-              <a:defRPr sz="800" b="0">
+              <a:defRPr sz="1100" b="0">
                 <a:solidFill>
                   <a:srgbClr val="666680"/>
                 </a:solidFill>
@@ -4175,8 +4191,8 @@
         </p:nvSpPr>
         <p:spPr>
           <a:xfrm>
-            <a:off x="5705856" y="2697480"/>
-            <a:ext cx="1078992" cy="1691640"/>
+            <a:off x="9575800" y="2768600"/>
+            <a:ext cx="2006600" cy="1905000"/>
           </a:xfrm>
           <a:prstGeom prst="roundRect">
             <a:avLst/>
@@ -4209,6 +4225,7 @@
           <a:lstStyle/>
           <a:p>
             <a:pPr algn="ctr"/>
+            <a:endParaRPr/>
           </a:p>
         </p:txBody>
       </p:sp>
@@ -4220,8 +4237,8 @@
         </p:nvSpPr>
         <p:spPr>
           <a:xfrm>
-            <a:off x="5705856" y="2697480"/>
-            <a:ext cx="1078992" cy="38100"/>
+            <a:off x="9575800" y="2768600"/>
+            <a:ext cx="2006600" cy="50800"/>
           </a:xfrm>
           <a:prstGeom prst="rect">
             <a:avLst/>
@@ -4252,6 +4269,7 @@
           <a:lstStyle/>
           <a:p>
             <a:pPr algn="ctr"/>
+            <a:endParaRPr/>
           </a:p>
         </p:txBody>
       </p:sp>
@@ -4263,8 +4281,8 @@
         </p:nvSpPr>
         <p:spPr>
           <a:xfrm>
-            <a:off x="5779008" y="2788920"/>
-            <a:ext cx="932688" cy="182880"/>
+            <a:off x="9677400" y="2895600"/>
+            <a:ext cx="1803400" cy="279400"/>
           </a:xfrm>
           <a:prstGeom prst="rect">
             <a:avLst/>
@@ -4278,7 +4296,7 @@
           <a:lstStyle/>
           <a:p>
             <a:pPr algn="ctr">
-              <a:defRPr sz="1000" b="1">
+              <a:defRPr sz="1300" b="1">
                 <a:solidFill>
                   <a:srgbClr val="7C3AED"/>
                 </a:solidFill>
@@ -4299,8 +4317,8 @@
         </p:nvSpPr>
         <p:spPr>
           <a:xfrm>
-            <a:off x="5779008" y="3017520"/>
-            <a:ext cx="932688" cy="1188720"/>
+            <a:off x="9677400" y="3225800"/>
+            <a:ext cx="1803400" cy="1371600"/>
           </a:xfrm>
           <a:prstGeom prst="rect">
             <a:avLst/>
@@ -4314,7 +4332,7 @@
           <a:lstStyle/>
           <a:p>
             <a:pPr algn="ctr">
-              <a:defRPr sz="800" b="0">
+              <a:defRPr sz="1100" b="0">
                 <a:solidFill>
                   <a:srgbClr val="666680"/>
                 </a:solidFill>
@@ -4343,8 +4361,8 @@
         </p:nvSpPr>
         <p:spPr>
           <a:xfrm>
-            <a:off x="1271016" y="4434840"/>
-            <a:ext cx="25400" cy="411480"/>
+            <a:off x="1828800" y="4724400"/>
+            <a:ext cx="38100" cy="457200"/>
           </a:xfrm>
           <a:prstGeom prst="rect">
             <a:avLst/>
@@ -4375,6 +4393,7 @@
           <a:lstStyle/>
           <a:p>
             <a:pPr algn="ctr"/>
+            <a:endParaRPr/>
           </a:p>
         </p:txBody>
       </p:sp>
@@ -4386,8 +4405,8 @@
         </p:nvSpPr>
         <p:spPr>
           <a:xfrm>
-            <a:off x="2514600" y="4434840"/>
-            <a:ext cx="25400" cy="411480"/>
+            <a:off x="4013200" y="4724400"/>
+            <a:ext cx="38100" cy="457200"/>
           </a:xfrm>
           <a:prstGeom prst="rect">
             <a:avLst/>
@@ -4418,6 +4437,7 @@
           <a:lstStyle/>
           <a:p>
             <a:pPr algn="ctr"/>
+            <a:endParaRPr/>
           </a:p>
         </p:txBody>
       </p:sp>
@@ -4429,8 +4449,8 @@
         </p:nvSpPr>
         <p:spPr>
           <a:xfrm>
-            <a:off x="3758184" y="4434840"/>
-            <a:ext cx="25400" cy="411480"/>
+            <a:off x="6197600" y="4724400"/>
+            <a:ext cx="38100" cy="457200"/>
           </a:xfrm>
           <a:prstGeom prst="rect">
             <a:avLst/>
@@ -4461,6 +4481,7 @@
           <a:lstStyle/>
           <a:p>
             <a:pPr algn="ctr"/>
+            <a:endParaRPr/>
           </a:p>
         </p:txBody>
       </p:sp>
@@ -4472,8 +4493,8 @@
         </p:nvSpPr>
         <p:spPr>
           <a:xfrm>
-            <a:off x="5001768" y="4434840"/>
-            <a:ext cx="25400" cy="411480"/>
+            <a:off x="8382000" y="4724400"/>
+            <a:ext cx="38100" cy="457200"/>
           </a:xfrm>
           <a:prstGeom prst="rect">
             <a:avLst/>
@@ -4504,6 +4525,7 @@
           <a:lstStyle/>
           <a:p>
             <a:pPr algn="ctr"/>
+            <a:endParaRPr/>
           </a:p>
         </p:txBody>
       </p:sp>
@@ -4515,8 +4537,8 @@
         </p:nvSpPr>
         <p:spPr>
           <a:xfrm>
-            <a:off x="5943600" y="4434840"/>
-            <a:ext cx="25400" cy="411480"/>
+            <a:off x="10566400" y="4724400"/>
+            <a:ext cx="38100" cy="457200"/>
           </a:xfrm>
           <a:prstGeom prst="rect">
             <a:avLst/>
@@ -4547,6 +4569,7 @@
           <a:lstStyle/>
           <a:p>
             <a:pPr algn="ctr"/>
+            <a:endParaRPr/>
           </a:p>
         </p:txBody>
       </p:sp>
@@ -4558,8 +4581,8 @@
         </p:nvSpPr>
         <p:spPr>
           <a:xfrm>
-            <a:off x="548640" y="4892040"/>
-            <a:ext cx="1133856" cy="777240"/>
+            <a:off x="635000" y="5232400"/>
+            <a:ext cx="2082800" cy="863600"/>
           </a:xfrm>
           <a:prstGeom prst="roundRect">
             <a:avLst/>
@@ -4592,6 +4615,7 @@
           <a:lstStyle/>
           <a:p>
             <a:pPr algn="ctr"/>
+            <a:endParaRPr/>
           </a:p>
         </p:txBody>
       </p:sp>
@@ -4603,8 +4627,8 @@
         </p:nvSpPr>
         <p:spPr>
           <a:xfrm>
-            <a:off x="603504" y="4983480"/>
-            <a:ext cx="1024128" cy="182880"/>
+            <a:off x="711200" y="5334000"/>
+            <a:ext cx="1930400" cy="279400"/>
           </a:xfrm>
           <a:prstGeom prst="rect">
             <a:avLst/>
@@ -4618,7 +4642,7 @@
           <a:lstStyle/>
           <a:p>
             <a:pPr algn="ctr">
-              <a:defRPr sz="1000" b="1">
+              <a:defRPr sz="1300" b="1">
                 <a:solidFill>
                   <a:srgbClr val="E63946"/>
                 </a:solidFill>
@@ -4639,8 +4663,8 @@
         </p:nvSpPr>
         <p:spPr>
           <a:xfrm>
-            <a:off x="603504" y="5239512"/>
-            <a:ext cx="1024128" cy="274320"/>
+            <a:off x="711200" y="5664200"/>
+            <a:ext cx="1930400" cy="330200"/>
           </a:xfrm>
           <a:prstGeom prst="rect">
             <a:avLst/>
@@ -4654,7 +4678,7 @@
           <a:lstStyle/>
           <a:p>
             <a:pPr algn="ctr">
-              <a:defRPr sz="800" b="0">
+              <a:defRPr sz="1100" b="0">
                 <a:solidFill>
                   <a:srgbClr val="666680"/>
                 </a:solidFill>
@@ -4675,8 +4699,8 @@
         </p:nvSpPr>
         <p:spPr>
           <a:xfrm>
-            <a:off x="1847088" y="4892040"/>
-            <a:ext cx="1133856" cy="777240"/>
+            <a:off x="2844800" y="5232400"/>
+            <a:ext cx="2082800" cy="863600"/>
           </a:xfrm>
           <a:prstGeom prst="roundRect">
             <a:avLst/>
@@ -4709,6 +4733,7 @@
           <a:lstStyle/>
           <a:p>
             <a:pPr algn="ctr"/>
+            <a:endParaRPr/>
           </a:p>
         </p:txBody>
       </p:sp>
@@ -4720,8 +4745,8 @@
         </p:nvSpPr>
         <p:spPr>
           <a:xfrm>
-            <a:off x="1901952" y="4983480"/>
-            <a:ext cx="1024128" cy="182880"/>
+            <a:off x="2921000" y="5334000"/>
+            <a:ext cx="1930400" cy="279400"/>
           </a:xfrm>
           <a:prstGeom prst="rect">
             <a:avLst/>
@@ -4735,7 +4760,7 @@
           <a:lstStyle/>
           <a:p>
             <a:pPr algn="ctr">
-              <a:defRPr sz="1000" b="1">
+              <a:defRPr sz="1300" b="1">
                 <a:solidFill>
                   <a:srgbClr val="2563EB"/>
                 </a:solidFill>
@@ -4756,8 +4781,8 @@
         </p:nvSpPr>
         <p:spPr>
           <a:xfrm>
-            <a:off x="1901952" y="5239512"/>
-            <a:ext cx="1024128" cy="274320"/>
+            <a:off x="2921000" y="5664200"/>
+            <a:ext cx="1930400" cy="330200"/>
           </a:xfrm>
           <a:prstGeom prst="rect">
             <a:avLst/>
@@ -4771,7 +4796,7 @@
           <a:lstStyle/>
           <a:p>
             <a:pPr algn="ctr">
-              <a:defRPr sz="800" b="0">
+              <a:defRPr sz="1100" b="0">
                 <a:solidFill>
                   <a:srgbClr val="666680"/>
                 </a:solidFill>
@@ -4792,8 +4817,8 @@
         </p:nvSpPr>
         <p:spPr>
           <a:xfrm>
-            <a:off x="3145536" y="4892040"/>
-            <a:ext cx="1133856" cy="777240"/>
+            <a:off x="5054600" y="5232400"/>
+            <a:ext cx="2082800" cy="863600"/>
           </a:xfrm>
           <a:prstGeom prst="roundRect">
             <a:avLst/>
@@ -4826,6 +4851,7 @@
           <a:lstStyle/>
           <a:p>
             <a:pPr algn="ctr"/>
+            <a:endParaRPr/>
           </a:p>
         </p:txBody>
       </p:sp>
@@ -4837,8 +4863,8 @@
         </p:nvSpPr>
         <p:spPr>
           <a:xfrm>
-            <a:off x="3200400" y="4983480"/>
-            <a:ext cx="1024128" cy="182880"/>
+            <a:off x="5130800" y="5334000"/>
+            <a:ext cx="1930400" cy="279400"/>
           </a:xfrm>
           <a:prstGeom prst="rect">
             <a:avLst/>
@@ -4852,7 +4878,7 @@
           <a:lstStyle/>
           <a:p>
             <a:pPr algn="ctr">
-              <a:defRPr sz="1000" b="1">
+              <a:defRPr sz="1300" b="1">
                 <a:solidFill>
                   <a:srgbClr val="EA880B"/>
                 </a:solidFill>
@@ -4873,8 +4899,8 @@
         </p:nvSpPr>
         <p:spPr>
           <a:xfrm>
-            <a:off x="3200400" y="5239512"/>
-            <a:ext cx="1024128" cy="274320"/>
+            <a:off x="5130800" y="5664200"/>
+            <a:ext cx="1930400" cy="330200"/>
           </a:xfrm>
           <a:prstGeom prst="rect">
             <a:avLst/>
@@ -4888,7 +4914,7 @@
           <a:lstStyle/>
           <a:p>
             <a:pPr algn="ctr">
-              <a:defRPr sz="800" b="0">
+              <a:defRPr sz="1100" b="0">
                 <a:solidFill>
                   <a:srgbClr val="666680"/>
                 </a:solidFill>
@@ -4909,8 +4935,8 @@
         </p:nvSpPr>
         <p:spPr>
           <a:xfrm>
-            <a:off x="4443983" y="4892040"/>
-            <a:ext cx="1133856" cy="777240"/>
+            <a:off x="7264400" y="5232400"/>
+            <a:ext cx="2082800" cy="863600"/>
           </a:xfrm>
           <a:prstGeom prst="roundRect">
             <a:avLst/>
@@ -4943,6 +4969,7 @@
           <a:lstStyle/>
           <a:p>
             <a:pPr algn="ctr"/>
+            <a:endParaRPr/>
           </a:p>
         </p:txBody>
       </p:sp>
@@ -4954,8 +4981,8 @@
         </p:nvSpPr>
         <p:spPr>
           <a:xfrm>
-            <a:off x="4498847" y="4983480"/>
-            <a:ext cx="1024128" cy="182880"/>
+            <a:off x="7340600" y="5334000"/>
+            <a:ext cx="1930400" cy="279400"/>
           </a:xfrm>
           <a:prstGeom prst="rect">
             <a:avLst/>
@@ -4969,7 +4996,7 @@
           <a:lstStyle/>
           <a:p>
             <a:pPr algn="ctr">
-              <a:defRPr sz="1000" b="1">
+              <a:defRPr sz="1300" b="1">
                 <a:solidFill>
                   <a:srgbClr val="7C3AED"/>
                 </a:solidFill>
@@ -4990,8 +5017,8 @@
         </p:nvSpPr>
         <p:spPr>
           <a:xfrm>
-            <a:off x="4498847" y="5239512"/>
-            <a:ext cx="1024128" cy="274320"/>
+            <a:off x="7340600" y="5664200"/>
+            <a:ext cx="1930400" cy="330200"/>
           </a:xfrm>
           <a:prstGeom prst="rect">
             <a:avLst/>
@@ -5005,7 +5032,7 @@
           <a:lstStyle/>
           <a:p>
             <a:pPr algn="ctr">
-              <a:defRPr sz="800" b="0">
+              <a:defRPr sz="1100" b="0">
                 <a:solidFill>
                   <a:srgbClr val="666680"/>
                 </a:solidFill>
@@ -5026,8 +5053,8 @@
         </p:nvSpPr>
         <p:spPr>
           <a:xfrm>
-            <a:off x="5742431" y="4892040"/>
-            <a:ext cx="1133856" cy="777240"/>
+            <a:off x="9474200" y="5232400"/>
+            <a:ext cx="2082800" cy="863600"/>
           </a:xfrm>
           <a:prstGeom prst="roundRect">
             <a:avLst/>
@@ -5060,6 +5087,7 @@
           <a:lstStyle/>
           <a:p>
             <a:pPr algn="ctr"/>
+            <a:endParaRPr/>
           </a:p>
         </p:txBody>
       </p:sp>
@@ -5071,8 +5099,8 @@
         </p:nvSpPr>
         <p:spPr>
           <a:xfrm>
-            <a:off x="5797295" y="4983480"/>
-            <a:ext cx="1024128" cy="182880"/>
+            <a:off x="9550400" y="5334000"/>
+            <a:ext cx="1930400" cy="279400"/>
           </a:xfrm>
           <a:prstGeom prst="rect">
             <a:avLst/>
@@ -5086,7 +5114,7 @@
           <a:lstStyle/>
           <a:p>
             <a:pPr algn="ctr">
-              <a:defRPr sz="1000" b="1">
+              <a:defRPr sz="1300" b="1">
                 <a:solidFill>
                   <a:srgbClr val="16A34A"/>
                 </a:solidFill>
@@ -5107,8 +5135,8 @@
         </p:nvSpPr>
         <p:spPr>
           <a:xfrm>
-            <a:off x="5797295" y="5239512"/>
-            <a:ext cx="1024128" cy="274320"/>
+            <a:off x="9550400" y="5664200"/>
+            <a:ext cx="1930400" cy="330200"/>
           </a:xfrm>
           <a:prstGeom prst="rect">
             <a:avLst/>
@@ -5122,7 +5150,7 @@
           <a:lstStyle/>
           <a:p>
             <a:pPr algn="ctr">
-              <a:defRPr sz="800" b="0">
+              <a:defRPr sz="1100" b="0">
                 <a:solidFill>
                   <a:srgbClr val="666680"/>
                 </a:solidFill>
@@ -5143,8 +5171,8 @@
         </p:nvSpPr>
         <p:spPr>
           <a:xfrm>
-            <a:off x="2514600" y="4617720"/>
-            <a:ext cx="1243584" cy="25400"/>
+            <a:off x="4140200" y="4978400"/>
+            <a:ext cx="1968500" cy="25400"/>
           </a:xfrm>
           <a:prstGeom prst="rect">
             <a:avLst/>
@@ -5175,6 +5203,7 @@
           <a:lstStyle/>
           <a:p>
             <a:pPr algn="ctr"/>
+            <a:endParaRPr/>
           </a:p>
         </p:txBody>
       </p:sp>
@@ -5186,8 +5215,8 @@
         </p:nvSpPr>
         <p:spPr>
           <a:xfrm>
-            <a:off x="548640" y="5806440"/>
-            <a:ext cx="6400800" cy="182880"/>
+            <a:off x="635000" y="6172200"/>
+            <a:ext cx="10922000" cy="228600"/>
           </a:xfrm>
           <a:prstGeom prst="rect">
             <a:avLst/>
@@ -5201,7 +5230,7 @@
           <a:lstStyle/>
           <a:p>
             <a:pPr algn="l">
-              <a:defRPr sz="800" b="0">
+              <a:defRPr sz="1000" b="0">
                 <a:solidFill>
                   <a:srgbClr val="9CA3AF"/>
                 </a:solidFill>
@@ -5216,17 +5245,217 @@
       </p:sp>
       <p:sp>
         <p:nvSpPr>
-          <p:cNvPr id="54" name="Rounded Rectangle 53"/>
-          <p:cNvSpPr/>
-          <p:nvPr/>
-        </p:nvSpPr>
-        <p:spPr>
-          <a:xfrm>
-            <a:off x="7315200" y="1097280"/>
-            <a:ext cx="4572000" cy="457200"/>
+          <p:cNvPr id="118" name="TextBox 117"/>
+          <p:cNvSpPr txBox="1"/>
+          <p:nvPr/>
+        </p:nvSpPr>
+        <p:spPr>
+          <a:xfrm>
+            <a:off x="635000" y="6451600"/>
+            <a:ext cx="10922000" cy="203200"/>
+          </a:xfrm>
+          <a:prstGeom prst="rect">
+            <a:avLst/>
+          </a:prstGeom>
+          <a:noFill/>
+        </p:spPr>
+        <p:txBody>
+          <a:bodyPr wrap="square">
+            <a:spAutoFit/>
+          </a:bodyPr>
+          <a:lstStyle/>
+          <a:p>
+            <a:pPr algn="l">
+              <a:defRPr sz="1000" b="0">
+                <a:solidFill>
+                  <a:srgbClr val="9CA3AF"/>
+                </a:solidFill>
+                <a:latin typeface="Meiryo UI"/>
+              </a:defRPr>
+            </a:pPr>
+            <a:r>
+              <a:t>LIVE SPOtCH  |  LIN-NAH株式会社  |  2026年4月</a:t>
+            </a:r>
+          </a:p>
+        </p:txBody>
+      </p:sp>
+    </p:spTree>
+    <p:extLst>
+      <p:ext uri="{BB962C8B-B14F-4D97-AF65-F5344CB8AC3E}">
+        <p14:creationId xmlns:p14="http://schemas.microsoft.com/office/powerpoint/2010/main" val="2825351629"/>
+      </p:ext>
+    </p:extLst>
+  </p:cSld>
+  <p:clrMapOvr>
+    <a:masterClrMapping/>
+  </p:clrMapOvr>
+</p:sld>
+</file>
+
+<file path=ppt/slides/slide2.xml><?xml version="1.0" encoding="utf-8"?>
+<p:sld xmlns:a="http://schemas.openxmlformats.org/drawingml/2006/main" xmlns:r="http://schemas.openxmlformats.org/officeDocument/2006/relationships" xmlns:p="http://schemas.openxmlformats.org/presentationml/2006/main">
+  <p:cSld>
+    <p:spTree>
+      <p:nvGrpSpPr>
+        <p:cNvPr id="1" name=""/>
+        <p:cNvGrpSpPr/>
+        <p:nvPr/>
+      </p:nvGrpSpPr>
+      <p:grpSpPr>
+        <a:xfrm>
+          <a:off x="0" y="0"/>
+          <a:ext cx="0" cy="0"/>
+          <a:chOff x="0" y="0"/>
+          <a:chExt cx="0" cy="0"/>
+        </a:xfrm>
+      </p:grpSpPr>
+      <p:sp>
+        <p:nvSpPr>
+          <p:cNvPr id="2" name="AccentBar"/>
+          <p:cNvSpPr/>
+          <p:nvPr/>
+        </p:nvSpPr>
+        <p:spPr>
+          <a:xfrm>
+            <a:off x="0" y="0"/>
+            <a:ext cx="63500" cy="6858000"/>
+          </a:xfrm>
+          <a:prstGeom prst="rect">
+            <a:avLst/>
+          </a:prstGeom>
+          <a:solidFill>
+            <a:srgbClr val="E63946"/>
+          </a:solidFill>
+          <a:ln>
+            <a:noFill/>
+          </a:ln>
+        </p:spPr>
+        <p:txBody>
+          <a:bodyPr/>
+          <a:lstStyle/>
+          <a:p>
+            <a:endParaRPr lang="ja-JP" altLang="en-US"/>
+          </a:p>
+        </p:txBody>
+      </p:sp>
+      <p:sp>
+        <p:nvSpPr>
+          <p:cNvPr id="3" name="Title"/>
+          <p:cNvSpPr/>
+          <p:nvPr/>
+        </p:nvSpPr>
+        <p:spPr>
+          <a:xfrm>
+            <a:off x="546100" y="203200"/>
+            <a:ext cx="10160000" cy="431800"/>
+          </a:xfrm>
+          <a:prstGeom prst="rect">
+            <a:avLst/>
+          </a:prstGeom>
+          <a:noFill/>
+          <a:ln>
+            <a:noFill/>
+          </a:ln>
+        </p:spPr>
+        <p:txBody>
+          <a:bodyPr wrap="square" lIns="0" tIns="0" rIns="0" bIns="0"/>
+          <a:lstStyle/>
+          <a:p>
+            <a:pPr algn="l"/>
+            <a:r>
+              <a:rPr lang="ja-JP" altLang="en-US" sz="2600" b="1" dirty="0">
+                <a:solidFill>
+                  <a:srgbClr val="0F172A"/>
+                </a:solidFill>
+                <a:latin typeface="Meiryo UI"/>
+                <a:ea typeface="Meiryo UI"/>
+              </a:rPr>
+              <a:t>LIVE SPOtCH — 将来の拡張ポイント</a:t>
+            </a:r>
+          </a:p>
+        </p:txBody>
+      </p:sp>
+      <p:sp>
+        <p:nvSpPr>
+          <p:cNvPr id="4" name="Subtitle"/>
+          <p:cNvSpPr/>
+          <p:nvPr/>
+        </p:nvSpPr>
+        <p:spPr>
+          <a:xfrm>
+            <a:off x="546100" y="635000"/>
+            <a:ext cx="10160000" cy="279400"/>
+          </a:xfrm>
+          <a:prstGeom prst="rect">
+            <a:avLst/>
+          </a:prstGeom>
+          <a:noFill/>
+          <a:ln>
+            <a:noFill/>
+          </a:ln>
+        </p:spPr>
+        <p:txBody>
+          <a:bodyPr wrap="square" lIns="0" tIns="0" rIns="0" bIns="0"/>
+          <a:lstStyle/>
+          <a:p>
+            <a:pPr algn="l"/>
+            <a:r>
+              <a:rPr lang="ja-JP" altLang="en-US" sz="1400" dirty="0">
+                <a:solidFill>
+                  <a:srgbClr val="666680"/>
+                </a:solidFill>
+                <a:latin typeface="Meiryo UI"/>
+                <a:ea typeface="Meiryo UI"/>
+              </a:rPr>
+              <a:t>機能拡張ロードマップと概算費用</a:t>
+            </a:r>
+          </a:p>
+        </p:txBody>
+      </p:sp>
+      <p:sp>
+        <p:nvSpPr>
+          <p:cNvPr id="5" name="AccentLine"/>
+          <p:cNvSpPr/>
+          <p:nvPr/>
+        </p:nvSpPr>
+        <p:spPr>
+          <a:xfrm>
+            <a:off x="546100" y="939800"/>
+            <a:ext cx="914400" cy="38100"/>
+          </a:xfrm>
+          <a:prstGeom prst="rect">
+            <a:avLst/>
+          </a:prstGeom>
+          <a:solidFill>
+            <a:srgbClr val="E63946"/>
+          </a:solidFill>
+          <a:ln>
+            <a:noFill/>
+          </a:ln>
+        </p:spPr>
+        <p:txBody>
+          <a:bodyPr/>
+          <a:lstStyle/>
+          <a:p>
+            <a:endParaRPr lang="ja-JP" altLang="en-US"/>
+          </a:p>
+        </p:txBody>
+      </p:sp>
+      <p:sp>
+        <p:nvSpPr>
+          <p:cNvPr id="6" name="HeaderBar"/>
+          <p:cNvSpPr/>
+          <p:nvPr/>
+        </p:nvSpPr>
+        <p:spPr>
+          <a:xfrm>
+            <a:off x="546100" y="1041400"/>
+            <a:ext cx="11099800" cy="457200"/>
           </a:xfrm>
           <a:prstGeom prst="roundRect">
-            <a:avLst/>
+            <a:avLst>
+              <a:gd name="adj" fmla="val 10000"/>
+            </a:avLst>
           </a:prstGeom>
           <a:solidFill>
             <a:srgbClr val="0F172A"/>
@@ -5235,122 +5464,1472 @@
             <a:noFill/>
           </a:ln>
         </p:spPr>
-        <p:style>
-          <a:lnRef idx="1">
-            <a:schemeClr val="accent1"/>
-          </a:lnRef>
-          <a:fillRef idx="3">
-            <a:schemeClr val="accent1"/>
-          </a:fillRef>
-          <a:effectRef idx="2">
-            <a:schemeClr val="accent1"/>
-          </a:effectRef>
-          <a:fontRef idx="minor">
-            <a:schemeClr val="lt1"/>
-          </a:fontRef>
-        </p:style>
-        <p:txBody>
-          <a:bodyPr rtlCol="0" anchor="ctr"/>
+        <p:txBody>
+          <a:bodyPr wrap="square" lIns="91440" tIns="0" rIns="91440" bIns="0" anchor="ctr"/>
+          <a:lstStyle/>
+          <a:p>
+            <a:pPr algn="l"/>
+            <a:r>
+              <a:rPr lang="ja-JP" altLang="en-US" sz="1800" b="1" dirty="0">
+                <a:solidFill>
+                  <a:srgbClr val="FFFFFF"/>
+                </a:solidFill>
+                <a:latin typeface="Meiryo UI"/>
+                <a:ea typeface="Meiryo UI"/>
+              </a:rPr>
+              <a:t>将来の拡張ポイント &amp; 概算費用</a:t>
+            </a:r>
+          </a:p>
+        </p:txBody>
+      </p:sp>
+      <p:sp>
+        <p:nvSpPr>
+          <p:cNvPr id="10" name="Row0Bg"/>
+          <p:cNvSpPr/>
+          <p:nvPr/>
+        </p:nvSpPr>
+        <p:spPr>
+          <a:xfrm>
+            <a:off x="546100" y="1549400"/>
+            <a:ext cx="11099800" cy="736600"/>
+          </a:xfrm>
+          <a:prstGeom prst="roundRect">
+            <a:avLst>
+              <a:gd name="adj" fmla="val 8000"/>
+            </a:avLst>
+          </a:prstGeom>
+          <a:solidFill>
+            <a:srgbClr val="F3F4F6"/>
+          </a:solidFill>
+          <a:ln w="6350">
+            <a:solidFill>
+              <a:srgbClr val="E5E7EB"/>
+            </a:solidFill>
+          </a:ln>
+        </p:spPr>
+        <p:txBody>
+          <a:bodyPr/>
+          <a:lstStyle/>
+          <a:p>
+            <a:endParaRPr lang="ja-JP" altLang="en-US"/>
+          </a:p>
+        </p:txBody>
+      </p:sp>
+      <p:sp>
+        <p:nvSpPr>
+          <p:cNvPr id="11" name="Row0Ver"/>
+          <p:cNvSpPr/>
+          <p:nvPr/>
+        </p:nvSpPr>
+        <p:spPr>
+          <a:xfrm>
+            <a:off x="673100" y="1739900"/>
+            <a:ext cx="660400" cy="355600"/>
+          </a:xfrm>
+          <a:prstGeom prst="roundRect">
+            <a:avLst>
+              <a:gd name="adj" fmla="val 25000"/>
+            </a:avLst>
+          </a:prstGeom>
+          <a:solidFill>
+            <a:srgbClr val="2563EB"/>
+          </a:solidFill>
+          <a:ln>
+            <a:noFill/>
+          </a:ln>
+        </p:spPr>
+        <p:txBody>
+          <a:bodyPr wrap="square" lIns="0" tIns="0" rIns="0" bIns="0" anchor="ctr"/>
           <a:lstStyle/>
           <a:p>
             <a:pPr algn="ctr"/>
-          </a:p>
-        </p:txBody>
-      </p:sp>
-      <p:sp>
-        <p:nvSpPr>
-          <p:cNvPr id="55" name="TextBox 54"/>
-          <p:cNvSpPr txBox="1"/>
-          <p:nvPr/>
-        </p:nvSpPr>
-        <p:spPr>
-          <a:xfrm>
-            <a:off x="7498080" y="1143000"/>
-            <a:ext cx="4206240" cy="365760"/>
+            <a:r>
+              <a:rPr lang="en-US" altLang="ja-JP" sz="1300" b="1" dirty="0">
+                <a:solidFill>
+                  <a:srgbClr val="FFFFFF"/>
+                </a:solidFill>
+                <a:latin typeface="Meiryo UI"/>
+                <a:ea typeface="Meiryo UI"/>
+              </a:rPr>
+              <a:t>v1.0</a:t>
+            </a:r>
+          </a:p>
+        </p:txBody>
+      </p:sp>
+      <p:sp>
+        <p:nvSpPr>
+          <p:cNvPr id="12" name="Row0Name"/>
+          <p:cNvSpPr/>
+          <p:nvPr/>
+        </p:nvSpPr>
+        <p:spPr>
+          <a:xfrm>
+            <a:off x="1460500" y="1612900"/>
+            <a:ext cx="2540000" cy="304800"/>
           </a:xfrm>
           <a:prstGeom prst="rect">
             <a:avLst/>
           </a:prstGeom>
           <a:noFill/>
-        </p:spPr>
-        <p:txBody>
-          <a:bodyPr wrap="square">
-            <a:spAutoFit/>
-          </a:bodyPr>
-          <a:lstStyle/>
-          <a:p>
-            <a:pPr algn="l">
-              <a:defRPr sz="1500" b="1">
+          <a:ln>
+            <a:noFill/>
+          </a:ln>
+        </p:spPr>
+        <p:txBody>
+          <a:bodyPr wrap="square" lIns="0" tIns="0" rIns="0" bIns="0"/>
+          <a:lstStyle/>
+          <a:p>
+            <a:pPr algn="l"/>
+            <a:r>
+              <a:rPr lang="ja-JP" altLang="en-US" sz="1600" b="1" dirty="0">
+                <a:solidFill>
+                  <a:srgbClr val="0F172A"/>
+                </a:solidFill>
+                <a:latin typeface="Meiryo UI"/>
+                <a:ea typeface="Meiryo UI"/>
+              </a:rPr>
+              <a:t>得点リモコン</a:t>
+            </a:r>
+          </a:p>
+        </p:txBody>
+      </p:sp>
+      <p:sp>
+        <p:nvSpPr>
+          <p:cNvPr id="13" name="Row0Desc"/>
+          <p:cNvSpPr/>
+          <p:nvPr/>
+        </p:nvSpPr>
+        <p:spPr>
+          <a:xfrm>
+            <a:off x="1460500" y="1917700"/>
+            <a:ext cx="2540000" cy="330200"/>
+          </a:xfrm>
+          <a:prstGeom prst="rect">
+            <a:avLst/>
+          </a:prstGeom>
+          <a:noFill/>
+          <a:ln>
+            <a:noFill/>
+          </a:ln>
+        </p:spPr>
+        <p:txBody>
+          <a:bodyPr wrap="square" lIns="0" tIns="0" rIns="0" bIns="0"/>
+          <a:lstStyle/>
+          <a:p>
+            <a:pPr algn="l"/>
+            <a:r>
+              <a:rPr lang="ja-JP" altLang="en-US" sz="1200" dirty="0">
+                <a:solidFill>
+                  <a:srgbClr val="666680"/>
+                </a:solidFill>
+                <a:latin typeface="Meiryo UI"/>
+                <a:ea typeface="Meiryo UI"/>
+              </a:rPr>
+              <a:t>別デバイスからスコア操作</a:t>
+            </a:r>
+            <a:br/>
+            <a:r>
+              <a:rPr lang="ja-JP" altLang="en-US" sz="1200" dirty="0">
+                <a:solidFill>
+                  <a:srgbClr val="666680"/>
+                </a:solidFill>
+                <a:latin typeface="Meiryo UI"/>
+                <a:ea typeface="Meiryo UI"/>
+              </a:rPr>
+              <a:t>撮影者は撮影に集中</a:t>
+            </a:r>
+          </a:p>
+        </p:txBody>
+      </p:sp>
+      <p:sp>
+        <p:nvSpPr>
+          <p:cNvPr id="14" name="Row0TechLabel"/>
+          <p:cNvSpPr/>
+          <p:nvPr/>
+        </p:nvSpPr>
+        <p:spPr>
+          <a:xfrm>
+            <a:off x="4229100" y="1612900"/>
+            <a:ext cx="2286000" cy="203200"/>
+          </a:xfrm>
+          <a:prstGeom prst="rect">
+            <a:avLst/>
+          </a:prstGeom>
+          <a:noFill/>
+          <a:ln>
+            <a:noFill/>
+          </a:ln>
+        </p:spPr>
+        <p:txBody>
+          <a:bodyPr wrap="square" lIns="0" tIns="0" rIns="0" bIns="0"/>
+          <a:lstStyle/>
+          <a:p>
+            <a:pPr algn="l"/>
+            <a:r>
+              <a:rPr lang="ja-JP" altLang="en-US" sz="1100" dirty="0">
+                <a:solidFill>
+                  <a:srgbClr val="9CA3AF"/>
+                </a:solidFill>
+                <a:latin typeface="Meiryo UI"/>
+                <a:ea typeface="Meiryo UI"/>
+              </a:rPr>
+              <a:t>技術:</a:t>
+            </a:r>
+          </a:p>
+        </p:txBody>
+      </p:sp>
+      <p:sp>
+        <p:nvSpPr>
+          <p:cNvPr id="15" name="Row0Tech"/>
+          <p:cNvSpPr/>
+          <p:nvPr/>
+        </p:nvSpPr>
+        <p:spPr>
+          <a:xfrm>
+            <a:off x="4229100" y="1816100"/>
+            <a:ext cx="2286000" cy="406400"/>
+          </a:xfrm>
+          <a:prstGeom prst="rect">
+            <a:avLst/>
+          </a:prstGeom>
+          <a:noFill/>
+          <a:ln>
+            <a:noFill/>
+          </a:ln>
+        </p:spPr>
+        <p:txBody>
+          <a:bodyPr wrap="square" lIns="0" tIns="0" rIns="0" bIns="0"/>
+          <a:lstStyle/>
+          <a:p>
+            <a:pPr algn="l"/>
+            <a:r>
+              <a:rPr lang="ja-JP" altLang="en-US" sz="1200" dirty="0">
+                <a:solidFill>
+                  <a:srgbClr val="1A1A2E"/>
+                </a:solidFill>
+                <a:latin typeface="Meiryo UI"/>
+                <a:ea typeface="Meiryo UI"/>
+              </a:rPr>
+              <a:t>WebSocket / Supabase Realtime</a:t>
+            </a:r>
+          </a:p>
+        </p:txBody>
+      </p:sp>
+      <p:sp>
+        <p:nvSpPr>
+          <p:cNvPr id="16" name="Row0Period"/>
+          <p:cNvSpPr/>
+          <p:nvPr/>
+        </p:nvSpPr>
+        <p:spPr>
+          <a:xfrm>
+            <a:off x="6769100" y="1612900"/>
+            <a:ext cx="1524000" cy="203200"/>
+          </a:xfrm>
+          <a:prstGeom prst="rect">
+            <a:avLst/>
+          </a:prstGeom>
+          <a:noFill/>
+          <a:ln>
+            <a:noFill/>
+          </a:ln>
+        </p:spPr>
+        <p:txBody>
+          <a:bodyPr wrap="square" lIns="0" tIns="0" rIns="0" bIns="0"/>
+          <a:lstStyle/>
+          <a:p>
+            <a:pPr algn="l"/>
+            <a:r>
+              <a:rPr lang="ja-JP" altLang="en-US" sz="1100" dirty="0">
+                <a:solidFill>
+                  <a:srgbClr val="9CA3AF"/>
+                </a:solidFill>
+                <a:latin typeface="Meiryo UI"/>
+                <a:ea typeface="Meiryo UI"/>
+              </a:rPr>
+              <a:t>期間:</a:t>
+            </a:r>
+          </a:p>
+        </p:txBody>
+      </p:sp>
+      <p:sp>
+        <p:nvSpPr>
+          <p:cNvPr id="17" name="Row0PeriodVal"/>
+          <p:cNvSpPr/>
+          <p:nvPr/>
+        </p:nvSpPr>
+        <p:spPr>
+          <a:xfrm>
+            <a:off x="6769100" y="1816100"/>
+            <a:ext cx="1524000" cy="279400"/>
+          </a:xfrm>
+          <a:prstGeom prst="rect">
+            <a:avLst/>
+          </a:prstGeom>
+          <a:noFill/>
+          <a:ln>
+            <a:noFill/>
+          </a:ln>
+        </p:spPr>
+        <p:txBody>
+          <a:bodyPr wrap="square" lIns="0" tIns="0" rIns="0" bIns="0"/>
+          <a:lstStyle/>
+          <a:p>
+            <a:pPr algn="l"/>
+            <a:r>
+              <a:rPr lang="ja-JP" altLang="en-US" sz="1300" dirty="0">
+                <a:solidFill>
+                  <a:srgbClr val="1A1A2E"/>
+                </a:solidFill>
+                <a:latin typeface="Meiryo UI"/>
+                <a:ea typeface="Meiryo UI"/>
+              </a:rPr>
+              <a:t>2-3週間</a:t>
+            </a:r>
+          </a:p>
+        </p:txBody>
+      </p:sp>
+      <p:sp>
+        <p:nvSpPr>
+          <p:cNvPr id="18" name="Row0Cost"/>
+          <p:cNvSpPr/>
+          <p:nvPr/>
+        </p:nvSpPr>
+        <p:spPr>
+          <a:xfrm>
+            <a:off x="8674100" y="1651000"/>
+            <a:ext cx="2794000" cy="533400"/>
+          </a:xfrm>
+          <a:prstGeom prst="roundRect">
+            <a:avLst>
+              <a:gd name="adj" fmla="val 15000"/>
+            </a:avLst>
+          </a:prstGeom>
+          <a:solidFill>
+            <a:srgbClr val="FFFFFF"/>
+          </a:solidFill>
+          <a:ln w="6350">
+            <a:solidFill>
+              <a:srgbClr val="DC2626"/>
+            </a:solidFill>
+          </a:ln>
+        </p:spPr>
+        <p:txBody>
+          <a:bodyPr wrap="square" lIns="0" tIns="0" rIns="0" bIns="0" anchor="ctr"/>
+          <a:lstStyle/>
+          <a:p>
+            <a:pPr algn="ctr"/>
+            <a:r>
+              <a:rPr lang="ja-JP" altLang="en-US" sz="1400" b="1" dirty="0">
+                <a:solidFill>
+                  <a:srgbClr val="DC2626"/>
+                </a:solidFill>
+                <a:latin typeface="Meiryo UI"/>
+                <a:ea typeface="Meiryo UI"/>
+              </a:rPr>
+              <a:t>約30〜50万円</a:t>
+            </a:r>
+          </a:p>
+        </p:txBody>
+      </p:sp>
+      <p:sp>
+        <p:nvSpPr>
+          <p:cNvPr id="19" name="Row1Bg"/>
+          <p:cNvSpPr/>
+          <p:nvPr/>
+        </p:nvSpPr>
+        <p:spPr>
+          <a:xfrm>
+            <a:off x="546100" y="2336800"/>
+            <a:ext cx="11099800" cy="736600"/>
+          </a:xfrm>
+          <a:prstGeom prst="roundRect">
+            <a:avLst>
+              <a:gd name="adj" fmla="val 8000"/>
+            </a:avLst>
+          </a:prstGeom>
+          <a:solidFill>
+            <a:srgbClr val="F3F4F6"/>
+          </a:solidFill>
+          <a:ln w="6350">
+            <a:solidFill>
+              <a:srgbClr val="E5E7EB"/>
+            </a:solidFill>
+          </a:ln>
+        </p:spPr>
+        <p:txBody>
+          <a:bodyPr/>
+          <a:lstStyle/>
+          <a:p>
+            <a:endParaRPr lang="ja-JP" altLang="en-US"/>
+          </a:p>
+        </p:txBody>
+      </p:sp>
+      <p:sp>
+        <p:nvSpPr>
+          <p:cNvPr id="20" name="Row1Ver"/>
+          <p:cNvSpPr/>
+          <p:nvPr/>
+        </p:nvSpPr>
+        <p:spPr>
+          <a:xfrm>
+            <a:off x="673100" y="2527300"/>
+            <a:ext cx="660400" cy="355600"/>
+          </a:xfrm>
+          <a:prstGeom prst="roundRect">
+            <a:avLst>
+              <a:gd name="adj" fmla="val 25000"/>
+            </a:avLst>
+          </a:prstGeom>
+          <a:solidFill>
+            <a:srgbClr val="15803D"/>
+          </a:solidFill>
+          <a:ln>
+            <a:noFill/>
+          </a:ln>
+        </p:spPr>
+        <p:txBody>
+          <a:bodyPr wrap="square" lIns="0" tIns="0" rIns="0" bIns="0" anchor="ctr"/>
+          <a:lstStyle/>
+          <a:p>
+            <a:pPr algn="ctr"/>
+            <a:r>
+              <a:rPr lang="en-US" altLang="ja-JP" sz="1300" b="1" dirty="0">
                 <a:solidFill>
                   <a:srgbClr val="FFFFFF"/>
                 </a:solidFill>
                 <a:latin typeface="Meiryo UI"/>
-              </a:defRPr>
-            </a:pPr>
-            <a:r>
-              <a:t>将来の拡張ポイント &amp; 概算費用</a:t>
-            </a:r>
-          </a:p>
-        </p:txBody>
-      </p:sp>
-      <p:sp>
-        <p:nvSpPr>
-          <p:cNvPr id="56" name="Rounded Rectangle 55"/>
-          <p:cNvSpPr/>
-          <p:nvPr/>
-        </p:nvSpPr>
-        <p:spPr>
-          <a:xfrm>
-            <a:off x="7315200" y="1691640"/>
-            <a:ext cx="4572000" cy="685800"/>
+                <a:ea typeface="Meiryo UI"/>
+              </a:rPr>
+              <a:t>v1.5</a:t>
+            </a:r>
+          </a:p>
+        </p:txBody>
+      </p:sp>
+      <p:sp>
+        <p:nvSpPr>
+          <p:cNvPr id="21" name="Row1Name"/>
+          <p:cNvSpPr/>
+          <p:nvPr/>
+        </p:nvSpPr>
+        <p:spPr>
+          <a:xfrm>
+            <a:off x="1460500" y="2400300"/>
+            <a:ext cx="2540000" cy="304800"/>
+          </a:xfrm>
+          <a:prstGeom prst="rect">
+            <a:avLst/>
+          </a:prstGeom>
+          <a:noFill/>
+          <a:ln>
+            <a:noFill/>
+          </a:ln>
+        </p:spPr>
+        <p:txBody>
+          <a:bodyPr wrap="square" lIns="0" tIns="0" rIns="0" bIns="0"/>
+          <a:lstStyle/>
+          <a:p>
+            <a:pPr algn="l"/>
+            <a:r>
+              <a:rPr lang="ja-JP" altLang="en-US" sz="1600" b="1" dirty="0">
+                <a:solidFill>
+                  <a:srgbClr val="0F172A"/>
+                </a:solidFill>
+                <a:latin typeface="Meiryo UI"/>
+                <a:ea typeface="Meiryo UI"/>
+              </a:rPr>
+              <a:t>マルチカメラ手動切替</a:t>
+            </a:r>
+          </a:p>
+        </p:txBody>
+      </p:sp>
+      <p:sp>
+        <p:nvSpPr>
+          <p:cNvPr id="22" name="Row1Desc"/>
+          <p:cNvSpPr/>
+          <p:nvPr/>
+        </p:nvSpPr>
+        <p:spPr>
+          <a:xfrm>
+            <a:off x="1460500" y="2705100"/>
+            <a:ext cx="2540000" cy="330200"/>
+          </a:xfrm>
+          <a:prstGeom prst="rect">
+            <a:avLst/>
+          </a:prstGeom>
+          <a:noFill/>
+          <a:ln>
+            <a:noFill/>
+          </a:ln>
+        </p:spPr>
+        <p:txBody>
+          <a:bodyPr wrap="square" lIns="0" tIns="0" rIns="0" bIns="0"/>
+          <a:lstStyle/>
+          <a:p>
+            <a:pPr algn="l"/>
+            <a:r>
+              <a:rPr lang="ja-JP" altLang="en-US" sz="1200" dirty="0">
+                <a:solidFill>
+                  <a:srgbClr val="666680"/>
+                </a:solidFill>
+                <a:latin typeface="Meiryo UI"/>
+                <a:ea typeface="Meiryo UI"/>
+              </a:rPr>
+              <a:t>複数スマホの映像を</a:t>
+            </a:r>
+            <a:br/>
+            <a:r>
+              <a:rPr lang="ja-JP" altLang="en-US" sz="1200" dirty="0">
+                <a:solidFill>
+                  <a:srgbClr val="666680"/>
+                </a:solidFill>
+                <a:latin typeface="Meiryo UI"/>
+                <a:ea typeface="Meiryo UI"/>
+              </a:rPr>
+              <a:t>手動で切り替え表示</a:t>
+            </a:r>
+          </a:p>
+        </p:txBody>
+      </p:sp>
+      <p:sp>
+        <p:nvSpPr>
+          <p:cNvPr id="23" name="Row1TechLabel"/>
+          <p:cNvSpPr/>
+          <p:nvPr/>
+        </p:nvSpPr>
+        <p:spPr>
+          <a:xfrm>
+            <a:off x="4229100" y="2400300"/>
+            <a:ext cx="2286000" cy="203200"/>
+          </a:xfrm>
+          <a:prstGeom prst="rect">
+            <a:avLst/>
+          </a:prstGeom>
+          <a:noFill/>
+          <a:ln>
+            <a:noFill/>
+          </a:ln>
+        </p:spPr>
+        <p:txBody>
+          <a:bodyPr wrap="square" lIns="0" tIns="0" rIns="0" bIns="0"/>
+          <a:lstStyle/>
+          <a:p>
+            <a:pPr algn="l"/>
+            <a:r>
+              <a:rPr lang="ja-JP" altLang="en-US" sz="1100" dirty="0">
+                <a:solidFill>
+                  <a:srgbClr val="9CA3AF"/>
+                </a:solidFill>
+                <a:latin typeface="Meiryo UI"/>
+                <a:ea typeface="Meiryo UI"/>
+              </a:rPr>
+              <a:t>技術:</a:t>
+            </a:r>
+          </a:p>
+        </p:txBody>
+      </p:sp>
+      <p:sp>
+        <p:nvSpPr>
+          <p:cNvPr id="24" name="Row1Tech"/>
+          <p:cNvSpPr/>
+          <p:nvPr/>
+        </p:nvSpPr>
+        <p:spPr>
+          <a:xfrm>
+            <a:off x="4229100" y="2603500"/>
+            <a:ext cx="2286000" cy="406400"/>
+          </a:xfrm>
+          <a:prstGeom prst="rect">
+            <a:avLst/>
+          </a:prstGeom>
+          <a:noFill/>
+          <a:ln>
+            <a:noFill/>
+          </a:ln>
+        </p:spPr>
+        <p:txBody>
+          <a:bodyPr wrap="square" lIns="0" tIns="0" rIns="0" bIns="0"/>
+          <a:lstStyle/>
+          <a:p>
+            <a:pPr algn="l"/>
+            <a:r>
+              <a:rPr lang="ja-JP" altLang="en-US" sz="1200" dirty="0">
+                <a:solidFill>
+                  <a:srgbClr val="1A1A2E"/>
+                </a:solidFill>
+                <a:latin typeface="Meiryo UI"/>
+                <a:ea typeface="Meiryo UI"/>
+              </a:rPr>
+              <a:t>LiveKit マルチトラック</a:t>
+            </a:r>
+          </a:p>
+        </p:txBody>
+      </p:sp>
+      <p:sp>
+        <p:nvSpPr>
+          <p:cNvPr id="25" name="Row1Period"/>
+          <p:cNvSpPr/>
+          <p:nvPr/>
+        </p:nvSpPr>
+        <p:spPr>
+          <a:xfrm>
+            <a:off x="6769100" y="2400300"/>
+            <a:ext cx="1524000" cy="203200"/>
+          </a:xfrm>
+          <a:prstGeom prst="rect">
+            <a:avLst/>
+          </a:prstGeom>
+          <a:noFill/>
+          <a:ln>
+            <a:noFill/>
+          </a:ln>
+        </p:spPr>
+        <p:txBody>
+          <a:bodyPr wrap="square" lIns="0" tIns="0" rIns="0" bIns="0"/>
+          <a:lstStyle/>
+          <a:p>
+            <a:pPr algn="l"/>
+            <a:r>
+              <a:rPr lang="ja-JP" altLang="en-US" sz="1100" dirty="0">
+                <a:solidFill>
+                  <a:srgbClr val="9CA3AF"/>
+                </a:solidFill>
+                <a:latin typeface="Meiryo UI"/>
+                <a:ea typeface="Meiryo UI"/>
+              </a:rPr>
+              <a:t>期間:</a:t>
+            </a:r>
+          </a:p>
+        </p:txBody>
+      </p:sp>
+      <p:sp>
+        <p:nvSpPr>
+          <p:cNvPr id="26" name="Row1PeriodVal"/>
+          <p:cNvSpPr/>
+          <p:nvPr/>
+        </p:nvSpPr>
+        <p:spPr>
+          <a:xfrm>
+            <a:off x="6769100" y="2603500"/>
+            <a:ext cx="1524000" cy="279400"/>
+          </a:xfrm>
+          <a:prstGeom prst="rect">
+            <a:avLst/>
+          </a:prstGeom>
+          <a:noFill/>
+          <a:ln>
+            <a:noFill/>
+          </a:ln>
+        </p:spPr>
+        <p:txBody>
+          <a:bodyPr wrap="square" lIns="0" tIns="0" rIns="0" bIns="0"/>
+          <a:lstStyle/>
+          <a:p>
+            <a:pPr algn="l"/>
+            <a:r>
+              <a:rPr lang="ja-JP" altLang="en-US" sz="1300" dirty="0">
+                <a:solidFill>
+                  <a:srgbClr val="1A1A2E"/>
+                </a:solidFill>
+                <a:latin typeface="Meiryo UI"/>
+                <a:ea typeface="Meiryo UI"/>
+              </a:rPr>
+              <a:t>1-2ヶ月</a:t>
+            </a:r>
+          </a:p>
+        </p:txBody>
+      </p:sp>
+      <p:sp>
+        <p:nvSpPr>
+          <p:cNvPr id="27" name="Row1Cost"/>
+          <p:cNvSpPr/>
+          <p:nvPr/>
+        </p:nvSpPr>
+        <p:spPr>
+          <a:xfrm>
+            <a:off x="8674100" y="2438400"/>
+            <a:ext cx="2794000" cy="533400"/>
           </a:xfrm>
           <a:prstGeom prst="roundRect">
-            <a:avLst/>
+            <a:avLst>
+              <a:gd name="adj" fmla="val 15000"/>
+            </a:avLst>
           </a:prstGeom>
           <a:solidFill>
-            <a:srgbClr val="FDEBED"/>
+            <a:srgbClr val="FFFFFF"/>
           </a:solidFill>
-          <a:ln w="19050">
+          <a:ln w="6350">
             <a:solidFill>
-              <a:srgbClr val="E63946"/>
+              <a:srgbClr val="DC2626"/>
             </a:solidFill>
           </a:ln>
         </p:spPr>
-        <p:style>
-          <a:lnRef idx="1">
-            <a:schemeClr val="accent1"/>
-          </a:lnRef>
-          <a:fillRef idx="3">
-            <a:schemeClr val="accent1"/>
-          </a:fillRef>
-          <a:effectRef idx="2">
-            <a:schemeClr val="accent1"/>
-          </a:effectRef>
-          <a:fontRef idx="minor">
-            <a:schemeClr val="lt1"/>
-          </a:fontRef>
-        </p:style>
-        <p:txBody>
-          <a:bodyPr rtlCol="0" anchor="ctr"/>
+        <p:txBody>
+          <a:bodyPr wrap="square" lIns="0" tIns="0" rIns="0" bIns="0" anchor="ctr"/>
           <a:lstStyle/>
           <a:p>
             <a:pPr algn="ctr"/>
-          </a:p>
-        </p:txBody>
-      </p:sp>
-      <p:sp>
-        <p:nvSpPr>
-          <p:cNvPr id="57" name="Rounded Rectangle 56"/>
-          <p:cNvSpPr/>
-          <p:nvPr/>
-        </p:nvSpPr>
-        <p:spPr>
-          <a:xfrm>
-            <a:off x="7406640" y="1783080"/>
-            <a:ext cx="502920" cy="274320"/>
+            <a:r>
+              <a:rPr lang="ja-JP" altLang="en-US" sz="1400" b="1" dirty="0">
+                <a:solidFill>
+                  <a:srgbClr val="DC2626"/>
+                </a:solidFill>
+                <a:latin typeface="Meiryo UI"/>
+                <a:ea typeface="Meiryo UI"/>
+              </a:rPr>
+              <a:t>約80〜120万円</a:t>
+            </a:r>
+          </a:p>
+        </p:txBody>
+      </p:sp>
+      <p:sp>
+        <p:nvSpPr>
+          <p:cNvPr id="28" name="Row2Bg"/>
+          <p:cNvSpPr/>
+          <p:nvPr/>
+        </p:nvSpPr>
+        <p:spPr>
+          <a:xfrm>
+            <a:off x="546100" y="3124200"/>
+            <a:ext cx="11099800" cy="736600"/>
           </a:xfrm>
           <a:prstGeom prst="roundRect">
-            <a:avLst/>
+            <a:avLst>
+              <a:gd name="adj" fmla="val 8000"/>
+            </a:avLst>
+          </a:prstGeom>
+          <a:solidFill>
+            <a:srgbClr val="F3F4F6"/>
+          </a:solidFill>
+          <a:ln w="6350">
+            <a:solidFill>
+              <a:srgbClr val="E5E7EB"/>
+            </a:solidFill>
+          </a:ln>
+        </p:spPr>
+        <p:txBody>
+          <a:bodyPr/>
+          <a:lstStyle/>
+          <a:p>
+            <a:endParaRPr lang="ja-JP" altLang="en-US"/>
+          </a:p>
+        </p:txBody>
+      </p:sp>
+      <p:sp>
+        <p:nvSpPr>
+          <p:cNvPr id="29" name="Row2Ver"/>
+          <p:cNvSpPr/>
+          <p:nvPr/>
+        </p:nvSpPr>
+        <p:spPr>
+          <a:xfrm>
+            <a:off x="673100" y="3314700"/>
+            <a:ext cx="660400" cy="355600"/>
+          </a:xfrm>
+          <a:prstGeom prst="roundRect">
+            <a:avLst>
+              <a:gd name="adj" fmla="val 25000"/>
+            </a:avLst>
+          </a:prstGeom>
+          <a:solidFill>
+            <a:srgbClr val="7C3AED"/>
+          </a:solidFill>
+          <a:ln>
+            <a:noFill/>
+          </a:ln>
+        </p:spPr>
+        <p:txBody>
+          <a:bodyPr wrap="square" lIns="0" tIns="0" rIns="0" bIns="0" anchor="ctr"/>
+          <a:lstStyle/>
+          <a:p>
+            <a:pPr algn="ctr"/>
+            <a:r>
+              <a:rPr lang="en-US" altLang="ja-JP" sz="1300" b="1" dirty="0">
+                <a:solidFill>
+                  <a:srgbClr val="FFFFFF"/>
+                </a:solidFill>
+                <a:latin typeface="Meiryo UI"/>
+                <a:ea typeface="Meiryo UI"/>
+              </a:rPr>
+              <a:t>v2.0</a:t>
+            </a:r>
+          </a:p>
+        </p:txBody>
+      </p:sp>
+      <p:sp>
+        <p:nvSpPr>
+          <p:cNvPr id="30" name="Row2Name"/>
+          <p:cNvSpPr/>
+          <p:nvPr/>
+        </p:nvSpPr>
+        <p:spPr>
+          <a:xfrm>
+            <a:off x="1460500" y="3187700"/>
+            <a:ext cx="2540000" cy="304800"/>
+          </a:xfrm>
+          <a:prstGeom prst="rect">
+            <a:avLst/>
+          </a:prstGeom>
+          <a:noFill/>
+          <a:ln>
+            <a:noFill/>
+          </a:ln>
+        </p:spPr>
+        <p:txBody>
+          <a:bodyPr wrap="square" lIns="0" tIns="0" rIns="0" bIns="0"/>
+          <a:lstStyle/>
+          <a:p>
+            <a:pPr algn="l"/>
+            <a:r>
+              <a:rPr lang="ja-JP" altLang="en-US" sz="1600" b="1" dirty="0">
+                <a:solidFill>
+                  <a:srgbClr val="0F172A"/>
+                </a:solidFill>
+                <a:latin typeface="Meiryo UI"/>
+                <a:ea typeface="Meiryo UI"/>
+              </a:rPr>
+              <a:t>AI自動アングル切替</a:t>
+            </a:r>
+          </a:p>
+        </p:txBody>
+      </p:sp>
+      <p:sp>
+        <p:nvSpPr>
+          <p:cNvPr id="31" name="Row2Desc"/>
+          <p:cNvSpPr/>
+          <p:nvPr/>
+        </p:nvSpPr>
+        <p:spPr>
+          <a:xfrm>
+            <a:off x="1460500" y="3492500"/>
+            <a:ext cx="2540000" cy="330200"/>
+          </a:xfrm>
+          <a:prstGeom prst="rect">
+            <a:avLst/>
+          </a:prstGeom>
+          <a:noFill/>
+          <a:ln>
+            <a:noFill/>
+          </a:ln>
+        </p:spPr>
+        <p:txBody>
+          <a:bodyPr wrap="square" lIns="0" tIns="0" rIns="0" bIns="0"/>
+          <a:lstStyle/>
+          <a:p>
+            <a:pPr algn="l"/>
+            <a:r>
+              <a:rPr lang="ja-JP" altLang="en-US" sz="1200" dirty="0">
+                <a:solidFill>
+                  <a:srgbClr val="666680"/>
+                </a:solidFill>
+                <a:latin typeface="Meiryo UI"/>
+                <a:ea typeface="Meiryo UI"/>
+              </a:rPr>
+              <a:t>AIがベストアングルを</a:t>
+            </a:r>
+            <a:br/>
+            <a:r>
+              <a:rPr lang="ja-JP" altLang="en-US" sz="1200" dirty="0">
+                <a:solidFill>
+                  <a:srgbClr val="666680"/>
+                </a:solidFill>
+                <a:latin typeface="Meiryo UI"/>
+                <a:ea typeface="Meiryo UI"/>
+              </a:rPr>
+              <a:t>判断して自動切替</a:t>
+            </a:r>
+          </a:p>
+        </p:txBody>
+      </p:sp>
+      <p:sp>
+        <p:nvSpPr>
+          <p:cNvPr id="32" name="Row2TechLabel"/>
+          <p:cNvSpPr/>
+          <p:nvPr/>
+        </p:nvSpPr>
+        <p:spPr>
+          <a:xfrm>
+            <a:off x="4229100" y="3187700"/>
+            <a:ext cx="2286000" cy="203200"/>
+          </a:xfrm>
+          <a:prstGeom prst="rect">
+            <a:avLst/>
+          </a:prstGeom>
+          <a:noFill/>
+          <a:ln>
+            <a:noFill/>
+          </a:ln>
+        </p:spPr>
+        <p:txBody>
+          <a:bodyPr wrap="square" lIns="0" tIns="0" rIns="0" bIns="0"/>
+          <a:lstStyle/>
+          <a:p>
+            <a:pPr algn="l"/>
+            <a:r>
+              <a:rPr lang="ja-JP" altLang="en-US" sz="1100" dirty="0">
+                <a:solidFill>
+                  <a:srgbClr val="9CA3AF"/>
+                </a:solidFill>
+                <a:latin typeface="Meiryo UI"/>
+                <a:ea typeface="Meiryo UI"/>
+              </a:rPr>
+              <a:t>技術:</a:t>
+            </a:r>
+          </a:p>
+        </p:txBody>
+      </p:sp>
+      <p:sp>
+        <p:nvSpPr>
+          <p:cNvPr id="33" name="Row2Tech"/>
+          <p:cNvSpPr/>
+          <p:nvPr/>
+        </p:nvSpPr>
+        <p:spPr>
+          <a:xfrm>
+            <a:off x="4229100" y="3390900"/>
+            <a:ext cx="2286000" cy="406400"/>
+          </a:xfrm>
+          <a:prstGeom prst="rect">
+            <a:avLst/>
+          </a:prstGeom>
+          <a:noFill/>
+          <a:ln>
+            <a:noFill/>
+          </a:ln>
+        </p:spPr>
+        <p:txBody>
+          <a:bodyPr wrap="square" lIns="0" tIns="0" rIns="0" bIns="0"/>
+          <a:lstStyle/>
+          <a:p>
+            <a:pPr algn="l"/>
+            <a:r>
+              <a:rPr lang="ja-JP" altLang="en-US" sz="1200" dirty="0">
+                <a:solidFill>
+                  <a:srgbClr val="1A1A2E"/>
+                </a:solidFill>
+                <a:latin typeface="Meiryo UI"/>
+                <a:ea typeface="Meiryo UI"/>
+              </a:rPr>
+              <a:t>AI推論サーバー（GPU）</a:t>
+            </a:r>
+          </a:p>
+        </p:txBody>
+      </p:sp>
+      <p:sp>
+        <p:nvSpPr>
+          <p:cNvPr id="34" name="Row2Period"/>
+          <p:cNvSpPr/>
+          <p:nvPr/>
+        </p:nvSpPr>
+        <p:spPr>
+          <a:xfrm>
+            <a:off x="6769100" y="3187700"/>
+            <a:ext cx="1524000" cy="203200"/>
+          </a:xfrm>
+          <a:prstGeom prst="rect">
+            <a:avLst/>
+          </a:prstGeom>
+          <a:noFill/>
+          <a:ln>
+            <a:noFill/>
+          </a:ln>
+        </p:spPr>
+        <p:txBody>
+          <a:bodyPr wrap="square" lIns="0" tIns="0" rIns="0" bIns="0"/>
+          <a:lstStyle/>
+          <a:p>
+            <a:pPr algn="l"/>
+            <a:r>
+              <a:rPr lang="ja-JP" altLang="en-US" sz="1100" dirty="0">
+                <a:solidFill>
+                  <a:srgbClr val="9CA3AF"/>
+                </a:solidFill>
+                <a:latin typeface="Meiryo UI"/>
+                <a:ea typeface="Meiryo UI"/>
+              </a:rPr>
+              <a:t>期間:</a:t>
+            </a:r>
+          </a:p>
+        </p:txBody>
+      </p:sp>
+      <p:sp>
+        <p:nvSpPr>
+          <p:cNvPr id="35" name="Row2PeriodVal"/>
+          <p:cNvSpPr/>
+          <p:nvPr/>
+        </p:nvSpPr>
+        <p:spPr>
+          <a:xfrm>
+            <a:off x="6769100" y="3390900"/>
+            <a:ext cx="1524000" cy="279400"/>
+          </a:xfrm>
+          <a:prstGeom prst="rect">
+            <a:avLst/>
+          </a:prstGeom>
+          <a:noFill/>
+          <a:ln>
+            <a:noFill/>
+          </a:ln>
+        </p:spPr>
+        <p:txBody>
+          <a:bodyPr wrap="square" lIns="0" tIns="0" rIns="0" bIns="0"/>
+          <a:lstStyle/>
+          <a:p>
+            <a:pPr algn="l"/>
+            <a:r>
+              <a:rPr lang="ja-JP" altLang="en-US" sz="1300" dirty="0">
+                <a:solidFill>
+                  <a:srgbClr val="1A1A2E"/>
+                </a:solidFill>
+                <a:latin typeface="Meiryo UI"/>
+                <a:ea typeface="Meiryo UI"/>
+              </a:rPr>
+              <a:t>3-6ヶ月</a:t>
+            </a:r>
+          </a:p>
+        </p:txBody>
+      </p:sp>
+      <p:sp>
+        <p:nvSpPr>
+          <p:cNvPr id="36" name="Row2Cost"/>
+          <p:cNvSpPr/>
+          <p:nvPr/>
+        </p:nvSpPr>
+        <p:spPr>
+          <a:xfrm>
+            <a:off x="8674100" y="3225800"/>
+            <a:ext cx="2794000" cy="533400"/>
+          </a:xfrm>
+          <a:prstGeom prst="roundRect">
+            <a:avLst>
+              <a:gd name="adj" fmla="val 15000"/>
+            </a:avLst>
+          </a:prstGeom>
+          <a:solidFill>
+            <a:srgbClr val="FFFFFF"/>
+          </a:solidFill>
+          <a:ln w="6350">
+            <a:solidFill>
+              <a:srgbClr val="DC2626"/>
+            </a:solidFill>
+          </a:ln>
+        </p:spPr>
+        <p:txBody>
+          <a:bodyPr wrap="square" lIns="0" tIns="0" rIns="0" bIns="0" anchor="ctr"/>
+          <a:lstStyle/>
+          <a:p>
+            <a:pPr algn="ctr"/>
+            <a:r>
+              <a:rPr lang="ja-JP" altLang="en-US" sz="1400" b="1" dirty="0">
+                <a:solidFill>
+                  <a:srgbClr val="DC2626"/>
+                </a:solidFill>
+                <a:latin typeface="Meiryo UI"/>
+                <a:ea typeface="Meiryo UI"/>
+              </a:rPr>
+              <a:t>約200〜350万円</a:t>
+            </a:r>
+          </a:p>
+        </p:txBody>
+      </p:sp>
+      <p:sp>
+        <p:nvSpPr>
+          <p:cNvPr id="37" name="Row3Bg"/>
+          <p:cNvSpPr/>
+          <p:nvPr/>
+        </p:nvSpPr>
+        <p:spPr>
+          <a:xfrm>
+            <a:off x="546100" y="3911600"/>
+            <a:ext cx="11099800" cy="736600"/>
+          </a:xfrm>
+          <a:prstGeom prst="roundRect">
+            <a:avLst>
+              <a:gd name="adj" fmla="val 8000"/>
+            </a:avLst>
+          </a:prstGeom>
+          <a:solidFill>
+            <a:srgbClr val="F3F4F6"/>
+          </a:solidFill>
+          <a:ln w="6350">
+            <a:solidFill>
+              <a:srgbClr val="E5E7EB"/>
+            </a:solidFill>
+          </a:ln>
+        </p:spPr>
+        <p:txBody>
+          <a:bodyPr/>
+          <a:lstStyle/>
+          <a:p>
+            <a:endParaRPr lang="ja-JP" altLang="en-US"/>
+          </a:p>
+        </p:txBody>
+      </p:sp>
+      <p:sp>
+        <p:nvSpPr>
+          <p:cNvPr id="38" name="Row3Ver"/>
+          <p:cNvSpPr/>
+          <p:nvPr/>
+        </p:nvSpPr>
+        <p:spPr>
+          <a:xfrm>
+            <a:off x="673100" y="4102100"/>
+            <a:ext cx="660400" cy="355600"/>
+          </a:xfrm>
+          <a:prstGeom prst="roundRect">
+            <a:avLst>
+              <a:gd name="adj" fmla="val 25000"/>
+            </a:avLst>
+          </a:prstGeom>
+          <a:solidFill>
+            <a:srgbClr val="B45309"/>
+          </a:solidFill>
+          <a:ln>
+            <a:noFill/>
+          </a:ln>
+        </p:spPr>
+        <p:txBody>
+          <a:bodyPr wrap="square" lIns="0" tIns="0" rIns="0" bIns="0" anchor="ctr"/>
+          <a:lstStyle/>
+          <a:p>
+            <a:pPr algn="ctr"/>
+            <a:r>
+              <a:rPr lang="en-US" altLang="ja-JP" sz="1300" b="1" dirty="0">
+                <a:solidFill>
+                  <a:srgbClr val="FFFFFF"/>
+                </a:solidFill>
+                <a:latin typeface="Meiryo UI"/>
+                <a:ea typeface="Meiryo UI"/>
+              </a:rPr>
+              <a:t>v2.5</a:t>
+            </a:r>
+          </a:p>
+        </p:txBody>
+      </p:sp>
+      <p:sp>
+        <p:nvSpPr>
+          <p:cNvPr id="39" name="Row3Name"/>
+          <p:cNvSpPr/>
+          <p:nvPr/>
+        </p:nvSpPr>
+        <p:spPr>
+          <a:xfrm>
+            <a:off x="1460500" y="3975100"/>
+            <a:ext cx="2540000" cy="304800"/>
+          </a:xfrm>
+          <a:prstGeom prst="rect">
+            <a:avLst/>
+          </a:prstGeom>
+          <a:noFill/>
+          <a:ln>
+            <a:noFill/>
+          </a:ln>
+        </p:spPr>
+        <p:txBody>
+          <a:bodyPr wrap="square" lIns="0" tIns="0" rIns="0" bIns="0"/>
+          <a:lstStyle/>
+          <a:p>
+            <a:pPr algn="l"/>
+            <a:r>
+              <a:rPr lang="ja-JP" altLang="en-US" sz="1600" b="1" dirty="0">
+                <a:solidFill>
+                  <a:srgbClr val="0F172A"/>
+                </a:solidFill>
+                <a:latin typeface="Meiryo UI"/>
+                <a:ea typeface="Meiryo UI"/>
+              </a:rPr>
+              <a:t>AIハイライト自動生成</a:t>
+            </a:r>
+          </a:p>
+        </p:txBody>
+      </p:sp>
+      <p:sp>
+        <p:nvSpPr>
+          <p:cNvPr id="40" name="Row3Desc"/>
+          <p:cNvSpPr/>
+          <p:nvPr/>
+        </p:nvSpPr>
+        <p:spPr>
+          <a:xfrm>
+            <a:off x="1460500" y="4279900"/>
+            <a:ext cx="2540000" cy="330200"/>
+          </a:xfrm>
+          <a:prstGeom prst="rect">
+            <a:avLst/>
+          </a:prstGeom>
+          <a:noFill/>
+          <a:ln>
+            <a:noFill/>
+          </a:ln>
+        </p:spPr>
+        <p:txBody>
+          <a:bodyPr wrap="square" lIns="0" tIns="0" rIns="0" bIns="0"/>
+          <a:lstStyle/>
+          <a:p>
+            <a:pPr algn="l"/>
+            <a:r>
+              <a:rPr lang="ja-JP" altLang="en-US" sz="1200" dirty="0">
+                <a:solidFill>
+                  <a:srgbClr val="666680"/>
+                </a:solidFill>
+                <a:latin typeface="Meiryo UI"/>
+                <a:ea typeface="Meiryo UI"/>
+              </a:rPr>
+              <a:t>試合のハイライトを</a:t>
+            </a:r>
+            <a:br/>
+            <a:r>
+              <a:rPr lang="ja-JP" altLang="en-US" sz="1200" dirty="0">
+                <a:solidFill>
+                  <a:srgbClr val="666680"/>
+                </a:solidFill>
+                <a:latin typeface="Meiryo UI"/>
+                <a:ea typeface="Meiryo UI"/>
+              </a:rPr>
+              <a:t>AIが自動編集・生成</a:t>
+            </a:r>
+          </a:p>
+        </p:txBody>
+      </p:sp>
+      <p:sp>
+        <p:nvSpPr>
+          <p:cNvPr id="41" name="Row3TechLabel"/>
+          <p:cNvSpPr/>
+          <p:nvPr/>
+        </p:nvSpPr>
+        <p:spPr>
+          <a:xfrm>
+            <a:off x="4229100" y="3975100"/>
+            <a:ext cx="2286000" cy="203200"/>
+          </a:xfrm>
+          <a:prstGeom prst="rect">
+            <a:avLst/>
+          </a:prstGeom>
+          <a:noFill/>
+          <a:ln>
+            <a:noFill/>
+          </a:ln>
+        </p:spPr>
+        <p:txBody>
+          <a:bodyPr wrap="square" lIns="0" tIns="0" rIns="0" bIns="0"/>
+          <a:lstStyle/>
+          <a:p>
+            <a:pPr algn="l"/>
+            <a:r>
+              <a:rPr lang="ja-JP" altLang="en-US" sz="1100" dirty="0">
+                <a:solidFill>
+                  <a:srgbClr val="9CA3AF"/>
+                </a:solidFill>
+                <a:latin typeface="Meiryo UI"/>
+                <a:ea typeface="Meiryo UI"/>
+              </a:rPr>
+              <a:t>技術:</a:t>
+            </a:r>
+          </a:p>
+        </p:txBody>
+      </p:sp>
+      <p:sp>
+        <p:nvSpPr>
+          <p:cNvPr id="42" name="Row3Tech"/>
+          <p:cNvSpPr/>
+          <p:nvPr/>
+        </p:nvSpPr>
+        <p:spPr>
+          <a:xfrm>
+            <a:off x="4229100" y="4178300"/>
+            <a:ext cx="2286000" cy="406400"/>
+          </a:xfrm>
+          <a:prstGeom prst="rect">
+            <a:avLst/>
+          </a:prstGeom>
+          <a:noFill/>
+          <a:ln>
+            <a:noFill/>
+          </a:ln>
+        </p:spPr>
+        <p:txBody>
+          <a:bodyPr wrap="square" lIns="0" tIns="0" rIns="0" bIns="0"/>
+          <a:lstStyle/>
+          <a:p>
+            <a:pPr algn="l"/>
+            <a:r>
+              <a:rPr lang="ja-JP" altLang="en-US" sz="1200" dirty="0">
+                <a:solidFill>
+                  <a:srgbClr val="1A1A2E"/>
+                </a:solidFill>
+                <a:latin typeface="Meiryo UI"/>
+                <a:ea typeface="Meiryo UI"/>
+              </a:rPr>
+              <a:t>動画解析AI + FFmpeg</a:t>
+            </a:r>
+          </a:p>
+        </p:txBody>
+      </p:sp>
+      <p:sp>
+        <p:nvSpPr>
+          <p:cNvPr id="43" name="Row3Period"/>
+          <p:cNvSpPr/>
+          <p:nvPr/>
+        </p:nvSpPr>
+        <p:spPr>
+          <a:xfrm>
+            <a:off x="6769100" y="3975100"/>
+            <a:ext cx="1524000" cy="203200"/>
+          </a:xfrm>
+          <a:prstGeom prst="rect">
+            <a:avLst/>
+          </a:prstGeom>
+          <a:noFill/>
+          <a:ln>
+            <a:noFill/>
+          </a:ln>
+        </p:spPr>
+        <p:txBody>
+          <a:bodyPr wrap="square" lIns="0" tIns="0" rIns="0" bIns="0"/>
+          <a:lstStyle/>
+          <a:p>
+            <a:pPr algn="l"/>
+            <a:r>
+              <a:rPr lang="ja-JP" altLang="en-US" sz="1100" dirty="0">
+                <a:solidFill>
+                  <a:srgbClr val="9CA3AF"/>
+                </a:solidFill>
+                <a:latin typeface="Meiryo UI"/>
+                <a:ea typeface="Meiryo UI"/>
+              </a:rPr>
+              <a:t>期間:</a:t>
+            </a:r>
+          </a:p>
+        </p:txBody>
+      </p:sp>
+      <p:sp>
+        <p:nvSpPr>
+          <p:cNvPr id="44" name="Row3PeriodVal"/>
+          <p:cNvSpPr/>
+          <p:nvPr/>
+        </p:nvSpPr>
+        <p:spPr>
+          <a:xfrm>
+            <a:off x="6769100" y="4178300"/>
+            <a:ext cx="1524000" cy="279400"/>
+          </a:xfrm>
+          <a:prstGeom prst="rect">
+            <a:avLst/>
+          </a:prstGeom>
+          <a:noFill/>
+          <a:ln>
+            <a:noFill/>
+          </a:ln>
+        </p:spPr>
+        <p:txBody>
+          <a:bodyPr wrap="square" lIns="0" tIns="0" rIns="0" bIns="0"/>
+          <a:lstStyle/>
+          <a:p>
+            <a:pPr algn="l"/>
+            <a:r>
+              <a:rPr lang="ja-JP" altLang="en-US" sz="1300" dirty="0">
+                <a:solidFill>
+                  <a:srgbClr val="1A1A2E"/>
+                </a:solidFill>
+                <a:latin typeface="Meiryo UI"/>
+                <a:ea typeface="Meiryo UI"/>
+              </a:rPr>
+              <a:t>2-4ヶ月</a:t>
+            </a:r>
+          </a:p>
+        </p:txBody>
+      </p:sp>
+      <p:sp>
+        <p:nvSpPr>
+          <p:cNvPr id="45" name="Row3Cost"/>
+          <p:cNvSpPr/>
+          <p:nvPr/>
+        </p:nvSpPr>
+        <p:spPr>
+          <a:xfrm>
+            <a:off x="8674100" y="4013200"/>
+            <a:ext cx="2794000" cy="533400"/>
+          </a:xfrm>
+          <a:prstGeom prst="roundRect">
+            <a:avLst>
+              <a:gd name="adj" fmla="val 15000"/>
+            </a:avLst>
+          </a:prstGeom>
+          <a:solidFill>
+            <a:srgbClr val="FFFFFF"/>
+          </a:solidFill>
+          <a:ln w="6350">
+            <a:solidFill>
+              <a:srgbClr val="DC2626"/>
+            </a:solidFill>
+          </a:ln>
+        </p:spPr>
+        <p:txBody>
+          <a:bodyPr wrap="square" lIns="0" tIns="0" rIns="0" bIns="0" anchor="ctr"/>
+          <a:lstStyle/>
+          <a:p>
+            <a:pPr algn="ctr"/>
+            <a:r>
+              <a:rPr lang="ja-JP" altLang="en-US" sz="1400" b="1" dirty="0">
+                <a:solidFill>
+                  <a:srgbClr val="DC2626"/>
+                </a:solidFill>
+                <a:latin typeface="Meiryo UI"/>
+                <a:ea typeface="Meiryo UI"/>
+              </a:rPr>
+              <a:t>約150〜250万円</a:t>
+            </a:r>
+          </a:p>
+        </p:txBody>
+      </p:sp>
+      <p:sp>
+        <p:nvSpPr>
+          <p:cNvPr id="46" name="Row4Bg"/>
+          <p:cNvSpPr/>
+          <p:nvPr/>
+        </p:nvSpPr>
+        <p:spPr>
+          <a:xfrm>
+            <a:off x="546100" y="4699000"/>
+            <a:ext cx="11099800" cy="736600"/>
+          </a:xfrm>
+          <a:prstGeom prst="roundRect">
+            <a:avLst>
+              <a:gd name="adj" fmla="val 8000"/>
+            </a:avLst>
+          </a:prstGeom>
+          <a:solidFill>
+            <a:srgbClr val="F3F4F6"/>
+          </a:solidFill>
+          <a:ln w="6350">
+            <a:solidFill>
+              <a:srgbClr val="E5E7EB"/>
+            </a:solidFill>
+          </a:ln>
+        </p:spPr>
+        <p:txBody>
+          <a:bodyPr/>
+          <a:lstStyle/>
+          <a:p>
+            <a:endParaRPr lang="ja-JP" altLang="en-US"/>
+          </a:p>
+        </p:txBody>
+      </p:sp>
+      <p:sp>
+        <p:nvSpPr>
+          <p:cNvPr id="47" name="Row4Ver"/>
+          <p:cNvSpPr/>
+          <p:nvPr/>
+        </p:nvSpPr>
+        <p:spPr>
+          <a:xfrm>
+            <a:off x="673100" y="4889500"/>
+            <a:ext cx="660400" cy="355600"/>
+          </a:xfrm>
+          <a:prstGeom prst="roundRect">
+            <a:avLst>
+              <a:gd name="adj" fmla="val 25000"/>
+            </a:avLst>
           </a:prstGeom>
           <a:solidFill>
             <a:srgbClr val="E63946"/>
@@ -5359,1554 +6938,665 @@
             <a:noFill/>
           </a:ln>
         </p:spPr>
-        <p:style>
-          <a:lnRef idx="1">
-            <a:schemeClr val="accent1"/>
-          </a:lnRef>
-          <a:fillRef idx="3">
-            <a:schemeClr val="accent1"/>
-          </a:fillRef>
-          <a:effectRef idx="2">
-            <a:schemeClr val="accent1"/>
-          </a:effectRef>
-          <a:fontRef idx="minor">
-            <a:schemeClr val="lt1"/>
-          </a:fontRef>
-        </p:style>
-        <p:txBody>
-          <a:bodyPr rtlCol="0" anchor="ctr"/>
+        <p:txBody>
+          <a:bodyPr wrap="square" lIns="0" tIns="0" rIns="0" bIns="0" anchor="ctr"/>
           <a:lstStyle/>
           <a:p>
             <a:pPr algn="ctr"/>
-          </a:p>
-        </p:txBody>
-      </p:sp>
-      <p:sp>
-        <p:nvSpPr>
-          <p:cNvPr id="58" name="TextBox 57"/>
-          <p:cNvSpPr txBox="1"/>
-          <p:nvPr/>
-        </p:nvSpPr>
-        <p:spPr>
-          <a:xfrm>
-            <a:off x="7406640" y="1783080"/>
-            <a:ext cx="502920" cy="274320"/>
+            <a:r>
+              <a:rPr lang="en-US" altLang="ja-JP" sz="1300" b="1" dirty="0">
+                <a:solidFill>
+                  <a:srgbClr val="FFFFFF"/>
+                </a:solidFill>
+                <a:latin typeface="Meiryo UI"/>
+                <a:ea typeface="Meiryo UI"/>
+              </a:rPr>
+              <a:t>v3.0</a:t>
+            </a:r>
+          </a:p>
+        </p:txBody>
+      </p:sp>
+      <p:sp>
+        <p:nvSpPr>
+          <p:cNvPr id="48" name="Row4Name"/>
+          <p:cNvSpPr/>
+          <p:nvPr/>
+        </p:nvSpPr>
+        <p:spPr>
+          <a:xfrm>
+            <a:off x="1460500" y="4762500"/>
+            <a:ext cx="2540000" cy="304800"/>
           </a:xfrm>
           <a:prstGeom prst="rect">
             <a:avLst/>
           </a:prstGeom>
           <a:noFill/>
-        </p:spPr>
-        <p:txBody>
-          <a:bodyPr wrap="square">
-            <a:spAutoFit/>
-          </a:bodyPr>
-          <a:lstStyle/>
-          <a:p>
-            <a:pPr algn="ctr">
-              <a:defRPr sz="1000" b="1">
-                <a:solidFill>
-                  <a:srgbClr val="FFFFFF"/>
-                </a:solidFill>
-                <a:latin typeface="Meiryo UI"/>
-              </a:defRPr>
-            </a:pPr>
-            <a:r>
-              <a:t>v1.0</a:t>
-            </a:r>
-          </a:p>
-        </p:txBody>
-      </p:sp>
-      <p:sp>
-        <p:nvSpPr>
-          <p:cNvPr id="59" name="TextBox 58"/>
-          <p:cNvSpPr txBox="1"/>
-          <p:nvPr/>
-        </p:nvSpPr>
-        <p:spPr>
-          <a:xfrm>
-            <a:off x="8001000" y="1764792"/>
-            <a:ext cx="1371600" cy="228600"/>
+          <a:ln>
+            <a:noFill/>
+          </a:ln>
+        </p:spPr>
+        <p:txBody>
+          <a:bodyPr wrap="square" lIns="0" tIns="0" rIns="0" bIns="0"/>
+          <a:lstStyle/>
+          <a:p>
+            <a:pPr algn="l"/>
+            <a:r>
+              <a:rPr lang="ja-JP" altLang="en-US" sz="1600" b="1" dirty="0">
+                <a:solidFill>
+                  <a:srgbClr val="0F172A"/>
+                </a:solidFill>
+                <a:latin typeface="Meiryo UI"/>
+                <a:ea typeface="Meiryo UI"/>
+              </a:rPr>
+              <a:t>AI得点検知</a:t>
+            </a:r>
+          </a:p>
+        </p:txBody>
+      </p:sp>
+      <p:sp>
+        <p:nvSpPr>
+          <p:cNvPr id="49" name="Row4Desc"/>
+          <p:cNvSpPr/>
+          <p:nvPr/>
+        </p:nvSpPr>
+        <p:spPr>
+          <a:xfrm>
+            <a:off x="1460500" y="5067300"/>
+            <a:ext cx="2540000" cy="330200"/>
           </a:xfrm>
           <a:prstGeom prst="rect">
             <a:avLst/>
           </a:prstGeom>
           <a:noFill/>
-        </p:spPr>
-        <p:txBody>
-          <a:bodyPr wrap="square">
-            <a:spAutoFit/>
-          </a:bodyPr>
-          <a:lstStyle/>
-          <a:p>
-            <a:pPr algn="l">
-              <a:defRPr sz="1200" b="1">
-                <a:solidFill>
-                  <a:srgbClr val="0F172A"/>
-                </a:solidFill>
-                <a:latin typeface="Meiryo UI"/>
-              </a:defRPr>
-            </a:pPr>
-            <a:r>
-              <a:t>得点リモコン</a:t>
-            </a:r>
-          </a:p>
-        </p:txBody>
-      </p:sp>
-      <p:sp>
-        <p:nvSpPr>
-          <p:cNvPr id="60" name="TextBox 59"/>
-          <p:cNvSpPr txBox="1"/>
-          <p:nvPr/>
-        </p:nvSpPr>
-        <p:spPr>
-          <a:xfrm>
-            <a:off x="8001000" y="2011680"/>
-            <a:ext cx="1371600" cy="457200"/>
+          <a:ln>
+            <a:noFill/>
+          </a:ln>
+        </p:spPr>
+        <p:txBody>
+          <a:bodyPr wrap="square" lIns="0" tIns="0" rIns="0" bIns="0"/>
+          <a:lstStyle/>
+          <a:p>
+            <a:pPr algn="l"/>
+            <a:r>
+              <a:rPr lang="ja-JP" altLang="en-US" sz="1200" dirty="0">
+                <a:solidFill>
+                  <a:srgbClr val="666680"/>
+                </a:solidFill>
+                <a:latin typeface="Meiryo UI"/>
+                <a:ea typeface="Meiryo UI"/>
+              </a:rPr>
+              <a:t>映像・音声からAIが得点を</a:t>
+            </a:r>
+            <a:br/>
+            <a:r>
+              <a:rPr lang="ja-JP" altLang="en-US" sz="1200" dirty="0">
+                <a:solidFill>
+                  <a:srgbClr val="666680"/>
+                </a:solidFill>
+                <a:latin typeface="Meiryo UI"/>
+                <a:ea typeface="Meiryo UI"/>
+              </a:rPr>
+              <a:t>検知しスコア自動更新</a:t>
+            </a:r>
+          </a:p>
+        </p:txBody>
+      </p:sp>
+      <p:sp>
+        <p:nvSpPr>
+          <p:cNvPr id="50" name="Row4TechLabel"/>
+          <p:cNvSpPr/>
+          <p:nvPr/>
+        </p:nvSpPr>
+        <p:spPr>
+          <a:xfrm>
+            <a:off x="4229100" y="4762500"/>
+            <a:ext cx="2286000" cy="203200"/>
           </a:xfrm>
           <a:prstGeom prst="rect">
             <a:avLst/>
           </a:prstGeom>
           <a:noFill/>
-        </p:spPr>
-        <p:txBody>
-          <a:bodyPr wrap="square">
-            <a:spAutoFit/>
-          </a:bodyPr>
-          <a:lstStyle/>
-          <a:p>
-            <a:pPr algn="l">
-              <a:defRPr sz="800" b="0">
-                <a:solidFill>
-                  <a:srgbClr val="666680"/>
-                </a:solidFill>
-                <a:latin typeface="Meiryo UI"/>
-              </a:defRPr>
-            </a:pPr>
-            <a:r>
-              <a:t>別デバイスからスコア操作</a:t>
-            </a:r>
-            <a:br/>
-            <a:r>
-              <a:t>撮影者は撮影に集中</a:t>
-            </a:r>
-          </a:p>
-        </p:txBody>
-      </p:sp>
-      <p:sp>
-        <p:nvSpPr>
-          <p:cNvPr id="61" name="TextBox 60"/>
-          <p:cNvSpPr txBox="1"/>
-          <p:nvPr/>
-        </p:nvSpPr>
-        <p:spPr>
-          <a:xfrm>
-            <a:off x="9509760" y="1764792"/>
-            <a:ext cx="1188720" cy="182880"/>
+          <a:ln>
+            <a:noFill/>
+          </a:ln>
+        </p:spPr>
+        <p:txBody>
+          <a:bodyPr wrap="square" lIns="0" tIns="0" rIns="0" bIns="0"/>
+          <a:lstStyle/>
+          <a:p>
+            <a:pPr algn="l"/>
+            <a:r>
+              <a:rPr lang="ja-JP" altLang="en-US" sz="1100" dirty="0">
+                <a:solidFill>
+                  <a:srgbClr val="9CA3AF"/>
+                </a:solidFill>
+                <a:latin typeface="Meiryo UI"/>
+                <a:ea typeface="Meiryo UI"/>
+              </a:rPr>
+              <a:t>技術:</a:t>
+            </a:r>
+          </a:p>
+        </p:txBody>
+      </p:sp>
+      <p:sp>
+        <p:nvSpPr>
+          <p:cNvPr id="51" name="Row4Tech"/>
+          <p:cNvSpPr/>
+          <p:nvPr/>
+        </p:nvSpPr>
+        <p:spPr>
+          <a:xfrm>
+            <a:off x="4229100" y="4965700"/>
+            <a:ext cx="2286000" cy="406400"/>
           </a:xfrm>
           <a:prstGeom prst="rect">
             <a:avLst/>
           </a:prstGeom>
           <a:noFill/>
-        </p:spPr>
-        <p:txBody>
-          <a:bodyPr wrap="square">
-            <a:spAutoFit/>
-          </a:bodyPr>
-          <a:lstStyle/>
-          <a:p>
-            <a:pPr algn="l">
-              <a:defRPr sz="700" b="0">
+          <a:ln>
+            <a:noFill/>
+          </a:ln>
+        </p:spPr>
+        <p:txBody>
+          <a:bodyPr wrap="square" lIns="0" tIns="0" rIns="0" bIns="0"/>
+          <a:lstStyle/>
+          <a:p>
+            <a:pPr algn="l"/>
+            <a:r>
+              <a:rPr lang="ja-JP" altLang="en-US" sz="1200" dirty="0">
+                <a:solidFill>
+                  <a:srgbClr val="1A1A2E"/>
+                </a:solidFill>
+                <a:latin typeface="Meiryo UI"/>
+                <a:ea typeface="Meiryo UI"/>
+              </a:rPr>
+              <a:t>映像解析AI / 音声認識</a:t>
+            </a:r>
+          </a:p>
+        </p:txBody>
+      </p:sp>
+      <p:sp>
+        <p:nvSpPr>
+          <p:cNvPr id="52" name="Row4Period"/>
+          <p:cNvSpPr/>
+          <p:nvPr/>
+        </p:nvSpPr>
+        <p:spPr>
+          <a:xfrm>
+            <a:off x="6769100" y="4762500"/>
+            <a:ext cx="1524000" cy="203200"/>
+          </a:xfrm>
+          <a:prstGeom prst="rect">
+            <a:avLst/>
+          </a:prstGeom>
+          <a:noFill/>
+          <a:ln>
+            <a:noFill/>
+          </a:ln>
+        </p:spPr>
+        <p:txBody>
+          <a:bodyPr wrap="square" lIns="0" tIns="0" rIns="0" bIns="0"/>
+          <a:lstStyle/>
+          <a:p>
+            <a:pPr algn="l"/>
+            <a:r>
+              <a:rPr lang="ja-JP" altLang="en-US" sz="1100" dirty="0">
                 <a:solidFill>
                   <a:srgbClr val="9CA3AF"/>
                 </a:solidFill>
                 <a:latin typeface="Meiryo UI"/>
-              </a:defRPr>
-            </a:pPr>
-            <a:r>
-              <a:t>技術:</a:t>
-            </a:r>
-          </a:p>
-        </p:txBody>
-      </p:sp>
-      <p:sp>
-        <p:nvSpPr>
-          <p:cNvPr id="62" name="TextBox 61"/>
-          <p:cNvSpPr txBox="1"/>
-          <p:nvPr/>
-        </p:nvSpPr>
-        <p:spPr>
-          <a:xfrm>
-            <a:off x="9509760" y="1920240"/>
-            <a:ext cx="1188720" cy="274320"/>
+                <a:ea typeface="Meiryo UI"/>
+              </a:rPr>
+              <a:t>期間:</a:t>
+            </a:r>
+          </a:p>
+        </p:txBody>
+      </p:sp>
+      <p:sp>
+        <p:nvSpPr>
+          <p:cNvPr id="53" name="Row4PeriodVal"/>
+          <p:cNvSpPr/>
+          <p:nvPr/>
+        </p:nvSpPr>
+        <p:spPr>
+          <a:xfrm>
+            <a:off x="6769100" y="4965700"/>
+            <a:ext cx="1524000" cy="279400"/>
           </a:xfrm>
           <a:prstGeom prst="rect">
             <a:avLst/>
           </a:prstGeom>
           <a:noFill/>
-        </p:spPr>
-        <p:txBody>
-          <a:bodyPr wrap="square">
-            <a:spAutoFit/>
-          </a:bodyPr>
-          <a:lstStyle/>
-          <a:p>
-            <a:pPr algn="l">
-              <a:defRPr sz="800" b="0">
+          <a:ln>
+            <a:noFill/>
+          </a:ln>
+        </p:spPr>
+        <p:txBody>
+          <a:bodyPr wrap="square" lIns="0" tIns="0" rIns="0" bIns="0"/>
+          <a:lstStyle/>
+          <a:p>
+            <a:pPr algn="l"/>
+            <a:r>
+              <a:rPr lang="ja-JP" altLang="en-US" sz="1300" dirty="0">
                 <a:solidFill>
                   <a:srgbClr val="1A1A2E"/>
                 </a:solidFill>
                 <a:latin typeface="Meiryo UI"/>
-              </a:defRPr>
-            </a:pPr>
-            <a:r>
-              <a:t>WebSocket / Supabase Realtime</a:t>
-            </a:r>
-          </a:p>
-        </p:txBody>
-      </p:sp>
-      <p:sp>
-        <p:nvSpPr>
-          <p:cNvPr id="63" name="Rounded Rectangle 62"/>
-          <p:cNvSpPr/>
-          <p:nvPr/>
-        </p:nvSpPr>
-        <p:spPr>
-          <a:xfrm>
-            <a:off x="10789920" y="1783080"/>
-            <a:ext cx="960120" cy="502920"/>
+                <a:ea typeface="Meiryo UI"/>
+              </a:rPr>
+              <a:t>3-6ヶ月</a:t>
+            </a:r>
+          </a:p>
+        </p:txBody>
+      </p:sp>
+      <p:sp>
+        <p:nvSpPr>
+          <p:cNvPr id="54" name="Row4Cost"/>
+          <p:cNvSpPr/>
+          <p:nvPr/>
+        </p:nvSpPr>
+        <p:spPr>
+          <a:xfrm>
+            <a:off x="8674100" y="4800600"/>
+            <a:ext cx="2794000" cy="533400"/>
           </a:xfrm>
           <a:prstGeom prst="roundRect">
-            <a:avLst/>
+            <a:avLst>
+              <a:gd name="adj" fmla="val 15000"/>
+            </a:avLst>
           </a:prstGeom>
           <a:solidFill>
             <a:srgbClr val="FFFFFF"/>
           </a:solidFill>
-          <a:ln w="19050">
+          <a:ln w="6350">
             <a:solidFill>
-              <a:srgbClr val="E0E0E8"/>
+              <a:srgbClr val="DC2626"/>
             </a:solidFill>
           </a:ln>
         </p:spPr>
-        <p:style>
-          <a:lnRef idx="1">
-            <a:schemeClr val="accent1"/>
-          </a:lnRef>
-          <a:fillRef idx="3">
-            <a:schemeClr val="accent1"/>
-          </a:fillRef>
-          <a:effectRef idx="2">
-            <a:schemeClr val="accent1"/>
-          </a:effectRef>
-          <a:fontRef idx="minor">
-            <a:schemeClr val="lt1"/>
-          </a:fontRef>
-        </p:style>
-        <p:txBody>
-          <a:bodyPr rtlCol="0" anchor="ctr"/>
+        <p:txBody>
+          <a:bodyPr wrap="square" lIns="0" tIns="0" rIns="0" bIns="0" anchor="ctr"/>
           <a:lstStyle/>
           <a:p>
             <a:pPr algn="ctr"/>
-          </a:p>
-        </p:txBody>
-      </p:sp>
-      <p:sp>
-        <p:nvSpPr>
-          <p:cNvPr id="64" name="TextBox 63"/>
-          <p:cNvSpPr txBox="1"/>
-          <p:nvPr/>
-        </p:nvSpPr>
-        <p:spPr>
-          <a:xfrm>
-            <a:off x="10835640" y="1801368"/>
-            <a:ext cx="868680" cy="228600"/>
-          </a:xfrm>
-          <a:prstGeom prst="rect">
-            <a:avLst/>
-          </a:prstGeom>
-          <a:noFill/>
-        </p:spPr>
-        <p:txBody>
-          <a:bodyPr wrap="square">
-            <a:spAutoFit/>
-          </a:bodyPr>
-          <a:lstStyle/>
-          <a:p>
-            <a:pPr algn="ctr">
-              <a:defRPr sz="1000" b="1">
-                <a:solidFill>
-                  <a:srgbClr val="E63946"/>
-                </a:solidFill>
-                <a:latin typeface="Meiryo UI"/>
-              </a:defRPr>
-            </a:pPr>
-            <a:r>
-              <a:t>約30〜50万円</a:t>
-            </a:r>
-          </a:p>
-        </p:txBody>
-      </p:sp>
-      <p:sp>
-        <p:nvSpPr>
-          <p:cNvPr id="65" name="TextBox 64"/>
-          <p:cNvSpPr txBox="1"/>
-          <p:nvPr/>
-        </p:nvSpPr>
-        <p:spPr>
-          <a:xfrm>
-            <a:off x="10835640" y="2057400"/>
-            <a:ext cx="868680" cy="182880"/>
-          </a:xfrm>
-          <a:prstGeom prst="rect">
-            <a:avLst/>
-          </a:prstGeom>
-          <a:noFill/>
-        </p:spPr>
-        <p:txBody>
-          <a:bodyPr wrap="square">
-            <a:spAutoFit/>
-          </a:bodyPr>
-          <a:lstStyle/>
-          <a:p>
-            <a:pPr algn="ctr">
-              <a:defRPr sz="800" b="0">
-                <a:solidFill>
-                  <a:srgbClr val="666680"/>
-                </a:solidFill>
-                <a:latin typeface="Meiryo UI"/>
-              </a:defRPr>
-            </a:pPr>
-            <a:r>
-              <a:t>2-3週間</a:t>
-            </a:r>
-          </a:p>
-        </p:txBody>
-      </p:sp>
-      <p:sp>
-        <p:nvSpPr>
-          <p:cNvPr id="66" name="Rounded Rectangle 65"/>
-          <p:cNvSpPr/>
-          <p:nvPr/>
-        </p:nvSpPr>
-        <p:spPr>
-          <a:xfrm>
-            <a:off x="7315200" y="2496312"/>
-            <a:ext cx="4572000" cy="685800"/>
+            <a:r>
+              <a:rPr lang="ja-JP" altLang="en-US" sz="1400" b="1" dirty="0">
+                <a:solidFill>
+                  <a:srgbClr val="DC2626"/>
+                </a:solidFill>
+                <a:latin typeface="Meiryo UI"/>
+                <a:ea typeface="Meiryo UI"/>
+              </a:rPr>
+              <a:t>約100〜200万円</a:t>
+            </a:r>
+          </a:p>
+        </p:txBody>
+      </p:sp>
+      <p:sp>
+        <p:nvSpPr>
+          <p:cNvPr id="55" name="Row5Bg"/>
+          <p:cNvSpPr/>
+          <p:nvPr/>
+        </p:nvSpPr>
+        <p:spPr>
+          <a:xfrm>
+            <a:off x="546100" y="5486400"/>
+            <a:ext cx="11099800" cy="736600"/>
           </a:xfrm>
           <a:prstGeom prst="roundRect">
-            <a:avLst/>
+            <a:avLst>
+              <a:gd name="adj" fmla="val 8000"/>
+            </a:avLst>
           </a:prstGeom>
           <a:solidFill>
-            <a:srgbClr val="EBF0FF"/>
+            <a:srgbClr val="F3F4F6"/>
           </a:solidFill>
-          <a:ln w="19050">
+          <a:ln w="6350">
             <a:solidFill>
-              <a:srgbClr val="2563EB"/>
+              <a:srgbClr val="E5E7EB"/>
             </a:solidFill>
           </a:ln>
         </p:spPr>
-        <p:style>
-          <a:lnRef idx="1">
-            <a:schemeClr val="accent1"/>
-          </a:lnRef>
-          <a:fillRef idx="3">
-            <a:schemeClr val="accent1"/>
-          </a:fillRef>
-          <a:effectRef idx="2">
-            <a:schemeClr val="accent1"/>
-          </a:effectRef>
-          <a:fontRef idx="minor">
-            <a:schemeClr val="lt1"/>
-          </a:fontRef>
-        </p:style>
-        <p:txBody>
-          <a:bodyPr rtlCol="0" anchor="ctr"/>
-          <a:lstStyle/>
-          <a:p>
-            <a:pPr algn="ctr"/>
-          </a:p>
-        </p:txBody>
-      </p:sp>
-      <p:sp>
-        <p:nvSpPr>
-          <p:cNvPr id="67" name="Rounded Rectangle 66"/>
-          <p:cNvSpPr/>
-          <p:nvPr/>
-        </p:nvSpPr>
-        <p:spPr>
-          <a:xfrm>
-            <a:off x="7406640" y="2587752"/>
-            <a:ext cx="502920" cy="274320"/>
+        <p:txBody>
+          <a:bodyPr/>
+          <a:lstStyle/>
+          <a:p>
+            <a:endParaRPr lang="ja-JP" altLang="en-US"/>
+          </a:p>
+        </p:txBody>
+      </p:sp>
+      <p:sp>
+        <p:nvSpPr>
+          <p:cNvPr id="56" name="Row5Ver"/>
+          <p:cNvSpPr/>
+          <p:nvPr/>
+        </p:nvSpPr>
+        <p:spPr>
+          <a:xfrm>
+            <a:off x="673100" y="5676900"/>
+            <a:ext cx="660400" cy="355600"/>
           </a:xfrm>
           <a:prstGeom prst="roundRect">
-            <a:avLst/>
+            <a:avLst>
+              <a:gd name="adj" fmla="val 25000"/>
+            </a:avLst>
           </a:prstGeom>
           <a:solidFill>
-            <a:srgbClr val="2563EB"/>
+            <a:srgbClr val="9333EA"/>
           </a:solidFill>
           <a:ln>
             <a:noFill/>
           </a:ln>
         </p:spPr>
-        <p:style>
-          <a:lnRef idx="1">
-            <a:schemeClr val="accent1"/>
-          </a:lnRef>
-          <a:fillRef idx="3">
-            <a:schemeClr val="accent1"/>
-          </a:fillRef>
-          <a:effectRef idx="2">
-            <a:schemeClr val="accent1"/>
-          </a:effectRef>
-          <a:fontRef idx="minor">
-            <a:schemeClr val="lt1"/>
-          </a:fontRef>
-        </p:style>
-        <p:txBody>
-          <a:bodyPr rtlCol="0" anchor="ctr"/>
+        <p:txBody>
+          <a:bodyPr wrap="square" lIns="0" tIns="0" rIns="0" bIns="0" anchor="ctr"/>
           <a:lstStyle/>
           <a:p>
             <a:pPr algn="ctr"/>
-          </a:p>
-        </p:txBody>
-      </p:sp>
-      <p:sp>
-        <p:nvSpPr>
-          <p:cNvPr id="68" name="TextBox 67"/>
-          <p:cNvSpPr txBox="1"/>
-          <p:nvPr/>
-        </p:nvSpPr>
-        <p:spPr>
-          <a:xfrm>
-            <a:off x="7406640" y="2587752"/>
-            <a:ext cx="502920" cy="274320"/>
+            <a:r>
+              <a:rPr lang="en-US" altLang="ja-JP" sz="1300" b="1" dirty="0">
+                <a:solidFill>
+                  <a:srgbClr val="FFFFFF"/>
+                </a:solidFill>
+                <a:latin typeface="Meiryo UI"/>
+                <a:ea typeface="Meiryo UI"/>
+              </a:rPr>
+              <a:t>v3.5</a:t>
+            </a:r>
+          </a:p>
+        </p:txBody>
+      </p:sp>
+      <p:sp>
+        <p:nvSpPr>
+          <p:cNvPr id="57" name="Row5Name"/>
+          <p:cNvSpPr/>
+          <p:nvPr/>
+        </p:nvSpPr>
+        <p:spPr>
+          <a:xfrm>
+            <a:off x="1460500" y="5549900"/>
+            <a:ext cx="2540000" cy="304800"/>
           </a:xfrm>
           <a:prstGeom prst="rect">
             <a:avLst/>
           </a:prstGeom>
           <a:noFill/>
-        </p:spPr>
-        <p:txBody>
-          <a:bodyPr wrap="square">
-            <a:spAutoFit/>
-          </a:bodyPr>
-          <a:lstStyle/>
-          <a:p>
-            <a:pPr algn="ctr">
-              <a:defRPr sz="1000" b="1">
-                <a:solidFill>
-                  <a:srgbClr val="FFFFFF"/>
-                </a:solidFill>
-                <a:latin typeface="Meiryo UI"/>
-              </a:defRPr>
-            </a:pPr>
-            <a:r>
-              <a:t>v1.5</a:t>
-            </a:r>
-          </a:p>
-        </p:txBody>
-      </p:sp>
-      <p:sp>
-        <p:nvSpPr>
-          <p:cNvPr id="69" name="TextBox 68"/>
-          <p:cNvSpPr txBox="1"/>
-          <p:nvPr/>
-        </p:nvSpPr>
-        <p:spPr>
-          <a:xfrm>
-            <a:off x="8001000" y="2569464"/>
-            <a:ext cx="1371600" cy="228600"/>
+          <a:ln>
+            <a:noFill/>
+          </a:ln>
+        </p:spPr>
+        <p:txBody>
+          <a:bodyPr wrap="square" lIns="0" tIns="0" rIns="0" bIns="0"/>
+          <a:lstStyle/>
+          <a:p>
+            <a:pPr algn="l"/>
+            <a:r>
+              <a:rPr lang="ja-JP" altLang="en-US" sz="1600" b="1" dirty="0">
+                <a:solidFill>
+                  <a:srgbClr val="0F172A"/>
+                </a:solidFill>
+                <a:latin typeface="Meiryo UI"/>
+                <a:ea typeface="Meiryo UI"/>
+              </a:rPr>
+              <a:t>SNS自動投稿</a:t>
+            </a:r>
+          </a:p>
+        </p:txBody>
+      </p:sp>
+      <p:sp>
+        <p:nvSpPr>
+          <p:cNvPr id="58" name="Row5Desc"/>
+          <p:cNvSpPr/>
+          <p:nvPr/>
+        </p:nvSpPr>
+        <p:spPr>
+          <a:xfrm>
+            <a:off x="1460500" y="5854700"/>
+            <a:ext cx="2540000" cy="330200"/>
           </a:xfrm>
           <a:prstGeom prst="rect">
             <a:avLst/>
           </a:prstGeom>
           <a:noFill/>
-        </p:spPr>
-        <p:txBody>
-          <a:bodyPr wrap="square">
-            <a:spAutoFit/>
-          </a:bodyPr>
-          <a:lstStyle/>
-          <a:p>
-            <a:pPr algn="l">
-              <a:defRPr sz="1200" b="1">
-                <a:solidFill>
-                  <a:srgbClr val="0F172A"/>
-                </a:solidFill>
-                <a:latin typeface="Meiryo UI"/>
-              </a:defRPr>
-            </a:pPr>
-            <a:r>
-              <a:t>マルチカメラ手動切替</a:t>
-            </a:r>
-          </a:p>
-        </p:txBody>
-      </p:sp>
-      <p:sp>
-        <p:nvSpPr>
-          <p:cNvPr id="70" name="TextBox 69"/>
-          <p:cNvSpPr txBox="1"/>
-          <p:nvPr/>
-        </p:nvSpPr>
-        <p:spPr>
-          <a:xfrm>
-            <a:off x="8001000" y="2816352"/>
-            <a:ext cx="1371600" cy="457200"/>
+          <a:ln>
+            <a:noFill/>
+          </a:ln>
+        </p:spPr>
+        <p:txBody>
+          <a:bodyPr wrap="square" lIns="0" tIns="0" rIns="0" bIns="0"/>
+          <a:lstStyle/>
+          <a:p>
+            <a:pPr algn="l"/>
+            <a:r>
+              <a:rPr lang="ja-JP" altLang="en-US" sz="1200" dirty="0">
+                <a:solidFill>
+                  <a:srgbClr val="666680"/>
+                </a:solidFill>
+                <a:latin typeface="Meiryo UI"/>
+                <a:ea typeface="Meiryo UI"/>
+              </a:rPr>
+              <a:t>ハイライトをInstagram</a:t>
+            </a:r>
+            <a:br/>
+            <a:r>
+              <a:rPr lang="ja-JP" altLang="en-US" sz="1200" dirty="0">
+                <a:solidFill>
+                  <a:srgbClr val="666680"/>
+                </a:solidFill>
+                <a:latin typeface="Meiryo UI"/>
+                <a:ea typeface="Meiryo UI"/>
+              </a:rPr>
+              <a:t>TikTokに自動投稿</a:t>
+            </a:r>
+          </a:p>
+        </p:txBody>
+      </p:sp>
+      <p:sp>
+        <p:nvSpPr>
+          <p:cNvPr id="59" name="Row5TechLabel"/>
+          <p:cNvSpPr/>
+          <p:nvPr/>
+        </p:nvSpPr>
+        <p:spPr>
+          <a:xfrm>
+            <a:off x="4229100" y="5549900"/>
+            <a:ext cx="2286000" cy="203200"/>
           </a:xfrm>
           <a:prstGeom prst="rect">
             <a:avLst/>
           </a:prstGeom>
           <a:noFill/>
-        </p:spPr>
-        <p:txBody>
-          <a:bodyPr wrap="square">
-            <a:spAutoFit/>
-          </a:bodyPr>
-          <a:lstStyle/>
-          <a:p>
-            <a:pPr algn="l">
-              <a:defRPr sz="800" b="0">
-                <a:solidFill>
-                  <a:srgbClr val="666680"/>
-                </a:solidFill>
-                <a:latin typeface="Meiryo UI"/>
-              </a:defRPr>
-            </a:pPr>
-            <a:r>
-              <a:t>複数スマホの映像を</a:t>
-            </a:r>
-            <a:br/>
-            <a:r>
-              <a:t>手動で切り替え表示</a:t>
-            </a:r>
-          </a:p>
-        </p:txBody>
-      </p:sp>
-      <p:sp>
-        <p:nvSpPr>
-          <p:cNvPr id="71" name="TextBox 70"/>
-          <p:cNvSpPr txBox="1"/>
-          <p:nvPr/>
-        </p:nvSpPr>
-        <p:spPr>
-          <a:xfrm>
-            <a:off x="9509760" y="2569464"/>
-            <a:ext cx="1188720" cy="182880"/>
+          <a:ln>
+            <a:noFill/>
+          </a:ln>
+        </p:spPr>
+        <p:txBody>
+          <a:bodyPr wrap="square" lIns="0" tIns="0" rIns="0" bIns="0"/>
+          <a:lstStyle/>
+          <a:p>
+            <a:pPr algn="l"/>
+            <a:r>
+              <a:rPr lang="ja-JP" altLang="en-US" sz="1100" dirty="0">
+                <a:solidFill>
+                  <a:srgbClr val="9CA3AF"/>
+                </a:solidFill>
+                <a:latin typeface="Meiryo UI"/>
+                <a:ea typeface="Meiryo UI"/>
+              </a:rPr>
+              <a:t>技術:</a:t>
+            </a:r>
+          </a:p>
+        </p:txBody>
+      </p:sp>
+      <p:sp>
+        <p:nvSpPr>
+          <p:cNvPr id="60" name="Row5Tech"/>
+          <p:cNvSpPr/>
+          <p:nvPr/>
+        </p:nvSpPr>
+        <p:spPr>
+          <a:xfrm>
+            <a:off x="4229100" y="5753100"/>
+            <a:ext cx="2286000" cy="406400"/>
           </a:xfrm>
           <a:prstGeom prst="rect">
             <a:avLst/>
           </a:prstGeom>
           <a:noFill/>
-        </p:spPr>
-        <p:txBody>
-          <a:bodyPr wrap="square">
-            <a:spAutoFit/>
-          </a:bodyPr>
-          <a:lstStyle/>
-          <a:p>
-            <a:pPr algn="l">
-              <a:defRPr sz="700" b="0">
+          <a:ln>
+            <a:noFill/>
+          </a:ln>
+        </p:spPr>
+        <p:txBody>
+          <a:bodyPr wrap="square" lIns="0" tIns="0" rIns="0" bIns="0"/>
+          <a:lstStyle/>
+          <a:p>
+            <a:pPr algn="l"/>
+            <a:r>
+              <a:rPr lang="ja-JP" altLang="en-US" sz="1200" dirty="0">
+                <a:solidFill>
+                  <a:srgbClr val="1A1A2E"/>
+                </a:solidFill>
+                <a:latin typeface="Meiryo UI"/>
+                <a:ea typeface="Meiryo UI"/>
+              </a:rPr>
+              <a:t>各SNS API連携</a:t>
+            </a:r>
+          </a:p>
+        </p:txBody>
+      </p:sp>
+      <p:sp>
+        <p:nvSpPr>
+          <p:cNvPr id="61" name="Row5Period"/>
+          <p:cNvSpPr/>
+          <p:nvPr/>
+        </p:nvSpPr>
+        <p:spPr>
+          <a:xfrm>
+            <a:off x="6769100" y="5549900"/>
+            <a:ext cx="1524000" cy="203200"/>
+          </a:xfrm>
+          <a:prstGeom prst="rect">
+            <a:avLst/>
+          </a:prstGeom>
+          <a:noFill/>
+          <a:ln>
+            <a:noFill/>
+          </a:ln>
+        </p:spPr>
+        <p:txBody>
+          <a:bodyPr wrap="square" lIns="0" tIns="0" rIns="0" bIns="0"/>
+          <a:lstStyle/>
+          <a:p>
+            <a:pPr algn="l"/>
+            <a:r>
+              <a:rPr lang="ja-JP" altLang="en-US" sz="1100" dirty="0">
                 <a:solidFill>
                   <a:srgbClr val="9CA3AF"/>
                 </a:solidFill>
                 <a:latin typeface="Meiryo UI"/>
-              </a:defRPr>
-            </a:pPr>
-            <a:r>
-              <a:t>技術:</a:t>
-            </a:r>
-          </a:p>
-        </p:txBody>
-      </p:sp>
-      <p:sp>
-        <p:nvSpPr>
-          <p:cNvPr id="72" name="TextBox 71"/>
-          <p:cNvSpPr txBox="1"/>
-          <p:nvPr/>
-        </p:nvSpPr>
-        <p:spPr>
-          <a:xfrm>
-            <a:off x="9509760" y="2724912"/>
-            <a:ext cx="1188720" cy="274320"/>
+                <a:ea typeface="Meiryo UI"/>
+              </a:rPr>
+              <a:t>期間:</a:t>
+            </a:r>
+          </a:p>
+        </p:txBody>
+      </p:sp>
+      <p:sp>
+        <p:nvSpPr>
+          <p:cNvPr id="62" name="Row5PeriodVal"/>
+          <p:cNvSpPr/>
+          <p:nvPr/>
+        </p:nvSpPr>
+        <p:spPr>
+          <a:xfrm>
+            <a:off x="6769100" y="5753100"/>
+            <a:ext cx="1524000" cy="279400"/>
           </a:xfrm>
           <a:prstGeom prst="rect">
             <a:avLst/>
           </a:prstGeom>
           <a:noFill/>
-        </p:spPr>
-        <p:txBody>
-          <a:bodyPr wrap="square">
-            <a:spAutoFit/>
-          </a:bodyPr>
-          <a:lstStyle/>
-          <a:p>
-            <a:pPr algn="l">
-              <a:defRPr sz="800" b="0">
+          <a:ln>
+            <a:noFill/>
+          </a:ln>
+        </p:spPr>
+        <p:txBody>
+          <a:bodyPr wrap="square" lIns="0" tIns="0" rIns="0" bIns="0"/>
+          <a:lstStyle/>
+          <a:p>
+            <a:pPr algn="l"/>
+            <a:r>
+              <a:rPr lang="ja-JP" altLang="en-US" sz="1300" dirty="0">
                 <a:solidFill>
                   <a:srgbClr val="1A1A2E"/>
                 </a:solidFill>
                 <a:latin typeface="Meiryo UI"/>
-              </a:defRPr>
-            </a:pPr>
-            <a:r>
-              <a:t>LiveKit マルチトラック</a:t>
-            </a:r>
-          </a:p>
-        </p:txBody>
-      </p:sp>
-      <p:sp>
-        <p:nvSpPr>
-          <p:cNvPr id="73" name="Rounded Rectangle 72"/>
-          <p:cNvSpPr/>
-          <p:nvPr/>
-        </p:nvSpPr>
-        <p:spPr>
-          <a:xfrm>
-            <a:off x="10789920" y="2587752"/>
-            <a:ext cx="960120" cy="502920"/>
+                <a:ea typeface="Meiryo UI"/>
+              </a:rPr>
+              <a:t>2-3週間</a:t>
+            </a:r>
+          </a:p>
+        </p:txBody>
+      </p:sp>
+      <p:sp>
+        <p:nvSpPr>
+          <p:cNvPr id="63" name="Row5Cost"/>
+          <p:cNvSpPr/>
+          <p:nvPr/>
+        </p:nvSpPr>
+        <p:spPr>
+          <a:xfrm>
+            <a:off x="8674100" y="5588000"/>
+            <a:ext cx="2794000" cy="533400"/>
           </a:xfrm>
           <a:prstGeom prst="roundRect">
-            <a:avLst/>
+            <a:avLst>
+              <a:gd name="adj" fmla="val 15000"/>
+            </a:avLst>
           </a:prstGeom>
           <a:solidFill>
             <a:srgbClr val="FFFFFF"/>
           </a:solidFill>
-          <a:ln w="19050">
+          <a:ln w="6350">
             <a:solidFill>
-              <a:srgbClr val="E0E0E8"/>
+              <a:srgbClr val="DC2626"/>
             </a:solidFill>
           </a:ln>
         </p:spPr>
-        <p:style>
-          <a:lnRef idx="1">
-            <a:schemeClr val="accent1"/>
-          </a:lnRef>
-          <a:fillRef idx="3">
-            <a:schemeClr val="accent1"/>
-          </a:fillRef>
-          <a:effectRef idx="2">
-            <a:schemeClr val="accent1"/>
-          </a:effectRef>
-          <a:fontRef idx="minor">
-            <a:schemeClr val="lt1"/>
-          </a:fontRef>
-        </p:style>
-        <p:txBody>
-          <a:bodyPr rtlCol="0" anchor="ctr"/>
+        <p:txBody>
+          <a:bodyPr wrap="square" lIns="0" tIns="0" rIns="0" bIns="0" anchor="ctr"/>
           <a:lstStyle/>
           <a:p>
             <a:pPr algn="ctr"/>
-          </a:p>
-        </p:txBody>
-      </p:sp>
-      <p:sp>
-        <p:nvSpPr>
-          <p:cNvPr id="74" name="TextBox 73"/>
-          <p:cNvSpPr txBox="1"/>
-          <p:nvPr/>
-        </p:nvSpPr>
-        <p:spPr>
-          <a:xfrm>
-            <a:off x="10835640" y="2606040"/>
-            <a:ext cx="868680" cy="228600"/>
-          </a:xfrm>
-          <a:prstGeom prst="rect">
-            <a:avLst/>
-          </a:prstGeom>
-          <a:noFill/>
-        </p:spPr>
-        <p:txBody>
-          <a:bodyPr wrap="square">
-            <a:spAutoFit/>
-          </a:bodyPr>
-          <a:lstStyle/>
-          <a:p>
-            <a:pPr algn="ctr">
-              <a:defRPr sz="1000" b="1">
-                <a:solidFill>
-                  <a:srgbClr val="E63946"/>
-                </a:solidFill>
-                <a:latin typeface="Meiryo UI"/>
-              </a:defRPr>
-            </a:pPr>
-            <a:r>
-              <a:t>約80〜120万円</a:t>
-            </a:r>
-          </a:p>
-        </p:txBody>
-      </p:sp>
-      <p:sp>
-        <p:nvSpPr>
-          <p:cNvPr id="75" name="TextBox 74"/>
-          <p:cNvSpPr txBox="1"/>
-          <p:nvPr/>
-        </p:nvSpPr>
-        <p:spPr>
-          <a:xfrm>
-            <a:off x="10835640" y="2862072"/>
-            <a:ext cx="868680" cy="182880"/>
-          </a:xfrm>
-          <a:prstGeom prst="rect">
-            <a:avLst/>
-          </a:prstGeom>
-          <a:noFill/>
-        </p:spPr>
-        <p:txBody>
-          <a:bodyPr wrap="square">
-            <a:spAutoFit/>
-          </a:bodyPr>
-          <a:lstStyle/>
-          <a:p>
-            <a:pPr algn="ctr">
-              <a:defRPr sz="800" b="0">
-                <a:solidFill>
-                  <a:srgbClr val="666680"/>
-                </a:solidFill>
-                <a:latin typeface="Meiryo UI"/>
-              </a:defRPr>
-            </a:pPr>
-            <a:r>
-              <a:t>1-2ヶ月</a:t>
-            </a:r>
-          </a:p>
-        </p:txBody>
-      </p:sp>
-      <p:sp>
-        <p:nvSpPr>
-          <p:cNvPr id="76" name="Rounded Rectangle 75"/>
-          <p:cNvSpPr/>
-          <p:nvPr/>
-        </p:nvSpPr>
-        <p:spPr>
-          <a:xfrm>
-            <a:off x="7315200" y="3300984"/>
-            <a:ext cx="4572000" cy="685800"/>
+            <a:r>
+              <a:rPr lang="ja-JP" altLang="en-US" sz="1400" b="1" dirty="0">
+                <a:solidFill>
+                  <a:srgbClr val="DC2626"/>
+                </a:solidFill>
+                <a:latin typeface="Meiryo UI"/>
+                <a:ea typeface="Meiryo UI"/>
+              </a:rPr>
+              <a:t>約50〜80万円</a:t>
+            </a:r>
+          </a:p>
+        </p:txBody>
+      </p:sp>
+      <p:sp>
+        <p:nvSpPr>
+          <p:cNvPr id="64" name="TotalBar"/>
+          <p:cNvSpPr/>
+          <p:nvPr/>
+        </p:nvSpPr>
+        <p:spPr>
+          <a:xfrm>
+            <a:off x="546100" y="6273800"/>
+            <a:ext cx="11099800" cy="355600"/>
           </a:xfrm>
           <a:prstGeom prst="roundRect">
-            <a:avLst/>
-          </a:prstGeom>
-          <a:solidFill>
-            <a:srgbClr val="FFF3E0"/>
-          </a:solidFill>
-          <a:ln w="19050">
-            <a:solidFill>
-              <a:srgbClr val="EA880B"/>
-            </a:solidFill>
-          </a:ln>
-        </p:spPr>
-        <p:style>
-          <a:lnRef idx="1">
-            <a:schemeClr val="accent1"/>
-          </a:lnRef>
-          <a:fillRef idx="3">
-            <a:schemeClr val="accent1"/>
-          </a:fillRef>
-          <a:effectRef idx="2">
-            <a:schemeClr val="accent1"/>
-          </a:effectRef>
-          <a:fontRef idx="minor">
-            <a:schemeClr val="lt1"/>
-          </a:fontRef>
-        </p:style>
-        <p:txBody>
-          <a:bodyPr rtlCol="0" anchor="ctr"/>
-          <a:lstStyle/>
-          <a:p>
-            <a:pPr algn="ctr"/>
-          </a:p>
-        </p:txBody>
-      </p:sp>
-      <p:sp>
-        <p:nvSpPr>
-          <p:cNvPr id="77" name="Rounded Rectangle 76"/>
-          <p:cNvSpPr/>
-          <p:nvPr/>
-        </p:nvSpPr>
-        <p:spPr>
-          <a:xfrm>
-            <a:off x="7406640" y="3392424"/>
-            <a:ext cx="502920" cy="274320"/>
-          </a:xfrm>
-          <a:prstGeom prst="roundRect">
-            <a:avLst/>
-          </a:prstGeom>
-          <a:solidFill>
-            <a:srgbClr val="EA880B"/>
-          </a:solidFill>
-          <a:ln>
-            <a:noFill/>
-          </a:ln>
-        </p:spPr>
-        <p:style>
-          <a:lnRef idx="1">
-            <a:schemeClr val="accent1"/>
-          </a:lnRef>
-          <a:fillRef idx="3">
-            <a:schemeClr val="accent1"/>
-          </a:fillRef>
-          <a:effectRef idx="2">
-            <a:schemeClr val="accent1"/>
-          </a:effectRef>
-          <a:fontRef idx="minor">
-            <a:schemeClr val="lt1"/>
-          </a:fontRef>
-        </p:style>
-        <p:txBody>
-          <a:bodyPr rtlCol="0" anchor="ctr"/>
-          <a:lstStyle/>
-          <a:p>
-            <a:pPr algn="ctr"/>
-          </a:p>
-        </p:txBody>
-      </p:sp>
-      <p:sp>
-        <p:nvSpPr>
-          <p:cNvPr id="78" name="TextBox 77"/>
-          <p:cNvSpPr txBox="1"/>
-          <p:nvPr/>
-        </p:nvSpPr>
-        <p:spPr>
-          <a:xfrm>
-            <a:off x="7406640" y="3392424"/>
-            <a:ext cx="502920" cy="274320"/>
-          </a:xfrm>
-          <a:prstGeom prst="rect">
-            <a:avLst/>
-          </a:prstGeom>
-          <a:noFill/>
-        </p:spPr>
-        <p:txBody>
-          <a:bodyPr wrap="square">
-            <a:spAutoFit/>
-          </a:bodyPr>
-          <a:lstStyle/>
-          <a:p>
-            <a:pPr algn="ctr">
-              <a:defRPr sz="1000" b="1">
-                <a:solidFill>
-                  <a:srgbClr val="FFFFFF"/>
-                </a:solidFill>
-                <a:latin typeface="Meiryo UI"/>
-              </a:defRPr>
-            </a:pPr>
-            <a:r>
-              <a:t>v2.0</a:t>
-            </a:r>
-          </a:p>
-        </p:txBody>
-      </p:sp>
-      <p:sp>
-        <p:nvSpPr>
-          <p:cNvPr id="79" name="TextBox 78"/>
-          <p:cNvSpPr txBox="1"/>
-          <p:nvPr/>
-        </p:nvSpPr>
-        <p:spPr>
-          <a:xfrm>
-            <a:off x="8001000" y="3374136"/>
-            <a:ext cx="1371600" cy="228600"/>
-          </a:xfrm>
-          <a:prstGeom prst="rect">
-            <a:avLst/>
-          </a:prstGeom>
-          <a:noFill/>
-        </p:spPr>
-        <p:txBody>
-          <a:bodyPr wrap="square">
-            <a:spAutoFit/>
-          </a:bodyPr>
-          <a:lstStyle/>
-          <a:p>
-            <a:pPr algn="l">
-              <a:defRPr sz="1200" b="1">
-                <a:solidFill>
-                  <a:srgbClr val="0F172A"/>
-                </a:solidFill>
-                <a:latin typeface="Meiryo UI"/>
-              </a:defRPr>
-            </a:pPr>
-            <a:r>
-              <a:t>AI自動アングル切替</a:t>
-            </a:r>
-          </a:p>
-        </p:txBody>
-      </p:sp>
-      <p:sp>
-        <p:nvSpPr>
-          <p:cNvPr id="80" name="TextBox 79"/>
-          <p:cNvSpPr txBox="1"/>
-          <p:nvPr/>
-        </p:nvSpPr>
-        <p:spPr>
-          <a:xfrm>
-            <a:off x="8001000" y="3621024"/>
-            <a:ext cx="1371600" cy="457200"/>
-          </a:xfrm>
-          <a:prstGeom prst="rect">
-            <a:avLst/>
-          </a:prstGeom>
-          <a:noFill/>
-        </p:spPr>
-        <p:txBody>
-          <a:bodyPr wrap="square">
-            <a:spAutoFit/>
-          </a:bodyPr>
-          <a:lstStyle/>
-          <a:p>
-            <a:pPr algn="l">
-              <a:defRPr sz="800" b="0">
-                <a:solidFill>
-                  <a:srgbClr val="666680"/>
-                </a:solidFill>
-                <a:latin typeface="Meiryo UI"/>
-              </a:defRPr>
-            </a:pPr>
-            <a:r>
-              <a:t>AIがベストアングルを</a:t>
-            </a:r>
-            <a:br/>
-            <a:r>
-              <a:t>判断して自動切替</a:t>
-            </a:r>
-          </a:p>
-        </p:txBody>
-      </p:sp>
-      <p:sp>
-        <p:nvSpPr>
-          <p:cNvPr id="81" name="TextBox 80"/>
-          <p:cNvSpPr txBox="1"/>
-          <p:nvPr/>
-        </p:nvSpPr>
-        <p:spPr>
-          <a:xfrm>
-            <a:off x="9509760" y="3374136"/>
-            <a:ext cx="1188720" cy="182880"/>
-          </a:xfrm>
-          <a:prstGeom prst="rect">
-            <a:avLst/>
-          </a:prstGeom>
-          <a:noFill/>
-        </p:spPr>
-        <p:txBody>
-          <a:bodyPr wrap="square">
-            <a:spAutoFit/>
-          </a:bodyPr>
-          <a:lstStyle/>
-          <a:p>
-            <a:pPr algn="l">
-              <a:defRPr sz="700" b="0">
-                <a:solidFill>
-                  <a:srgbClr val="9CA3AF"/>
-                </a:solidFill>
-                <a:latin typeface="Meiryo UI"/>
-              </a:defRPr>
-            </a:pPr>
-            <a:r>
-              <a:t>技術:</a:t>
-            </a:r>
-          </a:p>
-        </p:txBody>
-      </p:sp>
-      <p:sp>
-        <p:nvSpPr>
-          <p:cNvPr id="82" name="TextBox 81"/>
-          <p:cNvSpPr txBox="1"/>
-          <p:nvPr/>
-        </p:nvSpPr>
-        <p:spPr>
-          <a:xfrm>
-            <a:off x="9509760" y="3529584"/>
-            <a:ext cx="1188720" cy="274320"/>
-          </a:xfrm>
-          <a:prstGeom prst="rect">
-            <a:avLst/>
-          </a:prstGeom>
-          <a:noFill/>
-        </p:spPr>
-        <p:txBody>
-          <a:bodyPr wrap="square">
-            <a:spAutoFit/>
-          </a:bodyPr>
-          <a:lstStyle/>
-          <a:p>
-            <a:pPr algn="l">
-              <a:defRPr sz="800" b="0">
-                <a:solidFill>
-                  <a:srgbClr val="1A1A2E"/>
-                </a:solidFill>
-                <a:latin typeface="Meiryo UI"/>
-              </a:defRPr>
-            </a:pPr>
-            <a:r>
-              <a:t>AI推論サーバー（GPU）</a:t>
-            </a:r>
-          </a:p>
-        </p:txBody>
-      </p:sp>
-      <p:sp>
-        <p:nvSpPr>
-          <p:cNvPr id="83" name="Rounded Rectangle 82"/>
-          <p:cNvSpPr/>
-          <p:nvPr/>
-        </p:nvSpPr>
-        <p:spPr>
-          <a:xfrm>
-            <a:off x="10789920" y="3392424"/>
-            <a:ext cx="960120" cy="502920"/>
-          </a:xfrm>
-          <a:prstGeom prst="roundRect">
-            <a:avLst/>
-          </a:prstGeom>
-          <a:solidFill>
-            <a:srgbClr val="FFFFFF"/>
-          </a:solidFill>
-          <a:ln w="19050">
-            <a:solidFill>
-              <a:srgbClr val="E0E0E8"/>
-            </a:solidFill>
-          </a:ln>
-        </p:spPr>
-        <p:style>
-          <a:lnRef idx="1">
-            <a:schemeClr val="accent1"/>
-          </a:lnRef>
-          <a:fillRef idx="3">
-            <a:schemeClr val="accent1"/>
-          </a:fillRef>
-          <a:effectRef idx="2">
-            <a:schemeClr val="accent1"/>
-          </a:effectRef>
-          <a:fontRef idx="minor">
-            <a:schemeClr val="lt1"/>
-          </a:fontRef>
-        </p:style>
-        <p:txBody>
-          <a:bodyPr rtlCol="0" anchor="ctr"/>
-          <a:lstStyle/>
-          <a:p>
-            <a:pPr algn="ctr"/>
-          </a:p>
-        </p:txBody>
-      </p:sp>
-      <p:sp>
-        <p:nvSpPr>
-          <p:cNvPr id="84" name="TextBox 83"/>
-          <p:cNvSpPr txBox="1"/>
-          <p:nvPr/>
-        </p:nvSpPr>
-        <p:spPr>
-          <a:xfrm>
-            <a:off x="10835640" y="3410712"/>
-            <a:ext cx="868680" cy="228600"/>
-          </a:xfrm>
-          <a:prstGeom prst="rect">
-            <a:avLst/>
-          </a:prstGeom>
-          <a:noFill/>
-        </p:spPr>
-        <p:txBody>
-          <a:bodyPr wrap="square">
-            <a:spAutoFit/>
-          </a:bodyPr>
-          <a:lstStyle/>
-          <a:p>
-            <a:pPr algn="ctr">
-              <a:defRPr sz="1000" b="1">
-                <a:solidFill>
-                  <a:srgbClr val="E63946"/>
-                </a:solidFill>
-                <a:latin typeface="Meiryo UI"/>
-              </a:defRPr>
-            </a:pPr>
-            <a:r>
-              <a:t>約200〜350万円</a:t>
-            </a:r>
-          </a:p>
-        </p:txBody>
-      </p:sp>
-      <p:sp>
-        <p:nvSpPr>
-          <p:cNvPr id="85" name="TextBox 84"/>
-          <p:cNvSpPr txBox="1"/>
-          <p:nvPr/>
-        </p:nvSpPr>
-        <p:spPr>
-          <a:xfrm>
-            <a:off x="10835640" y="3666744"/>
-            <a:ext cx="868680" cy="182880"/>
-          </a:xfrm>
-          <a:prstGeom prst="rect">
-            <a:avLst/>
-          </a:prstGeom>
-          <a:noFill/>
-        </p:spPr>
-        <p:txBody>
-          <a:bodyPr wrap="square">
-            <a:spAutoFit/>
-          </a:bodyPr>
-          <a:lstStyle/>
-          <a:p>
-            <a:pPr algn="ctr">
-              <a:defRPr sz="800" b="0">
-                <a:solidFill>
-                  <a:srgbClr val="666680"/>
-                </a:solidFill>
-                <a:latin typeface="Meiryo UI"/>
-              </a:defRPr>
-            </a:pPr>
-            <a:r>
-              <a:t>3-6ヶ月</a:t>
-            </a:r>
-          </a:p>
-        </p:txBody>
-      </p:sp>
-      <p:sp>
-        <p:nvSpPr>
-          <p:cNvPr id="86" name="Rounded Rectangle 85"/>
-          <p:cNvSpPr/>
-          <p:nvPr/>
-        </p:nvSpPr>
-        <p:spPr>
-          <a:xfrm>
-            <a:off x="7315200" y="4105656"/>
-            <a:ext cx="4572000" cy="685800"/>
-          </a:xfrm>
-          <a:prstGeom prst="roundRect">
-            <a:avLst/>
-          </a:prstGeom>
-          <a:solidFill>
-            <a:srgbClr val="E8F5EB"/>
-          </a:solidFill>
-          <a:ln w="19050">
-            <a:solidFill>
-              <a:srgbClr val="16A34A"/>
-            </a:solidFill>
-          </a:ln>
-        </p:spPr>
-        <p:style>
-          <a:lnRef idx="1">
-            <a:schemeClr val="accent1"/>
-          </a:lnRef>
-          <a:fillRef idx="3">
-            <a:schemeClr val="accent1"/>
-          </a:fillRef>
-          <a:effectRef idx="2">
-            <a:schemeClr val="accent1"/>
-          </a:effectRef>
-          <a:fontRef idx="minor">
-            <a:schemeClr val="lt1"/>
-          </a:fontRef>
-        </p:style>
-        <p:txBody>
-          <a:bodyPr rtlCol="0" anchor="ctr"/>
-          <a:lstStyle/>
-          <a:p>
-            <a:pPr algn="ctr"/>
-          </a:p>
-        </p:txBody>
-      </p:sp>
-      <p:sp>
-        <p:nvSpPr>
-          <p:cNvPr id="87" name="Rounded Rectangle 86"/>
-          <p:cNvSpPr/>
-          <p:nvPr/>
-        </p:nvSpPr>
-        <p:spPr>
-          <a:xfrm>
-            <a:off x="7406640" y="4197096"/>
-            <a:ext cx="502920" cy="274320"/>
-          </a:xfrm>
-          <a:prstGeom prst="roundRect">
-            <a:avLst/>
-          </a:prstGeom>
-          <a:solidFill>
-            <a:srgbClr val="16A34A"/>
-          </a:solidFill>
-          <a:ln>
-            <a:noFill/>
-          </a:ln>
-        </p:spPr>
-        <p:style>
-          <a:lnRef idx="1">
-            <a:schemeClr val="accent1"/>
-          </a:lnRef>
-          <a:fillRef idx="3">
-            <a:schemeClr val="accent1"/>
-          </a:fillRef>
-          <a:effectRef idx="2">
-            <a:schemeClr val="accent1"/>
-          </a:effectRef>
-          <a:fontRef idx="minor">
-            <a:schemeClr val="lt1"/>
-          </a:fontRef>
-        </p:style>
-        <p:txBody>
-          <a:bodyPr rtlCol="0" anchor="ctr"/>
-          <a:lstStyle/>
-          <a:p>
-            <a:pPr algn="ctr"/>
-          </a:p>
-        </p:txBody>
-      </p:sp>
-      <p:sp>
-        <p:nvSpPr>
-          <p:cNvPr id="88" name="TextBox 87"/>
-          <p:cNvSpPr txBox="1"/>
-          <p:nvPr/>
-        </p:nvSpPr>
-        <p:spPr>
-          <a:xfrm>
-            <a:off x="7406640" y="4197096"/>
-            <a:ext cx="502920" cy="274320"/>
-          </a:xfrm>
-          <a:prstGeom prst="rect">
-            <a:avLst/>
-          </a:prstGeom>
-          <a:noFill/>
-        </p:spPr>
-        <p:txBody>
-          <a:bodyPr wrap="square">
-            <a:spAutoFit/>
-          </a:bodyPr>
-          <a:lstStyle/>
-          <a:p>
-            <a:pPr algn="ctr">
-              <a:defRPr sz="1000" b="1">
-                <a:solidFill>
-                  <a:srgbClr val="FFFFFF"/>
-                </a:solidFill>
-                <a:latin typeface="Meiryo UI"/>
-              </a:defRPr>
-            </a:pPr>
-            <a:r>
-              <a:t>v2.5</a:t>
-            </a:r>
-          </a:p>
-        </p:txBody>
-      </p:sp>
-      <p:sp>
-        <p:nvSpPr>
-          <p:cNvPr id="89" name="TextBox 88"/>
-          <p:cNvSpPr txBox="1"/>
-          <p:nvPr/>
-        </p:nvSpPr>
-        <p:spPr>
-          <a:xfrm>
-            <a:off x="8001000" y="4178808"/>
-            <a:ext cx="1371600" cy="228600"/>
-          </a:xfrm>
-          <a:prstGeom prst="rect">
-            <a:avLst/>
-          </a:prstGeom>
-          <a:noFill/>
-        </p:spPr>
-        <p:txBody>
-          <a:bodyPr wrap="square">
-            <a:spAutoFit/>
-          </a:bodyPr>
-          <a:lstStyle/>
-          <a:p>
-            <a:pPr algn="l">
-              <a:defRPr sz="1200" b="1">
-                <a:solidFill>
-                  <a:srgbClr val="0F172A"/>
-                </a:solidFill>
-                <a:latin typeface="Meiryo UI"/>
-              </a:defRPr>
-            </a:pPr>
-            <a:r>
-              <a:t>AIハイライト自動生成</a:t>
-            </a:r>
-          </a:p>
-        </p:txBody>
-      </p:sp>
-      <p:sp>
-        <p:nvSpPr>
-          <p:cNvPr id="90" name="TextBox 89"/>
-          <p:cNvSpPr txBox="1"/>
-          <p:nvPr/>
-        </p:nvSpPr>
-        <p:spPr>
-          <a:xfrm>
-            <a:off x="8001000" y="4425696"/>
-            <a:ext cx="1371600" cy="457200"/>
-          </a:xfrm>
-          <a:prstGeom prst="rect">
-            <a:avLst/>
-          </a:prstGeom>
-          <a:noFill/>
-        </p:spPr>
-        <p:txBody>
-          <a:bodyPr wrap="square">
-            <a:spAutoFit/>
-          </a:bodyPr>
-          <a:lstStyle/>
-          <a:p>
-            <a:pPr algn="l">
-              <a:defRPr sz="800" b="0">
-                <a:solidFill>
-                  <a:srgbClr val="666680"/>
-                </a:solidFill>
-                <a:latin typeface="Meiryo UI"/>
-              </a:defRPr>
-            </a:pPr>
-            <a:r>
-              <a:t>試合のハイライトを</a:t>
-            </a:r>
-            <a:br/>
-            <a:r>
-              <a:t>AIが自動編集・生成</a:t>
-            </a:r>
-          </a:p>
-        </p:txBody>
-      </p:sp>
-      <p:sp>
-        <p:nvSpPr>
-          <p:cNvPr id="91" name="TextBox 90"/>
-          <p:cNvSpPr txBox="1"/>
-          <p:nvPr/>
-        </p:nvSpPr>
-        <p:spPr>
-          <a:xfrm>
-            <a:off x="9509760" y="4178808"/>
-            <a:ext cx="1188720" cy="182880"/>
-          </a:xfrm>
-          <a:prstGeom prst="rect">
-            <a:avLst/>
-          </a:prstGeom>
-          <a:noFill/>
-        </p:spPr>
-        <p:txBody>
-          <a:bodyPr wrap="square">
-            <a:spAutoFit/>
-          </a:bodyPr>
-          <a:lstStyle/>
-          <a:p>
-            <a:pPr algn="l">
-              <a:defRPr sz="700" b="0">
-                <a:solidFill>
-                  <a:srgbClr val="9CA3AF"/>
-                </a:solidFill>
-                <a:latin typeface="Meiryo UI"/>
-              </a:defRPr>
-            </a:pPr>
-            <a:r>
-              <a:t>技術:</a:t>
-            </a:r>
-          </a:p>
-        </p:txBody>
-      </p:sp>
-      <p:sp>
-        <p:nvSpPr>
-          <p:cNvPr id="92" name="TextBox 91"/>
-          <p:cNvSpPr txBox="1"/>
-          <p:nvPr/>
-        </p:nvSpPr>
-        <p:spPr>
-          <a:xfrm>
-            <a:off x="9509760" y="4334256"/>
-            <a:ext cx="1188720" cy="274320"/>
-          </a:xfrm>
-          <a:prstGeom prst="rect">
-            <a:avLst/>
-          </a:prstGeom>
-          <a:noFill/>
-        </p:spPr>
-        <p:txBody>
-          <a:bodyPr wrap="square">
-            <a:spAutoFit/>
-          </a:bodyPr>
-          <a:lstStyle/>
-          <a:p>
-            <a:pPr algn="l">
-              <a:defRPr sz="800" b="0">
-                <a:solidFill>
-                  <a:srgbClr val="1A1A2E"/>
-                </a:solidFill>
-                <a:latin typeface="Meiryo UI"/>
-              </a:defRPr>
-            </a:pPr>
-            <a:r>
-              <a:t>動画解析AI + FFmpeg</a:t>
-            </a:r>
-          </a:p>
-        </p:txBody>
-      </p:sp>
-      <p:sp>
-        <p:nvSpPr>
-          <p:cNvPr id="93" name="Rounded Rectangle 92"/>
-          <p:cNvSpPr/>
-          <p:nvPr/>
-        </p:nvSpPr>
-        <p:spPr>
-          <a:xfrm>
-            <a:off x="10789920" y="4197096"/>
-            <a:ext cx="960120" cy="502920"/>
-          </a:xfrm>
-          <a:prstGeom prst="roundRect">
-            <a:avLst/>
-          </a:prstGeom>
-          <a:solidFill>
-            <a:srgbClr val="FFFFFF"/>
-          </a:solidFill>
-          <a:ln w="19050">
-            <a:solidFill>
-              <a:srgbClr val="E0E0E8"/>
-            </a:solidFill>
-          </a:ln>
-        </p:spPr>
-        <p:style>
-          <a:lnRef idx="1">
-            <a:schemeClr val="accent1"/>
-          </a:lnRef>
-          <a:fillRef idx="3">
-            <a:schemeClr val="accent1"/>
-          </a:fillRef>
-          <a:effectRef idx="2">
-            <a:schemeClr val="accent1"/>
-          </a:effectRef>
-          <a:fontRef idx="minor">
-            <a:schemeClr val="lt1"/>
-          </a:fontRef>
-        </p:style>
-        <p:txBody>
-          <a:bodyPr rtlCol="0" anchor="ctr"/>
-          <a:lstStyle/>
-          <a:p>
-            <a:pPr algn="ctr"/>
-          </a:p>
-        </p:txBody>
-      </p:sp>
-      <p:sp>
-        <p:nvSpPr>
-          <p:cNvPr id="94" name="TextBox 93"/>
-          <p:cNvSpPr txBox="1"/>
-          <p:nvPr/>
-        </p:nvSpPr>
-        <p:spPr>
-          <a:xfrm>
-            <a:off x="10835640" y="4215384"/>
-            <a:ext cx="868680" cy="228600"/>
-          </a:xfrm>
-          <a:prstGeom prst="rect">
-            <a:avLst/>
-          </a:prstGeom>
-          <a:noFill/>
-        </p:spPr>
-        <p:txBody>
-          <a:bodyPr wrap="square">
-            <a:spAutoFit/>
-          </a:bodyPr>
-          <a:lstStyle/>
-          <a:p>
-            <a:pPr algn="ctr">
-              <a:defRPr sz="1000" b="1">
-                <a:solidFill>
-                  <a:srgbClr val="E63946"/>
-                </a:solidFill>
-                <a:latin typeface="Meiryo UI"/>
-              </a:defRPr>
-            </a:pPr>
-            <a:r>
-              <a:t>約150〜250万円</a:t>
-            </a:r>
-          </a:p>
-        </p:txBody>
-      </p:sp>
-      <p:sp>
-        <p:nvSpPr>
-          <p:cNvPr id="95" name="TextBox 94"/>
-          <p:cNvSpPr txBox="1"/>
-          <p:nvPr/>
-        </p:nvSpPr>
-        <p:spPr>
-          <a:xfrm>
-            <a:off x="10835640" y="4471416"/>
-            <a:ext cx="868680" cy="182880"/>
-          </a:xfrm>
-          <a:prstGeom prst="rect">
-            <a:avLst/>
-          </a:prstGeom>
-          <a:noFill/>
-        </p:spPr>
-        <p:txBody>
-          <a:bodyPr wrap="square">
-            <a:spAutoFit/>
-          </a:bodyPr>
-          <a:lstStyle/>
-          <a:p>
-            <a:pPr algn="ctr">
-              <a:defRPr sz="800" b="0">
-                <a:solidFill>
-                  <a:srgbClr val="666680"/>
-                </a:solidFill>
-                <a:latin typeface="Meiryo UI"/>
-              </a:defRPr>
-            </a:pPr>
-            <a:r>
-              <a:t>2-4ヶ月</a:t>
-            </a:r>
-          </a:p>
-        </p:txBody>
-      </p:sp>
-      <p:sp>
-        <p:nvSpPr>
-          <p:cNvPr id="96" name="Rounded Rectangle 95"/>
-          <p:cNvSpPr/>
-          <p:nvPr/>
-        </p:nvSpPr>
-        <p:spPr>
-          <a:xfrm>
-            <a:off x="7315200" y="4910328"/>
-            <a:ext cx="4572000" cy="685800"/>
-          </a:xfrm>
-          <a:prstGeom prst="roundRect">
-            <a:avLst/>
-          </a:prstGeom>
-          <a:solidFill>
-            <a:srgbClr val="FDEBED"/>
-          </a:solidFill>
-          <a:ln w="19050">
-            <a:solidFill>
-              <a:srgbClr val="E63946"/>
-            </a:solidFill>
-          </a:ln>
-        </p:spPr>
-        <p:style>
-          <a:lnRef idx="1">
-            <a:schemeClr val="accent1"/>
-          </a:lnRef>
-          <a:fillRef idx="3">
-            <a:schemeClr val="accent1"/>
-          </a:fillRef>
-          <a:effectRef idx="2">
-            <a:schemeClr val="accent1"/>
-          </a:effectRef>
-          <a:fontRef idx="minor">
-            <a:schemeClr val="lt1"/>
-          </a:fontRef>
-        </p:style>
-        <p:txBody>
-          <a:bodyPr rtlCol="0" anchor="ctr"/>
-          <a:lstStyle/>
-          <a:p>
-            <a:pPr algn="ctr"/>
-          </a:p>
-        </p:txBody>
-      </p:sp>
-      <p:sp>
-        <p:nvSpPr>
-          <p:cNvPr id="97" name="Rounded Rectangle 96"/>
-          <p:cNvSpPr/>
-          <p:nvPr/>
-        </p:nvSpPr>
-        <p:spPr>
-          <a:xfrm>
-            <a:off x="7406640" y="5001768"/>
-            <a:ext cx="502920" cy="274320"/>
-          </a:xfrm>
-          <a:prstGeom prst="roundRect">
-            <a:avLst/>
+            <a:avLst>
+              <a:gd name="adj" fmla="val 10000"/>
+            </a:avLst>
           </a:prstGeom>
           <a:solidFill>
             <a:srgbClr val="E63946"/>
@@ -6915,836 +7605,67 @@
             <a:noFill/>
           </a:ln>
         </p:spPr>
-        <p:style>
-          <a:lnRef idx="1">
-            <a:schemeClr val="accent1"/>
-          </a:lnRef>
-          <a:fillRef idx="3">
-            <a:schemeClr val="accent1"/>
-          </a:fillRef>
-          <a:effectRef idx="2">
-            <a:schemeClr val="accent1"/>
-          </a:effectRef>
-          <a:fontRef idx="minor">
-            <a:schemeClr val="lt1"/>
-          </a:fontRef>
-        </p:style>
-        <p:txBody>
-          <a:bodyPr rtlCol="0" anchor="ctr"/>
+        <p:txBody>
+          <a:bodyPr wrap="square" lIns="91440" tIns="0" rIns="91440" bIns="0" anchor="ctr"/>
           <a:lstStyle/>
           <a:p>
             <a:pPr algn="ctr"/>
-          </a:p>
-        </p:txBody>
-      </p:sp>
-      <p:sp>
-        <p:nvSpPr>
-          <p:cNvPr id="98" name="TextBox 97"/>
-          <p:cNvSpPr txBox="1"/>
-          <p:nvPr/>
-        </p:nvSpPr>
-        <p:spPr>
-          <a:xfrm>
-            <a:off x="7406640" y="5001768"/>
-            <a:ext cx="502920" cy="274320"/>
+            <a:r>
+              <a:rPr lang="ja-JP" altLang="en-US" sz="1400" b="1" dirty="0">
+                <a:solidFill>
+                  <a:srgbClr val="FFFFFF"/>
+                </a:solidFill>
+                <a:latin typeface="Meiryo UI"/>
+                <a:ea typeface="Meiryo UI"/>
+              </a:rPr>
+              <a:t>全拡張の概算合計: 約610〜1,050万円（段階的に投資）</a:t>
+            </a:r>
+          </a:p>
+        </p:txBody>
+      </p:sp>
+      <p:sp>
+        <p:nvSpPr>
+          <p:cNvPr id="65" name="Footer"/>
+          <p:cNvSpPr/>
+          <p:nvPr/>
+        </p:nvSpPr>
+        <p:spPr>
+          <a:xfrm>
+            <a:off x="546100" y="6680200"/>
+            <a:ext cx="11099800" cy="152400"/>
           </a:xfrm>
           <a:prstGeom prst="rect">
             <a:avLst/>
           </a:prstGeom>
           <a:noFill/>
-        </p:spPr>
-        <p:txBody>
-          <a:bodyPr wrap="square">
-            <a:spAutoFit/>
-          </a:bodyPr>
-          <a:lstStyle/>
-          <a:p>
-            <a:pPr algn="ctr">
-              <a:defRPr sz="1000" b="1">
-                <a:solidFill>
-                  <a:srgbClr val="FFFFFF"/>
-                </a:solidFill>
-                <a:latin typeface="Meiryo UI"/>
-              </a:defRPr>
-            </a:pPr>
-            <a:r>
-              <a:t>v3.0</a:t>
-            </a:r>
-          </a:p>
-        </p:txBody>
-      </p:sp>
-      <p:sp>
-        <p:nvSpPr>
-          <p:cNvPr id="99" name="TextBox 98"/>
-          <p:cNvSpPr txBox="1"/>
-          <p:nvPr/>
-        </p:nvSpPr>
-        <p:spPr>
-          <a:xfrm>
-            <a:off x="8001000" y="4983480"/>
-            <a:ext cx="1371600" cy="228600"/>
-          </a:xfrm>
-          <a:prstGeom prst="rect">
-            <a:avLst/>
-          </a:prstGeom>
-          <a:noFill/>
-        </p:spPr>
-        <p:txBody>
-          <a:bodyPr wrap="square">
-            <a:spAutoFit/>
-          </a:bodyPr>
-          <a:lstStyle/>
-          <a:p>
-            <a:pPr algn="l">
-              <a:defRPr sz="1200" b="1">
-                <a:solidFill>
-                  <a:srgbClr val="0F172A"/>
-                </a:solidFill>
-                <a:latin typeface="Meiryo UI"/>
-              </a:defRPr>
-            </a:pPr>
-            <a:r>
-              <a:t>AI得点検知</a:t>
-            </a:r>
-          </a:p>
-        </p:txBody>
-      </p:sp>
-      <p:sp>
-        <p:nvSpPr>
-          <p:cNvPr id="100" name="TextBox 99"/>
-          <p:cNvSpPr txBox="1"/>
-          <p:nvPr/>
-        </p:nvSpPr>
-        <p:spPr>
-          <a:xfrm>
-            <a:off x="8001000" y="5230368"/>
-            <a:ext cx="1371600" cy="457200"/>
-          </a:xfrm>
-          <a:prstGeom prst="rect">
-            <a:avLst/>
-          </a:prstGeom>
-          <a:noFill/>
-        </p:spPr>
-        <p:txBody>
-          <a:bodyPr wrap="square">
-            <a:spAutoFit/>
-          </a:bodyPr>
-          <a:lstStyle/>
-          <a:p>
-            <a:pPr algn="l">
-              <a:defRPr sz="800" b="0">
-                <a:solidFill>
-                  <a:srgbClr val="666680"/>
-                </a:solidFill>
-                <a:latin typeface="Meiryo UI"/>
-              </a:defRPr>
-            </a:pPr>
-            <a:r>
-              <a:t>映像・音声からAIが得点を</a:t>
-            </a:r>
-            <a:br/>
-            <a:r>
-              <a:t>検知しスコア自動更新</a:t>
-            </a:r>
-          </a:p>
-        </p:txBody>
-      </p:sp>
-      <p:sp>
-        <p:nvSpPr>
-          <p:cNvPr id="101" name="TextBox 100"/>
-          <p:cNvSpPr txBox="1"/>
-          <p:nvPr/>
-        </p:nvSpPr>
-        <p:spPr>
-          <a:xfrm>
-            <a:off x="9509760" y="4983480"/>
-            <a:ext cx="1188720" cy="182880"/>
-          </a:xfrm>
-          <a:prstGeom prst="rect">
-            <a:avLst/>
-          </a:prstGeom>
-          <a:noFill/>
-        </p:spPr>
-        <p:txBody>
-          <a:bodyPr wrap="square">
-            <a:spAutoFit/>
-          </a:bodyPr>
-          <a:lstStyle/>
-          <a:p>
-            <a:pPr algn="l">
-              <a:defRPr sz="700" b="0">
-                <a:solidFill>
-                  <a:srgbClr val="9CA3AF"/>
-                </a:solidFill>
-                <a:latin typeface="Meiryo UI"/>
-              </a:defRPr>
-            </a:pPr>
-            <a:r>
-              <a:t>技術:</a:t>
-            </a:r>
-          </a:p>
-        </p:txBody>
-      </p:sp>
-      <p:sp>
-        <p:nvSpPr>
-          <p:cNvPr id="102" name="TextBox 101"/>
-          <p:cNvSpPr txBox="1"/>
-          <p:nvPr/>
-        </p:nvSpPr>
-        <p:spPr>
-          <a:xfrm>
-            <a:off x="9509760" y="5138928"/>
-            <a:ext cx="1188720" cy="274320"/>
-          </a:xfrm>
-          <a:prstGeom prst="rect">
-            <a:avLst/>
-          </a:prstGeom>
-          <a:noFill/>
-        </p:spPr>
-        <p:txBody>
-          <a:bodyPr wrap="square">
-            <a:spAutoFit/>
-          </a:bodyPr>
-          <a:lstStyle/>
-          <a:p>
-            <a:pPr algn="l">
-              <a:defRPr sz="800" b="0">
-                <a:solidFill>
-                  <a:srgbClr val="1A1A2E"/>
-                </a:solidFill>
-                <a:latin typeface="Meiryo UI"/>
-              </a:defRPr>
-            </a:pPr>
-            <a:r>
-              <a:t>映像解析AI / 音声認識</a:t>
-            </a:r>
-          </a:p>
-        </p:txBody>
-      </p:sp>
-      <p:sp>
-        <p:nvSpPr>
-          <p:cNvPr id="103" name="Rounded Rectangle 102"/>
-          <p:cNvSpPr/>
-          <p:nvPr/>
-        </p:nvSpPr>
-        <p:spPr>
-          <a:xfrm>
-            <a:off x="10789920" y="5001768"/>
-            <a:ext cx="960120" cy="502920"/>
-          </a:xfrm>
-          <a:prstGeom prst="roundRect">
-            <a:avLst/>
-          </a:prstGeom>
-          <a:solidFill>
-            <a:srgbClr val="FFFFFF"/>
-          </a:solidFill>
-          <a:ln w="19050">
-            <a:solidFill>
-              <a:srgbClr val="E0E0E8"/>
-            </a:solidFill>
-          </a:ln>
-        </p:spPr>
-        <p:style>
-          <a:lnRef idx="1">
-            <a:schemeClr val="accent1"/>
-          </a:lnRef>
-          <a:fillRef idx="3">
-            <a:schemeClr val="accent1"/>
-          </a:fillRef>
-          <a:effectRef idx="2">
-            <a:schemeClr val="accent1"/>
-          </a:effectRef>
-          <a:fontRef idx="minor">
-            <a:schemeClr val="lt1"/>
-          </a:fontRef>
-        </p:style>
-        <p:txBody>
-          <a:bodyPr rtlCol="0" anchor="ctr"/>
-          <a:lstStyle/>
-          <a:p>
-            <a:pPr algn="ctr"/>
-          </a:p>
-        </p:txBody>
-      </p:sp>
-      <p:sp>
-        <p:nvSpPr>
-          <p:cNvPr id="104" name="TextBox 103"/>
-          <p:cNvSpPr txBox="1"/>
-          <p:nvPr/>
-        </p:nvSpPr>
-        <p:spPr>
-          <a:xfrm>
-            <a:off x="10835640" y="5020056"/>
-            <a:ext cx="868680" cy="228600"/>
-          </a:xfrm>
-          <a:prstGeom prst="rect">
-            <a:avLst/>
-          </a:prstGeom>
-          <a:noFill/>
-        </p:spPr>
-        <p:txBody>
-          <a:bodyPr wrap="square">
-            <a:spAutoFit/>
-          </a:bodyPr>
-          <a:lstStyle/>
-          <a:p>
-            <a:pPr algn="ctr">
-              <a:defRPr sz="1000" b="1">
-                <a:solidFill>
-                  <a:srgbClr val="E63946"/>
-                </a:solidFill>
-                <a:latin typeface="Meiryo UI"/>
-              </a:defRPr>
-            </a:pPr>
-            <a:r>
-              <a:t>約100〜200万円</a:t>
-            </a:r>
-          </a:p>
-        </p:txBody>
-      </p:sp>
-      <p:sp>
-        <p:nvSpPr>
-          <p:cNvPr id="105" name="TextBox 104"/>
-          <p:cNvSpPr txBox="1"/>
-          <p:nvPr/>
-        </p:nvSpPr>
-        <p:spPr>
-          <a:xfrm>
-            <a:off x="10835640" y="5276088"/>
-            <a:ext cx="868680" cy="182880"/>
-          </a:xfrm>
-          <a:prstGeom prst="rect">
-            <a:avLst/>
-          </a:prstGeom>
-          <a:noFill/>
-        </p:spPr>
-        <p:txBody>
-          <a:bodyPr wrap="square">
-            <a:spAutoFit/>
-          </a:bodyPr>
-          <a:lstStyle/>
-          <a:p>
-            <a:pPr algn="ctr">
-              <a:defRPr sz="800" b="0">
-                <a:solidFill>
-                  <a:srgbClr val="666680"/>
-                </a:solidFill>
-                <a:latin typeface="Meiryo UI"/>
-              </a:defRPr>
-            </a:pPr>
-            <a:r>
-              <a:t>3-6ヶ月</a:t>
-            </a:r>
-          </a:p>
-        </p:txBody>
-      </p:sp>
-      <p:sp>
-        <p:nvSpPr>
-          <p:cNvPr id="106" name="Rounded Rectangle 105"/>
-          <p:cNvSpPr/>
-          <p:nvPr/>
-        </p:nvSpPr>
-        <p:spPr>
-          <a:xfrm>
-            <a:off x="7315200" y="5715000"/>
-            <a:ext cx="4572000" cy="685800"/>
-          </a:xfrm>
-          <a:prstGeom prst="roundRect">
-            <a:avLst/>
-          </a:prstGeom>
-          <a:solidFill>
-            <a:srgbClr val="F3EEFF"/>
-          </a:solidFill>
-          <a:ln w="19050">
-            <a:solidFill>
-              <a:srgbClr val="7C3AED"/>
-            </a:solidFill>
-          </a:ln>
-        </p:spPr>
-        <p:style>
-          <a:lnRef idx="1">
-            <a:schemeClr val="accent1"/>
-          </a:lnRef>
-          <a:fillRef idx="3">
-            <a:schemeClr val="accent1"/>
-          </a:fillRef>
-          <a:effectRef idx="2">
-            <a:schemeClr val="accent1"/>
-          </a:effectRef>
-          <a:fontRef idx="minor">
-            <a:schemeClr val="lt1"/>
-          </a:fontRef>
-        </p:style>
-        <p:txBody>
-          <a:bodyPr rtlCol="0" anchor="ctr"/>
-          <a:lstStyle/>
-          <a:p>
-            <a:pPr algn="ctr"/>
-          </a:p>
-        </p:txBody>
-      </p:sp>
-      <p:sp>
-        <p:nvSpPr>
-          <p:cNvPr id="107" name="Rounded Rectangle 106"/>
-          <p:cNvSpPr/>
-          <p:nvPr/>
-        </p:nvSpPr>
-        <p:spPr>
-          <a:xfrm>
-            <a:off x="7406640" y="5806440"/>
-            <a:ext cx="502920" cy="274320"/>
-          </a:xfrm>
-          <a:prstGeom prst="roundRect">
-            <a:avLst/>
-          </a:prstGeom>
-          <a:solidFill>
-            <a:srgbClr val="7C3AED"/>
-          </a:solidFill>
           <a:ln>
             <a:noFill/>
           </a:ln>
         </p:spPr>
-        <p:style>
-          <a:lnRef idx="1">
-            <a:schemeClr val="accent1"/>
-          </a:lnRef>
-          <a:fillRef idx="3">
-            <a:schemeClr val="accent1"/>
-          </a:fillRef>
-          <a:effectRef idx="2">
-            <a:schemeClr val="accent1"/>
-          </a:effectRef>
-          <a:fontRef idx="minor">
-            <a:schemeClr val="lt1"/>
-          </a:fontRef>
-        </p:style>
-        <p:txBody>
-          <a:bodyPr rtlCol="0" anchor="ctr"/>
-          <a:lstStyle/>
-          <a:p>
-            <a:pPr algn="ctr"/>
-          </a:p>
-        </p:txBody>
-      </p:sp>
-      <p:sp>
-        <p:nvSpPr>
-          <p:cNvPr id="108" name="TextBox 107"/>
-          <p:cNvSpPr txBox="1"/>
-          <p:nvPr/>
-        </p:nvSpPr>
-        <p:spPr>
-          <a:xfrm>
-            <a:off x="7406640" y="5806440"/>
-            <a:ext cx="502920" cy="274320"/>
-          </a:xfrm>
-          <a:prstGeom prst="rect">
-            <a:avLst/>
-          </a:prstGeom>
-          <a:noFill/>
-        </p:spPr>
-        <p:txBody>
-          <a:bodyPr wrap="square">
-            <a:spAutoFit/>
-          </a:bodyPr>
-          <a:lstStyle/>
-          <a:p>
-            <a:pPr algn="ctr">
-              <a:defRPr sz="1000" b="1">
-                <a:solidFill>
-                  <a:srgbClr val="FFFFFF"/>
-                </a:solidFill>
-                <a:latin typeface="Meiryo UI"/>
-              </a:defRPr>
-            </a:pPr>
-            <a:r>
-              <a:t>v3.5</a:t>
-            </a:r>
-          </a:p>
-        </p:txBody>
-      </p:sp>
-      <p:sp>
-        <p:nvSpPr>
-          <p:cNvPr id="109" name="TextBox 108"/>
-          <p:cNvSpPr txBox="1"/>
-          <p:nvPr/>
-        </p:nvSpPr>
-        <p:spPr>
-          <a:xfrm>
-            <a:off x="8001000" y="5788152"/>
-            <a:ext cx="1371600" cy="228600"/>
-          </a:xfrm>
-          <a:prstGeom prst="rect">
-            <a:avLst/>
-          </a:prstGeom>
-          <a:noFill/>
-        </p:spPr>
-        <p:txBody>
-          <a:bodyPr wrap="square">
-            <a:spAutoFit/>
-          </a:bodyPr>
-          <a:lstStyle/>
-          <a:p>
-            <a:pPr algn="l">
-              <a:defRPr sz="1200" b="1">
-                <a:solidFill>
-                  <a:srgbClr val="0F172A"/>
-                </a:solidFill>
-                <a:latin typeface="Meiryo UI"/>
-              </a:defRPr>
-            </a:pPr>
-            <a:r>
-              <a:t>SNS自動投稿</a:t>
-            </a:r>
-          </a:p>
-        </p:txBody>
-      </p:sp>
-      <p:sp>
-        <p:nvSpPr>
-          <p:cNvPr id="110" name="TextBox 109"/>
-          <p:cNvSpPr txBox="1"/>
-          <p:nvPr/>
-        </p:nvSpPr>
-        <p:spPr>
-          <a:xfrm>
-            <a:off x="8001000" y="6035040"/>
-            <a:ext cx="1371600" cy="457200"/>
-          </a:xfrm>
-          <a:prstGeom prst="rect">
-            <a:avLst/>
-          </a:prstGeom>
-          <a:noFill/>
-        </p:spPr>
-        <p:txBody>
-          <a:bodyPr wrap="square">
-            <a:spAutoFit/>
-          </a:bodyPr>
-          <a:lstStyle/>
-          <a:p>
-            <a:pPr algn="l">
-              <a:defRPr sz="800" b="0">
-                <a:solidFill>
-                  <a:srgbClr val="666680"/>
-                </a:solidFill>
-                <a:latin typeface="Meiryo UI"/>
-              </a:defRPr>
-            </a:pPr>
-            <a:r>
-              <a:t>ハイライトをInstagram</a:t>
-            </a:r>
-            <a:br/>
-            <a:r>
-              <a:t>TikTokに自動投稿</a:t>
-            </a:r>
-          </a:p>
-        </p:txBody>
-      </p:sp>
-      <p:sp>
-        <p:nvSpPr>
-          <p:cNvPr id="111" name="TextBox 110"/>
-          <p:cNvSpPr txBox="1"/>
-          <p:nvPr/>
-        </p:nvSpPr>
-        <p:spPr>
-          <a:xfrm>
-            <a:off x="9509760" y="5788152"/>
-            <a:ext cx="1188720" cy="182880"/>
-          </a:xfrm>
-          <a:prstGeom prst="rect">
-            <a:avLst/>
-          </a:prstGeom>
-          <a:noFill/>
-        </p:spPr>
-        <p:txBody>
-          <a:bodyPr wrap="square">
-            <a:spAutoFit/>
-          </a:bodyPr>
-          <a:lstStyle/>
-          <a:p>
-            <a:pPr algn="l">
-              <a:defRPr sz="700" b="0">
+        <p:txBody>
+          <a:bodyPr wrap="square" lIns="0" tIns="0" rIns="0" bIns="0"/>
+          <a:lstStyle/>
+          <a:p>
+            <a:pPr algn="l"/>
+            <a:r>
+              <a:rPr lang="ja-JP" altLang="en-US" sz="900" dirty="0">
                 <a:solidFill>
                   <a:srgbClr val="9CA3AF"/>
                 </a:solidFill>
                 <a:latin typeface="Meiryo UI"/>
-              </a:defRPr>
-            </a:pPr>
-            <a:r>
-              <a:t>技術:</a:t>
-            </a:r>
-          </a:p>
-        </p:txBody>
-      </p:sp>
-      <p:sp>
-        <p:nvSpPr>
-          <p:cNvPr id="112" name="TextBox 111"/>
-          <p:cNvSpPr txBox="1"/>
-          <p:nvPr/>
-        </p:nvSpPr>
-        <p:spPr>
-          <a:xfrm>
-            <a:off x="9509760" y="5943600"/>
-            <a:ext cx="1188720" cy="274320"/>
-          </a:xfrm>
-          <a:prstGeom prst="rect">
-            <a:avLst/>
-          </a:prstGeom>
-          <a:noFill/>
-        </p:spPr>
-        <p:txBody>
-          <a:bodyPr wrap="square">
-            <a:spAutoFit/>
-          </a:bodyPr>
-          <a:lstStyle/>
-          <a:p>
-            <a:pPr algn="l">
-              <a:defRPr sz="800" b="0">
-                <a:solidFill>
-                  <a:srgbClr val="1A1A2E"/>
-                </a:solidFill>
-                <a:latin typeface="Meiryo UI"/>
-              </a:defRPr>
-            </a:pPr>
-            <a:r>
-              <a:t>各SNS API連携</a:t>
-            </a:r>
-          </a:p>
-        </p:txBody>
-      </p:sp>
-      <p:sp>
-        <p:nvSpPr>
-          <p:cNvPr id="113" name="Rounded Rectangle 112"/>
-          <p:cNvSpPr/>
-          <p:nvPr/>
-        </p:nvSpPr>
-        <p:spPr>
-          <a:xfrm>
-            <a:off x="10789920" y="5806440"/>
-            <a:ext cx="960120" cy="502920"/>
-          </a:xfrm>
-          <a:prstGeom prst="roundRect">
-            <a:avLst/>
-          </a:prstGeom>
-          <a:solidFill>
-            <a:srgbClr val="FFFFFF"/>
-          </a:solidFill>
-          <a:ln w="19050">
-            <a:solidFill>
-              <a:srgbClr val="E0E0E8"/>
-            </a:solidFill>
-          </a:ln>
-        </p:spPr>
-        <p:style>
-          <a:lnRef idx="1">
-            <a:schemeClr val="accent1"/>
-          </a:lnRef>
-          <a:fillRef idx="3">
-            <a:schemeClr val="accent1"/>
-          </a:fillRef>
-          <a:effectRef idx="2">
-            <a:schemeClr val="accent1"/>
-          </a:effectRef>
-          <a:fontRef idx="minor">
-            <a:schemeClr val="lt1"/>
-          </a:fontRef>
-        </p:style>
-        <p:txBody>
-          <a:bodyPr rtlCol="0" anchor="ctr"/>
-          <a:lstStyle/>
-          <a:p>
-            <a:pPr algn="ctr"/>
-          </a:p>
-        </p:txBody>
-      </p:sp>
-      <p:sp>
-        <p:nvSpPr>
-          <p:cNvPr id="114" name="TextBox 113"/>
-          <p:cNvSpPr txBox="1"/>
-          <p:nvPr/>
-        </p:nvSpPr>
-        <p:spPr>
-          <a:xfrm>
-            <a:off x="10835640" y="5824728"/>
-            <a:ext cx="868680" cy="228600"/>
-          </a:xfrm>
-          <a:prstGeom prst="rect">
-            <a:avLst/>
-          </a:prstGeom>
-          <a:noFill/>
-        </p:spPr>
-        <p:txBody>
-          <a:bodyPr wrap="square">
-            <a:spAutoFit/>
-          </a:bodyPr>
-          <a:lstStyle/>
-          <a:p>
-            <a:pPr algn="ctr">
-              <a:defRPr sz="1000" b="1">
-                <a:solidFill>
-                  <a:srgbClr val="E63946"/>
-                </a:solidFill>
-                <a:latin typeface="Meiryo UI"/>
-              </a:defRPr>
-            </a:pPr>
-            <a:r>
-              <a:t>約50〜80万円</a:t>
-            </a:r>
-          </a:p>
-        </p:txBody>
-      </p:sp>
-      <p:sp>
-        <p:nvSpPr>
-          <p:cNvPr id="115" name="TextBox 114"/>
-          <p:cNvSpPr txBox="1"/>
-          <p:nvPr/>
-        </p:nvSpPr>
-        <p:spPr>
-          <a:xfrm>
-            <a:off x="10835640" y="6080760"/>
-            <a:ext cx="868680" cy="182880"/>
-          </a:xfrm>
-          <a:prstGeom prst="rect">
-            <a:avLst/>
-          </a:prstGeom>
-          <a:noFill/>
-        </p:spPr>
-        <p:txBody>
-          <a:bodyPr wrap="square">
-            <a:spAutoFit/>
-          </a:bodyPr>
-          <a:lstStyle/>
-          <a:p>
-            <a:pPr algn="ctr">
-              <a:defRPr sz="800" b="0">
-                <a:solidFill>
-                  <a:srgbClr val="666680"/>
-                </a:solidFill>
-                <a:latin typeface="Meiryo UI"/>
-              </a:defRPr>
-            </a:pPr>
-            <a:r>
-              <a:t>2-3週間</a:t>
-            </a:r>
-          </a:p>
-        </p:txBody>
-      </p:sp>
-      <p:sp>
-        <p:nvSpPr>
-          <p:cNvPr id="116" name="Rounded Rectangle 115"/>
-          <p:cNvSpPr/>
-          <p:nvPr/>
-        </p:nvSpPr>
-        <p:spPr>
-          <a:xfrm>
-            <a:off x="7315200" y="6446520"/>
-            <a:ext cx="4572000" cy="320040"/>
-          </a:xfrm>
-          <a:prstGeom prst="roundRect">
-            <a:avLst/>
-          </a:prstGeom>
-          <a:solidFill>
-            <a:srgbClr val="FDEBED"/>
-          </a:solidFill>
-          <a:ln w="19050">
-            <a:solidFill>
-              <a:srgbClr val="E63946"/>
-            </a:solidFill>
-          </a:ln>
-        </p:spPr>
-        <p:style>
-          <a:lnRef idx="1">
-            <a:schemeClr val="accent1"/>
-          </a:lnRef>
-          <a:fillRef idx="3">
-            <a:schemeClr val="accent1"/>
-          </a:fillRef>
-          <a:effectRef idx="2">
-            <a:schemeClr val="accent1"/>
-          </a:effectRef>
-          <a:fontRef idx="minor">
-            <a:schemeClr val="lt1"/>
-          </a:fontRef>
-        </p:style>
-        <p:txBody>
-          <a:bodyPr rtlCol="0" anchor="ctr"/>
-          <a:lstStyle/>
-          <a:p>
-            <a:pPr algn="ctr"/>
-          </a:p>
-        </p:txBody>
-      </p:sp>
-      <p:sp>
-        <p:nvSpPr>
-          <p:cNvPr id="117" name="TextBox 116"/>
-          <p:cNvSpPr txBox="1"/>
-          <p:nvPr/>
-        </p:nvSpPr>
-        <p:spPr>
-          <a:xfrm>
-            <a:off x="7498080" y="6473952"/>
-            <a:ext cx="3200400" cy="274320"/>
-          </a:xfrm>
-          <a:prstGeom prst="rect">
-            <a:avLst/>
-          </a:prstGeom>
-          <a:noFill/>
-        </p:spPr>
-        <p:txBody>
-          <a:bodyPr wrap="square">
-            <a:spAutoFit/>
-          </a:bodyPr>
-          <a:lstStyle/>
-          <a:p>
-            <a:pPr algn="l">
-              <a:defRPr sz="1100" b="1">
-                <a:solidFill>
-                  <a:srgbClr val="E63946"/>
-                </a:solidFill>
-                <a:latin typeface="Meiryo UI"/>
-              </a:defRPr>
-            </a:pPr>
-            <a:r>
-              <a:t>全拡張の概算合計: 約610〜1,050万円（段階的に投資）</a:t>
-            </a:r>
-          </a:p>
-        </p:txBody>
-      </p:sp>
-      <p:sp>
-        <p:nvSpPr>
-          <p:cNvPr id="118" name="TextBox 117"/>
-          <p:cNvSpPr txBox="1"/>
-          <p:nvPr/>
-        </p:nvSpPr>
-        <p:spPr>
-          <a:xfrm>
-            <a:off x="548640" y="6583680"/>
-            <a:ext cx="6400800" cy="182880"/>
-          </a:xfrm>
-          <a:prstGeom prst="rect">
-            <a:avLst/>
-          </a:prstGeom>
-          <a:noFill/>
-        </p:spPr>
-        <p:txBody>
-          <a:bodyPr wrap="square">
-            <a:spAutoFit/>
-          </a:bodyPr>
-          <a:lstStyle/>
-          <a:p>
-            <a:pPr algn="l">
-              <a:defRPr sz="800" b="0">
-                <a:solidFill>
-                  <a:srgbClr val="9CA3AF"/>
-                </a:solidFill>
-                <a:latin typeface="Meiryo UI"/>
-              </a:defRPr>
-            </a:pPr>
-            <a:r>
+                <a:ea typeface="Meiryo UI"/>
+              </a:rPr>
               <a:t>LIVE SPOtCH  |  LIN-NAH株式会社  |  2026年4月</a:t>
             </a:r>
           </a:p>
         </p:txBody>
       </p:sp>
     </p:spTree>
+    <p:extLst>
+      <p:ext uri="{BB962C8B-B14F-4D97-AF65-F5344CB8AC3E}">
+        <p14:creationId xmlns:p14="http://schemas.microsoft.com/office/powerpoint/2010/main" val="2360329068"/>
+      </p:ext>
+    </p:extLst>
   </p:cSld>
   <p:clrMapOvr>
     <a:masterClrMapping/>
@@ -8070,4 +7991,26 @@
   </a:objectDefaults>
   <a:extraClrSchemeLst/>
 </a:theme>
+</file>
+
+<file path=ppt/webextensions/taskpanes.xml><?xml version="1.0" encoding="utf-8"?>
+<wetp:taskpanes xmlns:wetp="http://schemas.microsoft.com/office/webextensions/taskpanes/2010/11">
+  <wetp:taskpane dockstate="right" visibility="0" width="350" row="0">
+    <wetp:webextensionref xmlns:r="http://schemas.openxmlformats.org/officeDocument/2006/relationships" r:id="rId1"/>
+  </wetp:taskpane>
+</wetp:taskpanes>
+</file>
+
+<file path=ppt/webextensions/webextension1.xml><?xml version="1.0" encoding="utf-8"?>
+<we:webextension xmlns:we="http://schemas.microsoft.com/office/webextensions/webextension/2010/11" id="{D230649E-80E1-6148-9347-6A0631153562}">
+  <we:reference id="wa200010001" version="1.0.0.1" store="ja-JP" storeType="OMEX"/>
+  <we:alternateReferences>
+    <we:reference id="WA200010001" version="1.0.0.1" store="WA200010001" storeType="OMEX"/>
+  </we:alternateReferences>
+  <we:properties>
+    <we:property name="claude.fileId" value="&quot;044c16d4-40a1-4af6-ac55-a695f6ca7f25&quot;"/>
+  </we:properties>
+  <we:bindings/>
+  <we:snapshot xmlns:r="http://schemas.openxmlformats.org/officeDocument/2006/relationships"/>
+</we:webextension>
 </file>
--- a/docs/LIVE_SPOtCH_構造チャート.pptx
+++ b/docs/LIVE_SPOtCH_構造チャート.pptx
@@ -5,10 +5,9 @@
     <p:sldMasterId id="2147483648" r:id="rId1"/>
   </p:sldMasterIdLst>
   <p:sldIdLst>
-    <p:sldId id="262" r:id="rId2"/>
-    <p:sldId id="261" r:id="rId3"/>
+    <p:sldId id="256" r:id="rId7"/>
   </p:sldIdLst>
-  <p:sldSz cx="12192000" cy="6858000"/>
+  <p:sldSz cx="12191695" cy="6858000" type="screen4x3"/>
   <p:notesSz cx="6858000" cy="9144000"/>
   <p:defaultTextStyle>
     <a:defPPr>
@@ -105,22 +104,6 @@
       </a:defRPr>
     </a:lvl9pPr>
   </p:defaultTextStyle>
-  <p:extLst>
-    <p:ext uri="{EFAFB233-063F-42B5-8137-9DF3F51BA10A}">
-      <p15:sldGuideLst xmlns:p15="http://schemas.microsoft.com/office/powerpoint/2012/main">
-        <p15:guide id="1" orient="horz" pos="2160">
-          <p15:clr>
-            <a:srgbClr val="A4A3A4"/>
-          </p15:clr>
-        </p15:guide>
-        <p15:guide id="2" pos="2880">
-          <p15:clr>
-            <a:srgbClr val="A4A3A4"/>
-          </p15:clr>
-        </p15:guide>
-      </p15:sldGuideLst>
-    </p:ext>
-  </p:extLst>
 </p:presentation>
 </file>
 
@@ -162,9 +145,10 @@
           <a:lstStyle/>
           <a:p>
             <a:r>
-              <a:rPr lang="en-US"/>
+              <a:rPr lang="en-US" smtClean="0"/>
               <a:t>Click to edit Master title style</a:t>
             </a:r>
+            <a:endParaRPr lang="en-US"/>
           </a:p>
         </p:txBody>
       </p:sp>
@@ -280,9 +264,10 @@
           </a:lstStyle>
           <a:p>
             <a:r>
-              <a:rPr lang="en-US"/>
+              <a:rPr lang="en-US" smtClean="0"/>
               <a:t>Click to edit Master subtitle style</a:t>
             </a:r>
+            <a:endParaRPr lang="en-US"/>
           </a:p>
         </p:txBody>
       </p:sp>
@@ -303,7 +288,7 @@
           <a:p>
             <a:fld id="{5BCAD085-E8A6-8845-BD4E-CB4CCA059FC4}" type="datetimeFigureOut">
               <a:rPr lang="en-US" smtClean="0"/>
-              <a:t>4/18/26</a:t>
+              <a:t>1/27/13</a:t>
             </a:fld>
             <a:endParaRPr lang="en-US"/>
           </a:p>
@@ -397,9 +382,10 @@
           <a:lstStyle/>
           <a:p>
             <a:r>
-              <a:rPr lang="en-US"/>
+              <a:rPr lang="en-US" smtClean="0"/>
               <a:t>Click to edit Master title style</a:t>
             </a:r>
+            <a:endParaRPr lang="en-US"/>
           </a:p>
         </p:txBody>
       </p:sp>
@@ -420,37 +406,38 @@
           <a:p>
             <a:pPr lvl="0"/>
             <a:r>
-              <a:rPr lang="en-US"/>
+              <a:rPr lang="en-US" smtClean="0"/>
               <a:t>Click to edit Master text styles</a:t>
             </a:r>
           </a:p>
           <a:p>
             <a:pPr lvl="1"/>
             <a:r>
-              <a:rPr lang="en-US"/>
+              <a:rPr lang="en-US" smtClean="0"/>
               <a:t>Second level</a:t>
             </a:r>
           </a:p>
           <a:p>
             <a:pPr lvl="2"/>
             <a:r>
-              <a:rPr lang="en-US"/>
+              <a:rPr lang="en-US" smtClean="0"/>
               <a:t>Third level</a:t>
             </a:r>
           </a:p>
           <a:p>
             <a:pPr lvl="3"/>
             <a:r>
-              <a:rPr lang="en-US"/>
+              <a:rPr lang="en-US" smtClean="0"/>
               <a:t>Fourth level</a:t>
             </a:r>
           </a:p>
           <a:p>
             <a:pPr lvl="4"/>
             <a:r>
-              <a:rPr lang="en-US"/>
+              <a:rPr lang="en-US" smtClean="0"/>
               <a:t>Fifth level</a:t>
             </a:r>
+            <a:endParaRPr lang="en-US"/>
           </a:p>
         </p:txBody>
       </p:sp>
@@ -471,7 +458,7 @@
           <a:p>
             <a:fld id="{5BCAD085-E8A6-8845-BD4E-CB4CCA059FC4}" type="datetimeFigureOut">
               <a:rPr lang="en-US" smtClean="0"/>
-              <a:t>4/18/26</a:t>
+              <a:t>1/27/13</a:t>
             </a:fld>
             <a:endParaRPr lang="en-US"/>
           </a:p>
@@ -570,9 +557,10 @@
           <a:lstStyle/>
           <a:p>
             <a:r>
-              <a:rPr lang="en-US"/>
+              <a:rPr lang="en-US" smtClean="0"/>
               <a:t>Click to edit Master title style</a:t>
             </a:r>
+            <a:endParaRPr lang="en-US"/>
           </a:p>
         </p:txBody>
       </p:sp>
@@ -598,37 +586,38 @@
           <a:p>
             <a:pPr lvl="0"/>
             <a:r>
-              <a:rPr lang="en-US"/>
+              <a:rPr lang="en-US" smtClean="0"/>
               <a:t>Click to edit Master text styles</a:t>
             </a:r>
           </a:p>
           <a:p>
             <a:pPr lvl="1"/>
             <a:r>
-              <a:rPr lang="en-US"/>
+              <a:rPr lang="en-US" smtClean="0"/>
               <a:t>Second level</a:t>
             </a:r>
           </a:p>
           <a:p>
             <a:pPr lvl="2"/>
             <a:r>
-              <a:rPr lang="en-US"/>
+              <a:rPr lang="en-US" smtClean="0"/>
               <a:t>Third level</a:t>
             </a:r>
           </a:p>
           <a:p>
             <a:pPr lvl="3"/>
             <a:r>
-              <a:rPr lang="en-US"/>
+              <a:rPr lang="en-US" smtClean="0"/>
               <a:t>Fourth level</a:t>
             </a:r>
           </a:p>
           <a:p>
             <a:pPr lvl="4"/>
             <a:r>
-              <a:rPr lang="en-US"/>
+              <a:rPr lang="en-US" smtClean="0"/>
               <a:t>Fifth level</a:t>
             </a:r>
+            <a:endParaRPr lang="en-US"/>
           </a:p>
         </p:txBody>
       </p:sp>
@@ -649,7 +638,7 @@
           <a:p>
             <a:fld id="{5BCAD085-E8A6-8845-BD4E-CB4CCA059FC4}" type="datetimeFigureOut">
               <a:rPr lang="en-US" smtClean="0"/>
-              <a:t>4/18/26</a:t>
+              <a:t>1/27/13</a:t>
             </a:fld>
             <a:endParaRPr lang="en-US"/>
           </a:p>
@@ -743,9 +732,10 @@
           <a:lstStyle/>
           <a:p>
             <a:r>
-              <a:rPr lang="en-US"/>
+              <a:rPr lang="en-US" smtClean="0"/>
               <a:t>Click to edit Master title style</a:t>
             </a:r>
+            <a:endParaRPr lang="en-US"/>
           </a:p>
         </p:txBody>
       </p:sp>
@@ -766,37 +756,38 @@
           <a:p>
             <a:pPr lvl="0"/>
             <a:r>
-              <a:rPr lang="en-US"/>
+              <a:rPr lang="en-US" smtClean="0"/>
               <a:t>Click to edit Master text styles</a:t>
             </a:r>
           </a:p>
           <a:p>
             <a:pPr lvl="1"/>
             <a:r>
-              <a:rPr lang="en-US"/>
+              <a:rPr lang="en-US" smtClean="0"/>
               <a:t>Second level</a:t>
             </a:r>
           </a:p>
           <a:p>
             <a:pPr lvl="2"/>
             <a:r>
-              <a:rPr lang="en-US"/>
+              <a:rPr lang="en-US" smtClean="0"/>
               <a:t>Third level</a:t>
             </a:r>
           </a:p>
           <a:p>
             <a:pPr lvl="3"/>
             <a:r>
-              <a:rPr lang="en-US"/>
+              <a:rPr lang="en-US" smtClean="0"/>
               <a:t>Fourth level</a:t>
             </a:r>
           </a:p>
           <a:p>
             <a:pPr lvl="4"/>
             <a:r>
-              <a:rPr lang="en-US"/>
+              <a:rPr lang="en-US" smtClean="0"/>
               <a:t>Fifth level</a:t>
             </a:r>
+            <a:endParaRPr lang="en-US"/>
           </a:p>
         </p:txBody>
       </p:sp>
@@ -817,7 +808,7 @@
           <a:p>
             <a:fld id="{5BCAD085-E8A6-8845-BD4E-CB4CCA059FC4}" type="datetimeFigureOut">
               <a:rPr lang="en-US" smtClean="0"/>
-              <a:t>4/18/26</a:t>
+              <a:t>1/27/13</a:t>
             </a:fld>
             <a:endParaRPr lang="en-US"/>
           </a:p>
@@ -920,9 +911,10 @@
           </a:lstStyle>
           <a:p>
             <a:r>
-              <a:rPr lang="en-US"/>
+              <a:rPr lang="en-US" smtClean="0"/>
               <a:t>Click to edit Master title style</a:t>
             </a:r>
+            <a:endParaRPr lang="en-US"/>
           </a:p>
         </p:txBody>
       </p:sp>
@@ -1039,7 +1031,7 @@
           <a:p>
             <a:pPr lvl="0"/>
             <a:r>
-              <a:rPr lang="en-US"/>
+              <a:rPr lang="en-US" smtClean="0"/>
               <a:t>Click to edit Master text styles</a:t>
             </a:r>
           </a:p>
@@ -1062,7 +1054,7 @@
           <a:p>
             <a:fld id="{5BCAD085-E8A6-8845-BD4E-CB4CCA059FC4}" type="datetimeFigureOut">
               <a:rPr lang="en-US" smtClean="0"/>
-              <a:t>4/18/26</a:t>
+              <a:t>1/27/13</a:t>
             </a:fld>
             <a:endParaRPr lang="en-US"/>
           </a:p>
@@ -1156,9 +1148,10 @@
           <a:lstStyle/>
           <a:p>
             <a:r>
-              <a:rPr lang="en-US"/>
+              <a:rPr lang="en-US" smtClean="0"/>
               <a:t>Click to edit Master title style</a:t>
             </a:r>
+            <a:endParaRPr lang="en-US"/>
           </a:p>
         </p:txBody>
       </p:sp>
@@ -1212,37 +1205,38 @@
           <a:p>
             <a:pPr lvl="0"/>
             <a:r>
-              <a:rPr lang="en-US"/>
+              <a:rPr lang="en-US" smtClean="0"/>
               <a:t>Click to edit Master text styles</a:t>
             </a:r>
           </a:p>
           <a:p>
             <a:pPr lvl="1"/>
             <a:r>
-              <a:rPr lang="en-US"/>
+              <a:rPr lang="en-US" smtClean="0"/>
               <a:t>Second level</a:t>
             </a:r>
           </a:p>
           <a:p>
             <a:pPr lvl="2"/>
             <a:r>
-              <a:rPr lang="en-US"/>
+              <a:rPr lang="en-US" smtClean="0"/>
               <a:t>Third level</a:t>
             </a:r>
           </a:p>
           <a:p>
             <a:pPr lvl="3"/>
             <a:r>
-              <a:rPr lang="en-US"/>
+              <a:rPr lang="en-US" smtClean="0"/>
               <a:t>Fourth level</a:t>
             </a:r>
           </a:p>
           <a:p>
             <a:pPr lvl="4"/>
             <a:r>
-              <a:rPr lang="en-US"/>
+              <a:rPr lang="en-US" smtClean="0"/>
               <a:t>Fifth level</a:t>
             </a:r>
+            <a:endParaRPr lang="en-US"/>
           </a:p>
         </p:txBody>
       </p:sp>
@@ -1296,37 +1290,38 @@
           <a:p>
             <a:pPr lvl="0"/>
             <a:r>
-              <a:rPr lang="en-US"/>
+              <a:rPr lang="en-US" smtClean="0"/>
               <a:t>Click to edit Master text styles</a:t>
             </a:r>
           </a:p>
           <a:p>
             <a:pPr lvl="1"/>
             <a:r>
-              <a:rPr lang="en-US"/>
+              <a:rPr lang="en-US" smtClean="0"/>
               <a:t>Second level</a:t>
             </a:r>
           </a:p>
           <a:p>
             <a:pPr lvl="2"/>
             <a:r>
-              <a:rPr lang="en-US"/>
+              <a:rPr lang="en-US" smtClean="0"/>
               <a:t>Third level</a:t>
             </a:r>
           </a:p>
           <a:p>
             <a:pPr lvl="3"/>
             <a:r>
-              <a:rPr lang="en-US"/>
+              <a:rPr lang="en-US" smtClean="0"/>
               <a:t>Fourth level</a:t>
             </a:r>
           </a:p>
           <a:p>
             <a:pPr lvl="4"/>
             <a:r>
-              <a:rPr lang="en-US"/>
+              <a:rPr lang="en-US" smtClean="0"/>
               <a:t>Fifth level</a:t>
             </a:r>
+            <a:endParaRPr lang="en-US"/>
           </a:p>
         </p:txBody>
       </p:sp>
@@ -1347,7 +1342,7 @@
           <a:p>
             <a:fld id="{5BCAD085-E8A6-8845-BD4E-CB4CCA059FC4}" type="datetimeFigureOut">
               <a:rPr lang="en-US" smtClean="0"/>
-              <a:t>4/18/26</a:t>
+              <a:t>1/27/13</a:t>
             </a:fld>
             <a:endParaRPr lang="en-US"/>
           </a:p>
@@ -1445,9 +1440,10 @@
           </a:lstStyle>
           <a:p>
             <a:r>
-              <a:rPr lang="en-US"/>
+              <a:rPr lang="en-US" smtClean="0"/>
               <a:t>Click to edit Master title style</a:t>
             </a:r>
+            <a:endParaRPr lang="en-US"/>
           </a:p>
         </p:txBody>
       </p:sp>
@@ -1510,7 +1506,7 @@
           <a:p>
             <a:pPr lvl="0"/>
             <a:r>
-              <a:rPr lang="en-US"/>
+              <a:rPr lang="en-US" smtClean="0"/>
               <a:t>Click to edit Master text styles</a:t>
             </a:r>
           </a:p>
@@ -1566,37 +1562,38 @@
           <a:p>
             <a:pPr lvl="0"/>
             <a:r>
-              <a:rPr lang="en-US"/>
+              <a:rPr lang="en-US" smtClean="0"/>
               <a:t>Click to edit Master text styles</a:t>
             </a:r>
           </a:p>
           <a:p>
             <a:pPr lvl="1"/>
             <a:r>
-              <a:rPr lang="en-US"/>
+              <a:rPr lang="en-US" smtClean="0"/>
               <a:t>Second level</a:t>
             </a:r>
           </a:p>
           <a:p>
             <a:pPr lvl="2"/>
             <a:r>
-              <a:rPr lang="en-US"/>
+              <a:rPr lang="en-US" smtClean="0"/>
               <a:t>Third level</a:t>
             </a:r>
           </a:p>
           <a:p>
             <a:pPr lvl="3"/>
             <a:r>
-              <a:rPr lang="en-US"/>
+              <a:rPr lang="en-US" smtClean="0"/>
               <a:t>Fourth level</a:t>
             </a:r>
           </a:p>
           <a:p>
             <a:pPr lvl="4"/>
             <a:r>
-              <a:rPr lang="en-US"/>
+              <a:rPr lang="en-US" smtClean="0"/>
               <a:t>Fifth level</a:t>
             </a:r>
+            <a:endParaRPr lang="en-US"/>
           </a:p>
         </p:txBody>
       </p:sp>
@@ -1659,7 +1656,7 @@
           <a:p>
             <a:pPr lvl="0"/>
             <a:r>
-              <a:rPr lang="en-US"/>
+              <a:rPr lang="en-US" smtClean="0"/>
               <a:t>Click to edit Master text styles</a:t>
             </a:r>
           </a:p>
@@ -1715,37 +1712,38 @@
           <a:p>
             <a:pPr lvl="0"/>
             <a:r>
-              <a:rPr lang="en-US"/>
+              <a:rPr lang="en-US" smtClean="0"/>
               <a:t>Click to edit Master text styles</a:t>
             </a:r>
           </a:p>
           <a:p>
             <a:pPr lvl="1"/>
             <a:r>
-              <a:rPr lang="en-US"/>
+              <a:rPr lang="en-US" smtClean="0"/>
               <a:t>Second level</a:t>
             </a:r>
           </a:p>
           <a:p>
             <a:pPr lvl="2"/>
             <a:r>
-              <a:rPr lang="en-US"/>
+              <a:rPr lang="en-US" smtClean="0"/>
               <a:t>Third level</a:t>
             </a:r>
           </a:p>
           <a:p>
             <a:pPr lvl="3"/>
             <a:r>
-              <a:rPr lang="en-US"/>
+              <a:rPr lang="en-US" smtClean="0"/>
               <a:t>Fourth level</a:t>
             </a:r>
           </a:p>
           <a:p>
             <a:pPr lvl="4"/>
             <a:r>
-              <a:rPr lang="en-US"/>
+              <a:rPr lang="en-US" smtClean="0"/>
               <a:t>Fifth level</a:t>
             </a:r>
+            <a:endParaRPr lang="en-US"/>
           </a:p>
         </p:txBody>
       </p:sp>
@@ -1766,7 +1764,7 @@
           <a:p>
             <a:fld id="{5BCAD085-E8A6-8845-BD4E-CB4CCA059FC4}" type="datetimeFigureOut">
               <a:rPr lang="en-US" smtClean="0"/>
-              <a:t>4/18/26</a:t>
+              <a:t>1/27/13</a:t>
             </a:fld>
             <a:endParaRPr lang="en-US"/>
           </a:p>
@@ -1860,9 +1858,10 @@
           <a:lstStyle/>
           <a:p>
             <a:r>
-              <a:rPr lang="en-US"/>
+              <a:rPr lang="en-US" smtClean="0"/>
               <a:t>Click to edit Master title style</a:t>
             </a:r>
+            <a:endParaRPr lang="en-US"/>
           </a:p>
         </p:txBody>
       </p:sp>
@@ -1883,7 +1882,7 @@
           <a:p>
             <a:fld id="{5BCAD085-E8A6-8845-BD4E-CB4CCA059FC4}" type="datetimeFigureOut">
               <a:rPr lang="en-US" smtClean="0"/>
-              <a:t>4/18/26</a:t>
+              <a:t>1/27/13</a:t>
             </a:fld>
             <a:endParaRPr lang="en-US"/>
           </a:p>
@@ -1978,7 +1977,7 @@
           <a:p>
             <a:fld id="{5BCAD085-E8A6-8845-BD4E-CB4CCA059FC4}" type="datetimeFigureOut">
               <a:rPr lang="en-US" smtClean="0"/>
-              <a:t>4/18/26</a:t>
+              <a:t>1/27/13</a:t>
             </a:fld>
             <a:endParaRPr lang="en-US"/>
           </a:p>
@@ -2081,9 +2080,10 @@
           </a:lstStyle>
           <a:p>
             <a:r>
-              <a:rPr lang="en-US"/>
+              <a:rPr lang="en-US" smtClean="0"/>
               <a:t>Click to edit Master title style</a:t>
             </a:r>
+            <a:endParaRPr lang="en-US"/>
           </a:p>
         </p:txBody>
       </p:sp>
@@ -2137,37 +2137,38 @@
           <a:p>
             <a:pPr lvl="0"/>
             <a:r>
-              <a:rPr lang="en-US"/>
+              <a:rPr lang="en-US" smtClean="0"/>
               <a:t>Click to edit Master text styles</a:t>
             </a:r>
           </a:p>
           <a:p>
             <a:pPr lvl="1"/>
             <a:r>
-              <a:rPr lang="en-US"/>
+              <a:rPr lang="en-US" smtClean="0"/>
               <a:t>Second level</a:t>
             </a:r>
           </a:p>
           <a:p>
             <a:pPr lvl="2"/>
             <a:r>
-              <a:rPr lang="en-US"/>
+              <a:rPr lang="en-US" smtClean="0"/>
               <a:t>Third level</a:t>
             </a:r>
           </a:p>
           <a:p>
             <a:pPr lvl="3"/>
             <a:r>
-              <a:rPr lang="en-US"/>
+              <a:rPr lang="en-US" smtClean="0"/>
               <a:t>Fourth level</a:t>
             </a:r>
           </a:p>
           <a:p>
             <a:pPr lvl="4"/>
             <a:r>
-              <a:rPr lang="en-US"/>
+              <a:rPr lang="en-US" smtClean="0"/>
               <a:t>Fifth level</a:t>
             </a:r>
+            <a:endParaRPr lang="en-US"/>
           </a:p>
         </p:txBody>
       </p:sp>
@@ -2230,7 +2231,7 @@
           <a:p>
             <a:pPr lvl="0"/>
             <a:r>
-              <a:rPr lang="en-US"/>
+              <a:rPr lang="en-US" smtClean="0"/>
               <a:t>Click to edit Master text styles</a:t>
             </a:r>
           </a:p>
@@ -2253,7 +2254,7 @@
           <a:p>
             <a:fld id="{5BCAD085-E8A6-8845-BD4E-CB4CCA059FC4}" type="datetimeFigureOut">
               <a:rPr lang="en-US" smtClean="0"/>
-              <a:t>4/18/26</a:t>
+              <a:t>1/27/13</a:t>
             </a:fld>
             <a:endParaRPr lang="en-US"/>
           </a:p>
@@ -2356,9 +2357,10 @@
           </a:lstStyle>
           <a:p>
             <a:r>
-              <a:rPr lang="en-US"/>
+              <a:rPr lang="en-US" smtClean="0"/>
               <a:t>Click to edit Master title style</a:t>
             </a:r>
+            <a:endParaRPr lang="en-US"/>
           </a:p>
         </p:txBody>
       </p:sp>
@@ -2482,7 +2484,7 @@
           <a:p>
             <a:pPr lvl="0"/>
             <a:r>
-              <a:rPr lang="en-US"/>
+              <a:rPr lang="en-US" smtClean="0"/>
               <a:t>Click to edit Master text styles</a:t>
             </a:r>
           </a:p>
@@ -2505,7 +2507,7 @@
           <a:p>
             <a:fld id="{5BCAD085-E8A6-8845-BD4E-CB4CCA059FC4}" type="datetimeFigureOut">
               <a:rPr lang="en-US" smtClean="0"/>
-              <a:t>4/18/26</a:t>
+              <a:t>1/27/13</a:t>
             </a:fld>
             <a:endParaRPr lang="en-US"/>
           </a:p>
@@ -2614,9 +2616,10 @@
           <a:lstStyle/>
           <a:p>
             <a:r>
-              <a:rPr lang="en-US"/>
+              <a:rPr lang="en-US" smtClean="0"/>
               <a:t>Click to edit Master title style</a:t>
             </a:r>
+            <a:endParaRPr lang="en-US"/>
           </a:p>
         </p:txBody>
       </p:sp>
@@ -2647,37 +2650,38 @@
           <a:p>
             <a:pPr lvl="0"/>
             <a:r>
-              <a:rPr lang="en-US"/>
+              <a:rPr lang="en-US" smtClean="0"/>
               <a:t>Click to edit Master text styles</a:t>
             </a:r>
           </a:p>
           <a:p>
             <a:pPr lvl="1"/>
             <a:r>
-              <a:rPr lang="en-US"/>
+              <a:rPr lang="en-US" smtClean="0"/>
               <a:t>Second level</a:t>
             </a:r>
           </a:p>
           <a:p>
             <a:pPr lvl="2"/>
             <a:r>
-              <a:rPr lang="en-US"/>
+              <a:rPr lang="en-US" smtClean="0"/>
               <a:t>Third level</a:t>
             </a:r>
           </a:p>
           <a:p>
             <a:pPr lvl="3"/>
             <a:r>
-              <a:rPr lang="en-US"/>
+              <a:rPr lang="en-US" smtClean="0"/>
               <a:t>Fourth level</a:t>
             </a:r>
           </a:p>
           <a:p>
             <a:pPr lvl="4"/>
             <a:r>
-              <a:rPr lang="en-US"/>
+              <a:rPr lang="en-US" smtClean="0"/>
               <a:t>Fifth level</a:t>
             </a:r>
+            <a:endParaRPr lang="en-US"/>
           </a:p>
         </p:txBody>
       </p:sp>
@@ -2716,7 +2720,7 @@
           <a:p>
             <a:fld id="{5BCAD085-E8A6-8845-BD4E-CB4CCA059FC4}" type="datetimeFigureOut">
               <a:rPr lang="en-US" smtClean="0"/>
-              <a:t>4/18/26</a:t>
+              <a:t>1/27/13</a:t>
             </a:fld>
             <a:endParaRPr lang="en-US"/>
           </a:p>
@@ -3075,7 +3079,7 @@
 </file>
 
 <file path=ppt/slides/slide1.xml><?xml version="1.0" encoding="utf-8"?>
-<p:sld xmlns:a="http://schemas.openxmlformats.org/drawingml/2006/main" xmlns:r="http://schemas.openxmlformats.org/officeDocument/2006/relationships" xmlns:p="http://schemas.openxmlformats.org/presentationml/2006/main">
+<p:sld xmlns:a="http://schemas.openxmlformats.org/drawingml/2006/main" xmlns:p="http://schemas.openxmlformats.org/presentationml/2006/main" xmlns:r="http://schemas.openxmlformats.org/officeDocument/2006/relationships">
   <p:cSld>
     <p:bg>
       <p:bgPr>
@@ -3091,14 +3095,7 @@
         <p:cNvGrpSpPr/>
         <p:nvPr/>
       </p:nvGrpSpPr>
-      <p:grpSpPr>
-        <a:xfrm>
-          <a:off x="0" y="0"/>
-          <a:ext cx="0" cy="0"/>
-          <a:chOff x="0" y="0"/>
-          <a:chExt cx="0" cy="0"/>
-        </a:xfrm>
-      </p:grpSpPr>
+      <p:grpSpPr/>
       <p:sp>
         <p:nvSpPr>
           <p:cNvPr id="2" name="Rectangle 1"/>
@@ -3139,7 +3136,6 @@
           <a:lstStyle/>
           <a:p>
             <a:pPr algn="ctr"/>
-            <a:endParaRPr/>
           </a:p>
         </p:txBody>
       </p:sp>
@@ -3151,8 +3147,8 @@
         </p:nvSpPr>
         <p:spPr>
           <a:xfrm>
-            <a:off x="635000" y="177800"/>
-            <a:ext cx="10922000" cy="457200"/>
+            <a:off x="548640" y="228600"/>
+            <a:ext cx="6400800" cy="365760"/>
           </a:xfrm>
           <a:prstGeom prst="rect">
             <a:avLst/>
@@ -3166,7 +3162,7 @@
           <a:lstStyle/>
           <a:p>
             <a:pPr algn="l">
-              <a:defRPr sz="2600" b="1">
+              <a:defRPr sz="2200" b="1">
                 <a:solidFill>
                   <a:srgbClr val="0F172A"/>
                 </a:solidFill>
@@ -3174,7 +3170,7 @@
               </a:defRPr>
             </a:pPr>
             <a:r>
-              <a:t>LIVE SPOtCH — システム構造</a:t>
+              <a:t>LIVE SPOtCH — システム構造 (v2 改訂版)</a:t>
             </a:r>
           </a:p>
         </p:txBody>
@@ -3187,8 +3183,8 @@
         </p:nvSpPr>
         <p:spPr>
           <a:xfrm>
-            <a:off x="635000" y="635000"/>
-            <a:ext cx="10922000" cy="279400"/>
+            <a:off x="548640" y="594360"/>
+            <a:ext cx="6400800" cy="228600"/>
           </a:xfrm>
           <a:prstGeom prst="rect">
             <a:avLst/>
@@ -3202,7 +3198,7 @@
           <a:lstStyle/>
           <a:p>
             <a:pPr algn="l">
-              <a:defRPr sz="1400" b="0">
+              <a:defRPr sz="1100" b="0">
                 <a:solidFill>
                   <a:srgbClr val="666680"/>
                 </a:solidFill>
@@ -3210,7 +3206,7 @@
               </a:defRPr>
             </a:pPr>
             <a:r>
-              <a:t>現在の構成と将来の拡張ポイント</a:t>
+              <a:t>5/10 時点の本番稼働構成 + 5月中完璧化計画</a:t>
             </a:r>
           </a:p>
         </p:txBody>
@@ -3223,8 +3219,8 @@
         </p:nvSpPr>
         <p:spPr>
           <a:xfrm>
-            <a:off x="635000" y="939800"/>
-            <a:ext cx="1016000" cy="38100"/>
+            <a:off x="548640" y="868680"/>
+            <a:ext cx="914400" cy="38100"/>
           </a:xfrm>
           <a:prstGeom prst="rect">
             <a:avLst/>
@@ -3255,7 +3251,6 @@
           <a:lstStyle/>
           <a:p>
             <a:pPr algn="ctr"/>
-            <a:endParaRPr/>
           </a:p>
         </p:txBody>
       </p:sp>
@@ -3267,8 +3262,8 @@
         </p:nvSpPr>
         <p:spPr>
           <a:xfrm>
-            <a:off x="3429000" y="1066800"/>
-            <a:ext cx="5334000" cy="711200"/>
+            <a:off x="2286000" y="1097280"/>
+            <a:ext cx="2926080" cy="640080"/>
           </a:xfrm>
           <a:prstGeom prst="roundRect">
             <a:avLst/>
@@ -3301,7 +3296,6 @@
           <a:lstStyle/>
           <a:p>
             <a:pPr algn="ctr"/>
-            <a:endParaRPr/>
           </a:p>
         </p:txBody>
       </p:sp>
@@ -3313,8 +3307,8 @@
         </p:nvSpPr>
         <p:spPr>
           <a:xfrm>
-            <a:off x="3683000" y="1117600"/>
-            <a:ext cx="4826000" cy="330200"/>
+            <a:off x="2468880" y="1170432"/>
+            <a:ext cx="2560320" cy="228600"/>
           </a:xfrm>
           <a:prstGeom prst="rect">
             <a:avLst/>
@@ -3328,7 +3322,7 @@
           <a:lstStyle/>
           <a:p>
             <a:pPr algn="ctr">
-              <a:defRPr sz="1600" b="1">
+              <a:defRPr sz="1300" b="1">
                 <a:solidFill>
                   <a:srgbClr val="E63946"/>
                 </a:solidFill>
@@ -3349,8 +3343,8 @@
         </p:nvSpPr>
         <p:spPr>
           <a:xfrm>
-            <a:off x="3683000" y="1447800"/>
-            <a:ext cx="4826000" cy="254000"/>
+            <a:off x="2468880" y="1417320"/>
+            <a:ext cx="2560320" cy="182880"/>
           </a:xfrm>
           <a:prstGeom prst="rect">
             <a:avLst/>
@@ -3364,7 +3358,7 @@
           <a:lstStyle/>
           <a:p>
             <a:pPr algn="ctr">
-              <a:defRPr sz="1100" b="0">
+              <a:defRPr sz="800" b="0">
                 <a:solidFill>
                   <a:srgbClr val="666680"/>
                 </a:solidFill>
@@ -3372,7 +3366,7 @@
               </a:defRPr>
             </a:pPr>
             <a:r>
-              <a:t>スマホのブラウザからアクセス（アプリDL不要）</a:t>
+              <a:t>スマホ・PCブラウザからアクセス（アプリDL不要・PWA対応）</a:t>
             </a:r>
           </a:p>
         </p:txBody>
@@ -3385,8 +3379,8 @@
         </p:nvSpPr>
         <p:spPr>
           <a:xfrm>
-            <a:off x="5867400" y="1828800"/>
-            <a:ext cx="457200" cy="355600"/>
+            <a:off x="3566160" y="1783080"/>
+            <a:ext cx="320040" cy="320040"/>
           </a:xfrm>
           <a:prstGeom prst="downArrow">
             <a:avLst/>
@@ -3417,7 +3411,6 @@
           <a:lstStyle/>
           <a:p>
             <a:pPr algn="ctr"/>
-            <a:endParaRPr/>
           </a:p>
         </p:txBody>
       </p:sp>
@@ -3429,8 +3422,8 @@
         </p:nvSpPr>
         <p:spPr>
           <a:xfrm>
-            <a:off x="635000" y="2260600"/>
-            <a:ext cx="10922000" cy="2667000"/>
+            <a:off x="548640" y="2194560"/>
+            <a:ext cx="6400800" cy="2468880"/>
           </a:xfrm>
           <a:prstGeom prst="roundRect">
             <a:avLst/>
@@ -3463,7 +3456,6 @@
           <a:lstStyle/>
           <a:p>
             <a:pPr algn="ctr"/>
-            <a:endParaRPr/>
           </a:p>
         </p:txBody>
       </p:sp>
@@ -3475,8 +3467,8 @@
         </p:nvSpPr>
         <p:spPr>
           <a:xfrm>
-            <a:off x="889000" y="2336800"/>
-            <a:ext cx="10414000" cy="355600"/>
+            <a:off x="822960" y="2286000"/>
+            <a:ext cx="5852160" cy="274320"/>
           </a:xfrm>
           <a:prstGeom prst="rect">
             <a:avLst/>
@@ -3490,7 +3482,7 @@
           <a:lstStyle/>
           <a:p>
             <a:pPr algn="l">
-              <a:defRPr sz="1800" b="1">
+              <a:defRPr sz="1400" b="1">
                 <a:solidFill>
                   <a:srgbClr val="0F172A"/>
                 </a:solidFill>
@@ -3498,7 +3490,7 @@
               </a:defRPr>
             </a:pPr>
             <a:r>
-              <a:t>LIVE SPOtCH（Next.js / Vercel）</a:t>
+              <a:t>LIVE SPOtCH (Next.js / Vercel) — live-spotch.com</a:t>
             </a:r>
           </a:p>
         </p:txBody>
@@ -3511,8 +3503,8 @@
         </p:nvSpPr>
         <p:spPr>
           <a:xfrm>
-            <a:off x="838200" y="2768600"/>
-            <a:ext cx="2006600" cy="1905000"/>
+            <a:off x="731520" y="2697480"/>
+            <a:ext cx="1078992" cy="1691640"/>
           </a:xfrm>
           <a:prstGeom prst="roundRect">
             <a:avLst/>
@@ -3545,7 +3537,6 @@
           <a:lstStyle/>
           <a:p>
             <a:pPr algn="ctr"/>
-            <a:endParaRPr/>
           </a:p>
         </p:txBody>
       </p:sp>
@@ -3557,8 +3548,8 @@
         </p:nvSpPr>
         <p:spPr>
           <a:xfrm>
-            <a:off x="838200" y="2768600"/>
-            <a:ext cx="2006600" cy="50800"/>
+            <a:off x="731520" y="2697480"/>
+            <a:ext cx="1078992" cy="38100"/>
           </a:xfrm>
           <a:prstGeom prst="rect">
             <a:avLst/>
@@ -3589,7 +3580,6 @@
           <a:lstStyle/>
           <a:p>
             <a:pPr algn="ctr"/>
-            <a:endParaRPr/>
           </a:p>
         </p:txBody>
       </p:sp>
@@ -3601,8 +3591,8 @@
         </p:nvSpPr>
         <p:spPr>
           <a:xfrm>
-            <a:off x="939800" y="2895600"/>
-            <a:ext cx="1803400" cy="279400"/>
+            <a:off x="804672" y="2788920"/>
+            <a:ext cx="932688" cy="182880"/>
           </a:xfrm>
           <a:prstGeom prst="rect">
             <a:avLst/>
@@ -3616,7 +3606,7 @@
           <a:lstStyle/>
           <a:p>
             <a:pPr algn="ctr">
-              <a:defRPr sz="1300" b="1">
+              <a:defRPr sz="1000" b="1">
                 <a:solidFill>
                   <a:srgbClr val="E63946"/>
                 </a:solidFill>
@@ -3637,8 +3627,8 @@
         </p:nvSpPr>
         <p:spPr>
           <a:xfrm>
-            <a:off x="939800" y="3225800"/>
-            <a:ext cx="1803400" cy="1371600"/>
+            <a:off x="804672" y="3017520"/>
+            <a:ext cx="932688" cy="1188720"/>
           </a:xfrm>
           <a:prstGeom prst="rect">
             <a:avLst/>
@@ -3652,7 +3642,7 @@
           <a:lstStyle/>
           <a:p>
             <a:pPr algn="ctr">
-              <a:defRPr sz="1100" b="0">
+              <a:defRPr sz="800" b="0">
                 <a:solidFill>
                   <a:srgbClr val="666680"/>
                 </a:solidFill>
@@ -3660,15 +3650,15 @@
               </a:defRPr>
             </a:pPr>
             <a:r>
-              <a:t>カメラ映像取得</a:t>
+              <a:t>Canvas焼き込み</a:t>
             </a:r>
             <a:br/>
             <a:r>
-              <a:t>スコアオーバーレイ</a:t>
+              <a:t>WebRTC publish</a:t>
             </a:r>
             <a:br/>
             <a:r>
-              <a:t>リアルタイム配信</a:t>
+              <a:t>720p/2.0Mbps</a:t>
             </a:r>
           </a:p>
         </p:txBody>
@@ -3681,8 +3671,8 @@
         </p:nvSpPr>
         <p:spPr>
           <a:xfrm>
-            <a:off x="3022600" y="2768600"/>
-            <a:ext cx="2006600" cy="1905000"/>
+            <a:off x="1975104" y="2697480"/>
+            <a:ext cx="1078992" cy="1691640"/>
           </a:xfrm>
           <a:prstGeom prst="roundRect">
             <a:avLst/>
@@ -3715,7 +3705,6 @@
           <a:lstStyle/>
           <a:p>
             <a:pPr algn="ctr"/>
-            <a:endParaRPr/>
           </a:p>
         </p:txBody>
       </p:sp>
@@ -3727,8 +3716,8 @@
         </p:nvSpPr>
         <p:spPr>
           <a:xfrm>
-            <a:off x="3022600" y="2768600"/>
-            <a:ext cx="2006600" cy="50800"/>
+            <a:off x="1975104" y="2697480"/>
+            <a:ext cx="1078992" cy="38100"/>
           </a:xfrm>
           <a:prstGeom prst="rect">
             <a:avLst/>
@@ -3759,7 +3748,6 @@
           <a:lstStyle/>
           <a:p>
             <a:pPr algn="ctr"/>
-            <a:endParaRPr/>
           </a:p>
         </p:txBody>
       </p:sp>
@@ -3771,8 +3759,8 @@
         </p:nvSpPr>
         <p:spPr>
           <a:xfrm>
-            <a:off x="3124200" y="2895600"/>
-            <a:ext cx="1803400" cy="279400"/>
+            <a:off x="2048256" y="2788920"/>
+            <a:ext cx="932688" cy="182880"/>
           </a:xfrm>
           <a:prstGeom prst="rect">
             <a:avLst/>
@@ -3786,7 +3774,7 @@
           <a:lstStyle/>
           <a:p>
             <a:pPr algn="ctr">
-              <a:defRPr sz="1300" b="1">
+              <a:defRPr sz="1000" b="1">
                 <a:solidFill>
                   <a:srgbClr val="2563EB"/>
                 </a:solidFill>
@@ -3807,8 +3795,8 @@
         </p:nvSpPr>
         <p:spPr>
           <a:xfrm>
-            <a:off x="3124200" y="3225800"/>
-            <a:ext cx="1803400" cy="1371600"/>
+            <a:off x="2048256" y="3017520"/>
+            <a:ext cx="932688" cy="1188720"/>
           </a:xfrm>
           <a:prstGeom prst="rect">
             <a:avLst/>
@@ -3822,7 +3810,7 @@
           <a:lstStyle/>
           <a:p>
             <a:pPr algn="ctr">
-              <a:defRPr sz="1100" b="0">
+              <a:defRPr sz="800" b="0">
                 <a:solidFill>
                   <a:srgbClr val="666680"/>
                 </a:solidFill>
@@ -3830,15 +3818,15 @@
               </a:defRPr>
             </a:pPr>
             <a:r>
-              <a:t>共有コードで接続</a:t>
+              <a:t>WebRTC subscribe</a:t>
             </a:r>
             <a:br/>
             <a:r>
-              <a:t>スコア自動更新</a:t>
+              <a:t>＋YouTube iframe</a:t>
             </a:r>
             <a:br/>
             <a:r>
-              <a:t>LINE共有</a:t>
+              <a:t>(PR #124)</a:t>
             </a:r>
           </a:p>
         </p:txBody>
@@ -3851,8 +3839,8 @@
         </p:nvSpPr>
         <p:spPr>
           <a:xfrm>
-            <a:off x="5207000" y="2768600"/>
-            <a:ext cx="2006600" cy="1905000"/>
+            <a:off x="3218688" y="2697480"/>
+            <a:ext cx="1078992" cy="1691640"/>
           </a:xfrm>
           <a:prstGeom prst="roundRect">
             <a:avLst/>
@@ -3885,7 +3873,6 @@
           <a:lstStyle/>
           <a:p>
             <a:pPr algn="ctr"/>
-            <a:endParaRPr/>
           </a:p>
         </p:txBody>
       </p:sp>
@@ -3897,8 +3884,8 @@
         </p:nvSpPr>
         <p:spPr>
           <a:xfrm>
-            <a:off x="5207000" y="2768600"/>
-            <a:ext cx="2006600" cy="50800"/>
+            <a:off x="3218688" y="2697480"/>
+            <a:ext cx="1078992" cy="38100"/>
           </a:xfrm>
           <a:prstGeom prst="rect">
             <a:avLst/>
@@ -3929,7 +3916,6 @@
           <a:lstStyle/>
           <a:p>
             <a:pPr algn="ctr"/>
-            <a:endParaRPr/>
           </a:p>
         </p:txBody>
       </p:sp>
@@ -3941,8 +3927,8 @@
         </p:nvSpPr>
         <p:spPr>
           <a:xfrm>
-            <a:off x="5308600" y="2895600"/>
-            <a:ext cx="1803400" cy="279400"/>
+            <a:off x="3291840" y="2788920"/>
+            <a:ext cx="932688" cy="182880"/>
           </a:xfrm>
           <a:prstGeom prst="rect">
             <a:avLst/>
@@ -3956,7 +3942,7 @@
           <a:lstStyle/>
           <a:p>
             <a:pPr algn="ctr">
-              <a:defRPr sz="1300" b="1">
+              <a:defRPr sz="1000" b="1">
                 <a:solidFill>
                   <a:srgbClr val="16A34A"/>
                 </a:solidFill>
@@ -3977,8 +3963,8 @@
         </p:nvSpPr>
         <p:spPr>
           <a:xfrm>
-            <a:off x="5308600" y="3225800"/>
-            <a:ext cx="1803400" cy="1371600"/>
+            <a:off x="3291840" y="3017520"/>
+            <a:ext cx="932688" cy="1188720"/>
           </a:xfrm>
           <a:prstGeom prst="rect">
             <a:avLst/>
@@ -3992,7 +3978,7 @@
           <a:lstStyle/>
           <a:p>
             <a:pPr algn="ctr">
-              <a:defRPr sz="1100" b="0">
+              <a:defRPr sz="800" b="0">
                 <a:solidFill>
                   <a:srgbClr val="666680"/>
                 </a:solidFill>
@@ -4004,11 +3990,11 @@
             </a:r>
             <a:br/>
             <a:r>
+              <a:t>スケジュール</a:t>
+            </a:r>
+            <a:br/>
+            <a:r>
               <a:t>メンバー権限</a:t>
-            </a:r>
-            <a:br/>
-            <a:r>
-              <a:t>チーム配信</a:t>
             </a:r>
           </a:p>
         </p:txBody>
@@ -4021,8 +4007,8 @@
         </p:nvSpPr>
         <p:spPr>
           <a:xfrm>
-            <a:off x="7391400" y="2768600"/>
-            <a:ext cx="2006600" cy="1905000"/>
+            <a:off x="4462272" y="2697480"/>
+            <a:ext cx="1078992" cy="1691640"/>
           </a:xfrm>
           <a:prstGeom prst="roundRect">
             <a:avLst/>
@@ -4055,7 +4041,6 @@
           <a:lstStyle/>
           <a:p>
             <a:pPr algn="ctr"/>
-            <a:endParaRPr/>
           </a:p>
         </p:txBody>
       </p:sp>
@@ -4067,8 +4052,8 @@
         </p:nvSpPr>
         <p:spPr>
           <a:xfrm>
-            <a:off x="7391400" y="2768600"/>
-            <a:ext cx="2006600" cy="50800"/>
+            <a:off x="4462272" y="2697480"/>
+            <a:ext cx="1078992" cy="38100"/>
           </a:xfrm>
           <a:prstGeom prst="rect">
             <a:avLst/>
@@ -4099,7 +4084,6 @@
           <a:lstStyle/>
           <a:p>
             <a:pPr algn="ctr"/>
-            <a:endParaRPr/>
           </a:p>
         </p:txBody>
       </p:sp>
@@ -4111,8 +4095,8 @@
         </p:nvSpPr>
         <p:spPr>
           <a:xfrm>
-            <a:off x="7493000" y="2895600"/>
-            <a:ext cx="1803400" cy="279400"/>
+            <a:off x="4535424" y="2788920"/>
+            <a:ext cx="932688" cy="182880"/>
           </a:xfrm>
           <a:prstGeom prst="rect">
             <a:avLst/>
@@ -4126,7 +4110,7 @@
           <a:lstStyle/>
           <a:p>
             <a:pPr algn="ctr">
-              <a:defRPr sz="1300" b="1">
+              <a:defRPr sz="1000" b="1">
                 <a:solidFill>
                   <a:srgbClr val="EA880B"/>
                 </a:solidFill>
@@ -4147,8 +4131,8 @@
         </p:nvSpPr>
         <p:spPr>
           <a:xfrm>
-            <a:off x="7493000" y="3225800"/>
-            <a:ext cx="1803400" cy="1371600"/>
+            <a:off x="4535424" y="3017520"/>
+            <a:ext cx="932688" cy="1188720"/>
           </a:xfrm>
           <a:prstGeom prst="rect">
             <a:avLst/>
@@ -4162,7 +4146,7 @@
           <a:lstStyle/>
           <a:p>
             <a:pPr algn="ctr">
-              <a:defRPr sz="1100" b="0">
+              <a:defRPr sz="800" b="0">
                 <a:solidFill>
                   <a:srgbClr val="666680"/>
                 </a:solidFill>
@@ -4174,11 +4158,11 @@
             </a:r>
             <a:br/>
             <a:r>
-              <a:t>¥300/¥500月額</a:t>
+              <a:t>¥300 / ¥500</a:t>
             </a:r>
             <a:br/>
             <a:r>
-              <a:t>解約・退会</a:t>
+              <a:t>月額サブスク</a:t>
             </a:r>
           </a:p>
         </p:txBody>
@@ -4191,8 +4175,8 @@
         </p:nvSpPr>
         <p:spPr>
           <a:xfrm>
-            <a:off x="9575800" y="2768600"/>
-            <a:ext cx="2006600" cy="1905000"/>
+            <a:off x="5705856" y="2697480"/>
+            <a:ext cx="1078992" cy="1691640"/>
           </a:xfrm>
           <a:prstGeom prst="roundRect">
             <a:avLst/>
@@ -4225,7 +4209,6 @@
           <a:lstStyle/>
           <a:p>
             <a:pPr algn="ctr"/>
-            <a:endParaRPr/>
           </a:p>
         </p:txBody>
       </p:sp>
@@ -4237,8 +4220,8 @@
         </p:nvSpPr>
         <p:spPr>
           <a:xfrm>
-            <a:off x="9575800" y="2768600"/>
-            <a:ext cx="2006600" cy="50800"/>
+            <a:off x="5705856" y="2697480"/>
+            <a:ext cx="1078992" cy="38100"/>
           </a:xfrm>
           <a:prstGeom prst="rect">
             <a:avLst/>
@@ -4269,7 +4252,6 @@
           <a:lstStyle/>
           <a:p>
             <a:pPr algn="ctr"/>
-            <a:endParaRPr/>
           </a:p>
         </p:txBody>
       </p:sp>
@@ -4281,8 +4263,8 @@
         </p:nvSpPr>
         <p:spPr>
           <a:xfrm>
-            <a:off x="9677400" y="2895600"/>
-            <a:ext cx="1803400" cy="279400"/>
+            <a:off x="5779008" y="2788920"/>
+            <a:ext cx="932688" cy="182880"/>
           </a:xfrm>
           <a:prstGeom prst="rect">
             <a:avLst/>
@@ -4296,7 +4278,7 @@
           <a:lstStyle/>
           <a:p>
             <a:pPr algn="ctr">
-              <a:defRPr sz="1300" b="1">
+              <a:defRPr sz="1000" b="1">
                 <a:solidFill>
                   <a:srgbClr val="7C3AED"/>
                 </a:solidFill>
@@ -4304,7 +4286,7 @@
               </a:defRPr>
             </a:pPr>
             <a:r>
-              <a:t>YouTube</a:t>
+              <a:t>YouTube Live</a:t>
             </a:r>
           </a:p>
         </p:txBody>
@@ -4317,8 +4299,8 @@
         </p:nvSpPr>
         <p:spPr>
           <a:xfrm>
-            <a:off x="9677400" y="3225800"/>
-            <a:ext cx="1803400" cy="1371600"/>
+            <a:off x="5779008" y="3017520"/>
+            <a:ext cx="932688" cy="1188720"/>
           </a:xfrm>
           <a:prstGeom prst="rect">
             <a:avLst/>
@@ -4332,7 +4314,7 @@
           <a:lstStyle/>
           <a:p>
             <a:pPr algn="ctr">
-              <a:defRPr sz="1100" b="0">
+              <a:defRPr sz="800" b="0">
                 <a:solidFill>
                   <a:srgbClr val="666680"/>
                 </a:solidFill>
@@ -4340,15 +4322,15 @@
               </a:defRPr>
             </a:pPr>
             <a:r>
-              <a:t>OAuth連携</a:t>
+              <a:t>同時配信</a:t>
             </a:r>
             <a:br/>
             <a:r>
-              <a:t>アーカイブ保存</a:t>
+              <a:t>アーカイブ自動</a:t>
             </a:r>
             <a:br/>
             <a:r>
-              <a:t>（Phase 2-3）</a:t>
+              <a:t>(チームプラン)</a:t>
             </a:r>
           </a:p>
         </p:txBody>
@@ -4361,8 +4343,8 @@
         </p:nvSpPr>
         <p:spPr>
           <a:xfrm>
-            <a:off x="1828800" y="4724400"/>
-            <a:ext cx="38100" cy="457200"/>
+            <a:off x="1271016" y="4434840"/>
+            <a:ext cx="25400" cy="411480"/>
           </a:xfrm>
           <a:prstGeom prst="rect">
             <a:avLst/>
@@ -4393,7 +4375,6 @@
           <a:lstStyle/>
           <a:p>
             <a:pPr algn="ctr"/>
-            <a:endParaRPr/>
           </a:p>
         </p:txBody>
       </p:sp>
@@ -4405,8 +4386,8 @@
         </p:nvSpPr>
         <p:spPr>
           <a:xfrm>
-            <a:off x="4013200" y="4724400"/>
-            <a:ext cx="38100" cy="457200"/>
+            <a:off x="2514600" y="4434840"/>
+            <a:ext cx="25400" cy="411480"/>
           </a:xfrm>
           <a:prstGeom prst="rect">
             <a:avLst/>
@@ -4437,7 +4418,6 @@
           <a:lstStyle/>
           <a:p>
             <a:pPr algn="ctr"/>
-            <a:endParaRPr/>
           </a:p>
         </p:txBody>
       </p:sp>
@@ -4449,8 +4429,8 @@
         </p:nvSpPr>
         <p:spPr>
           <a:xfrm>
-            <a:off x="6197600" y="4724400"/>
-            <a:ext cx="38100" cy="457200"/>
+            <a:off x="3758184" y="4434840"/>
+            <a:ext cx="25400" cy="411480"/>
           </a:xfrm>
           <a:prstGeom prst="rect">
             <a:avLst/>
@@ -4481,7 +4461,6 @@
           <a:lstStyle/>
           <a:p>
             <a:pPr algn="ctr"/>
-            <a:endParaRPr/>
           </a:p>
         </p:txBody>
       </p:sp>
@@ -4493,8 +4472,8 @@
         </p:nvSpPr>
         <p:spPr>
           <a:xfrm>
-            <a:off x="8382000" y="4724400"/>
-            <a:ext cx="38100" cy="457200"/>
+            <a:off x="5001768" y="4434840"/>
+            <a:ext cx="25400" cy="411480"/>
           </a:xfrm>
           <a:prstGeom prst="rect">
             <a:avLst/>
@@ -4525,7 +4504,6 @@
           <a:lstStyle/>
           <a:p>
             <a:pPr algn="ctr"/>
-            <a:endParaRPr/>
           </a:p>
         </p:txBody>
       </p:sp>
@@ -4537,8 +4515,8 @@
         </p:nvSpPr>
         <p:spPr>
           <a:xfrm>
-            <a:off x="10566400" y="4724400"/>
-            <a:ext cx="38100" cy="457200"/>
+            <a:off x="5943600" y="4434840"/>
+            <a:ext cx="25400" cy="411480"/>
           </a:xfrm>
           <a:prstGeom prst="rect">
             <a:avLst/>
@@ -4569,7 +4547,6 @@
           <a:lstStyle/>
           <a:p>
             <a:pPr algn="ctr"/>
-            <a:endParaRPr/>
           </a:p>
         </p:txBody>
       </p:sp>
@@ -4581,8 +4558,8 @@
         </p:nvSpPr>
         <p:spPr>
           <a:xfrm>
-            <a:off x="635000" y="5232400"/>
-            <a:ext cx="2082800" cy="863600"/>
+            <a:off x="548640" y="4892040"/>
+            <a:ext cx="1133856" cy="777240"/>
           </a:xfrm>
           <a:prstGeom prst="roundRect">
             <a:avLst/>
@@ -4615,7 +4592,6 @@
           <a:lstStyle/>
           <a:p>
             <a:pPr algn="ctr"/>
-            <a:endParaRPr/>
           </a:p>
         </p:txBody>
       </p:sp>
@@ -4627,8 +4603,8 @@
         </p:nvSpPr>
         <p:spPr>
           <a:xfrm>
-            <a:off x="711200" y="5334000"/>
-            <a:ext cx="1930400" cy="279400"/>
+            <a:off x="603504" y="4983480"/>
+            <a:ext cx="1024128" cy="182880"/>
           </a:xfrm>
           <a:prstGeom prst="rect">
             <a:avLst/>
@@ -4642,7 +4618,7 @@
           <a:lstStyle/>
           <a:p>
             <a:pPr algn="ctr">
-              <a:defRPr sz="1300" b="1">
+              <a:defRPr sz="900" b="1">
                 <a:solidFill>
                   <a:srgbClr val="E63946"/>
                 </a:solidFill>
@@ -4650,7 +4626,7 @@
               </a:defRPr>
             </a:pPr>
             <a:r>
-              <a:t>LiveKit Cloud</a:t>
+              <a:t>LiveKit Cloud Ship</a:t>
             </a:r>
           </a:p>
         </p:txBody>
@@ -4663,8 +4639,8 @@
         </p:nvSpPr>
         <p:spPr>
           <a:xfrm>
-            <a:off x="711200" y="5664200"/>
-            <a:ext cx="1930400" cy="330200"/>
+            <a:off x="603504" y="5239512"/>
+            <a:ext cx="1024128" cy="274320"/>
           </a:xfrm>
           <a:prstGeom prst="rect">
             <a:avLst/>
@@ -4678,7 +4654,7 @@
           <a:lstStyle/>
           <a:p>
             <a:pPr algn="ctr">
-              <a:defRPr sz="1100" b="0">
+              <a:defRPr sz="800" b="0">
                 <a:solidFill>
                   <a:srgbClr val="666680"/>
                 </a:solidFill>
@@ -4686,7 +4662,7 @@
               </a:defRPr>
             </a:pPr>
             <a:r>
-              <a:t>映像配信基盤</a:t>
+              <a:t>$50/月・600分含み</a:t>
             </a:r>
           </a:p>
         </p:txBody>
@@ -4699,8 +4675,8 @@
         </p:nvSpPr>
         <p:spPr>
           <a:xfrm>
-            <a:off x="2844800" y="5232400"/>
-            <a:ext cx="2082800" cy="863600"/>
+            <a:off x="1847088" y="4892040"/>
+            <a:ext cx="1133856" cy="777240"/>
           </a:xfrm>
           <a:prstGeom prst="roundRect">
             <a:avLst/>
@@ -4733,7 +4709,6 @@
           <a:lstStyle/>
           <a:p>
             <a:pPr algn="ctr"/>
-            <a:endParaRPr/>
           </a:p>
         </p:txBody>
       </p:sp>
@@ -4745,8 +4720,8 @@
         </p:nvSpPr>
         <p:spPr>
           <a:xfrm>
-            <a:off x="2921000" y="5334000"/>
-            <a:ext cx="1930400" cy="279400"/>
+            <a:off x="1901952" y="4983480"/>
+            <a:ext cx="1024128" cy="182880"/>
           </a:xfrm>
           <a:prstGeom prst="rect">
             <a:avLst/>
@@ -4760,7 +4735,7 @@
           <a:lstStyle/>
           <a:p>
             <a:pPr algn="ctr">
-              <a:defRPr sz="1300" b="1">
+              <a:defRPr sz="900" b="1">
                 <a:solidFill>
                   <a:srgbClr val="2563EB"/>
                 </a:solidFill>
@@ -4781,8 +4756,8 @@
         </p:nvSpPr>
         <p:spPr>
           <a:xfrm>
-            <a:off x="2921000" y="5664200"/>
-            <a:ext cx="1930400" cy="330200"/>
+            <a:off x="1901952" y="5239512"/>
+            <a:ext cx="1024128" cy="274320"/>
           </a:xfrm>
           <a:prstGeom prst="rect">
             <a:avLst/>
@@ -4796,7 +4771,7 @@
           <a:lstStyle/>
           <a:p>
             <a:pPr algn="ctr">
-              <a:defRPr sz="1100" b="0">
+              <a:defRPr sz="800" b="0">
                 <a:solidFill>
                   <a:srgbClr val="666680"/>
                 </a:solidFill>
@@ -4817,8 +4792,8 @@
         </p:nvSpPr>
         <p:spPr>
           <a:xfrm>
-            <a:off x="5054600" y="5232400"/>
-            <a:ext cx="2082800" cy="863600"/>
+            <a:off x="3145536" y="4892040"/>
+            <a:ext cx="1133856" cy="777240"/>
           </a:xfrm>
           <a:prstGeom prst="roundRect">
             <a:avLst/>
@@ -4851,7 +4826,6 @@
           <a:lstStyle/>
           <a:p>
             <a:pPr algn="ctr"/>
-            <a:endParaRPr/>
           </a:p>
         </p:txBody>
       </p:sp>
@@ -4863,8 +4837,8 @@
         </p:nvSpPr>
         <p:spPr>
           <a:xfrm>
-            <a:off x="5130800" y="5334000"/>
-            <a:ext cx="1930400" cy="279400"/>
+            <a:off x="3200400" y="4983480"/>
+            <a:ext cx="1024128" cy="182880"/>
           </a:xfrm>
           <a:prstGeom prst="rect">
             <a:avLst/>
@@ -4878,7 +4852,7 @@
           <a:lstStyle/>
           <a:p>
             <a:pPr algn="ctr">
-              <a:defRPr sz="1300" b="1">
+              <a:defRPr sz="900" b="1">
                 <a:solidFill>
                   <a:srgbClr val="EA880B"/>
                 </a:solidFill>
@@ -4899,8 +4873,8 @@
         </p:nvSpPr>
         <p:spPr>
           <a:xfrm>
-            <a:off x="5130800" y="5664200"/>
-            <a:ext cx="1930400" cy="330200"/>
+            <a:off x="3200400" y="5239512"/>
+            <a:ext cx="1024128" cy="274320"/>
           </a:xfrm>
           <a:prstGeom prst="rect">
             <a:avLst/>
@@ -4914,7 +4888,7 @@
           <a:lstStyle/>
           <a:p>
             <a:pPr algn="ctr">
-              <a:defRPr sz="1100" b="0">
+              <a:defRPr sz="800" b="0">
                 <a:solidFill>
                   <a:srgbClr val="666680"/>
                 </a:solidFill>
@@ -4922,7 +4896,7 @@
               </a:defRPr>
             </a:pPr>
             <a:r>
-              <a:t>決済処理</a:t>
+              <a:t>決済・課金</a:t>
             </a:r>
           </a:p>
         </p:txBody>
@@ -4935,8 +4909,8 @@
         </p:nvSpPr>
         <p:spPr>
           <a:xfrm>
-            <a:off x="7264400" y="5232400"/>
-            <a:ext cx="2082800" cy="863600"/>
+            <a:off x="4443983" y="4892040"/>
+            <a:ext cx="1133856" cy="777240"/>
           </a:xfrm>
           <a:prstGeom prst="roundRect">
             <a:avLst/>
@@ -4969,7 +4943,6 @@
           <a:lstStyle/>
           <a:p>
             <a:pPr algn="ctr"/>
-            <a:endParaRPr/>
           </a:p>
         </p:txBody>
       </p:sp>
@@ -4981,8 +4954,8 @@
         </p:nvSpPr>
         <p:spPr>
           <a:xfrm>
-            <a:off x="7340600" y="5334000"/>
-            <a:ext cx="1930400" cy="279400"/>
+            <a:off x="4498847" y="4983480"/>
+            <a:ext cx="1024128" cy="182880"/>
           </a:xfrm>
           <a:prstGeom prst="rect">
             <a:avLst/>
@@ -4996,7 +4969,7 @@
           <a:lstStyle/>
           <a:p>
             <a:pPr algn="ctr">
-              <a:defRPr sz="1300" b="1">
+              <a:defRPr sz="900" b="1">
                 <a:solidFill>
                   <a:srgbClr val="7C3AED"/>
                 </a:solidFill>
@@ -5004,7 +4977,7 @@
               </a:defRPr>
             </a:pPr>
             <a:r>
-              <a:t>YouTube API</a:t>
+              <a:t>YouTube Live API</a:t>
             </a:r>
           </a:p>
         </p:txBody>
@@ -5017,8 +4990,8 @@
         </p:nvSpPr>
         <p:spPr>
           <a:xfrm>
-            <a:off x="7340600" y="5664200"/>
-            <a:ext cx="1930400" cy="330200"/>
+            <a:off x="4498847" y="5239512"/>
+            <a:ext cx="1024128" cy="274320"/>
           </a:xfrm>
           <a:prstGeom prst="rect">
             <a:avLst/>
@@ -5032,7 +5005,7 @@
           <a:lstStyle/>
           <a:p>
             <a:pPr algn="ctr">
-              <a:defRPr sz="1100" b="0">
+              <a:defRPr sz="800" b="0">
                 <a:solidFill>
                   <a:srgbClr val="666680"/>
                 </a:solidFill>
@@ -5040,7 +5013,7 @@
               </a:defRPr>
             </a:pPr>
             <a:r>
-              <a:t>動画保存</a:t>
+              <a:t>同時配信・アーカイブ</a:t>
             </a:r>
           </a:p>
         </p:txBody>
@@ -5053,8 +5026,8 @@
         </p:nvSpPr>
         <p:spPr>
           <a:xfrm>
-            <a:off x="9474200" y="5232400"/>
-            <a:ext cx="2082800" cy="863600"/>
+            <a:off x="5742431" y="4892040"/>
+            <a:ext cx="1133856" cy="777240"/>
           </a:xfrm>
           <a:prstGeom prst="roundRect">
             <a:avLst/>
@@ -5087,7 +5060,6 @@
           <a:lstStyle/>
           <a:p>
             <a:pPr algn="ctr"/>
-            <a:endParaRPr/>
           </a:p>
         </p:txBody>
       </p:sp>
@@ -5099,8 +5071,8 @@
         </p:nvSpPr>
         <p:spPr>
           <a:xfrm>
-            <a:off x="9550400" y="5334000"/>
-            <a:ext cx="1930400" cy="279400"/>
+            <a:off x="5797295" y="4983480"/>
+            <a:ext cx="1024128" cy="182880"/>
           </a:xfrm>
           <a:prstGeom prst="rect">
             <a:avLst/>
@@ -5114,7 +5086,7 @@
           <a:lstStyle/>
           <a:p>
             <a:pPr algn="ctr">
-              <a:defRPr sz="1300" b="1">
+              <a:defRPr sz="900" b="1">
                 <a:solidFill>
                   <a:srgbClr val="16A34A"/>
                 </a:solidFill>
@@ -5135,8 +5107,8 @@
         </p:nvSpPr>
         <p:spPr>
           <a:xfrm>
-            <a:off x="9550400" y="5664200"/>
-            <a:ext cx="1930400" cy="330200"/>
+            <a:off x="5797295" y="5239512"/>
+            <a:ext cx="1024128" cy="274320"/>
           </a:xfrm>
           <a:prstGeom prst="rect">
             <a:avLst/>
@@ -5150,7 +5122,7 @@
           <a:lstStyle/>
           <a:p>
             <a:pPr algn="ctr">
-              <a:defRPr sz="1100" b="0">
+              <a:defRPr sz="800" b="0">
                 <a:solidFill>
                   <a:srgbClr val="666680"/>
                 </a:solidFill>
@@ -5158,7 +5130,7 @@
               </a:defRPr>
             </a:pPr>
             <a:r>
-              <a:t>ホスティング</a:t>
+              <a:t>ホスティング・CDN</a:t>
             </a:r>
           </a:p>
         </p:txBody>
@@ -5171,8 +5143,8 @@
         </p:nvSpPr>
         <p:spPr>
           <a:xfrm>
-            <a:off x="4140200" y="4978400"/>
-            <a:ext cx="1968500" cy="25400"/>
+            <a:off x="2514600" y="4617720"/>
+            <a:ext cx="1243584" cy="25400"/>
           </a:xfrm>
           <a:prstGeom prst="rect">
             <a:avLst/>
@@ -5203,20 +5175,64 @@
           <a:lstStyle/>
           <a:p>
             <a:pPr algn="ctr"/>
-            <a:endParaRPr/>
-          </a:p>
-        </p:txBody>
-      </p:sp>
-      <p:sp>
-        <p:nvSpPr>
-          <p:cNvPr id="53" name="TextBox 52"/>
+          </a:p>
+        </p:txBody>
+      </p:sp>
+      <p:sp>
+        <p:nvSpPr>
+          <p:cNvPr id="53" name="Rounded Rectangle 52"/>
+          <p:cNvSpPr/>
+          <p:nvPr/>
+        </p:nvSpPr>
+        <p:spPr>
+          <a:xfrm>
+            <a:off x="548640" y="5760720"/>
+            <a:ext cx="6400800" cy="502920"/>
+          </a:xfrm>
+          <a:prstGeom prst="roundRect">
+            <a:avLst/>
+          </a:prstGeom>
+          <a:solidFill>
+            <a:srgbClr val="FFF3E0"/>
+          </a:solidFill>
+          <a:ln w="19050">
+            <a:solidFill>
+              <a:srgbClr val="EA880B"/>
+            </a:solidFill>
+          </a:ln>
+        </p:spPr>
+        <p:style>
+          <a:lnRef idx="1">
+            <a:schemeClr val="accent1"/>
+          </a:lnRef>
+          <a:fillRef idx="3">
+            <a:schemeClr val="accent1"/>
+          </a:fillRef>
+          <a:effectRef idx="2">
+            <a:schemeClr val="accent1"/>
+          </a:effectRef>
+          <a:fontRef idx="minor">
+            <a:schemeClr val="lt1"/>
+          </a:fontRef>
+        </p:style>
+        <p:txBody>
+          <a:bodyPr rtlCol="0" anchor="ctr"/>
+          <a:lstStyle/>
+          <a:p>
+            <a:pPr algn="ctr"/>
+          </a:p>
+        </p:txBody>
+      </p:sp>
+      <p:sp>
+        <p:nvSpPr>
+          <p:cNvPr id="54" name="TextBox 53"/>
           <p:cNvSpPr txBox="1"/>
           <p:nvPr/>
         </p:nvSpPr>
         <p:spPr>
           <a:xfrm>
-            <a:off x="635000" y="6172200"/>
-            <a:ext cx="10922000" cy="228600"/>
+            <a:off x="731520" y="5806440"/>
+            <a:ext cx="777240" cy="411480"/>
           </a:xfrm>
           <a:prstGeom prst="rect">
             <a:avLst/>
@@ -5229,30 +5245,34 @@
           </a:bodyPr>
           <a:lstStyle/>
           <a:p>
-            <a:pPr algn="l">
-              <a:defRPr sz="1000" b="0">
-                <a:solidFill>
-                  <a:srgbClr val="9CA3AF"/>
+            <a:pPr algn="ctr">
+              <a:defRPr sz="800" b="1">
+                <a:solidFill>
+                  <a:srgbClr val="EA880B"/>
                 </a:solidFill>
                 <a:latin typeface="Meiryo UI"/>
               </a:defRPr>
             </a:pPr>
             <a:r>
-              <a:t>■ 実線 = 現在稼働中の接続    ■ 各色 = 機能と対応サービスの紐付き</a:t>
-            </a:r>
-          </a:p>
-        </p:txBody>
-      </p:sp>
-      <p:sp>
-        <p:nvSpPr>
-          <p:cNvPr id="118" name="TextBox 117"/>
+              <a:t>5月末</a:t>
+            </a:r>
+            <a:br/>
+            <a:r>
+              <a:t>追加</a:t>
+            </a:r>
+          </a:p>
+        </p:txBody>
+      </p:sp>
+      <p:sp>
+        <p:nvSpPr>
+          <p:cNvPr id="55" name="TextBox 54"/>
           <p:cNvSpPr txBox="1"/>
           <p:nvPr/>
         </p:nvSpPr>
         <p:spPr>
           <a:xfrm>
-            <a:off x="635000" y="6451600"/>
-            <a:ext cx="10922000" cy="203200"/>
+            <a:off x="1508760" y="5815584"/>
+            <a:ext cx="5349240" cy="411480"/>
           </a:xfrm>
           <a:prstGeom prst="rect">
             <a:avLst/>
@@ -5266,7 +5286,43 @@
           <a:lstStyle/>
           <a:p>
             <a:pPr algn="l">
-              <a:defRPr sz="1000" b="0">
+              <a:defRPr sz="900" b="1">
+                <a:solidFill>
+                  <a:srgbClr val="EA880B"/>
+                </a:solidFill>
+                <a:latin typeface="Meiryo UI"/>
+              </a:defRPr>
+            </a:pPr>
+            <a:r>
+              <a:t>TCP化中継 server (B案) → 4G環境下の配信品質を BAND 同等に / +$5-20/月 / 5月末完成見込み</a:t>
+            </a:r>
+          </a:p>
+        </p:txBody>
+      </p:sp>
+      <p:sp>
+        <p:nvSpPr>
+          <p:cNvPr id="56" name="TextBox 55"/>
+          <p:cNvSpPr txBox="1"/>
+          <p:nvPr/>
+        </p:nvSpPr>
+        <p:spPr>
+          <a:xfrm>
+            <a:off x="548640" y="6355080"/>
+            <a:ext cx="6400800" cy="182880"/>
+          </a:xfrm>
+          <a:prstGeom prst="rect">
+            <a:avLst/>
+          </a:prstGeom>
+          <a:noFill/>
+        </p:spPr>
+        <p:txBody>
+          <a:bodyPr wrap="square">
+            <a:spAutoFit/>
+          </a:bodyPr>
+          <a:lstStyle/>
+          <a:p>
+            <a:pPr algn="l">
+              <a:defRPr sz="800" b="0">
                 <a:solidFill>
                   <a:srgbClr val="9CA3AF"/>
                 </a:solidFill>
@@ -5274,53 +5330,147 @@
               </a:defRPr>
             </a:pPr>
             <a:r>
-              <a:t>LIVE SPOtCH  |  LIN-NAH株式会社  |  2026年4月</a:t>
-            </a:r>
-          </a:p>
-        </p:txBody>
-      </p:sp>
-    </p:spTree>
-    <p:extLst>
-      <p:ext uri="{BB962C8B-B14F-4D97-AF65-F5344CB8AC3E}">
-        <p14:creationId xmlns:p14="http://schemas.microsoft.com/office/powerpoint/2010/main" val="2825351629"/>
-      </p:ext>
-    </p:extLst>
-  </p:cSld>
-  <p:clrMapOvr>
-    <a:masterClrMapping/>
-  </p:clrMapOvr>
-</p:sld>
-</file>
-
-<file path=ppt/slides/slide2.xml><?xml version="1.0" encoding="utf-8"?>
-<p:sld xmlns:a="http://schemas.openxmlformats.org/drawingml/2006/main" xmlns:r="http://schemas.openxmlformats.org/officeDocument/2006/relationships" xmlns:p="http://schemas.openxmlformats.org/presentationml/2006/main">
-  <p:cSld>
-    <p:spTree>
-      <p:nvGrpSpPr>
-        <p:cNvPr id="1" name=""/>
-        <p:cNvGrpSpPr/>
-        <p:nvPr/>
-      </p:nvGrpSpPr>
-      <p:grpSpPr>
-        <a:xfrm>
-          <a:off x="0" y="0"/>
-          <a:ext cx="0" cy="0"/>
-          <a:chOff x="0" y="0"/>
-          <a:chExt cx="0" cy="0"/>
-        </a:xfrm>
-      </p:grpSpPr>
-      <p:sp>
-        <p:nvSpPr>
-          <p:cNvPr id="2" name="AccentBar"/>
+              <a:t>■ 実線 = 現在稼働中の接続    ■ オレンジ枠 = 5月中完璧化で追加予定（提案書 v2 / 借入対応）</a:t>
+            </a:r>
+          </a:p>
+        </p:txBody>
+      </p:sp>
+      <p:sp>
+        <p:nvSpPr>
+          <p:cNvPr id="57" name="Rounded Rectangle 56"/>
           <p:cNvSpPr/>
           <p:nvPr/>
         </p:nvSpPr>
         <p:spPr>
           <a:xfrm>
-            <a:off x="0" y="0"/>
-            <a:ext cx="63500" cy="6858000"/>
-          </a:xfrm>
-          <a:prstGeom prst="rect">
+            <a:off x="7315200" y="1097280"/>
+            <a:ext cx="4572000" cy="457200"/>
+          </a:xfrm>
+          <a:prstGeom prst="roundRect">
+            <a:avLst/>
+          </a:prstGeom>
+          <a:solidFill>
+            <a:srgbClr val="0F172A"/>
+          </a:solidFill>
+          <a:ln>
+            <a:noFill/>
+          </a:ln>
+        </p:spPr>
+        <p:style>
+          <a:lnRef idx="1">
+            <a:schemeClr val="accent1"/>
+          </a:lnRef>
+          <a:fillRef idx="3">
+            <a:schemeClr val="accent1"/>
+          </a:fillRef>
+          <a:effectRef idx="2">
+            <a:schemeClr val="accent1"/>
+          </a:effectRef>
+          <a:fontRef idx="minor">
+            <a:schemeClr val="lt1"/>
+          </a:fontRef>
+        </p:style>
+        <p:txBody>
+          <a:bodyPr rtlCol="0" anchor="ctr"/>
+          <a:lstStyle/>
+          <a:p>
+            <a:pPr algn="ctr"/>
+          </a:p>
+        </p:txBody>
+      </p:sp>
+      <p:sp>
+        <p:nvSpPr>
+          <p:cNvPr id="58" name="TextBox 57"/>
+          <p:cNvSpPr txBox="1"/>
+          <p:nvPr/>
+        </p:nvSpPr>
+        <p:spPr>
+          <a:xfrm>
+            <a:off x="7498080" y="1143000"/>
+            <a:ext cx="4206240" cy="365760"/>
+          </a:xfrm>
+          <a:prstGeom prst="rect">
+            <a:avLst/>
+          </a:prstGeom>
+          <a:noFill/>
+        </p:spPr>
+        <p:txBody>
+          <a:bodyPr wrap="square">
+            <a:spAutoFit/>
+          </a:bodyPr>
+          <a:lstStyle/>
+          <a:p>
+            <a:pPr algn="l">
+              <a:defRPr sz="1500" b="1">
+                <a:solidFill>
+                  <a:srgbClr val="FFFFFF"/>
+                </a:solidFill>
+                <a:latin typeface="Meiryo UI"/>
+              </a:defRPr>
+            </a:pPr>
+            <a:r>
+              <a:t>将来の拡張ポイント &amp; 概算費用</a:t>
+            </a:r>
+          </a:p>
+        </p:txBody>
+      </p:sp>
+      <p:sp>
+        <p:nvSpPr>
+          <p:cNvPr id="59" name="Rounded Rectangle 58"/>
+          <p:cNvSpPr/>
+          <p:nvPr/>
+        </p:nvSpPr>
+        <p:spPr>
+          <a:xfrm>
+            <a:off x="7315200" y="1691640"/>
+            <a:ext cx="4572000" cy="685800"/>
+          </a:xfrm>
+          <a:prstGeom prst="roundRect">
+            <a:avLst/>
+          </a:prstGeom>
+          <a:solidFill>
+            <a:srgbClr val="FDEBED"/>
+          </a:solidFill>
+          <a:ln w="19050">
+            <a:solidFill>
+              <a:srgbClr val="E63946"/>
+            </a:solidFill>
+          </a:ln>
+        </p:spPr>
+        <p:style>
+          <a:lnRef idx="1">
+            <a:schemeClr val="accent1"/>
+          </a:lnRef>
+          <a:fillRef idx="3">
+            <a:schemeClr val="accent1"/>
+          </a:fillRef>
+          <a:effectRef idx="2">
+            <a:schemeClr val="accent1"/>
+          </a:effectRef>
+          <a:fontRef idx="minor">
+            <a:schemeClr val="lt1"/>
+          </a:fontRef>
+        </p:style>
+        <p:txBody>
+          <a:bodyPr rtlCol="0" anchor="ctr"/>
+          <a:lstStyle/>
+          <a:p>
+            <a:pPr algn="ctr"/>
+          </a:p>
+        </p:txBody>
+      </p:sp>
+      <p:sp>
+        <p:nvSpPr>
+          <p:cNvPr id="60" name="Rounded Rectangle 59"/>
+          <p:cNvSpPr/>
+          <p:nvPr/>
+        </p:nvSpPr>
+        <p:spPr>
+          <a:xfrm>
+            <a:off x="7406640" y="1783080"/>
+            <a:ext cx="502920" cy="274320"/>
+          </a:xfrm>
+          <a:prstGeom prst="roundRect">
             <a:avLst/>
           </a:prstGeom>
           <a:solidFill>
@@ -5330,100 +5480,1553 @@
             <a:noFill/>
           </a:ln>
         </p:spPr>
-        <p:txBody>
-          <a:bodyPr/>
-          <a:lstStyle/>
-          <a:p>
-            <a:endParaRPr lang="ja-JP" altLang="en-US"/>
-          </a:p>
-        </p:txBody>
-      </p:sp>
-      <p:sp>
-        <p:nvSpPr>
-          <p:cNvPr id="3" name="Title"/>
+        <p:style>
+          <a:lnRef idx="1">
+            <a:schemeClr val="accent1"/>
+          </a:lnRef>
+          <a:fillRef idx="3">
+            <a:schemeClr val="accent1"/>
+          </a:fillRef>
+          <a:effectRef idx="2">
+            <a:schemeClr val="accent1"/>
+          </a:effectRef>
+          <a:fontRef idx="minor">
+            <a:schemeClr val="lt1"/>
+          </a:fontRef>
+        </p:style>
+        <p:txBody>
+          <a:bodyPr rtlCol="0" anchor="ctr"/>
+          <a:lstStyle/>
+          <a:p>
+            <a:pPr algn="ctr"/>
+          </a:p>
+        </p:txBody>
+      </p:sp>
+      <p:sp>
+        <p:nvSpPr>
+          <p:cNvPr id="61" name="TextBox 60"/>
+          <p:cNvSpPr txBox="1"/>
+          <p:nvPr/>
+        </p:nvSpPr>
+        <p:spPr>
+          <a:xfrm>
+            <a:off x="7406640" y="1783080"/>
+            <a:ext cx="502920" cy="274320"/>
+          </a:xfrm>
+          <a:prstGeom prst="rect">
+            <a:avLst/>
+          </a:prstGeom>
+          <a:noFill/>
+        </p:spPr>
+        <p:txBody>
+          <a:bodyPr wrap="square">
+            <a:spAutoFit/>
+          </a:bodyPr>
+          <a:lstStyle/>
+          <a:p>
+            <a:pPr algn="ctr">
+              <a:defRPr sz="1000" b="1">
+                <a:solidFill>
+                  <a:srgbClr val="FFFFFF"/>
+                </a:solidFill>
+                <a:latin typeface="Meiryo UI"/>
+              </a:defRPr>
+            </a:pPr>
+            <a:r>
+              <a:t>v1.0</a:t>
+            </a:r>
+          </a:p>
+        </p:txBody>
+      </p:sp>
+      <p:sp>
+        <p:nvSpPr>
+          <p:cNvPr id="62" name="TextBox 61"/>
+          <p:cNvSpPr txBox="1"/>
+          <p:nvPr/>
+        </p:nvSpPr>
+        <p:spPr>
+          <a:xfrm>
+            <a:off x="8001000" y="1764792"/>
+            <a:ext cx="1371600" cy="228600"/>
+          </a:xfrm>
+          <a:prstGeom prst="rect">
+            <a:avLst/>
+          </a:prstGeom>
+          <a:noFill/>
+        </p:spPr>
+        <p:txBody>
+          <a:bodyPr wrap="square">
+            <a:spAutoFit/>
+          </a:bodyPr>
+          <a:lstStyle/>
+          <a:p>
+            <a:pPr algn="l">
+              <a:defRPr sz="1200" b="1">
+                <a:solidFill>
+                  <a:srgbClr val="0F172A"/>
+                </a:solidFill>
+                <a:latin typeface="Meiryo UI"/>
+              </a:defRPr>
+            </a:pPr>
+            <a:r>
+              <a:t>得点リモコン</a:t>
+            </a:r>
+          </a:p>
+        </p:txBody>
+      </p:sp>
+      <p:sp>
+        <p:nvSpPr>
+          <p:cNvPr id="63" name="TextBox 62"/>
+          <p:cNvSpPr txBox="1"/>
+          <p:nvPr/>
+        </p:nvSpPr>
+        <p:spPr>
+          <a:xfrm>
+            <a:off x="8001000" y="2011680"/>
+            <a:ext cx="1371600" cy="457200"/>
+          </a:xfrm>
+          <a:prstGeom prst="rect">
+            <a:avLst/>
+          </a:prstGeom>
+          <a:noFill/>
+        </p:spPr>
+        <p:txBody>
+          <a:bodyPr wrap="square">
+            <a:spAutoFit/>
+          </a:bodyPr>
+          <a:lstStyle/>
+          <a:p>
+            <a:pPr algn="l">
+              <a:defRPr sz="800" b="0">
+                <a:solidFill>
+                  <a:srgbClr val="666680"/>
+                </a:solidFill>
+                <a:latin typeface="Meiryo UI"/>
+              </a:defRPr>
+            </a:pPr>
+            <a:r>
+              <a:t>別デバイスからスコア操作</a:t>
+            </a:r>
+            <a:br/>
+            <a:r>
+              <a:t>撮影者は撮影に集中</a:t>
+            </a:r>
+          </a:p>
+        </p:txBody>
+      </p:sp>
+      <p:sp>
+        <p:nvSpPr>
+          <p:cNvPr id="64" name="TextBox 63"/>
+          <p:cNvSpPr txBox="1"/>
+          <p:nvPr/>
+        </p:nvSpPr>
+        <p:spPr>
+          <a:xfrm>
+            <a:off x="9509760" y="1764792"/>
+            <a:ext cx="1188720" cy="182880"/>
+          </a:xfrm>
+          <a:prstGeom prst="rect">
+            <a:avLst/>
+          </a:prstGeom>
+          <a:noFill/>
+        </p:spPr>
+        <p:txBody>
+          <a:bodyPr wrap="square">
+            <a:spAutoFit/>
+          </a:bodyPr>
+          <a:lstStyle/>
+          <a:p>
+            <a:pPr algn="l">
+              <a:defRPr sz="700" b="0">
+                <a:solidFill>
+                  <a:srgbClr val="9CA3AF"/>
+                </a:solidFill>
+                <a:latin typeface="Meiryo UI"/>
+              </a:defRPr>
+            </a:pPr>
+            <a:r>
+              <a:t>技術:</a:t>
+            </a:r>
+          </a:p>
+        </p:txBody>
+      </p:sp>
+      <p:sp>
+        <p:nvSpPr>
+          <p:cNvPr id="65" name="TextBox 64"/>
+          <p:cNvSpPr txBox="1"/>
+          <p:nvPr/>
+        </p:nvSpPr>
+        <p:spPr>
+          <a:xfrm>
+            <a:off x="9509760" y="1920240"/>
+            <a:ext cx="1188720" cy="274320"/>
+          </a:xfrm>
+          <a:prstGeom prst="rect">
+            <a:avLst/>
+          </a:prstGeom>
+          <a:noFill/>
+        </p:spPr>
+        <p:txBody>
+          <a:bodyPr wrap="square">
+            <a:spAutoFit/>
+          </a:bodyPr>
+          <a:lstStyle/>
+          <a:p>
+            <a:pPr algn="l">
+              <a:defRPr sz="800" b="0">
+                <a:solidFill>
+                  <a:srgbClr val="1A1A2E"/>
+                </a:solidFill>
+                <a:latin typeface="Meiryo UI"/>
+              </a:defRPr>
+            </a:pPr>
+            <a:r>
+              <a:t>WebSocket / Supabase Realtime</a:t>
+            </a:r>
+          </a:p>
+        </p:txBody>
+      </p:sp>
+      <p:sp>
+        <p:nvSpPr>
+          <p:cNvPr id="66" name="Rounded Rectangle 65"/>
           <p:cNvSpPr/>
           <p:nvPr/>
         </p:nvSpPr>
         <p:spPr>
           <a:xfrm>
-            <a:off x="546100" y="203200"/>
-            <a:ext cx="10160000" cy="431800"/>
+            <a:off x="10789920" y="1783080"/>
+            <a:ext cx="960120" cy="502920"/>
+          </a:xfrm>
+          <a:prstGeom prst="roundRect">
+            <a:avLst/>
+          </a:prstGeom>
+          <a:solidFill>
+            <a:srgbClr val="FFFFFF"/>
+          </a:solidFill>
+          <a:ln w="19050">
+            <a:solidFill>
+              <a:srgbClr val="E0E0E8"/>
+            </a:solidFill>
+          </a:ln>
+        </p:spPr>
+        <p:style>
+          <a:lnRef idx="1">
+            <a:schemeClr val="accent1"/>
+          </a:lnRef>
+          <a:fillRef idx="3">
+            <a:schemeClr val="accent1"/>
+          </a:fillRef>
+          <a:effectRef idx="2">
+            <a:schemeClr val="accent1"/>
+          </a:effectRef>
+          <a:fontRef idx="minor">
+            <a:schemeClr val="lt1"/>
+          </a:fontRef>
+        </p:style>
+        <p:txBody>
+          <a:bodyPr rtlCol="0" anchor="ctr"/>
+          <a:lstStyle/>
+          <a:p>
+            <a:pPr algn="ctr"/>
+          </a:p>
+        </p:txBody>
+      </p:sp>
+      <p:sp>
+        <p:nvSpPr>
+          <p:cNvPr id="67" name="TextBox 66"/>
+          <p:cNvSpPr txBox="1"/>
+          <p:nvPr/>
+        </p:nvSpPr>
+        <p:spPr>
+          <a:xfrm>
+            <a:off x="10835640" y="1801368"/>
+            <a:ext cx="868680" cy="228600"/>
           </a:xfrm>
           <a:prstGeom prst="rect">
             <a:avLst/>
           </a:prstGeom>
           <a:noFill/>
+        </p:spPr>
+        <p:txBody>
+          <a:bodyPr wrap="square">
+            <a:spAutoFit/>
+          </a:bodyPr>
+          <a:lstStyle/>
+          <a:p>
+            <a:pPr algn="ctr">
+              <a:defRPr sz="1000" b="1">
+                <a:solidFill>
+                  <a:srgbClr val="E63946"/>
+                </a:solidFill>
+                <a:latin typeface="Meiryo UI"/>
+              </a:defRPr>
+            </a:pPr>
+            <a:r>
+              <a:t>約30〜50万円</a:t>
+            </a:r>
+          </a:p>
+        </p:txBody>
+      </p:sp>
+      <p:sp>
+        <p:nvSpPr>
+          <p:cNvPr id="68" name="TextBox 67"/>
+          <p:cNvSpPr txBox="1"/>
+          <p:nvPr/>
+        </p:nvSpPr>
+        <p:spPr>
+          <a:xfrm>
+            <a:off x="10835640" y="2057400"/>
+            <a:ext cx="868680" cy="182880"/>
+          </a:xfrm>
+          <a:prstGeom prst="rect">
+            <a:avLst/>
+          </a:prstGeom>
+          <a:noFill/>
+        </p:spPr>
+        <p:txBody>
+          <a:bodyPr wrap="square">
+            <a:spAutoFit/>
+          </a:bodyPr>
+          <a:lstStyle/>
+          <a:p>
+            <a:pPr algn="ctr">
+              <a:defRPr sz="800" b="0">
+                <a:solidFill>
+                  <a:srgbClr val="666680"/>
+                </a:solidFill>
+                <a:latin typeface="Meiryo UI"/>
+              </a:defRPr>
+            </a:pPr>
+            <a:r>
+              <a:t>2-3週間</a:t>
+            </a:r>
+          </a:p>
+        </p:txBody>
+      </p:sp>
+      <p:sp>
+        <p:nvSpPr>
+          <p:cNvPr id="69" name="Rounded Rectangle 68"/>
+          <p:cNvSpPr/>
+          <p:nvPr/>
+        </p:nvSpPr>
+        <p:spPr>
+          <a:xfrm>
+            <a:off x="7315200" y="2496312"/>
+            <a:ext cx="4572000" cy="685800"/>
+          </a:xfrm>
+          <a:prstGeom prst="roundRect">
+            <a:avLst/>
+          </a:prstGeom>
+          <a:solidFill>
+            <a:srgbClr val="EBF0FF"/>
+          </a:solidFill>
+          <a:ln w="19050">
+            <a:solidFill>
+              <a:srgbClr val="2563EB"/>
+            </a:solidFill>
+          </a:ln>
+        </p:spPr>
+        <p:style>
+          <a:lnRef idx="1">
+            <a:schemeClr val="accent1"/>
+          </a:lnRef>
+          <a:fillRef idx="3">
+            <a:schemeClr val="accent1"/>
+          </a:fillRef>
+          <a:effectRef idx="2">
+            <a:schemeClr val="accent1"/>
+          </a:effectRef>
+          <a:fontRef idx="minor">
+            <a:schemeClr val="lt1"/>
+          </a:fontRef>
+        </p:style>
+        <p:txBody>
+          <a:bodyPr rtlCol="0" anchor="ctr"/>
+          <a:lstStyle/>
+          <a:p>
+            <a:pPr algn="ctr"/>
+          </a:p>
+        </p:txBody>
+      </p:sp>
+      <p:sp>
+        <p:nvSpPr>
+          <p:cNvPr id="70" name="Rounded Rectangle 69"/>
+          <p:cNvSpPr/>
+          <p:nvPr/>
+        </p:nvSpPr>
+        <p:spPr>
+          <a:xfrm>
+            <a:off x="7406640" y="2587752"/>
+            <a:ext cx="502920" cy="274320"/>
+          </a:xfrm>
+          <a:prstGeom prst="roundRect">
+            <a:avLst/>
+          </a:prstGeom>
+          <a:solidFill>
+            <a:srgbClr val="2563EB"/>
+          </a:solidFill>
           <a:ln>
             <a:noFill/>
           </a:ln>
         </p:spPr>
-        <p:txBody>
-          <a:bodyPr wrap="square" lIns="0" tIns="0" rIns="0" bIns="0"/>
-          <a:lstStyle/>
-          <a:p>
-            <a:pPr algn="l"/>
-            <a:r>
-              <a:rPr lang="ja-JP" altLang="en-US" sz="2600" b="1" dirty="0">
+        <p:style>
+          <a:lnRef idx="1">
+            <a:schemeClr val="accent1"/>
+          </a:lnRef>
+          <a:fillRef idx="3">
+            <a:schemeClr val="accent1"/>
+          </a:fillRef>
+          <a:effectRef idx="2">
+            <a:schemeClr val="accent1"/>
+          </a:effectRef>
+          <a:fontRef idx="minor">
+            <a:schemeClr val="lt1"/>
+          </a:fontRef>
+        </p:style>
+        <p:txBody>
+          <a:bodyPr rtlCol="0" anchor="ctr"/>
+          <a:lstStyle/>
+          <a:p>
+            <a:pPr algn="ctr"/>
+          </a:p>
+        </p:txBody>
+      </p:sp>
+      <p:sp>
+        <p:nvSpPr>
+          <p:cNvPr id="71" name="TextBox 70"/>
+          <p:cNvSpPr txBox="1"/>
+          <p:nvPr/>
+        </p:nvSpPr>
+        <p:spPr>
+          <a:xfrm>
+            <a:off x="7406640" y="2587752"/>
+            <a:ext cx="502920" cy="274320"/>
+          </a:xfrm>
+          <a:prstGeom prst="rect">
+            <a:avLst/>
+          </a:prstGeom>
+          <a:noFill/>
+        </p:spPr>
+        <p:txBody>
+          <a:bodyPr wrap="square">
+            <a:spAutoFit/>
+          </a:bodyPr>
+          <a:lstStyle/>
+          <a:p>
+            <a:pPr algn="ctr">
+              <a:defRPr sz="1000" b="1">
+                <a:solidFill>
+                  <a:srgbClr val="FFFFFF"/>
+                </a:solidFill>
+                <a:latin typeface="Meiryo UI"/>
+              </a:defRPr>
+            </a:pPr>
+            <a:r>
+              <a:t>v1.5</a:t>
+            </a:r>
+          </a:p>
+        </p:txBody>
+      </p:sp>
+      <p:sp>
+        <p:nvSpPr>
+          <p:cNvPr id="72" name="TextBox 71"/>
+          <p:cNvSpPr txBox="1"/>
+          <p:nvPr/>
+        </p:nvSpPr>
+        <p:spPr>
+          <a:xfrm>
+            <a:off x="8001000" y="2569464"/>
+            <a:ext cx="1371600" cy="228600"/>
+          </a:xfrm>
+          <a:prstGeom prst="rect">
+            <a:avLst/>
+          </a:prstGeom>
+          <a:noFill/>
+        </p:spPr>
+        <p:txBody>
+          <a:bodyPr wrap="square">
+            <a:spAutoFit/>
+          </a:bodyPr>
+          <a:lstStyle/>
+          <a:p>
+            <a:pPr algn="l">
+              <a:defRPr sz="1200" b="1">
                 <a:solidFill>
                   <a:srgbClr val="0F172A"/>
                 </a:solidFill>
                 <a:latin typeface="Meiryo UI"/>
-                <a:ea typeface="Meiryo UI"/>
-              </a:rPr>
-              <a:t>LIVE SPOtCH — 将来の拡張ポイント</a:t>
-            </a:r>
-          </a:p>
-        </p:txBody>
-      </p:sp>
-      <p:sp>
-        <p:nvSpPr>
-          <p:cNvPr id="4" name="Subtitle"/>
+              </a:defRPr>
+            </a:pPr>
+            <a:r>
+              <a:t>マルチカメラ手動切替</a:t>
+            </a:r>
+          </a:p>
+        </p:txBody>
+      </p:sp>
+      <p:sp>
+        <p:nvSpPr>
+          <p:cNvPr id="73" name="TextBox 72"/>
+          <p:cNvSpPr txBox="1"/>
+          <p:nvPr/>
+        </p:nvSpPr>
+        <p:spPr>
+          <a:xfrm>
+            <a:off x="8001000" y="2816352"/>
+            <a:ext cx="1371600" cy="457200"/>
+          </a:xfrm>
+          <a:prstGeom prst="rect">
+            <a:avLst/>
+          </a:prstGeom>
+          <a:noFill/>
+        </p:spPr>
+        <p:txBody>
+          <a:bodyPr wrap="square">
+            <a:spAutoFit/>
+          </a:bodyPr>
+          <a:lstStyle/>
+          <a:p>
+            <a:pPr algn="l">
+              <a:defRPr sz="800" b="0">
+                <a:solidFill>
+                  <a:srgbClr val="666680"/>
+                </a:solidFill>
+                <a:latin typeface="Meiryo UI"/>
+              </a:defRPr>
+            </a:pPr>
+            <a:r>
+              <a:t>複数スマホの映像を</a:t>
+            </a:r>
+            <a:br/>
+            <a:r>
+              <a:t>手動で切り替え表示</a:t>
+            </a:r>
+          </a:p>
+        </p:txBody>
+      </p:sp>
+      <p:sp>
+        <p:nvSpPr>
+          <p:cNvPr id="74" name="TextBox 73"/>
+          <p:cNvSpPr txBox="1"/>
+          <p:nvPr/>
+        </p:nvSpPr>
+        <p:spPr>
+          <a:xfrm>
+            <a:off x="9509760" y="2569464"/>
+            <a:ext cx="1188720" cy="182880"/>
+          </a:xfrm>
+          <a:prstGeom prst="rect">
+            <a:avLst/>
+          </a:prstGeom>
+          <a:noFill/>
+        </p:spPr>
+        <p:txBody>
+          <a:bodyPr wrap="square">
+            <a:spAutoFit/>
+          </a:bodyPr>
+          <a:lstStyle/>
+          <a:p>
+            <a:pPr algn="l">
+              <a:defRPr sz="700" b="0">
+                <a:solidFill>
+                  <a:srgbClr val="9CA3AF"/>
+                </a:solidFill>
+                <a:latin typeface="Meiryo UI"/>
+              </a:defRPr>
+            </a:pPr>
+            <a:r>
+              <a:t>技術:</a:t>
+            </a:r>
+          </a:p>
+        </p:txBody>
+      </p:sp>
+      <p:sp>
+        <p:nvSpPr>
+          <p:cNvPr id="75" name="TextBox 74"/>
+          <p:cNvSpPr txBox="1"/>
+          <p:nvPr/>
+        </p:nvSpPr>
+        <p:spPr>
+          <a:xfrm>
+            <a:off x="9509760" y="2724912"/>
+            <a:ext cx="1188720" cy="274320"/>
+          </a:xfrm>
+          <a:prstGeom prst="rect">
+            <a:avLst/>
+          </a:prstGeom>
+          <a:noFill/>
+        </p:spPr>
+        <p:txBody>
+          <a:bodyPr wrap="square">
+            <a:spAutoFit/>
+          </a:bodyPr>
+          <a:lstStyle/>
+          <a:p>
+            <a:pPr algn="l">
+              <a:defRPr sz="800" b="0">
+                <a:solidFill>
+                  <a:srgbClr val="1A1A2E"/>
+                </a:solidFill>
+                <a:latin typeface="Meiryo UI"/>
+              </a:defRPr>
+            </a:pPr>
+            <a:r>
+              <a:t>LiveKit マルチトラック</a:t>
+            </a:r>
+          </a:p>
+        </p:txBody>
+      </p:sp>
+      <p:sp>
+        <p:nvSpPr>
+          <p:cNvPr id="76" name="Rounded Rectangle 75"/>
           <p:cNvSpPr/>
           <p:nvPr/>
         </p:nvSpPr>
         <p:spPr>
           <a:xfrm>
-            <a:off x="546100" y="635000"/>
-            <a:ext cx="10160000" cy="279400"/>
+            <a:off x="10789920" y="2587752"/>
+            <a:ext cx="960120" cy="502920"/>
+          </a:xfrm>
+          <a:prstGeom prst="roundRect">
+            <a:avLst/>
+          </a:prstGeom>
+          <a:solidFill>
+            <a:srgbClr val="FFFFFF"/>
+          </a:solidFill>
+          <a:ln w="19050">
+            <a:solidFill>
+              <a:srgbClr val="E0E0E8"/>
+            </a:solidFill>
+          </a:ln>
+        </p:spPr>
+        <p:style>
+          <a:lnRef idx="1">
+            <a:schemeClr val="accent1"/>
+          </a:lnRef>
+          <a:fillRef idx="3">
+            <a:schemeClr val="accent1"/>
+          </a:fillRef>
+          <a:effectRef idx="2">
+            <a:schemeClr val="accent1"/>
+          </a:effectRef>
+          <a:fontRef idx="minor">
+            <a:schemeClr val="lt1"/>
+          </a:fontRef>
+        </p:style>
+        <p:txBody>
+          <a:bodyPr rtlCol="0" anchor="ctr"/>
+          <a:lstStyle/>
+          <a:p>
+            <a:pPr algn="ctr"/>
+          </a:p>
+        </p:txBody>
+      </p:sp>
+      <p:sp>
+        <p:nvSpPr>
+          <p:cNvPr id="77" name="TextBox 76"/>
+          <p:cNvSpPr txBox="1"/>
+          <p:nvPr/>
+        </p:nvSpPr>
+        <p:spPr>
+          <a:xfrm>
+            <a:off x="10835640" y="2606040"/>
+            <a:ext cx="868680" cy="228600"/>
           </a:xfrm>
           <a:prstGeom prst="rect">
             <a:avLst/>
           </a:prstGeom>
           <a:noFill/>
+        </p:spPr>
+        <p:txBody>
+          <a:bodyPr wrap="square">
+            <a:spAutoFit/>
+          </a:bodyPr>
+          <a:lstStyle/>
+          <a:p>
+            <a:pPr algn="ctr">
+              <a:defRPr sz="1000" b="1">
+                <a:solidFill>
+                  <a:srgbClr val="E63946"/>
+                </a:solidFill>
+                <a:latin typeface="Meiryo UI"/>
+              </a:defRPr>
+            </a:pPr>
+            <a:r>
+              <a:t>約80〜120万円</a:t>
+            </a:r>
+          </a:p>
+        </p:txBody>
+      </p:sp>
+      <p:sp>
+        <p:nvSpPr>
+          <p:cNvPr id="78" name="TextBox 77"/>
+          <p:cNvSpPr txBox="1"/>
+          <p:nvPr/>
+        </p:nvSpPr>
+        <p:spPr>
+          <a:xfrm>
+            <a:off x="10835640" y="2862072"/>
+            <a:ext cx="868680" cy="182880"/>
+          </a:xfrm>
+          <a:prstGeom prst="rect">
+            <a:avLst/>
+          </a:prstGeom>
+          <a:noFill/>
+        </p:spPr>
+        <p:txBody>
+          <a:bodyPr wrap="square">
+            <a:spAutoFit/>
+          </a:bodyPr>
+          <a:lstStyle/>
+          <a:p>
+            <a:pPr algn="ctr">
+              <a:defRPr sz="800" b="0">
+                <a:solidFill>
+                  <a:srgbClr val="666680"/>
+                </a:solidFill>
+                <a:latin typeface="Meiryo UI"/>
+              </a:defRPr>
+            </a:pPr>
+            <a:r>
+              <a:t>1-2ヶ月</a:t>
+            </a:r>
+          </a:p>
+        </p:txBody>
+      </p:sp>
+      <p:sp>
+        <p:nvSpPr>
+          <p:cNvPr id="79" name="Rounded Rectangle 78"/>
+          <p:cNvSpPr/>
+          <p:nvPr/>
+        </p:nvSpPr>
+        <p:spPr>
+          <a:xfrm>
+            <a:off x="7315200" y="3300984"/>
+            <a:ext cx="4572000" cy="685800"/>
+          </a:xfrm>
+          <a:prstGeom prst="roundRect">
+            <a:avLst/>
+          </a:prstGeom>
+          <a:solidFill>
+            <a:srgbClr val="FFF3E0"/>
+          </a:solidFill>
+          <a:ln w="19050">
+            <a:solidFill>
+              <a:srgbClr val="EA880B"/>
+            </a:solidFill>
+          </a:ln>
+        </p:spPr>
+        <p:style>
+          <a:lnRef idx="1">
+            <a:schemeClr val="accent1"/>
+          </a:lnRef>
+          <a:fillRef idx="3">
+            <a:schemeClr val="accent1"/>
+          </a:fillRef>
+          <a:effectRef idx="2">
+            <a:schemeClr val="accent1"/>
+          </a:effectRef>
+          <a:fontRef idx="minor">
+            <a:schemeClr val="lt1"/>
+          </a:fontRef>
+        </p:style>
+        <p:txBody>
+          <a:bodyPr rtlCol="0" anchor="ctr"/>
+          <a:lstStyle/>
+          <a:p>
+            <a:pPr algn="ctr"/>
+          </a:p>
+        </p:txBody>
+      </p:sp>
+      <p:sp>
+        <p:nvSpPr>
+          <p:cNvPr id="80" name="Rounded Rectangle 79"/>
+          <p:cNvSpPr/>
+          <p:nvPr/>
+        </p:nvSpPr>
+        <p:spPr>
+          <a:xfrm>
+            <a:off x="7406640" y="3392424"/>
+            <a:ext cx="502920" cy="274320"/>
+          </a:xfrm>
+          <a:prstGeom prst="roundRect">
+            <a:avLst/>
+          </a:prstGeom>
+          <a:solidFill>
+            <a:srgbClr val="EA880B"/>
+          </a:solidFill>
           <a:ln>
             <a:noFill/>
           </a:ln>
         </p:spPr>
-        <p:txBody>
-          <a:bodyPr wrap="square" lIns="0" tIns="0" rIns="0" bIns="0"/>
-          <a:lstStyle/>
-          <a:p>
-            <a:pPr algn="l"/>
-            <a:r>
-              <a:rPr lang="ja-JP" altLang="en-US" sz="1400" dirty="0">
+        <p:style>
+          <a:lnRef idx="1">
+            <a:schemeClr val="accent1"/>
+          </a:lnRef>
+          <a:fillRef idx="3">
+            <a:schemeClr val="accent1"/>
+          </a:fillRef>
+          <a:effectRef idx="2">
+            <a:schemeClr val="accent1"/>
+          </a:effectRef>
+          <a:fontRef idx="minor">
+            <a:schemeClr val="lt1"/>
+          </a:fontRef>
+        </p:style>
+        <p:txBody>
+          <a:bodyPr rtlCol="0" anchor="ctr"/>
+          <a:lstStyle/>
+          <a:p>
+            <a:pPr algn="ctr"/>
+          </a:p>
+        </p:txBody>
+      </p:sp>
+      <p:sp>
+        <p:nvSpPr>
+          <p:cNvPr id="81" name="TextBox 80"/>
+          <p:cNvSpPr txBox="1"/>
+          <p:nvPr/>
+        </p:nvSpPr>
+        <p:spPr>
+          <a:xfrm>
+            <a:off x="7406640" y="3392424"/>
+            <a:ext cx="502920" cy="274320"/>
+          </a:xfrm>
+          <a:prstGeom prst="rect">
+            <a:avLst/>
+          </a:prstGeom>
+          <a:noFill/>
+        </p:spPr>
+        <p:txBody>
+          <a:bodyPr wrap="square">
+            <a:spAutoFit/>
+          </a:bodyPr>
+          <a:lstStyle/>
+          <a:p>
+            <a:pPr algn="ctr">
+              <a:defRPr sz="1000" b="1">
+                <a:solidFill>
+                  <a:srgbClr val="FFFFFF"/>
+                </a:solidFill>
+                <a:latin typeface="Meiryo UI"/>
+              </a:defRPr>
+            </a:pPr>
+            <a:r>
+              <a:t>v2.0</a:t>
+            </a:r>
+          </a:p>
+        </p:txBody>
+      </p:sp>
+      <p:sp>
+        <p:nvSpPr>
+          <p:cNvPr id="82" name="TextBox 81"/>
+          <p:cNvSpPr txBox="1"/>
+          <p:nvPr/>
+        </p:nvSpPr>
+        <p:spPr>
+          <a:xfrm>
+            <a:off x="8001000" y="3374136"/>
+            <a:ext cx="1371600" cy="228600"/>
+          </a:xfrm>
+          <a:prstGeom prst="rect">
+            <a:avLst/>
+          </a:prstGeom>
+          <a:noFill/>
+        </p:spPr>
+        <p:txBody>
+          <a:bodyPr wrap="square">
+            <a:spAutoFit/>
+          </a:bodyPr>
+          <a:lstStyle/>
+          <a:p>
+            <a:pPr algn="l">
+              <a:defRPr sz="1200" b="1">
+                <a:solidFill>
+                  <a:srgbClr val="0F172A"/>
+                </a:solidFill>
+                <a:latin typeface="Meiryo UI"/>
+              </a:defRPr>
+            </a:pPr>
+            <a:r>
+              <a:t>AI自動アングル切替</a:t>
+            </a:r>
+          </a:p>
+        </p:txBody>
+      </p:sp>
+      <p:sp>
+        <p:nvSpPr>
+          <p:cNvPr id="83" name="TextBox 82"/>
+          <p:cNvSpPr txBox="1"/>
+          <p:nvPr/>
+        </p:nvSpPr>
+        <p:spPr>
+          <a:xfrm>
+            <a:off x="8001000" y="3621024"/>
+            <a:ext cx="1371600" cy="457200"/>
+          </a:xfrm>
+          <a:prstGeom prst="rect">
+            <a:avLst/>
+          </a:prstGeom>
+          <a:noFill/>
+        </p:spPr>
+        <p:txBody>
+          <a:bodyPr wrap="square">
+            <a:spAutoFit/>
+          </a:bodyPr>
+          <a:lstStyle/>
+          <a:p>
+            <a:pPr algn="l">
+              <a:defRPr sz="800" b="0">
                 <a:solidFill>
                   <a:srgbClr val="666680"/>
                 </a:solidFill>
                 <a:latin typeface="Meiryo UI"/>
-                <a:ea typeface="Meiryo UI"/>
-              </a:rPr>
-              <a:t>機能拡張ロードマップと概算費用</a:t>
-            </a:r>
-          </a:p>
-        </p:txBody>
-      </p:sp>
-      <p:sp>
-        <p:nvSpPr>
-          <p:cNvPr id="5" name="AccentLine"/>
+              </a:defRPr>
+            </a:pPr>
+            <a:r>
+              <a:t>AIがベストアングルを</a:t>
+            </a:r>
+            <a:br/>
+            <a:r>
+              <a:t>判断して自動切替</a:t>
+            </a:r>
+          </a:p>
+        </p:txBody>
+      </p:sp>
+      <p:sp>
+        <p:nvSpPr>
+          <p:cNvPr id="84" name="TextBox 83"/>
+          <p:cNvSpPr txBox="1"/>
+          <p:nvPr/>
+        </p:nvSpPr>
+        <p:spPr>
+          <a:xfrm>
+            <a:off x="9509760" y="3374136"/>
+            <a:ext cx="1188720" cy="182880"/>
+          </a:xfrm>
+          <a:prstGeom prst="rect">
+            <a:avLst/>
+          </a:prstGeom>
+          <a:noFill/>
+        </p:spPr>
+        <p:txBody>
+          <a:bodyPr wrap="square">
+            <a:spAutoFit/>
+          </a:bodyPr>
+          <a:lstStyle/>
+          <a:p>
+            <a:pPr algn="l">
+              <a:defRPr sz="700" b="0">
+                <a:solidFill>
+                  <a:srgbClr val="9CA3AF"/>
+                </a:solidFill>
+                <a:latin typeface="Meiryo UI"/>
+              </a:defRPr>
+            </a:pPr>
+            <a:r>
+              <a:t>技術:</a:t>
+            </a:r>
+          </a:p>
+        </p:txBody>
+      </p:sp>
+      <p:sp>
+        <p:nvSpPr>
+          <p:cNvPr id="85" name="TextBox 84"/>
+          <p:cNvSpPr txBox="1"/>
+          <p:nvPr/>
+        </p:nvSpPr>
+        <p:spPr>
+          <a:xfrm>
+            <a:off x="9509760" y="3529584"/>
+            <a:ext cx="1188720" cy="274320"/>
+          </a:xfrm>
+          <a:prstGeom prst="rect">
+            <a:avLst/>
+          </a:prstGeom>
+          <a:noFill/>
+        </p:spPr>
+        <p:txBody>
+          <a:bodyPr wrap="square">
+            <a:spAutoFit/>
+          </a:bodyPr>
+          <a:lstStyle/>
+          <a:p>
+            <a:pPr algn="l">
+              <a:defRPr sz="800" b="0">
+                <a:solidFill>
+                  <a:srgbClr val="1A1A2E"/>
+                </a:solidFill>
+                <a:latin typeface="Meiryo UI"/>
+              </a:defRPr>
+            </a:pPr>
+            <a:r>
+              <a:t>AI推論サーバー（GPU）</a:t>
+            </a:r>
+          </a:p>
+        </p:txBody>
+      </p:sp>
+      <p:sp>
+        <p:nvSpPr>
+          <p:cNvPr id="86" name="Rounded Rectangle 85"/>
           <p:cNvSpPr/>
           <p:nvPr/>
         </p:nvSpPr>
         <p:spPr>
           <a:xfrm>
-            <a:off x="546100" y="939800"/>
-            <a:ext cx="914400" cy="38100"/>
-          </a:xfrm>
-          <a:prstGeom prst="rect">
+            <a:off x="10789920" y="3392424"/>
+            <a:ext cx="960120" cy="502920"/>
+          </a:xfrm>
+          <a:prstGeom prst="roundRect">
+            <a:avLst/>
+          </a:prstGeom>
+          <a:solidFill>
+            <a:srgbClr val="FFFFFF"/>
+          </a:solidFill>
+          <a:ln w="19050">
+            <a:solidFill>
+              <a:srgbClr val="E0E0E8"/>
+            </a:solidFill>
+          </a:ln>
+        </p:spPr>
+        <p:style>
+          <a:lnRef idx="1">
+            <a:schemeClr val="accent1"/>
+          </a:lnRef>
+          <a:fillRef idx="3">
+            <a:schemeClr val="accent1"/>
+          </a:fillRef>
+          <a:effectRef idx="2">
+            <a:schemeClr val="accent1"/>
+          </a:effectRef>
+          <a:fontRef idx="minor">
+            <a:schemeClr val="lt1"/>
+          </a:fontRef>
+        </p:style>
+        <p:txBody>
+          <a:bodyPr rtlCol="0" anchor="ctr"/>
+          <a:lstStyle/>
+          <a:p>
+            <a:pPr algn="ctr"/>
+          </a:p>
+        </p:txBody>
+      </p:sp>
+      <p:sp>
+        <p:nvSpPr>
+          <p:cNvPr id="87" name="TextBox 86"/>
+          <p:cNvSpPr txBox="1"/>
+          <p:nvPr/>
+        </p:nvSpPr>
+        <p:spPr>
+          <a:xfrm>
+            <a:off x="10835640" y="3410712"/>
+            <a:ext cx="868680" cy="228600"/>
+          </a:xfrm>
+          <a:prstGeom prst="rect">
+            <a:avLst/>
+          </a:prstGeom>
+          <a:noFill/>
+        </p:spPr>
+        <p:txBody>
+          <a:bodyPr wrap="square">
+            <a:spAutoFit/>
+          </a:bodyPr>
+          <a:lstStyle/>
+          <a:p>
+            <a:pPr algn="ctr">
+              <a:defRPr sz="1000" b="1">
+                <a:solidFill>
+                  <a:srgbClr val="E63946"/>
+                </a:solidFill>
+                <a:latin typeface="Meiryo UI"/>
+              </a:defRPr>
+            </a:pPr>
+            <a:r>
+              <a:t>約200〜350万円</a:t>
+            </a:r>
+          </a:p>
+        </p:txBody>
+      </p:sp>
+      <p:sp>
+        <p:nvSpPr>
+          <p:cNvPr id="88" name="TextBox 87"/>
+          <p:cNvSpPr txBox="1"/>
+          <p:nvPr/>
+        </p:nvSpPr>
+        <p:spPr>
+          <a:xfrm>
+            <a:off x="10835640" y="3666744"/>
+            <a:ext cx="868680" cy="182880"/>
+          </a:xfrm>
+          <a:prstGeom prst="rect">
+            <a:avLst/>
+          </a:prstGeom>
+          <a:noFill/>
+        </p:spPr>
+        <p:txBody>
+          <a:bodyPr wrap="square">
+            <a:spAutoFit/>
+          </a:bodyPr>
+          <a:lstStyle/>
+          <a:p>
+            <a:pPr algn="ctr">
+              <a:defRPr sz="800" b="0">
+                <a:solidFill>
+                  <a:srgbClr val="666680"/>
+                </a:solidFill>
+                <a:latin typeface="Meiryo UI"/>
+              </a:defRPr>
+            </a:pPr>
+            <a:r>
+              <a:t>3-6ヶ月</a:t>
+            </a:r>
+          </a:p>
+        </p:txBody>
+      </p:sp>
+      <p:sp>
+        <p:nvSpPr>
+          <p:cNvPr id="89" name="Rounded Rectangle 88"/>
+          <p:cNvSpPr/>
+          <p:nvPr/>
+        </p:nvSpPr>
+        <p:spPr>
+          <a:xfrm>
+            <a:off x="7315200" y="4105656"/>
+            <a:ext cx="4572000" cy="685800"/>
+          </a:xfrm>
+          <a:prstGeom prst="roundRect">
+            <a:avLst/>
+          </a:prstGeom>
+          <a:solidFill>
+            <a:srgbClr val="E8F5EB"/>
+          </a:solidFill>
+          <a:ln w="19050">
+            <a:solidFill>
+              <a:srgbClr val="16A34A"/>
+            </a:solidFill>
+          </a:ln>
+        </p:spPr>
+        <p:style>
+          <a:lnRef idx="1">
+            <a:schemeClr val="accent1"/>
+          </a:lnRef>
+          <a:fillRef idx="3">
+            <a:schemeClr val="accent1"/>
+          </a:fillRef>
+          <a:effectRef idx="2">
+            <a:schemeClr val="accent1"/>
+          </a:effectRef>
+          <a:fontRef idx="minor">
+            <a:schemeClr val="lt1"/>
+          </a:fontRef>
+        </p:style>
+        <p:txBody>
+          <a:bodyPr rtlCol="0" anchor="ctr"/>
+          <a:lstStyle/>
+          <a:p>
+            <a:pPr algn="ctr"/>
+          </a:p>
+        </p:txBody>
+      </p:sp>
+      <p:sp>
+        <p:nvSpPr>
+          <p:cNvPr id="90" name="Rounded Rectangle 89"/>
+          <p:cNvSpPr/>
+          <p:nvPr/>
+        </p:nvSpPr>
+        <p:spPr>
+          <a:xfrm>
+            <a:off x="7406640" y="4197096"/>
+            <a:ext cx="502920" cy="274320"/>
+          </a:xfrm>
+          <a:prstGeom prst="roundRect">
+            <a:avLst/>
+          </a:prstGeom>
+          <a:solidFill>
+            <a:srgbClr val="16A34A"/>
+          </a:solidFill>
+          <a:ln>
+            <a:noFill/>
+          </a:ln>
+        </p:spPr>
+        <p:style>
+          <a:lnRef idx="1">
+            <a:schemeClr val="accent1"/>
+          </a:lnRef>
+          <a:fillRef idx="3">
+            <a:schemeClr val="accent1"/>
+          </a:fillRef>
+          <a:effectRef idx="2">
+            <a:schemeClr val="accent1"/>
+          </a:effectRef>
+          <a:fontRef idx="minor">
+            <a:schemeClr val="lt1"/>
+          </a:fontRef>
+        </p:style>
+        <p:txBody>
+          <a:bodyPr rtlCol="0" anchor="ctr"/>
+          <a:lstStyle/>
+          <a:p>
+            <a:pPr algn="ctr"/>
+          </a:p>
+        </p:txBody>
+      </p:sp>
+      <p:sp>
+        <p:nvSpPr>
+          <p:cNvPr id="91" name="TextBox 90"/>
+          <p:cNvSpPr txBox="1"/>
+          <p:nvPr/>
+        </p:nvSpPr>
+        <p:spPr>
+          <a:xfrm>
+            <a:off x="7406640" y="4197096"/>
+            <a:ext cx="502920" cy="274320"/>
+          </a:xfrm>
+          <a:prstGeom prst="rect">
+            <a:avLst/>
+          </a:prstGeom>
+          <a:noFill/>
+        </p:spPr>
+        <p:txBody>
+          <a:bodyPr wrap="square">
+            <a:spAutoFit/>
+          </a:bodyPr>
+          <a:lstStyle/>
+          <a:p>
+            <a:pPr algn="ctr">
+              <a:defRPr sz="1000" b="1">
+                <a:solidFill>
+                  <a:srgbClr val="FFFFFF"/>
+                </a:solidFill>
+                <a:latin typeface="Meiryo UI"/>
+              </a:defRPr>
+            </a:pPr>
+            <a:r>
+              <a:t>v2.5</a:t>
+            </a:r>
+          </a:p>
+        </p:txBody>
+      </p:sp>
+      <p:sp>
+        <p:nvSpPr>
+          <p:cNvPr id="92" name="TextBox 91"/>
+          <p:cNvSpPr txBox="1"/>
+          <p:nvPr/>
+        </p:nvSpPr>
+        <p:spPr>
+          <a:xfrm>
+            <a:off x="8001000" y="4178808"/>
+            <a:ext cx="1371600" cy="228600"/>
+          </a:xfrm>
+          <a:prstGeom prst="rect">
+            <a:avLst/>
+          </a:prstGeom>
+          <a:noFill/>
+        </p:spPr>
+        <p:txBody>
+          <a:bodyPr wrap="square">
+            <a:spAutoFit/>
+          </a:bodyPr>
+          <a:lstStyle/>
+          <a:p>
+            <a:pPr algn="l">
+              <a:defRPr sz="1200" b="1">
+                <a:solidFill>
+                  <a:srgbClr val="0F172A"/>
+                </a:solidFill>
+                <a:latin typeface="Meiryo UI"/>
+              </a:defRPr>
+            </a:pPr>
+            <a:r>
+              <a:t>AIハイライト自動生成</a:t>
+            </a:r>
+          </a:p>
+        </p:txBody>
+      </p:sp>
+      <p:sp>
+        <p:nvSpPr>
+          <p:cNvPr id="93" name="TextBox 92"/>
+          <p:cNvSpPr txBox="1"/>
+          <p:nvPr/>
+        </p:nvSpPr>
+        <p:spPr>
+          <a:xfrm>
+            <a:off x="8001000" y="4425696"/>
+            <a:ext cx="1371600" cy="457200"/>
+          </a:xfrm>
+          <a:prstGeom prst="rect">
+            <a:avLst/>
+          </a:prstGeom>
+          <a:noFill/>
+        </p:spPr>
+        <p:txBody>
+          <a:bodyPr wrap="square">
+            <a:spAutoFit/>
+          </a:bodyPr>
+          <a:lstStyle/>
+          <a:p>
+            <a:pPr algn="l">
+              <a:defRPr sz="800" b="0">
+                <a:solidFill>
+                  <a:srgbClr val="666680"/>
+                </a:solidFill>
+                <a:latin typeface="Meiryo UI"/>
+              </a:defRPr>
+            </a:pPr>
+            <a:r>
+              <a:t>試合のハイライトを</a:t>
+            </a:r>
+            <a:br/>
+            <a:r>
+              <a:t>AIが自動編集・生成</a:t>
+            </a:r>
+          </a:p>
+        </p:txBody>
+      </p:sp>
+      <p:sp>
+        <p:nvSpPr>
+          <p:cNvPr id="94" name="TextBox 93"/>
+          <p:cNvSpPr txBox="1"/>
+          <p:nvPr/>
+        </p:nvSpPr>
+        <p:spPr>
+          <a:xfrm>
+            <a:off x="9509760" y="4178808"/>
+            <a:ext cx="1188720" cy="182880"/>
+          </a:xfrm>
+          <a:prstGeom prst="rect">
+            <a:avLst/>
+          </a:prstGeom>
+          <a:noFill/>
+        </p:spPr>
+        <p:txBody>
+          <a:bodyPr wrap="square">
+            <a:spAutoFit/>
+          </a:bodyPr>
+          <a:lstStyle/>
+          <a:p>
+            <a:pPr algn="l">
+              <a:defRPr sz="700" b="0">
+                <a:solidFill>
+                  <a:srgbClr val="9CA3AF"/>
+                </a:solidFill>
+                <a:latin typeface="Meiryo UI"/>
+              </a:defRPr>
+            </a:pPr>
+            <a:r>
+              <a:t>技術:</a:t>
+            </a:r>
+          </a:p>
+        </p:txBody>
+      </p:sp>
+      <p:sp>
+        <p:nvSpPr>
+          <p:cNvPr id="95" name="TextBox 94"/>
+          <p:cNvSpPr txBox="1"/>
+          <p:nvPr/>
+        </p:nvSpPr>
+        <p:spPr>
+          <a:xfrm>
+            <a:off x="9509760" y="4334256"/>
+            <a:ext cx="1188720" cy="274320"/>
+          </a:xfrm>
+          <a:prstGeom prst="rect">
+            <a:avLst/>
+          </a:prstGeom>
+          <a:noFill/>
+        </p:spPr>
+        <p:txBody>
+          <a:bodyPr wrap="square">
+            <a:spAutoFit/>
+          </a:bodyPr>
+          <a:lstStyle/>
+          <a:p>
+            <a:pPr algn="l">
+              <a:defRPr sz="800" b="0">
+                <a:solidFill>
+                  <a:srgbClr val="1A1A2E"/>
+                </a:solidFill>
+                <a:latin typeface="Meiryo UI"/>
+              </a:defRPr>
+            </a:pPr>
+            <a:r>
+              <a:t>動画解析AI + FFmpeg</a:t>
+            </a:r>
+          </a:p>
+        </p:txBody>
+      </p:sp>
+      <p:sp>
+        <p:nvSpPr>
+          <p:cNvPr id="96" name="Rounded Rectangle 95"/>
+          <p:cNvSpPr/>
+          <p:nvPr/>
+        </p:nvSpPr>
+        <p:spPr>
+          <a:xfrm>
+            <a:off x="10789920" y="4197096"/>
+            <a:ext cx="960120" cy="502920"/>
+          </a:xfrm>
+          <a:prstGeom prst="roundRect">
+            <a:avLst/>
+          </a:prstGeom>
+          <a:solidFill>
+            <a:srgbClr val="FFFFFF"/>
+          </a:solidFill>
+          <a:ln w="19050">
+            <a:solidFill>
+              <a:srgbClr val="E0E0E8"/>
+            </a:solidFill>
+          </a:ln>
+        </p:spPr>
+        <p:style>
+          <a:lnRef idx="1">
+            <a:schemeClr val="accent1"/>
+          </a:lnRef>
+          <a:fillRef idx="3">
+            <a:schemeClr val="accent1"/>
+          </a:fillRef>
+          <a:effectRef idx="2">
+            <a:schemeClr val="accent1"/>
+          </a:effectRef>
+          <a:fontRef idx="minor">
+            <a:schemeClr val="lt1"/>
+          </a:fontRef>
+        </p:style>
+        <p:txBody>
+          <a:bodyPr rtlCol="0" anchor="ctr"/>
+          <a:lstStyle/>
+          <a:p>
+            <a:pPr algn="ctr"/>
+          </a:p>
+        </p:txBody>
+      </p:sp>
+      <p:sp>
+        <p:nvSpPr>
+          <p:cNvPr id="97" name="TextBox 96"/>
+          <p:cNvSpPr txBox="1"/>
+          <p:nvPr/>
+        </p:nvSpPr>
+        <p:spPr>
+          <a:xfrm>
+            <a:off x="10835640" y="4215384"/>
+            <a:ext cx="868680" cy="228600"/>
+          </a:xfrm>
+          <a:prstGeom prst="rect">
+            <a:avLst/>
+          </a:prstGeom>
+          <a:noFill/>
+        </p:spPr>
+        <p:txBody>
+          <a:bodyPr wrap="square">
+            <a:spAutoFit/>
+          </a:bodyPr>
+          <a:lstStyle/>
+          <a:p>
+            <a:pPr algn="ctr">
+              <a:defRPr sz="1000" b="1">
+                <a:solidFill>
+                  <a:srgbClr val="E63946"/>
+                </a:solidFill>
+                <a:latin typeface="Meiryo UI"/>
+              </a:defRPr>
+            </a:pPr>
+            <a:r>
+              <a:t>約150〜250万円</a:t>
+            </a:r>
+          </a:p>
+        </p:txBody>
+      </p:sp>
+      <p:sp>
+        <p:nvSpPr>
+          <p:cNvPr id="98" name="TextBox 97"/>
+          <p:cNvSpPr txBox="1"/>
+          <p:nvPr/>
+        </p:nvSpPr>
+        <p:spPr>
+          <a:xfrm>
+            <a:off x="10835640" y="4471416"/>
+            <a:ext cx="868680" cy="182880"/>
+          </a:xfrm>
+          <a:prstGeom prst="rect">
+            <a:avLst/>
+          </a:prstGeom>
+          <a:noFill/>
+        </p:spPr>
+        <p:txBody>
+          <a:bodyPr wrap="square">
+            <a:spAutoFit/>
+          </a:bodyPr>
+          <a:lstStyle/>
+          <a:p>
+            <a:pPr algn="ctr">
+              <a:defRPr sz="800" b="0">
+                <a:solidFill>
+                  <a:srgbClr val="666680"/>
+                </a:solidFill>
+                <a:latin typeface="Meiryo UI"/>
+              </a:defRPr>
+            </a:pPr>
+            <a:r>
+              <a:t>2-4ヶ月</a:t>
+            </a:r>
+          </a:p>
+        </p:txBody>
+      </p:sp>
+      <p:sp>
+        <p:nvSpPr>
+          <p:cNvPr id="99" name="Rounded Rectangle 98"/>
+          <p:cNvSpPr/>
+          <p:nvPr/>
+        </p:nvSpPr>
+        <p:spPr>
+          <a:xfrm>
+            <a:off x="7315200" y="4910328"/>
+            <a:ext cx="4572000" cy="685800"/>
+          </a:xfrm>
+          <a:prstGeom prst="roundRect">
+            <a:avLst/>
+          </a:prstGeom>
+          <a:solidFill>
+            <a:srgbClr val="FDEBED"/>
+          </a:solidFill>
+          <a:ln w="19050">
+            <a:solidFill>
+              <a:srgbClr val="E63946"/>
+            </a:solidFill>
+          </a:ln>
+        </p:spPr>
+        <p:style>
+          <a:lnRef idx="1">
+            <a:schemeClr val="accent1"/>
+          </a:lnRef>
+          <a:fillRef idx="3">
+            <a:schemeClr val="accent1"/>
+          </a:fillRef>
+          <a:effectRef idx="2">
+            <a:schemeClr val="accent1"/>
+          </a:effectRef>
+          <a:fontRef idx="minor">
+            <a:schemeClr val="lt1"/>
+          </a:fontRef>
+        </p:style>
+        <p:txBody>
+          <a:bodyPr rtlCol="0" anchor="ctr"/>
+          <a:lstStyle/>
+          <a:p>
+            <a:pPr algn="ctr"/>
+          </a:p>
+        </p:txBody>
+      </p:sp>
+      <p:sp>
+        <p:nvSpPr>
+          <p:cNvPr id="100" name="Rounded Rectangle 99"/>
+          <p:cNvSpPr/>
+          <p:nvPr/>
+        </p:nvSpPr>
+        <p:spPr>
+          <a:xfrm>
+            <a:off x="7406640" y="5001768"/>
+            <a:ext cx="502920" cy="274320"/>
+          </a:xfrm>
+          <a:prstGeom prst="roundRect">
             <a:avLst/>
           </a:prstGeom>
           <a:solidFill>
@@ -5433,803 +7036,387 @@
             <a:noFill/>
           </a:ln>
         </p:spPr>
-        <p:txBody>
-          <a:bodyPr/>
-          <a:lstStyle/>
-          <a:p>
-            <a:endParaRPr lang="ja-JP" altLang="en-US"/>
-          </a:p>
-        </p:txBody>
-      </p:sp>
-      <p:sp>
-        <p:nvSpPr>
-          <p:cNvPr id="6" name="HeaderBar"/>
+        <p:style>
+          <a:lnRef idx="1">
+            <a:schemeClr val="accent1"/>
+          </a:lnRef>
+          <a:fillRef idx="3">
+            <a:schemeClr val="accent1"/>
+          </a:fillRef>
+          <a:effectRef idx="2">
+            <a:schemeClr val="accent1"/>
+          </a:effectRef>
+          <a:fontRef idx="minor">
+            <a:schemeClr val="lt1"/>
+          </a:fontRef>
+        </p:style>
+        <p:txBody>
+          <a:bodyPr rtlCol="0" anchor="ctr"/>
+          <a:lstStyle/>
+          <a:p>
+            <a:pPr algn="ctr"/>
+          </a:p>
+        </p:txBody>
+      </p:sp>
+      <p:sp>
+        <p:nvSpPr>
+          <p:cNvPr id="101" name="TextBox 100"/>
+          <p:cNvSpPr txBox="1"/>
+          <p:nvPr/>
+        </p:nvSpPr>
+        <p:spPr>
+          <a:xfrm>
+            <a:off x="7406640" y="5001768"/>
+            <a:ext cx="502920" cy="274320"/>
+          </a:xfrm>
+          <a:prstGeom prst="rect">
+            <a:avLst/>
+          </a:prstGeom>
+          <a:noFill/>
+        </p:spPr>
+        <p:txBody>
+          <a:bodyPr wrap="square">
+            <a:spAutoFit/>
+          </a:bodyPr>
+          <a:lstStyle/>
+          <a:p>
+            <a:pPr algn="ctr">
+              <a:defRPr sz="1000" b="1">
+                <a:solidFill>
+                  <a:srgbClr val="FFFFFF"/>
+                </a:solidFill>
+                <a:latin typeface="Meiryo UI"/>
+              </a:defRPr>
+            </a:pPr>
+            <a:r>
+              <a:t>v3.0</a:t>
+            </a:r>
+          </a:p>
+        </p:txBody>
+      </p:sp>
+      <p:sp>
+        <p:nvSpPr>
+          <p:cNvPr id="102" name="TextBox 101"/>
+          <p:cNvSpPr txBox="1"/>
+          <p:nvPr/>
+        </p:nvSpPr>
+        <p:spPr>
+          <a:xfrm>
+            <a:off x="8001000" y="4983480"/>
+            <a:ext cx="1371600" cy="228600"/>
+          </a:xfrm>
+          <a:prstGeom prst="rect">
+            <a:avLst/>
+          </a:prstGeom>
+          <a:noFill/>
+        </p:spPr>
+        <p:txBody>
+          <a:bodyPr wrap="square">
+            <a:spAutoFit/>
+          </a:bodyPr>
+          <a:lstStyle/>
+          <a:p>
+            <a:pPr algn="l">
+              <a:defRPr sz="1200" b="1">
+                <a:solidFill>
+                  <a:srgbClr val="0F172A"/>
+                </a:solidFill>
+                <a:latin typeface="Meiryo UI"/>
+              </a:defRPr>
+            </a:pPr>
+            <a:r>
+              <a:t>AI得点検知</a:t>
+            </a:r>
+          </a:p>
+        </p:txBody>
+      </p:sp>
+      <p:sp>
+        <p:nvSpPr>
+          <p:cNvPr id="103" name="TextBox 102"/>
+          <p:cNvSpPr txBox="1"/>
+          <p:nvPr/>
+        </p:nvSpPr>
+        <p:spPr>
+          <a:xfrm>
+            <a:off x="8001000" y="5230368"/>
+            <a:ext cx="1371600" cy="457200"/>
+          </a:xfrm>
+          <a:prstGeom prst="rect">
+            <a:avLst/>
+          </a:prstGeom>
+          <a:noFill/>
+        </p:spPr>
+        <p:txBody>
+          <a:bodyPr wrap="square">
+            <a:spAutoFit/>
+          </a:bodyPr>
+          <a:lstStyle/>
+          <a:p>
+            <a:pPr algn="l">
+              <a:defRPr sz="800" b="0">
+                <a:solidFill>
+                  <a:srgbClr val="666680"/>
+                </a:solidFill>
+                <a:latin typeface="Meiryo UI"/>
+              </a:defRPr>
+            </a:pPr>
+            <a:r>
+              <a:t>映像・音声からAIが得点を</a:t>
+            </a:r>
+            <a:br/>
+            <a:r>
+              <a:t>検知しスコア自動更新</a:t>
+            </a:r>
+          </a:p>
+        </p:txBody>
+      </p:sp>
+      <p:sp>
+        <p:nvSpPr>
+          <p:cNvPr id="104" name="TextBox 103"/>
+          <p:cNvSpPr txBox="1"/>
+          <p:nvPr/>
+        </p:nvSpPr>
+        <p:spPr>
+          <a:xfrm>
+            <a:off x="9509760" y="4983480"/>
+            <a:ext cx="1188720" cy="182880"/>
+          </a:xfrm>
+          <a:prstGeom prst="rect">
+            <a:avLst/>
+          </a:prstGeom>
+          <a:noFill/>
+        </p:spPr>
+        <p:txBody>
+          <a:bodyPr wrap="square">
+            <a:spAutoFit/>
+          </a:bodyPr>
+          <a:lstStyle/>
+          <a:p>
+            <a:pPr algn="l">
+              <a:defRPr sz="700" b="0">
+                <a:solidFill>
+                  <a:srgbClr val="9CA3AF"/>
+                </a:solidFill>
+                <a:latin typeface="Meiryo UI"/>
+              </a:defRPr>
+            </a:pPr>
+            <a:r>
+              <a:t>技術:</a:t>
+            </a:r>
+          </a:p>
+        </p:txBody>
+      </p:sp>
+      <p:sp>
+        <p:nvSpPr>
+          <p:cNvPr id="105" name="TextBox 104"/>
+          <p:cNvSpPr txBox="1"/>
+          <p:nvPr/>
+        </p:nvSpPr>
+        <p:spPr>
+          <a:xfrm>
+            <a:off x="9509760" y="5138928"/>
+            <a:ext cx="1188720" cy="274320"/>
+          </a:xfrm>
+          <a:prstGeom prst="rect">
+            <a:avLst/>
+          </a:prstGeom>
+          <a:noFill/>
+        </p:spPr>
+        <p:txBody>
+          <a:bodyPr wrap="square">
+            <a:spAutoFit/>
+          </a:bodyPr>
+          <a:lstStyle/>
+          <a:p>
+            <a:pPr algn="l">
+              <a:defRPr sz="800" b="0">
+                <a:solidFill>
+                  <a:srgbClr val="1A1A2E"/>
+                </a:solidFill>
+                <a:latin typeface="Meiryo UI"/>
+              </a:defRPr>
+            </a:pPr>
+            <a:r>
+              <a:t>映像解析AI / 音声認識</a:t>
+            </a:r>
+          </a:p>
+        </p:txBody>
+      </p:sp>
+      <p:sp>
+        <p:nvSpPr>
+          <p:cNvPr id="106" name="Rounded Rectangle 105"/>
           <p:cNvSpPr/>
           <p:nvPr/>
         </p:nvSpPr>
         <p:spPr>
           <a:xfrm>
-            <a:off x="546100" y="1041400"/>
-            <a:ext cx="11099800" cy="457200"/>
+            <a:off x="10789920" y="5001768"/>
+            <a:ext cx="960120" cy="502920"/>
           </a:xfrm>
           <a:prstGeom prst="roundRect">
-            <a:avLst>
-              <a:gd name="adj" fmla="val 10000"/>
-            </a:avLst>
-          </a:prstGeom>
-          <a:solidFill>
-            <a:srgbClr val="0F172A"/>
-          </a:solidFill>
-          <a:ln>
-            <a:noFill/>
-          </a:ln>
-        </p:spPr>
-        <p:txBody>
-          <a:bodyPr wrap="square" lIns="91440" tIns="0" rIns="91440" bIns="0" anchor="ctr"/>
-          <a:lstStyle/>
-          <a:p>
-            <a:pPr algn="l"/>
-            <a:r>
-              <a:rPr lang="ja-JP" altLang="en-US" sz="1800" b="1" dirty="0">
-                <a:solidFill>
-                  <a:srgbClr val="FFFFFF"/>
-                </a:solidFill>
-                <a:latin typeface="Meiryo UI"/>
-                <a:ea typeface="Meiryo UI"/>
-              </a:rPr>
-              <a:t>将来の拡張ポイント &amp; 概算費用</a:t>
-            </a:r>
-          </a:p>
-        </p:txBody>
-      </p:sp>
-      <p:sp>
-        <p:nvSpPr>
-          <p:cNvPr id="10" name="Row0Bg"/>
-          <p:cNvSpPr/>
-          <p:nvPr/>
-        </p:nvSpPr>
-        <p:spPr>
-          <a:xfrm>
-            <a:off x="546100" y="1549400"/>
-            <a:ext cx="11099800" cy="736600"/>
-          </a:xfrm>
-          <a:prstGeom prst="roundRect">
-            <a:avLst>
-              <a:gd name="adj" fmla="val 8000"/>
-            </a:avLst>
-          </a:prstGeom>
-          <a:solidFill>
-            <a:srgbClr val="F3F4F6"/>
-          </a:solidFill>
-          <a:ln w="6350">
-            <a:solidFill>
-              <a:srgbClr val="E5E7EB"/>
-            </a:solidFill>
-          </a:ln>
-        </p:spPr>
-        <p:txBody>
-          <a:bodyPr/>
-          <a:lstStyle/>
-          <a:p>
-            <a:endParaRPr lang="ja-JP" altLang="en-US"/>
-          </a:p>
-        </p:txBody>
-      </p:sp>
-      <p:sp>
-        <p:nvSpPr>
-          <p:cNvPr id="11" name="Row0Ver"/>
-          <p:cNvSpPr/>
-          <p:nvPr/>
-        </p:nvSpPr>
-        <p:spPr>
-          <a:xfrm>
-            <a:off x="673100" y="1739900"/>
-            <a:ext cx="660400" cy="355600"/>
-          </a:xfrm>
-          <a:prstGeom prst="roundRect">
-            <a:avLst>
-              <a:gd name="adj" fmla="val 25000"/>
-            </a:avLst>
-          </a:prstGeom>
-          <a:solidFill>
-            <a:srgbClr val="2563EB"/>
-          </a:solidFill>
-          <a:ln>
-            <a:noFill/>
-          </a:ln>
-        </p:spPr>
-        <p:txBody>
-          <a:bodyPr wrap="square" lIns="0" tIns="0" rIns="0" bIns="0" anchor="ctr"/>
-          <a:lstStyle/>
-          <a:p>
-            <a:pPr algn="ctr"/>
-            <a:r>
-              <a:rPr lang="en-US" altLang="ja-JP" sz="1300" b="1" dirty="0">
-                <a:solidFill>
-                  <a:srgbClr val="FFFFFF"/>
-                </a:solidFill>
-                <a:latin typeface="Meiryo UI"/>
-                <a:ea typeface="Meiryo UI"/>
-              </a:rPr>
-              <a:t>v1.0</a:t>
-            </a:r>
-          </a:p>
-        </p:txBody>
-      </p:sp>
-      <p:sp>
-        <p:nvSpPr>
-          <p:cNvPr id="12" name="Row0Name"/>
-          <p:cNvSpPr/>
-          <p:nvPr/>
-        </p:nvSpPr>
-        <p:spPr>
-          <a:xfrm>
-            <a:off x="1460500" y="1612900"/>
-            <a:ext cx="2540000" cy="304800"/>
-          </a:xfrm>
-          <a:prstGeom prst="rect">
-            <a:avLst/>
-          </a:prstGeom>
-          <a:noFill/>
-          <a:ln>
-            <a:noFill/>
-          </a:ln>
-        </p:spPr>
-        <p:txBody>
-          <a:bodyPr wrap="square" lIns="0" tIns="0" rIns="0" bIns="0"/>
-          <a:lstStyle/>
-          <a:p>
-            <a:pPr algn="l"/>
-            <a:r>
-              <a:rPr lang="ja-JP" altLang="en-US" sz="1600" b="1" dirty="0">
-                <a:solidFill>
-                  <a:srgbClr val="0F172A"/>
-                </a:solidFill>
-                <a:latin typeface="Meiryo UI"/>
-                <a:ea typeface="Meiryo UI"/>
-              </a:rPr>
-              <a:t>得点リモコン</a:t>
-            </a:r>
-          </a:p>
-        </p:txBody>
-      </p:sp>
-      <p:sp>
-        <p:nvSpPr>
-          <p:cNvPr id="13" name="Row0Desc"/>
-          <p:cNvSpPr/>
-          <p:nvPr/>
-        </p:nvSpPr>
-        <p:spPr>
-          <a:xfrm>
-            <a:off x="1460500" y="1917700"/>
-            <a:ext cx="2540000" cy="330200"/>
-          </a:xfrm>
-          <a:prstGeom prst="rect">
-            <a:avLst/>
-          </a:prstGeom>
-          <a:noFill/>
-          <a:ln>
-            <a:noFill/>
-          </a:ln>
-        </p:spPr>
-        <p:txBody>
-          <a:bodyPr wrap="square" lIns="0" tIns="0" rIns="0" bIns="0"/>
-          <a:lstStyle/>
-          <a:p>
-            <a:pPr algn="l"/>
-            <a:r>
-              <a:rPr lang="ja-JP" altLang="en-US" sz="1200" dirty="0">
-                <a:solidFill>
-                  <a:srgbClr val="666680"/>
-                </a:solidFill>
-                <a:latin typeface="Meiryo UI"/>
-                <a:ea typeface="Meiryo UI"/>
-              </a:rPr>
-              <a:t>別デバイスからスコア操作</a:t>
-            </a:r>
-            <a:br/>
-            <a:r>
-              <a:rPr lang="ja-JP" altLang="en-US" sz="1200" dirty="0">
-                <a:solidFill>
-                  <a:srgbClr val="666680"/>
-                </a:solidFill>
-                <a:latin typeface="Meiryo UI"/>
-                <a:ea typeface="Meiryo UI"/>
-              </a:rPr>
-              <a:t>撮影者は撮影に集中</a:t>
-            </a:r>
-          </a:p>
-        </p:txBody>
-      </p:sp>
-      <p:sp>
-        <p:nvSpPr>
-          <p:cNvPr id="14" name="Row0TechLabel"/>
-          <p:cNvSpPr/>
-          <p:nvPr/>
-        </p:nvSpPr>
-        <p:spPr>
-          <a:xfrm>
-            <a:off x="4229100" y="1612900"/>
-            <a:ext cx="2286000" cy="203200"/>
-          </a:xfrm>
-          <a:prstGeom prst="rect">
-            <a:avLst/>
-          </a:prstGeom>
-          <a:noFill/>
-          <a:ln>
-            <a:noFill/>
-          </a:ln>
-        </p:spPr>
-        <p:txBody>
-          <a:bodyPr wrap="square" lIns="0" tIns="0" rIns="0" bIns="0"/>
-          <a:lstStyle/>
-          <a:p>
-            <a:pPr algn="l"/>
-            <a:r>
-              <a:rPr lang="ja-JP" altLang="en-US" sz="1100" dirty="0">
-                <a:solidFill>
-                  <a:srgbClr val="9CA3AF"/>
-                </a:solidFill>
-                <a:latin typeface="Meiryo UI"/>
-                <a:ea typeface="Meiryo UI"/>
-              </a:rPr>
-              <a:t>技術:</a:t>
-            </a:r>
-          </a:p>
-        </p:txBody>
-      </p:sp>
-      <p:sp>
-        <p:nvSpPr>
-          <p:cNvPr id="15" name="Row0Tech"/>
-          <p:cNvSpPr/>
-          <p:nvPr/>
-        </p:nvSpPr>
-        <p:spPr>
-          <a:xfrm>
-            <a:off x="4229100" y="1816100"/>
-            <a:ext cx="2286000" cy="406400"/>
-          </a:xfrm>
-          <a:prstGeom prst="rect">
-            <a:avLst/>
-          </a:prstGeom>
-          <a:noFill/>
-          <a:ln>
-            <a:noFill/>
-          </a:ln>
-        </p:spPr>
-        <p:txBody>
-          <a:bodyPr wrap="square" lIns="0" tIns="0" rIns="0" bIns="0"/>
-          <a:lstStyle/>
-          <a:p>
-            <a:pPr algn="l"/>
-            <a:r>
-              <a:rPr lang="ja-JP" altLang="en-US" sz="1200" dirty="0">
-                <a:solidFill>
-                  <a:srgbClr val="1A1A2E"/>
-                </a:solidFill>
-                <a:latin typeface="Meiryo UI"/>
-                <a:ea typeface="Meiryo UI"/>
-              </a:rPr>
-              <a:t>WebSocket / Supabase Realtime</a:t>
-            </a:r>
-          </a:p>
-        </p:txBody>
-      </p:sp>
-      <p:sp>
-        <p:nvSpPr>
-          <p:cNvPr id="16" name="Row0Period"/>
-          <p:cNvSpPr/>
-          <p:nvPr/>
-        </p:nvSpPr>
-        <p:spPr>
-          <a:xfrm>
-            <a:off x="6769100" y="1612900"/>
-            <a:ext cx="1524000" cy="203200"/>
-          </a:xfrm>
-          <a:prstGeom prst="rect">
-            <a:avLst/>
-          </a:prstGeom>
-          <a:noFill/>
-          <a:ln>
-            <a:noFill/>
-          </a:ln>
-        </p:spPr>
-        <p:txBody>
-          <a:bodyPr wrap="square" lIns="0" tIns="0" rIns="0" bIns="0"/>
-          <a:lstStyle/>
-          <a:p>
-            <a:pPr algn="l"/>
-            <a:r>
-              <a:rPr lang="ja-JP" altLang="en-US" sz="1100" dirty="0">
-                <a:solidFill>
-                  <a:srgbClr val="9CA3AF"/>
-                </a:solidFill>
-                <a:latin typeface="Meiryo UI"/>
-                <a:ea typeface="Meiryo UI"/>
-              </a:rPr>
-              <a:t>期間:</a:t>
-            </a:r>
-          </a:p>
-        </p:txBody>
-      </p:sp>
-      <p:sp>
-        <p:nvSpPr>
-          <p:cNvPr id="17" name="Row0PeriodVal"/>
-          <p:cNvSpPr/>
-          <p:nvPr/>
-        </p:nvSpPr>
-        <p:spPr>
-          <a:xfrm>
-            <a:off x="6769100" y="1816100"/>
-            <a:ext cx="1524000" cy="279400"/>
-          </a:xfrm>
-          <a:prstGeom prst="rect">
-            <a:avLst/>
-          </a:prstGeom>
-          <a:noFill/>
-          <a:ln>
-            <a:noFill/>
-          </a:ln>
-        </p:spPr>
-        <p:txBody>
-          <a:bodyPr wrap="square" lIns="0" tIns="0" rIns="0" bIns="0"/>
-          <a:lstStyle/>
-          <a:p>
-            <a:pPr algn="l"/>
-            <a:r>
-              <a:rPr lang="ja-JP" altLang="en-US" sz="1300" dirty="0">
-                <a:solidFill>
-                  <a:srgbClr val="1A1A2E"/>
-                </a:solidFill>
-                <a:latin typeface="Meiryo UI"/>
-                <a:ea typeface="Meiryo UI"/>
-              </a:rPr>
-              <a:t>2-3週間</a:t>
-            </a:r>
-          </a:p>
-        </p:txBody>
-      </p:sp>
-      <p:sp>
-        <p:nvSpPr>
-          <p:cNvPr id="18" name="Row0Cost"/>
-          <p:cNvSpPr/>
-          <p:nvPr/>
-        </p:nvSpPr>
-        <p:spPr>
-          <a:xfrm>
-            <a:off x="8674100" y="1651000"/>
-            <a:ext cx="2794000" cy="533400"/>
-          </a:xfrm>
-          <a:prstGeom prst="roundRect">
-            <a:avLst>
-              <a:gd name="adj" fmla="val 15000"/>
-            </a:avLst>
+            <a:avLst/>
           </a:prstGeom>
           <a:solidFill>
             <a:srgbClr val="FFFFFF"/>
           </a:solidFill>
-          <a:ln w="6350">
+          <a:ln w="19050">
             <a:solidFill>
-              <a:srgbClr val="DC2626"/>
+              <a:srgbClr val="E0E0E8"/>
             </a:solidFill>
           </a:ln>
         </p:spPr>
-        <p:txBody>
-          <a:bodyPr wrap="square" lIns="0" tIns="0" rIns="0" bIns="0" anchor="ctr"/>
+        <p:style>
+          <a:lnRef idx="1">
+            <a:schemeClr val="accent1"/>
+          </a:lnRef>
+          <a:fillRef idx="3">
+            <a:schemeClr val="accent1"/>
+          </a:fillRef>
+          <a:effectRef idx="2">
+            <a:schemeClr val="accent1"/>
+          </a:effectRef>
+          <a:fontRef idx="minor">
+            <a:schemeClr val="lt1"/>
+          </a:fontRef>
+        </p:style>
+        <p:txBody>
+          <a:bodyPr rtlCol="0" anchor="ctr"/>
           <a:lstStyle/>
           <a:p>
             <a:pPr algn="ctr"/>
-            <a:r>
-              <a:rPr lang="ja-JP" altLang="en-US" sz="1400" b="1" dirty="0">
-                <a:solidFill>
-                  <a:srgbClr val="DC2626"/>
+          </a:p>
+        </p:txBody>
+      </p:sp>
+      <p:sp>
+        <p:nvSpPr>
+          <p:cNvPr id="107" name="TextBox 106"/>
+          <p:cNvSpPr txBox="1"/>
+          <p:nvPr/>
+        </p:nvSpPr>
+        <p:spPr>
+          <a:xfrm>
+            <a:off x="10835640" y="5020056"/>
+            <a:ext cx="868680" cy="228600"/>
+          </a:xfrm>
+          <a:prstGeom prst="rect">
+            <a:avLst/>
+          </a:prstGeom>
+          <a:noFill/>
+        </p:spPr>
+        <p:txBody>
+          <a:bodyPr wrap="square">
+            <a:spAutoFit/>
+          </a:bodyPr>
+          <a:lstStyle/>
+          <a:p>
+            <a:pPr algn="ctr">
+              <a:defRPr sz="1000" b="1">
+                <a:solidFill>
+                  <a:srgbClr val="E63946"/>
                 </a:solidFill>
                 <a:latin typeface="Meiryo UI"/>
-                <a:ea typeface="Meiryo UI"/>
-              </a:rPr>
-              <a:t>約30〜50万円</a:t>
-            </a:r>
-          </a:p>
-        </p:txBody>
-      </p:sp>
-      <p:sp>
-        <p:nvSpPr>
-          <p:cNvPr id="19" name="Row1Bg"/>
+              </a:defRPr>
+            </a:pPr>
+            <a:r>
+              <a:t>約100〜200万円</a:t>
+            </a:r>
+          </a:p>
+        </p:txBody>
+      </p:sp>
+      <p:sp>
+        <p:nvSpPr>
+          <p:cNvPr id="108" name="TextBox 107"/>
+          <p:cNvSpPr txBox="1"/>
+          <p:nvPr/>
+        </p:nvSpPr>
+        <p:spPr>
+          <a:xfrm>
+            <a:off x="10835640" y="5276088"/>
+            <a:ext cx="868680" cy="182880"/>
+          </a:xfrm>
+          <a:prstGeom prst="rect">
+            <a:avLst/>
+          </a:prstGeom>
+          <a:noFill/>
+        </p:spPr>
+        <p:txBody>
+          <a:bodyPr wrap="square">
+            <a:spAutoFit/>
+          </a:bodyPr>
+          <a:lstStyle/>
+          <a:p>
+            <a:pPr algn="ctr">
+              <a:defRPr sz="800" b="0">
+                <a:solidFill>
+                  <a:srgbClr val="666680"/>
+                </a:solidFill>
+                <a:latin typeface="Meiryo UI"/>
+              </a:defRPr>
+            </a:pPr>
+            <a:r>
+              <a:t>3-6ヶ月</a:t>
+            </a:r>
+          </a:p>
+        </p:txBody>
+      </p:sp>
+      <p:sp>
+        <p:nvSpPr>
+          <p:cNvPr id="109" name="Rounded Rectangle 108"/>
           <p:cNvSpPr/>
           <p:nvPr/>
         </p:nvSpPr>
         <p:spPr>
           <a:xfrm>
-            <a:off x="546100" y="2336800"/>
-            <a:ext cx="11099800" cy="736600"/>
+            <a:off x="7315200" y="5715000"/>
+            <a:ext cx="4572000" cy="685800"/>
           </a:xfrm>
           <a:prstGeom prst="roundRect">
-            <a:avLst>
-              <a:gd name="adj" fmla="val 8000"/>
-            </a:avLst>
+            <a:avLst/>
           </a:prstGeom>
           <a:solidFill>
-            <a:srgbClr val="F3F4F6"/>
+            <a:srgbClr val="F3EEFF"/>
           </a:solidFill>
-          <a:ln w="6350">
+          <a:ln w="19050">
             <a:solidFill>
-              <a:srgbClr val="E5E7EB"/>
+              <a:srgbClr val="7C3AED"/>
             </a:solidFill>
           </a:ln>
         </p:spPr>
-        <p:txBody>
-          <a:bodyPr/>
-          <a:lstStyle/>
-          <a:p>
-            <a:endParaRPr lang="ja-JP" altLang="en-US"/>
-          </a:p>
-        </p:txBody>
-      </p:sp>
-      <p:sp>
-        <p:nvSpPr>
-          <p:cNvPr id="20" name="Row1Ver"/>
+        <p:style>
+          <a:lnRef idx="1">
+            <a:schemeClr val="accent1"/>
+          </a:lnRef>
+          <a:fillRef idx="3">
+            <a:schemeClr val="accent1"/>
+          </a:fillRef>
+          <a:effectRef idx="2">
+            <a:schemeClr val="accent1"/>
+          </a:effectRef>
+          <a:fontRef idx="minor">
+            <a:schemeClr val="lt1"/>
+          </a:fontRef>
+        </p:style>
+        <p:txBody>
+          <a:bodyPr rtlCol="0" anchor="ctr"/>
+          <a:lstStyle/>
+          <a:p>
+            <a:pPr algn="ctr"/>
+          </a:p>
+        </p:txBody>
+      </p:sp>
+      <p:sp>
+        <p:nvSpPr>
+          <p:cNvPr id="110" name="Rounded Rectangle 109"/>
           <p:cNvSpPr/>
           <p:nvPr/>
         </p:nvSpPr>
         <p:spPr>
           <a:xfrm>
-            <a:off x="673100" y="2527300"/>
-            <a:ext cx="660400" cy="355600"/>
+            <a:off x="7406640" y="5806440"/>
+            <a:ext cx="502920" cy="274320"/>
           </a:xfrm>
           <a:prstGeom prst="roundRect">
-            <a:avLst>
-              <a:gd name="adj" fmla="val 25000"/>
-            </a:avLst>
-          </a:prstGeom>
-          <a:solidFill>
-            <a:srgbClr val="15803D"/>
-          </a:solidFill>
-          <a:ln>
-            <a:noFill/>
-          </a:ln>
-        </p:spPr>
-        <p:txBody>
-          <a:bodyPr wrap="square" lIns="0" tIns="0" rIns="0" bIns="0" anchor="ctr"/>
-          <a:lstStyle/>
-          <a:p>
-            <a:pPr algn="ctr"/>
-            <a:r>
-              <a:rPr lang="en-US" altLang="ja-JP" sz="1300" b="1" dirty="0">
-                <a:solidFill>
-                  <a:srgbClr val="FFFFFF"/>
-                </a:solidFill>
-                <a:latin typeface="Meiryo UI"/>
-                <a:ea typeface="Meiryo UI"/>
-              </a:rPr>
-              <a:t>v1.5</a:t>
-            </a:r>
-          </a:p>
-        </p:txBody>
-      </p:sp>
-      <p:sp>
-        <p:nvSpPr>
-          <p:cNvPr id="21" name="Row1Name"/>
-          <p:cNvSpPr/>
-          <p:nvPr/>
-        </p:nvSpPr>
-        <p:spPr>
-          <a:xfrm>
-            <a:off x="1460500" y="2400300"/>
-            <a:ext cx="2540000" cy="304800"/>
-          </a:xfrm>
-          <a:prstGeom prst="rect">
-            <a:avLst/>
-          </a:prstGeom>
-          <a:noFill/>
-          <a:ln>
-            <a:noFill/>
-          </a:ln>
-        </p:spPr>
-        <p:txBody>
-          <a:bodyPr wrap="square" lIns="0" tIns="0" rIns="0" bIns="0"/>
-          <a:lstStyle/>
-          <a:p>
-            <a:pPr algn="l"/>
-            <a:r>
-              <a:rPr lang="ja-JP" altLang="en-US" sz="1600" b="1" dirty="0">
-                <a:solidFill>
-                  <a:srgbClr val="0F172A"/>
-                </a:solidFill>
-                <a:latin typeface="Meiryo UI"/>
-                <a:ea typeface="Meiryo UI"/>
-              </a:rPr>
-              <a:t>マルチカメラ手動切替</a:t>
-            </a:r>
-          </a:p>
-        </p:txBody>
-      </p:sp>
-      <p:sp>
-        <p:nvSpPr>
-          <p:cNvPr id="22" name="Row1Desc"/>
-          <p:cNvSpPr/>
-          <p:nvPr/>
-        </p:nvSpPr>
-        <p:spPr>
-          <a:xfrm>
-            <a:off x="1460500" y="2705100"/>
-            <a:ext cx="2540000" cy="330200"/>
-          </a:xfrm>
-          <a:prstGeom prst="rect">
-            <a:avLst/>
-          </a:prstGeom>
-          <a:noFill/>
-          <a:ln>
-            <a:noFill/>
-          </a:ln>
-        </p:spPr>
-        <p:txBody>
-          <a:bodyPr wrap="square" lIns="0" tIns="0" rIns="0" bIns="0"/>
-          <a:lstStyle/>
-          <a:p>
-            <a:pPr algn="l"/>
-            <a:r>
-              <a:rPr lang="ja-JP" altLang="en-US" sz="1200" dirty="0">
-                <a:solidFill>
-                  <a:srgbClr val="666680"/>
-                </a:solidFill>
-                <a:latin typeface="Meiryo UI"/>
-                <a:ea typeface="Meiryo UI"/>
-              </a:rPr>
-              <a:t>複数スマホの映像を</a:t>
-            </a:r>
-            <a:br/>
-            <a:r>
-              <a:rPr lang="ja-JP" altLang="en-US" sz="1200" dirty="0">
-                <a:solidFill>
-                  <a:srgbClr val="666680"/>
-                </a:solidFill>
-                <a:latin typeface="Meiryo UI"/>
-                <a:ea typeface="Meiryo UI"/>
-              </a:rPr>
-              <a:t>手動で切り替え表示</a:t>
-            </a:r>
-          </a:p>
-        </p:txBody>
-      </p:sp>
-      <p:sp>
-        <p:nvSpPr>
-          <p:cNvPr id="23" name="Row1TechLabel"/>
-          <p:cNvSpPr/>
-          <p:nvPr/>
-        </p:nvSpPr>
-        <p:spPr>
-          <a:xfrm>
-            <a:off x="4229100" y="2400300"/>
-            <a:ext cx="2286000" cy="203200"/>
-          </a:xfrm>
-          <a:prstGeom prst="rect">
-            <a:avLst/>
-          </a:prstGeom>
-          <a:noFill/>
-          <a:ln>
-            <a:noFill/>
-          </a:ln>
-        </p:spPr>
-        <p:txBody>
-          <a:bodyPr wrap="square" lIns="0" tIns="0" rIns="0" bIns="0"/>
-          <a:lstStyle/>
-          <a:p>
-            <a:pPr algn="l"/>
-            <a:r>
-              <a:rPr lang="ja-JP" altLang="en-US" sz="1100" dirty="0">
-                <a:solidFill>
-                  <a:srgbClr val="9CA3AF"/>
-                </a:solidFill>
-                <a:latin typeface="Meiryo UI"/>
-                <a:ea typeface="Meiryo UI"/>
-              </a:rPr>
-              <a:t>技術:</a:t>
-            </a:r>
-          </a:p>
-        </p:txBody>
-      </p:sp>
-      <p:sp>
-        <p:nvSpPr>
-          <p:cNvPr id="24" name="Row1Tech"/>
-          <p:cNvSpPr/>
-          <p:nvPr/>
-        </p:nvSpPr>
-        <p:spPr>
-          <a:xfrm>
-            <a:off x="4229100" y="2603500"/>
-            <a:ext cx="2286000" cy="406400"/>
-          </a:xfrm>
-          <a:prstGeom prst="rect">
-            <a:avLst/>
-          </a:prstGeom>
-          <a:noFill/>
-          <a:ln>
-            <a:noFill/>
-          </a:ln>
-        </p:spPr>
-        <p:txBody>
-          <a:bodyPr wrap="square" lIns="0" tIns="0" rIns="0" bIns="0"/>
-          <a:lstStyle/>
-          <a:p>
-            <a:pPr algn="l"/>
-            <a:r>
-              <a:rPr lang="ja-JP" altLang="en-US" sz="1200" dirty="0">
-                <a:solidFill>
-                  <a:srgbClr val="1A1A2E"/>
-                </a:solidFill>
-                <a:latin typeface="Meiryo UI"/>
-                <a:ea typeface="Meiryo UI"/>
-              </a:rPr>
-              <a:t>LiveKit マルチトラック</a:t>
-            </a:r>
-          </a:p>
-        </p:txBody>
-      </p:sp>
-      <p:sp>
-        <p:nvSpPr>
-          <p:cNvPr id="25" name="Row1Period"/>
-          <p:cNvSpPr/>
-          <p:nvPr/>
-        </p:nvSpPr>
-        <p:spPr>
-          <a:xfrm>
-            <a:off x="6769100" y="2400300"/>
-            <a:ext cx="1524000" cy="203200"/>
-          </a:xfrm>
-          <a:prstGeom prst="rect">
-            <a:avLst/>
-          </a:prstGeom>
-          <a:noFill/>
-          <a:ln>
-            <a:noFill/>
-          </a:ln>
-        </p:spPr>
-        <p:txBody>
-          <a:bodyPr wrap="square" lIns="0" tIns="0" rIns="0" bIns="0"/>
-          <a:lstStyle/>
-          <a:p>
-            <a:pPr algn="l"/>
-            <a:r>
-              <a:rPr lang="ja-JP" altLang="en-US" sz="1100" dirty="0">
-                <a:solidFill>
-                  <a:srgbClr val="9CA3AF"/>
-                </a:solidFill>
-                <a:latin typeface="Meiryo UI"/>
-                <a:ea typeface="Meiryo UI"/>
-              </a:rPr>
-              <a:t>期間:</a:t>
-            </a:r>
-          </a:p>
-        </p:txBody>
-      </p:sp>
-      <p:sp>
-        <p:nvSpPr>
-          <p:cNvPr id="26" name="Row1PeriodVal"/>
-          <p:cNvSpPr/>
-          <p:nvPr/>
-        </p:nvSpPr>
-        <p:spPr>
-          <a:xfrm>
-            <a:off x="6769100" y="2603500"/>
-            <a:ext cx="1524000" cy="279400"/>
-          </a:xfrm>
-          <a:prstGeom prst="rect">
-            <a:avLst/>
-          </a:prstGeom>
-          <a:noFill/>
-          <a:ln>
-            <a:noFill/>
-          </a:ln>
-        </p:spPr>
-        <p:txBody>
-          <a:bodyPr wrap="square" lIns="0" tIns="0" rIns="0" bIns="0"/>
-          <a:lstStyle/>
-          <a:p>
-            <a:pPr algn="l"/>
-            <a:r>
-              <a:rPr lang="ja-JP" altLang="en-US" sz="1300" dirty="0">
-                <a:solidFill>
-                  <a:srgbClr val="1A1A2E"/>
-                </a:solidFill>
-                <a:latin typeface="Meiryo UI"/>
-                <a:ea typeface="Meiryo UI"/>
-              </a:rPr>
-              <a:t>1-2ヶ月</a:t>
-            </a:r>
-          </a:p>
-        </p:txBody>
-      </p:sp>
-      <p:sp>
-        <p:nvSpPr>
-          <p:cNvPr id="27" name="Row1Cost"/>
-          <p:cNvSpPr/>
-          <p:nvPr/>
-        </p:nvSpPr>
-        <p:spPr>
-          <a:xfrm>
-            <a:off x="8674100" y="2438400"/>
-            <a:ext cx="2794000" cy="533400"/>
-          </a:xfrm>
-          <a:prstGeom prst="roundRect">
-            <a:avLst>
-              <a:gd name="adj" fmla="val 15000"/>
-            </a:avLst>
-          </a:prstGeom>
-          <a:solidFill>
-            <a:srgbClr val="FFFFFF"/>
-          </a:solidFill>
-          <a:ln w="6350">
-            <a:solidFill>
-              <a:srgbClr val="DC2626"/>
-            </a:solidFill>
-          </a:ln>
-        </p:spPr>
-        <p:txBody>
-          <a:bodyPr wrap="square" lIns="0" tIns="0" rIns="0" bIns="0" anchor="ctr"/>
-          <a:lstStyle/>
-          <a:p>
-            <a:pPr algn="ctr"/>
-            <a:r>
-              <a:rPr lang="ja-JP" altLang="en-US" sz="1400" b="1" dirty="0">
-                <a:solidFill>
-                  <a:srgbClr val="DC2626"/>
-                </a:solidFill>
-                <a:latin typeface="Meiryo UI"/>
-                <a:ea typeface="Meiryo UI"/>
-              </a:rPr>
-              <a:t>約80〜120万円</a:t>
-            </a:r>
-          </a:p>
-        </p:txBody>
-      </p:sp>
-      <p:sp>
-        <p:nvSpPr>
-          <p:cNvPr id="28" name="Row2Bg"/>
-          <p:cNvSpPr/>
-          <p:nvPr/>
-        </p:nvSpPr>
-        <p:spPr>
-          <a:xfrm>
-            <a:off x="546100" y="3124200"/>
-            <a:ext cx="11099800" cy="736600"/>
-          </a:xfrm>
-          <a:prstGeom prst="roundRect">
-            <a:avLst>
-              <a:gd name="adj" fmla="val 8000"/>
-            </a:avLst>
-          </a:prstGeom>
-          <a:solidFill>
-            <a:srgbClr val="F3F4F6"/>
-          </a:solidFill>
-          <a:ln w="6350">
-            <a:solidFill>
-              <a:srgbClr val="E5E7EB"/>
-            </a:solidFill>
-          </a:ln>
-        </p:spPr>
-        <p:txBody>
-          <a:bodyPr/>
-          <a:lstStyle/>
-          <a:p>
-            <a:endParaRPr lang="ja-JP" altLang="en-US"/>
-          </a:p>
-        </p:txBody>
-      </p:sp>
-      <p:sp>
-        <p:nvSpPr>
-          <p:cNvPr id="29" name="Row2Ver"/>
-          <p:cNvSpPr/>
-          <p:nvPr/>
-        </p:nvSpPr>
-        <p:spPr>
-          <a:xfrm>
-            <a:off x="673100" y="3314700"/>
-            <a:ext cx="660400" cy="355600"/>
-          </a:xfrm>
-          <a:prstGeom prst="roundRect">
-            <a:avLst>
-              <a:gd name="adj" fmla="val 25000"/>
-            </a:avLst>
+            <a:avLst/>
           </a:prstGeom>
           <a:solidFill>
             <a:srgbClr val="7C3AED"/>
@@ -6238,1434 +7425,447 @@
             <a:noFill/>
           </a:ln>
         </p:spPr>
-        <p:txBody>
-          <a:bodyPr wrap="square" lIns="0" tIns="0" rIns="0" bIns="0" anchor="ctr"/>
+        <p:style>
+          <a:lnRef idx="1">
+            <a:schemeClr val="accent1"/>
+          </a:lnRef>
+          <a:fillRef idx="3">
+            <a:schemeClr val="accent1"/>
+          </a:fillRef>
+          <a:effectRef idx="2">
+            <a:schemeClr val="accent1"/>
+          </a:effectRef>
+          <a:fontRef idx="minor">
+            <a:schemeClr val="lt1"/>
+          </a:fontRef>
+        </p:style>
+        <p:txBody>
+          <a:bodyPr rtlCol="0" anchor="ctr"/>
           <a:lstStyle/>
           <a:p>
             <a:pPr algn="ctr"/>
-            <a:r>
-              <a:rPr lang="en-US" altLang="ja-JP" sz="1300" b="1" dirty="0">
+          </a:p>
+        </p:txBody>
+      </p:sp>
+      <p:sp>
+        <p:nvSpPr>
+          <p:cNvPr id="111" name="TextBox 110"/>
+          <p:cNvSpPr txBox="1"/>
+          <p:nvPr/>
+        </p:nvSpPr>
+        <p:spPr>
+          <a:xfrm>
+            <a:off x="7406640" y="5806440"/>
+            <a:ext cx="502920" cy="274320"/>
+          </a:xfrm>
+          <a:prstGeom prst="rect">
+            <a:avLst/>
+          </a:prstGeom>
+          <a:noFill/>
+        </p:spPr>
+        <p:txBody>
+          <a:bodyPr wrap="square">
+            <a:spAutoFit/>
+          </a:bodyPr>
+          <a:lstStyle/>
+          <a:p>
+            <a:pPr algn="ctr">
+              <a:defRPr sz="1000" b="1">
                 <a:solidFill>
                   <a:srgbClr val="FFFFFF"/>
                 </a:solidFill>
                 <a:latin typeface="Meiryo UI"/>
-                <a:ea typeface="Meiryo UI"/>
-              </a:rPr>
-              <a:t>v2.0</a:t>
-            </a:r>
-          </a:p>
-        </p:txBody>
-      </p:sp>
-      <p:sp>
-        <p:nvSpPr>
-          <p:cNvPr id="30" name="Row2Name"/>
+              </a:defRPr>
+            </a:pPr>
+            <a:r>
+              <a:t>v3.5</a:t>
+            </a:r>
+          </a:p>
+        </p:txBody>
+      </p:sp>
+      <p:sp>
+        <p:nvSpPr>
+          <p:cNvPr id="112" name="TextBox 111"/>
+          <p:cNvSpPr txBox="1"/>
+          <p:nvPr/>
+        </p:nvSpPr>
+        <p:spPr>
+          <a:xfrm>
+            <a:off x="8001000" y="5788152"/>
+            <a:ext cx="1371600" cy="228600"/>
+          </a:xfrm>
+          <a:prstGeom prst="rect">
+            <a:avLst/>
+          </a:prstGeom>
+          <a:noFill/>
+        </p:spPr>
+        <p:txBody>
+          <a:bodyPr wrap="square">
+            <a:spAutoFit/>
+          </a:bodyPr>
+          <a:lstStyle/>
+          <a:p>
+            <a:pPr algn="l">
+              <a:defRPr sz="1200" b="1">
+                <a:solidFill>
+                  <a:srgbClr val="0F172A"/>
+                </a:solidFill>
+                <a:latin typeface="Meiryo UI"/>
+              </a:defRPr>
+            </a:pPr>
+            <a:r>
+              <a:t>SNS自動投稿</a:t>
+            </a:r>
+          </a:p>
+        </p:txBody>
+      </p:sp>
+      <p:sp>
+        <p:nvSpPr>
+          <p:cNvPr id="113" name="TextBox 112"/>
+          <p:cNvSpPr txBox="1"/>
+          <p:nvPr/>
+        </p:nvSpPr>
+        <p:spPr>
+          <a:xfrm>
+            <a:off x="8001000" y="6035040"/>
+            <a:ext cx="1371600" cy="457200"/>
+          </a:xfrm>
+          <a:prstGeom prst="rect">
+            <a:avLst/>
+          </a:prstGeom>
+          <a:noFill/>
+        </p:spPr>
+        <p:txBody>
+          <a:bodyPr wrap="square">
+            <a:spAutoFit/>
+          </a:bodyPr>
+          <a:lstStyle/>
+          <a:p>
+            <a:pPr algn="l">
+              <a:defRPr sz="800" b="0">
+                <a:solidFill>
+                  <a:srgbClr val="666680"/>
+                </a:solidFill>
+                <a:latin typeface="Meiryo UI"/>
+              </a:defRPr>
+            </a:pPr>
+            <a:r>
+              <a:t>ハイライトをInstagram</a:t>
+            </a:r>
+            <a:br/>
+            <a:r>
+              <a:t>TikTokに自動投稿</a:t>
+            </a:r>
+          </a:p>
+        </p:txBody>
+      </p:sp>
+      <p:sp>
+        <p:nvSpPr>
+          <p:cNvPr id="114" name="TextBox 113"/>
+          <p:cNvSpPr txBox="1"/>
+          <p:nvPr/>
+        </p:nvSpPr>
+        <p:spPr>
+          <a:xfrm>
+            <a:off x="9509760" y="5788152"/>
+            <a:ext cx="1188720" cy="182880"/>
+          </a:xfrm>
+          <a:prstGeom prst="rect">
+            <a:avLst/>
+          </a:prstGeom>
+          <a:noFill/>
+        </p:spPr>
+        <p:txBody>
+          <a:bodyPr wrap="square">
+            <a:spAutoFit/>
+          </a:bodyPr>
+          <a:lstStyle/>
+          <a:p>
+            <a:pPr algn="l">
+              <a:defRPr sz="700" b="0">
+                <a:solidFill>
+                  <a:srgbClr val="9CA3AF"/>
+                </a:solidFill>
+                <a:latin typeface="Meiryo UI"/>
+              </a:defRPr>
+            </a:pPr>
+            <a:r>
+              <a:t>技術:</a:t>
+            </a:r>
+          </a:p>
+        </p:txBody>
+      </p:sp>
+      <p:sp>
+        <p:nvSpPr>
+          <p:cNvPr id="115" name="TextBox 114"/>
+          <p:cNvSpPr txBox="1"/>
+          <p:nvPr/>
+        </p:nvSpPr>
+        <p:spPr>
+          <a:xfrm>
+            <a:off x="9509760" y="5943600"/>
+            <a:ext cx="1188720" cy="274320"/>
+          </a:xfrm>
+          <a:prstGeom prst="rect">
+            <a:avLst/>
+          </a:prstGeom>
+          <a:noFill/>
+        </p:spPr>
+        <p:txBody>
+          <a:bodyPr wrap="square">
+            <a:spAutoFit/>
+          </a:bodyPr>
+          <a:lstStyle/>
+          <a:p>
+            <a:pPr algn="l">
+              <a:defRPr sz="800" b="0">
+                <a:solidFill>
+                  <a:srgbClr val="1A1A2E"/>
+                </a:solidFill>
+                <a:latin typeface="Meiryo UI"/>
+              </a:defRPr>
+            </a:pPr>
+            <a:r>
+              <a:t>各SNS API連携</a:t>
+            </a:r>
+          </a:p>
+        </p:txBody>
+      </p:sp>
+      <p:sp>
+        <p:nvSpPr>
+          <p:cNvPr id="116" name="Rounded Rectangle 115"/>
           <p:cNvSpPr/>
           <p:nvPr/>
         </p:nvSpPr>
         <p:spPr>
           <a:xfrm>
-            <a:off x="1460500" y="3187700"/>
-            <a:ext cx="2540000" cy="304800"/>
-          </a:xfrm>
-          <a:prstGeom prst="rect">
-            <a:avLst/>
-          </a:prstGeom>
-          <a:noFill/>
-          <a:ln>
-            <a:noFill/>
-          </a:ln>
-        </p:spPr>
-        <p:txBody>
-          <a:bodyPr wrap="square" lIns="0" tIns="0" rIns="0" bIns="0"/>
-          <a:lstStyle/>
-          <a:p>
-            <a:pPr algn="l"/>
-            <a:r>
-              <a:rPr lang="ja-JP" altLang="en-US" sz="1600" b="1" dirty="0">
-                <a:solidFill>
-                  <a:srgbClr val="0F172A"/>
-                </a:solidFill>
-                <a:latin typeface="Meiryo UI"/>
-                <a:ea typeface="Meiryo UI"/>
-              </a:rPr>
-              <a:t>AI自動アングル切替</a:t>
-            </a:r>
-          </a:p>
-        </p:txBody>
-      </p:sp>
-      <p:sp>
-        <p:nvSpPr>
-          <p:cNvPr id="31" name="Row2Desc"/>
-          <p:cNvSpPr/>
-          <p:nvPr/>
-        </p:nvSpPr>
-        <p:spPr>
-          <a:xfrm>
-            <a:off x="1460500" y="3492500"/>
-            <a:ext cx="2540000" cy="330200"/>
-          </a:xfrm>
-          <a:prstGeom prst="rect">
-            <a:avLst/>
-          </a:prstGeom>
-          <a:noFill/>
-          <a:ln>
-            <a:noFill/>
-          </a:ln>
-        </p:spPr>
-        <p:txBody>
-          <a:bodyPr wrap="square" lIns="0" tIns="0" rIns="0" bIns="0"/>
-          <a:lstStyle/>
-          <a:p>
-            <a:pPr algn="l"/>
-            <a:r>
-              <a:rPr lang="ja-JP" altLang="en-US" sz="1200" dirty="0">
-                <a:solidFill>
-                  <a:srgbClr val="666680"/>
-                </a:solidFill>
-                <a:latin typeface="Meiryo UI"/>
-                <a:ea typeface="Meiryo UI"/>
-              </a:rPr>
-              <a:t>AIがベストアングルを</a:t>
-            </a:r>
-            <a:br/>
-            <a:r>
-              <a:rPr lang="ja-JP" altLang="en-US" sz="1200" dirty="0">
-                <a:solidFill>
-                  <a:srgbClr val="666680"/>
-                </a:solidFill>
-                <a:latin typeface="Meiryo UI"/>
-                <a:ea typeface="Meiryo UI"/>
-              </a:rPr>
-              <a:t>判断して自動切替</a:t>
-            </a:r>
-          </a:p>
-        </p:txBody>
-      </p:sp>
-      <p:sp>
-        <p:nvSpPr>
-          <p:cNvPr id="32" name="Row2TechLabel"/>
-          <p:cNvSpPr/>
-          <p:nvPr/>
-        </p:nvSpPr>
-        <p:spPr>
-          <a:xfrm>
-            <a:off x="4229100" y="3187700"/>
-            <a:ext cx="2286000" cy="203200"/>
-          </a:xfrm>
-          <a:prstGeom prst="rect">
-            <a:avLst/>
-          </a:prstGeom>
-          <a:noFill/>
-          <a:ln>
-            <a:noFill/>
-          </a:ln>
-        </p:spPr>
-        <p:txBody>
-          <a:bodyPr wrap="square" lIns="0" tIns="0" rIns="0" bIns="0"/>
-          <a:lstStyle/>
-          <a:p>
-            <a:pPr algn="l"/>
-            <a:r>
-              <a:rPr lang="ja-JP" altLang="en-US" sz="1100" dirty="0">
-                <a:solidFill>
-                  <a:srgbClr val="9CA3AF"/>
-                </a:solidFill>
-                <a:latin typeface="Meiryo UI"/>
-                <a:ea typeface="Meiryo UI"/>
-              </a:rPr>
-              <a:t>技術:</a:t>
-            </a:r>
-          </a:p>
-        </p:txBody>
-      </p:sp>
-      <p:sp>
-        <p:nvSpPr>
-          <p:cNvPr id="33" name="Row2Tech"/>
-          <p:cNvSpPr/>
-          <p:nvPr/>
-        </p:nvSpPr>
-        <p:spPr>
-          <a:xfrm>
-            <a:off x="4229100" y="3390900"/>
-            <a:ext cx="2286000" cy="406400"/>
-          </a:xfrm>
-          <a:prstGeom prst="rect">
-            <a:avLst/>
-          </a:prstGeom>
-          <a:noFill/>
-          <a:ln>
-            <a:noFill/>
-          </a:ln>
-        </p:spPr>
-        <p:txBody>
-          <a:bodyPr wrap="square" lIns="0" tIns="0" rIns="0" bIns="0"/>
-          <a:lstStyle/>
-          <a:p>
-            <a:pPr algn="l"/>
-            <a:r>
-              <a:rPr lang="ja-JP" altLang="en-US" sz="1200" dirty="0">
-                <a:solidFill>
-                  <a:srgbClr val="1A1A2E"/>
-                </a:solidFill>
-                <a:latin typeface="Meiryo UI"/>
-                <a:ea typeface="Meiryo UI"/>
-              </a:rPr>
-              <a:t>AI推論サーバー（GPU）</a:t>
-            </a:r>
-          </a:p>
-        </p:txBody>
-      </p:sp>
-      <p:sp>
-        <p:nvSpPr>
-          <p:cNvPr id="34" name="Row2Period"/>
-          <p:cNvSpPr/>
-          <p:nvPr/>
-        </p:nvSpPr>
-        <p:spPr>
-          <a:xfrm>
-            <a:off x="6769100" y="3187700"/>
-            <a:ext cx="1524000" cy="203200"/>
-          </a:xfrm>
-          <a:prstGeom prst="rect">
-            <a:avLst/>
-          </a:prstGeom>
-          <a:noFill/>
-          <a:ln>
-            <a:noFill/>
-          </a:ln>
-        </p:spPr>
-        <p:txBody>
-          <a:bodyPr wrap="square" lIns="0" tIns="0" rIns="0" bIns="0"/>
-          <a:lstStyle/>
-          <a:p>
-            <a:pPr algn="l"/>
-            <a:r>
-              <a:rPr lang="ja-JP" altLang="en-US" sz="1100" dirty="0">
-                <a:solidFill>
-                  <a:srgbClr val="9CA3AF"/>
-                </a:solidFill>
-                <a:latin typeface="Meiryo UI"/>
-                <a:ea typeface="Meiryo UI"/>
-              </a:rPr>
-              <a:t>期間:</a:t>
-            </a:r>
-          </a:p>
-        </p:txBody>
-      </p:sp>
-      <p:sp>
-        <p:nvSpPr>
-          <p:cNvPr id="35" name="Row2PeriodVal"/>
-          <p:cNvSpPr/>
-          <p:nvPr/>
-        </p:nvSpPr>
-        <p:spPr>
-          <a:xfrm>
-            <a:off x="6769100" y="3390900"/>
-            <a:ext cx="1524000" cy="279400"/>
-          </a:xfrm>
-          <a:prstGeom prst="rect">
-            <a:avLst/>
-          </a:prstGeom>
-          <a:noFill/>
-          <a:ln>
-            <a:noFill/>
-          </a:ln>
-        </p:spPr>
-        <p:txBody>
-          <a:bodyPr wrap="square" lIns="0" tIns="0" rIns="0" bIns="0"/>
-          <a:lstStyle/>
-          <a:p>
-            <a:pPr algn="l"/>
-            <a:r>
-              <a:rPr lang="ja-JP" altLang="en-US" sz="1300" dirty="0">
-                <a:solidFill>
-                  <a:srgbClr val="1A1A2E"/>
-                </a:solidFill>
-                <a:latin typeface="Meiryo UI"/>
-                <a:ea typeface="Meiryo UI"/>
-              </a:rPr>
-              <a:t>3-6ヶ月</a:t>
-            </a:r>
-          </a:p>
-        </p:txBody>
-      </p:sp>
-      <p:sp>
-        <p:nvSpPr>
-          <p:cNvPr id="36" name="Row2Cost"/>
-          <p:cNvSpPr/>
-          <p:nvPr/>
-        </p:nvSpPr>
-        <p:spPr>
-          <a:xfrm>
-            <a:off x="8674100" y="3225800"/>
-            <a:ext cx="2794000" cy="533400"/>
+            <a:off x="10789920" y="5806440"/>
+            <a:ext cx="960120" cy="502920"/>
           </a:xfrm>
           <a:prstGeom prst="roundRect">
-            <a:avLst>
-              <a:gd name="adj" fmla="val 15000"/>
-            </a:avLst>
+            <a:avLst/>
           </a:prstGeom>
           <a:solidFill>
             <a:srgbClr val="FFFFFF"/>
           </a:solidFill>
-          <a:ln w="6350">
+          <a:ln w="19050">
             <a:solidFill>
-              <a:srgbClr val="DC2626"/>
+              <a:srgbClr val="E0E0E8"/>
             </a:solidFill>
           </a:ln>
         </p:spPr>
-        <p:txBody>
-          <a:bodyPr wrap="square" lIns="0" tIns="0" rIns="0" bIns="0" anchor="ctr"/>
+        <p:style>
+          <a:lnRef idx="1">
+            <a:schemeClr val="accent1"/>
+          </a:lnRef>
+          <a:fillRef idx="3">
+            <a:schemeClr val="accent1"/>
+          </a:fillRef>
+          <a:effectRef idx="2">
+            <a:schemeClr val="accent1"/>
+          </a:effectRef>
+          <a:fontRef idx="minor">
+            <a:schemeClr val="lt1"/>
+          </a:fontRef>
+        </p:style>
+        <p:txBody>
+          <a:bodyPr rtlCol="0" anchor="ctr"/>
           <a:lstStyle/>
           <a:p>
             <a:pPr algn="ctr"/>
-            <a:r>
-              <a:rPr lang="ja-JP" altLang="en-US" sz="1400" b="1" dirty="0">
-                <a:solidFill>
-                  <a:srgbClr val="DC2626"/>
+          </a:p>
+        </p:txBody>
+      </p:sp>
+      <p:sp>
+        <p:nvSpPr>
+          <p:cNvPr id="117" name="TextBox 116"/>
+          <p:cNvSpPr txBox="1"/>
+          <p:nvPr/>
+        </p:nvSpPr>
+        <p:spPr>
+          <a:xfrm>
+            <a:off x="10835640" y="5824728"/>
+            <a:ext cx="868680" cy="228600"/>
+          </a:xfrm>
+          <a:prstGeom prst="rect">
+            <a:avLst/>
+          </a:prstGeom>
+          <a:noFill/>
+        </p:spPr>
+        <p:txBody>
+          <a:bodyPr wrap="square">
+            <a:spAutoFit/>
+          </a:bodyPr>
+          <a:lstStyle/>
+          <a:p>
+            <a:pPr algn="ctr">
+              <a:defRPr sz="1000" b="1">
+                <a:solidFill>
+                  <a:srgbClr val="E63946"/>
                 </a:solidFill>
                 <a:latin typeface="Meiryo UI"/>
-                <a:ea typeface="Meiryo UI"/>
-              </a:rPr>
-              <a:t>約200〜350万円</a:t>
-            </a:r>
-          </a:p>
-        </p:txBody>
-      </p:sp>
-      <p:sp>
-        <p:nvSpPr>
-          <p:cNvPr id="37" name="Row3Bg"/>
+              </a:defRPr>
+            </a:pPr>
+            <a:r>
+              <a:t>約50〜80万円</a:t>
+            </a:r>
+          </a:p>
+        </p:txBody>
+      </p:sp>
+      <p:sp>
+        <p:nvSpPr>
+          <p:cNvPr id="118" name="TextBox 117"/>
+          <p:cNvSpPr txBox="1"/>
+          <p:nvPr/>
+        </p:nvSpPr>
+        <p:spPr>
+          <a:xfrm>
+            <a:off x="10835640" y="6080760"/>
+            <a:ext cx="868680" cy="182880"/>
+          </a:xfrm>
+          <a:prstGeom prst="rect">
+            <a:avLst/>
+          </a:prstGeom>
+          <a:noFill/>
+        </p:spPr>
+        <p:txBody>
+          <a:bodyPr wrap="square">
+            <a:spAutoFit/>
+          </a:bodyPr>
+          <a:lstStyle/>
+          <a:p>
+            <a:pPr algn="ctr">
+              <a:defRPr sz="800" b="0">
+                <a:solidFill>
+                  <a:srgbClr val="666680"/>
+                </a:solidFill>
+                <a:latin typeface="Meiryo UI"/>
+              </a:defRPr>
+            </a:pPr>
+            <a:r>
+              <a:t>2-3週間</a:t>
+            </a:r>
+          </a:p>
+        </p:txBody>
+      </p:sp>
+      <p:sp>
+        <p:nvSpPr>
+          <p:cNvPr id="119" name="Rounded Rectangle 118"/>
           <p:cNvSpPr/>
           <p:nvPr/>
         </p:nvSpPr>
         <p:spPr>
           <a:xfrm>
-            <a:off x="546100" y="3911600"/>
-            <a:ext cx="11099800" cy="736600"/>
+            <a:off x="7315200" y="6446520"/>
+            <a:ext cx="4572000" cy="320040"/>
           </a:xfrm>
           <a:prstGeom prst="roundRect">
-            <a:avLst>
-              <a:gd name="adj" fmla="val 8000"/>
-            </a:avLst>
+            <a:avLst/>
           </a:prstGeom>
           <a:solidFill>
-            <a:srgbClr val="F3F4F6"/>
+            <a:srgbClr val="FDEBED"/>
           </a:solidFill>
-          <a:ln w="6350">
+          <a:ln w="19050">
             <a:solidFill>
-              <a:srgbClr val="E5E7EB"/>
+              <a:srgbClr val="E63946"/>
             </a:solidFill>
           </a:ln>
         </p:spPr>
-        <p:txBody>
-          <a:bodyPr/>
-          <a:lstStyle/>
-          <a:p>
-            <a:endParaRPr lang="ja-JP" altLang="en-US"/>
-          </a:p>
-        </p:txBody>
-      </p:sp>
-      <p:sp>
-        <p:nvSpPr>
-          <p:cNvPr id="38" name="Row3Ver"/>
-          <p:cNvSpPr/>
-          <p:nvPr/>
-        </p:nvSpPr>
-        <p:spPr>
-          <a:xfrm>
-            <a:off x="673100" y="4102100"/>
-            <a:ext cx="660400" cy="355600"/>
-          </a:xfrm>
-          <a:prstGeom prst="roundRect">
-            <a:avLst>
-              <a:gd name="adj" fmla="val 25000"/>
-            </a:avLst>
-          </a:prstGeom>
-          <a:solidFill>
-            <a:srgbClr val="B45309"/>
-          </a:solidFill>
-          <a:ln>
-            <a:noFill/>
-          </a:ln>
-        </p:spPr>
-        <p:txBody>
-          <a:bodyPr wrap="square" lIns="0" tIns="0" rIns="0" bIns="0" anchor="ctr"/>
+        <p:style>
+          <a:lnRef idx="1">
+            <a:schemeClr val="accent1"/>
+          </a:lnRef>
+          <a:fillRef idx="3">
+            <a:schemeClr val="accent1"/>
+          </a:fillRef>
+          <a:effectRef idx="2">
+            <a:schemeClr val="accent1"/>
+          </a:effectRef>
+          <a:fontRef idx="minor">
+            <a:schemeClr val="lt1"/>
+          </a:fontRef>
+        </p:style>
+        <p:txBody>
+          <a:bodyPr rtlCol="0" anchor="ctr"/>
           <a:lstStyle/>
           <a:p>
             <a:pPr algn="ctr"/>
-            <a:r>
-              <a:rPr lang="en-US" altLang="ja-JP" sz="1300" b="1" dirty="0">
-                <a:solidFill>
-                  <a:srgbClr val="FFFFFF"/>
+          </a:p>
+        </p:txBody>
+      </p:sp>
+      <p:sp>
+        <p:nvSpPr>
+          <p:cNvPr id="120" name="TextBox 119"/>
+          <p:cNvSpPr txBox="1"/>
+          <p:nvPr/>
+        </p:nvSpPr>
+        <p:spPr>
+          <a:xfrm>
+            <a:off x="7498080" y="6473952"/>
+            <a:ext cx="3200400" cy="274320"/>
+          </a:xfrm>
+          <a:prstGeom prst="rect">
+            <a:avLst/>
+          </a:prstGeom>
+          <a:noFill/>
+        </p:spPr>
+        <p:txBody>
+          <a:bodyPr wrap="square">
+            <a:spAutoFit/>
+          </a:bodyPr>
+          <a:lstStyle/>
+          <a:p>
+            <a:pPr algn="l">
+              <a:defRPr sz="1100" b="1">
+                <a:solidFill>
+                  <a:srgbClr val="E63946"/>
                 </a:solidFill>
                 <a:latin typeface="Meiryo UI"/>
-                <a:ea typeface="Meiryo UI"/>
-              </a:rPr>
-              <a:t>v2.5</a:t>
-            </a:r>
-          </a:p>
-        </p:txBody>
-      </p:sp>
-      <p:sp>
-        <p:nvSpPr>
-          <p:cNvPr id="39" name="Row3Name"/>
-          <p:cNvSpPr/>
-          <p:nvPr/>
-        </p:nvSpPr>
-        <p:spPr>
-          <a:xfrm>
-            <a:off x="1460500" y="3975100"/>
-            <a:ext cx="2540000" cy="304800"/>
+              </a:defRPr>
+            </a:pPr>
+            <a:r>
+              <a:t>全拡張の概算合計: 約610〜1,050万円（Phase 2-3 で段階的に投資）</a:t>
+            </a:r>
+          </a:p>
+        </p:txBody>
+      </p:sp>
+      <p:sp>
+        <p:nvSpPr>
+          <p:cNvPr id="121" name="TextBox 120"/>
+          <p:cNvSpPr txBox="1"/>
+          <p:nvPr/>
+        </p:nvSpPr>
+        <p:spPr>
+          <a:xfrm>
+            <a:off x="548640" y="6583680"/>
+            <a:ext cx="6400800" cy="182880"/>
           </a:xfrm>
           <a:prstGeom prst="rect">
             <a:avLst/>
           </a:prstGeom>
           <a:noFill/>
-          <a:ln>
-            <a:noFill/>
-          </a:ln>
-        </p:spPr>
-        <p:txBody>
-          <a:bodyPr wrap="square" lIns="0" tIns="0" rIns="0" bIns="0"/>
-          <a:lstStyle/>
-          <a:p>
-            <a:pPr algn="l"/>
-            <a:r>
-              <a:rPr lang="ja-JP" altLang="en-US" sz="1600" b="1" dirty="0">
-                <a:solidFill>
-                  <a:srgbClr val="0F172A"/>
+        </p:spPr>
+        <p:txBody>
+          <a:bodyPr wrap="square">
+            <a:spAutoFit/>
+          </a:bodyPr>
+          <a:lstStyle/>
+          <a:p>
+            <a:pPr algn="l">
+              <a:defRPr sz="800" b="0">
+                <a:solidFill>
+                  <a:srgbClr val="9CA3AF"/>
                 </a:solidFill>
                 <a:latin typeface="Meiryo UI"/>
-                <a:ea typeface="Meiryo UI"/>
-              </a:rPr>
-              <a:t>AIハイライト自動生成</a:t>
-            </a:r>
-          </a:p>
-        </p:txBody>
-      </p:sp>
-      <p:sp>
-        <p:nvSpPr>
-          <p:cNvPr id="40" name="Row3Desc"/>
-          <p:cNvSpPr/>
-          <p:nvPr/>
-        </p:nvSpPr>
-        <p:spPr>
-          <a:xfrm>
-            <a:off x="1460500" y="4279900"/>
-            <a:ext cx="2540000" cy="330200"/>
-          </a:xfrm>
-          <a:prstGeom prst="rect">
-            <a:avLst/>
-          </a:prstGeom>
-          <a:noFill/>
-          <a:ln>
-            <a:noFill/>
-          </a:ln>
-        </p:spPr>
-        <p:txBody>
-          <a:bodyPr wrap="square" lIns="0" tIns="0" rIns="0" bIns="0"/>
-          <a:lstStyle/>
-          <a:p>
-            <a:pPr algn="l"/>
-            <a:r>
-              <a:rPr lang="ja-JP" altLang="en-US" sz="1200" dirty="0">
-                <a:solidFill>
-                  <a:srgbClr val="666680"/>
-                </a:solidFill>
-                <a:latin typeface="Meiryo UI"/>
-                <a:ea typeface="Meiryo UI"/>
-              </a:rPr>
-              <a:t>試合のハイライトを</a:t>
-            </a:r>
-            <a:br/>
-            <a:r>
-              <a:rPr lang="ja-JP" altLang="en-US" sz="1200" dirty="0">
-                <a:solidFill>
-                  <a:srgbClr val="666680"/>
-                </a:solidFill>
-                <a:latin typeface="Meiryo UI"/>
-                <a:ea typeface="Meiryo UI"/>
-              </a:rPr>
-              <a:t>AIが自動編集・生成</a:t>
-            </a:r>
-          </a:p>
-        </p:txBody>
-      </p:sp>
-      <p:sp>
-        <p:nvSpPr>
-          <p:cNvPr id="41" name="Row3TechLabel"/>
-          <p:cNvSpPr/>
-          <p:nvPr/>
-        </p:nvSpPr>
-        <p:spPr>
-          <a:xfrm>
-            <a:off x="4229100" y="3975100"/>
-            <a:ext cx="2286000" cy="203200"/>
-          </a:xfrm>
-          <a:prstGeom prst="rect">
-            <a:avLst/>
-          </a:prstGeom>
-          <a:noFill/>
-          <a:ln>
-            <a:noFill/>
-          </a:ln>
-        </p:spPr>
-        <p:txBody>
-          <a:bodyPr wrap="square" lIns="0" tIns="0" rIns="0" bIns="0"/>
-          <a:lstStyle/>
-          <a:p>
-            <a:pPr algn="l"/>
-            <a:r>
-              <a:rPr lang="ja-JP" altLang="en-US" sz="1100" dirty="0">
-                <a:solidFill>
-                  <a:srgbClr val="9CA3AF"/>
-                </a:solidFill>
-                <a:latin typeface="Meiryo UI"/>
-                <a:ea typeface="Meiryo UI"/>
-              </a:rPr>
-              <a:t>技術:</a:t>
-            </a:r>
-          </a:p>
-        </p:txBody>
-      </p:sp>
-      <p:sp>
-        <p:nvSpPr>
-          <p:cNvPr id="42" name="Row3Tech"/>
-          <p:cNvSpPr/>
-          <p:nvPr/>
-        </p:nvSpPr>
-        <p:spPr>
-          <a:xfrm>
-            <a:off x="4229100" y="4178300"/>
-            <a:ext cx="2286000" cy="406400"/>
-          </a:xfrm>
-          <a:prstGeom prst="rect">
-            <a:avLst/>
-          </a:prstGeom>
-          <a:noFill/>
-          <a:ln>
-            <a:noFill/>
-          </a:ln>
-        </p:spPr>
-        <p:txBody>
-          <a:bodyPr wrap="square" lIns="0" tIns="0" rIns="0" bIns="0"/>
-          <a:lstStyle/>
-          <a:p>
-            <a:pPr algn="l"/>
-            <a:r>
-              <a:rPr lang="ja-JP" altLang="en-US" sz="1200" dirty="0">
-                <a:solidFill>
-                  <a:srgbClr val="1A1A2E"/>
-                </a:solidFill>
-                <a:latin typeface="Meiryo UI"/>
-                <a:ea typeface="Meiryo UI"/>
-              </a:rPr>
-              <a:t>動画解析AI + FFmpeg</a:t>
-            </a:r>
-          </a:p>
-        </p:txBody>
-      </p:sp>
-      <p:sp>
-        <p:nvSpPr>
-          <p:cNvPr id="43" name="Row3Period"/>
-          <p:cNvSpPr/>
-          <p:nvPr/>
-        </p:nvSpPr>
-        <p:spPr>
-          <a:xfrm>
-            <a:off x="6769100" y="3975100"/>
-            <a:ext cx="1524000" cy="203200"/>
-          </a:xfrm>
-          <a:prstGeom prst="rect">
-            <a:avLst/>
-          </a:prstGeom>
-          <a:noFill/>
-          <a:ln>
-            <a:noFill/>
-          </a:ln>
-        </p:spPr>
-        <p:txBody>
-          <a:bodyPr wrap="square" lIns="0" tIns="0" rIns="0" bIns="0"/>
-          <a:lstStyle/>
-          <a:p>
-            <a:pPr algn="l"/>
-            <a:r>
-              <a:rPr lang="ja-JP" altLang="en-US" sz="1100" dirty="0">
-                <a:solidFill>
-                  <a:srgbClr val="9CA3AF"/>
-                </a:solidFill>
-                <a:latin typeface="Meiryo UI"/>
-                <a:ea typeface="Meiryo UI"/>
-              </a:rPr>
-              <a:t>期間:</a:t>
-            </a:r>
-          </a:p>
-        </p:txBody>
-      </p:sp>
-      <p:sp>
-        <p:nvSpPr>
-          <p:cNvPr id="44" name="Row3PeriodVal"/>
-          <p:cNvSpPr/>
-          <p:nvPr/>
-        </p:nvSpPr>
-        <p:spPr>
-          <a:xfrm>
-            <a:off x="6769100" y="4178300"/>
-            <a:ext cx="1524000" cy="279400"/>
-          </a:xfrm>
-          <a:prstGeom prst="rect">
-            <a:avLst/>
-          </a:prstGeom>
-          <a:noFill/>
-          <a:ln>
-            <a:noFill/>
-          </a:ln>
-        </p:spPr>
-        <p:txBody>
-          <a:bodyPr wrap="square" lIns="0" tIns="0" rIns="0" bIns="0"/>
-          <a:lstStyle/>
-          <a:p>
-            <a:pPr algn="l"/>
-            <a:r>
-              <a:rPr lang="ja-JP" altLang="en-US" sz="1300" dirty="0">
-                <a:solidFill>
-                  <a:srgbClr val="1A1A2E"/>
-                </a:solidFill>
-                <a:latin typeface="Meiryo UI"/>
-                <a:ea typeface="Meiryo UI"/>
-              </a:rPr>
-              <a:t>2-4ヶ月</a:t>
-            </a:r>
-          </a:p>
-        </p:txBody>
-      </p:sp>
-      <p:sp>
-        <p:nvSpPr>
-          <p:cNvPr id="45" name="Row3Cost"/>
-          <p:cNvSpPr/>
-          <p:nvPr/>
-        </p:nvSpPr>
-        <p:spPr>
-          <a:xfrm>
-            <a:off x="8674100" y="4013200"/>
-            <a:ext cx="2794000" cy="533400"/>
-          </a:xfrm>
-          <a:prstGeom prst="roundRect">
-            <a:avLst>
-              <a:gd name="adj" fmla="val 15000"/>
-            </a:avLst>
-          </a:prstGeom>
-          <a:solidFill>
-            <a:srgbClr val="FFFFFF"/>
-          </a:solidFill>
-          <a:ln w="6350">
-            <a:solidFill>
-              <a:srgbClr val="DC2626"/>
-            </a:solidFill>
-          </a:ln>
-        </p:spPr>
-        <p:txBody>
-          <a:bodyPr wrap="square" lIns="0" tIns="0" rIns="0" bIns="0" anchor="ctr"/>
-          <a:lstStyle/>
-          <a:p>
-            <a:pPr algn="ctr"/>
-            <a:r>
-              <a:rPr lang="ja-JP" altLang="en-US" sz="1400" b="1" dirty="0">
-                <a:solidFill>
-                  <a:srgbClr val="DC2626"/>
-                </a:solidFill>
-                <a:latin typeface="Meiryo UI"/>
-                <a:ea typeface="Meiryo UI"/>
-              </a:rPr>
-              <a:t>約150〜250万円</a:t>
-            </a:r>
-          </a:p>
-        </p:txBody>
-      </p:sp>
-      <p:sp>
-        <p:nvSpPr>
-          <p:cNvPr id="46" name="Row4Bg"/>
-          <p:cNvSpPr/>
-          <p:nvPr/>
-        </p:nvSpPr>
-        <p:spPr>
-          <a:xfrm>
-            <a:off x="546100" y="4699000"/>
-            <a:ext cx="11099800" cy="736600"/>
-          </a:xfrm>
-          <a:prstGeom prst="roundRect">
-            <a:avLst>
-              <a:gd name="adj" fmla="val 8000"/>
-            </a:avLst>
-          </a:prstGeom>
-          <a:solidFill>
-            <a:srgbClr val="F3F4F6"/>
-          </a:solidFill>
-          <a:ln w="6350">
-            <a:solidFill>
-              <a:srgbClr val="E5E7EB"/>
-            </a:solidFill>
-          </a:ln>
-        </p:spPr>
-        <p:txBody>
-          <a:bodyPr/>
-          <a:lstStyle/>
-          <a:p>
-            <a:endParaRPr lang="ja-JP" altLang="en-US"/>
-          </a:p>
-        </p:txBody>
-      </p:sp>
-      <p:sp>
-        <p:nvSpPr>
-          <p:cNvPr id="47" name="Row4Ver"/>
-          <p:cNvSpPr/>
-          <p:nvPr/>
-        </p:nvSpPr>
-        <p:spPr>
-          <a:xfrm>
-            <a:off x="673100" y="4889500"/>
-            <a:ext cx="660400" cy="355600"/>
-          </a:xfrm>
-          <a:prstGeom prst="roundRect">
-            <a:avLst>
-              <a:gd name="adj" fmla="val 25000"/>
-            </a:avLst>
-          </a:prstGeom>
-          <a:solidFill>
-            <a:srgbClr val="E63946"/>
-          </a:solidFill>
-          <a:ln>
-            <a:noFill/>
-          </a:ln>
-        </p:spPr>
-        <p:txBody>
-          <a:bodyPr wrap="square" lIns="0" tIns="0" rIns="0" bIns="0" anchor="ctr"/>
-          <a:lstStyle/>
-          <a:p>
-            <a:pPr algn="ctr"/>
-            <a:r>
-              <a:rPr lang="en-US" altLang="ja-JP" sz="1300" b="1" dirty="0">
-                <a:solidFill>
-                  <a:srgbClr val="FFFFFF"/>
-                </a:solidFill>
-                <a:latin typeface="Meiryo UI"/>
-                <a:ea typeface="Meiryo UI"/>
-              </a:rPr>
-              <a:t>v3.0</a:t>
-            </a:r>
-          </a:p>
-        </p:txBody>
-      </p:sp>
-      <p:sp>
-        <p:nvSpPr>
-          <p:cNvPr id="48" name="Row4Name"/>
-          <p:cNvSpPr/>
-          <p:nvPr/>
-        </p:nvSpPr>
-        <p:spPr>
-          <a:xfrm>
-            <a:off x="1460500" y="4762500"/>
-            <a:ext cx="2540000" cy="304800"/>
-          </a:xfrm>
-          <a:prstGeom prst="rect">
-            <a:avLst/>
-          </a:prstGeom>
-          <a:noFill/>
-          <a:ln>
-            <a:noFill/>
-          </a:ln>
-        </p:spPr>
-        <p:txBody>
-          <a:bodyPr wrap="square" lIns="0" tIns="0" rIns="0" bIns="0"/>
-          <a:lstStyle/>
-          <a:p>
-            <a:pPr algn="l"/>
-            <a:r>
-              <a:rPr lang="ja-JP" altLang="en-US" sz="1600" b="1" dirty="0">
-                <a:solidFill>
-                  <a:srgbClr val="0F172A"/>
-                </a:solidFill>
-                <a:latin typeface="Meiryo UI"/>
-                <a:ea typeface="Meiryo UI"/>
-              </a:rPr>
-              <a:t>AI得点検知</a:t>
-            </a:r>
-          </a:p>
-        </p:txBody>
-      </p:sp>
-      <p:sp>
-        <p:nvSpPr>
-          <p:cNvPr id="49" name="Row4Desc"/>
-          <p:cNvSpPr/>
-          <p:nvPr/>
-        </p:nvSpPr>
-        <p:spPr>
-          <a:xfrm>
-            <a:off x="1460500" y="5067300"/>
-            <a:ext cx="2540000" cy="330200"/>
-          </a:xfrm>
-          <a:prstGeom prst="rect">
-            <a:avLst/>
-          </a:prstGeom>
-          <a:noFill/>
-          <a:ln>
-            <a:noFill/>
-          </a:ln>
-        </p:spPr>
-        <p:txBody>
-          <a:bodyPr wrap="square" lIns="0" tIns="0" rIns="0" bIns="0"/>
-          <a:lstStyle/>
-          <a:p>
-            <a:pPr algn="l"/>
-            <a:r>
-              <a:rPr lang="ja-JP" altLang="en-US" sz="1200" dirty="0">
-                <a:solidFill>
-                  <a:srgbClr val="666680"/>
-                </a:solidFill>
-                <a:latin typeface="Meiryo UI"/>
-                <a:ea typeface="Meiryo UI"/>
-              </a:rPr>
-              <a:t>映像・音声からAIが得点を</a:t>
-            </a:r>
-            <a:br/>
-            <a:r>
-              <a:rPr lang="ja-JP" altLang="en-US" sz="1200" dirty="0">
-                <a:solidFill>
-                  <a:srgbClr val="666680"/>
-                </a:solidFill>
-                <a:latin typeface="Meiryo UI"/>
-                <a:ea typeface="Meiryo UI"/>
-              </a:rPr>
-              <a:t>検知しスコア自動更新</a:t>
-            </a:r>
-          </a:p>
-        </p:txBody>
-      </p:sp>
-      <p:sp>
-        <p:nvSpPr>
-          <p:cNvPr id="50" name="Row4TechLabel"/>
-          <p:cNvSpPr/>
-          <p:nvPr/>
-        </p:nvSpPr>
-        <p:spPr>
-          <a:xfrm>
-            <a:off x="4229100" y="4762500"/>
-            <a:ext cx="2286000" cy="203200"/>
-          </a:xfrm>
-          <a:prstGeom prst="rect">
-            <a:avLst/>
-          </a:prstGeom>
-          <a:noFill/>
-          <a:ln>
-            <a:noFill/>
-          </a:ln>
-        </p:spPr>
-        <p:txBody>
-          <a:bodyPr wrap="square" lIns="0" tIns="0" rIns="0" bIns="0"/>
-          <a:lstStyle/>
-          <a:p>
-            <a:pPr algn="l"/>
-            <a:r>
-              <a:rPr lang="ja-JP" altLang="en-US" sz="1100" dirty="0">
-                <a:solidFill>
-                  <a:srgbClr val="9CA3AF"/>
-                </a:solidFill>
-                <a:latin typeface="Meiryo UI"/>
-                <a:ea typeface="Meiryo UI"/>
-              </a:rPr>
-              <a:t>技術:</a:t>
-            </a:r>
-          </a:p>
-        </p:txBody>
-      </p:sp>
-      <p:sp>
-        <p:nvSpPr>
-          <p:cNvPr id="51" name="Row4Tech"/>
-          <p:cNvSpPr/>
-          <p:nvPr/>
-        </p:nvSpPr>
-        <p:spPr>
-          <a:xfrm>
-            <a:off x="4229100" y="4965700"/>
-            <a:ext cx="2286000" cy="406400"/>
-          </a:xfrm>
-          <a:prstGeom prst="rect">
-            <a:avLst/>
-          </a:prstGeom>
-          <a:noFill/>
-          <a:ln>
-            <a:noFill/>
-          </a:ln>
-        </p:spPr>
-        <p:txBody>
-          <a:bodyPr wrap="square" lIns="0" tIns="0" rIns="0" bIns="0"/>
-          <a:lstStyle/>
-          <a:p>
-            <a:pPr algn="l"/>
-            <a:r>
-              <a:rPr lang="ja-JP" altLang="en-US" sz="1200" dirty="0">
-                <a:solidFill>
-                  <a:srgbClr val="1A1A2E"/>
-                </a:solidFill>
-                <a:latin typeface="Meiryo UI"/>
-                <a:ea typeface="Meiryo UI"/>
-              </a:rPr>
-              <a:t>映像解析AI / 音声認識</a:t>
-            </a:r>
-          </a:p>
-        </p:txBody>
-      </p:sp>
-      <p:sp>
-        <p:nvSpPr>
-          <p:cNvPr id="52" name="Row4Period"/>
-          <p:cNvSpPr/>
-          <p:nvPr/>
-        </p:nvSpPr>
-        <p:spPr>
-          <a:xfrm>
-            <a:off x="6769100" y="4762500"/>
-            <a:ext cx="1524000" cy="203200"/>
-          </a:xfrm>
-          <a:prstGeom prst="rect">
-            <a:avLst/>
-          </a:prstGeom>
-          <a:noFill/>
-          <a:ln>
-            <a:noFill/>
-          </a:ln>
-        </p:spPr>
-        <p:txBody>
-          <a:bodyPr wrap="square" lIns="0" tIns="0" rIns="0" bIns="0"/>
-          <a:lstStyle/>
-          <a:p>
-            <a:pPr algn="l"/>
-            <a:r>
-              <a:rPr lang="ja-JP" altLang="en-US" sz="1100" dirty="0">
-                <a:solidFill>
-                  <a:srgbClr val="9CA3AF"/>
-                </a:solidFill>
-                <a:latin typeface="Meiryo UI"/>
-                <a:ea typeface="Meiryo UI"/>
-              </a:rPr>
-              <a:t>期間:</a:t>
-            </a:r>
-          </a:p>
-        </p:txBody>
-      </p:sp>
-      <p:sp>
-        <p:nvSpPr>
-          <p:cNvPr id="53" name="Row4PeriodVal"/>
-          <p:cNvSpPr/>
-          <p:nvPr/>
-        </p:nvSpPr>
-        <p:spPr>
-          <a:xfrm>
-            <a:off x="6769100" y="4965700"/>
-            <a:ext cx="1524000" cy="279400"/>
-          </a:xfrm>
-          <a:prstGeom prst="rect">
-            <a:avLst/>
-          </a:prstGeom>
-          <a:noFill/>
-          <a:ln>
-            <a:noFill/>
-          </a:ln>
-        </p:spPr>
-        <p:txBody>
-          <a:bodyPr wrap="square" lIns="0" tIns="0" rIns="0" bIns="0"/>
-          <a:lstStyle/>
-          <a:p>
-            <a:pPr algn="l"/>
-            <a:r>
-              <a:rPr lang="ja-JP" altLang="en-US" sz="1300" dirty="0">
-                <a:solidFill>
-                  <a:srgbClr val="1A1A2E"/>
-                </a:solidFill>
-                <a:latin typeface="Meiryo UI"/>
-                <a:ea typeface="Meiryo UI"/>
-              </a:rPr>
-              <a:t>3-6ヶ月</a:t>
-            </a:r>
-          </a:p>
-        </p:txBody>
-      </p:sp>
-      <p:sp>
-        <p:nvSpPr>
-          <p:cNvPr id="54" name="Row4Cost"/>
-          <p:cNvSpPr/>
-          <p:nvPr/>
-        </p:nvSpPr>
-        <p:spPr>
-          <a:xfrm>
-            <a:off x="8674100" y="4800600"/>
-            <a:ext cx="2794000" cy="533400"/>
-          </a:xfrm>
-          <a:prstGeom prst="roundRect">
-            <a:avLst>
-              <a:gd name="adj" fmla="val 15000"/>
-            </a:avLst>
-          </a:prstGeom>
-          <a:solidFill>
-            <a:srgbClr val="FFFFFF"/>
-          </a:solidFill>
-          <a:ln w="6350">
-            <a:solidFill>
-              <a:srgbClr val="DC2626"/>
-            </a:solidFill>
-          </a:ln>
-        </p:spPr>
-        <p:txBody>
-          <a:bodyPr wrap="square" lIns="0" tIns="0" rIns="0" bIns="0" anchor="ctr"/>
-          <a:lstStyle/>
-          <a:p>
-            <a:pPr algn="ctr"/>
-            <a:r>
-              <a:rPr lang="ja-JP" altLang="en-US" sz="1400" b="1" dirty="0">
-                <a:solidFill>
-                  <a:srgbClr val="DC2626"/>
-                </a:solidFill>
-                <a:latin typeface="Meiryo UI"/>
-                <a:ea typeface="Meiryo UI"/>
-              </a:rPr>
-              <a:t>約100〜200万円</a:t>
-            </a:r>
-          </a:p>
-        </p:txBody>
-      </p:sp>
-      <p:sp>
-        <p:nvSpPr>
-          <p:cNvPr id="55" name="Row5Bg"/>
-          <p:cNvSpPr/>
-          <p:nvPr/>
-        </p:nvSpPr>
-        <p:spPr>
-          <a:xfrm>
-            <a:off x="546100" y="5486400"/>
-            <a:ext cx="11099800" cy="736600"/>
-          </a:xfrm>
-          <a:prstGeom prst="roundRect">
-            <a:avLst>
-              <a:gd name="adj" fmla="val 8000"/>
-            </a:avLst>
-          </a:prstGeom>
-          <a:solidFill>
-            <a:srgbClr val="F3F4F6"/>
-          </a:solidFill>
-          <a:ln w="6350">
-            <a:solidFill>
-              <a:srgbClr val="E5E7EB"/>
-            </a:solidFill>
-          </a:ln>
-        </p:spPr>
-        <p:txBody>
-          <a:bodyPr/>
-          <a:lstStyle/>
-          <a:p>
-            <a:endParaRPr lang="ja-JP" altLang="en-US"/>
-          </a:p>
-        </p:txBody>
-      </p:sp>
-      <p:sp>
-        <p:nvSpPr>
-          <p:cNvPr id="56" name="Row5Ver"/>
-          <p:cNvSpPr/>
-          <p:nvPr/>
-        </p:nvSpPr>
-        <p:spPr>
-          <a:xfrm>
-            <a:off x="673100" y="5676900"/>
-            <a:ext cx="660400" cy="355600"/>
-          </a:xfrm>
-          <a:prstGeom prst="roundRect">
-            <a:avLst>
-              <a:gd name="adj" fmla="val 25000"/>
-            </a:avLst>
-          </a:prstGeom>
-          <a:solidFill>
-            <a:srgbClr val="9333EA"/>
-          </a:solidFill>
-          <a:ln>
-            <a:noFill/>
-          </a:ln>
-        </p:spPr>
-        <p:txBody>
-          <a:bodyPr wrap="square" lIns="0" tIns="0" rIns="0" bIns="0" anchor="ctr"/>
-          <a:lstStyle/>
-          <a:p>
-            <a:pPr algn="ctr"/>
-            <a:r>
-              <a:rPr lang="en-US" altLang="ja-JP" sz="1300" b="1" dirty="0">
-                <a:solidFill>
-                  <a:srgbClr val="FFFFFF"/>
-                </a:solidFill>
-                <a:latin typeface="Meiryo UI"/>
-                <a:ea typeface="Meiryo UI"/>
-              </a:rPr>
-              <a:t>v3.5</a:t>
-            </a:r>
-          </a:p>
-        </p:txBody>
-      </p:sp>
-      <p:sp>
-        <p:nvSpPr>
-          <p:cNvPr id="57" name="Row5Name"/>
-          <p:cNvSpPr/>
-          <p:nvPr/>
-        </p:nvSpPr>
-        <p:spPr>
-          <a:xfrm>
-            <a:off x="1460500" y="5549900"/>
-            <a:ext cx="2540000" cy="304800"/>
-          </a:xfrm>
-          <a:prstGeom prst="rect">
-            <a:avLst/>
-          </a:prstGeom>
-          <a:noFill/>
-          <a:ln>
-            <a:noFill/>
-          </a:ln>
-        </p:spPr>
-        <p:txBody>
-          <a:bodyPr wrap="square" lIns="0" tIns="0" rIns="0" bIns="0"/>
-          <a:lstStyle/>
-          <a:p>
-            <a:pPr algn="l"/>
-            <a:r>
-              <a:rPr lang="ja-JP" altLang="en-US" sz="1600" b="1" dirty="0">
-                <a:solidFill>
-                  <a:srgbClr val="0F172A"/>
-                </a:solidFill>
-                <a:latin typeface="Meiryo UI"/>
-                <a:ea typeface="Meiryo UI"/>
-              </a:rPr>
-              <a:t>SNS自動投稿</a:t>
-            </a:r>
-          </a:p>
-        </p:txBody>
-      </p:sp>
-      <p:sp>
-        <p:nvSpPr>
-          <p:cNvPr id="58" name="Row5Desc"/>
-          <p:cNvSpPr/>
-          <p:nvPr/>
-        </p:nvSpPr>
-        <p:spPr>
-          <a:xfrm>
-            <a:off x="1460500" y="5854700"/>
-            <a:ext cx="2540000" cy="330200"/>
-          </a:xfrm>
-          <a:prstGeom prst="rect">
-            <a:avLst/>
-          </a:prstGeom>
-          <a:noFill/>
-          <a:ln>
-            <a:noFill/>
-          </a:ln>
-        </p:spPr>
-        <p:txBody>
-          <a:bodyPr wrap="square" lIns="0" tIns="0" rIns="0" bIns="0"/>
-          <a:lstStyle/>
-          <a:p>
-            <a:pPr algn="l"/>
-            <a:r>
-              <a:rPr lang="ja-JP" altLang="en-US" sz="1200" dirty="0">
-                <a:solidFill>
-                  <a:srgbClr val="666680"/>
-                </a:solidFill>
-                <a:latin typeface="Meiryo UI"/>
-                <a:ea typeface="Meiryo UI"/>
-              </a:rPr>
-              <a:t>ハイライトをInstagram</a:t>
-            </a:r>
-            <a:br/>
-            <a:r>
-              <a:rPr lang="ja-JP" altLang="en-US" sz="1200" dirty="0">
-                <a:solidFill>
-                  <a:srgbClr val="666680"/>
-                </a:solidFill>
-                <a:latin typeface="Meiryo UI"/>
-                <a:ea typeface="Meiryo UI"/>
-              </a:rPr>
-              <a:t>TikTokに自動投稿</a:t>
-            </a:r>
-          </a:p>
-        </p:txBody>
-      </p:sp>
-      <p:sp>
-        <p:nvSpPr>
-          <p:cNvPr id="59" name="Row5TechLabel"/>
-          <p:cNvSpPr/>
-          <p:nvPr/>
-        </p:nvSpPr>
-        <p:spPr>
-          <a:xfrm>
-            <a:off x="4229100" y="5549900"/>
-            <a:ext cx="2286000" cy="203200"/>
-          </a:xfrm>
-          <a:prstGeom prst="rect">
-            <a:avLst/>
-          </a:prstGeom>
-          <a:noFill/>
-          <a:ln>
-            <a:noFill/>
-          </a:ln>
-        </p:spPr>
-        <p:txBody>
-          <a:bodyPr wrap="square" lIns="0" tIns="0" rIns="0" bIns="0"/>
-          <a:lstStyle/>
-          <a:p>
-            <a:pPr algn="l"/>
-            <a:r>
-              <a:rPr lang="ja-JP" altLang="en-US" sz="1100" dirty="0">
-                <a:solidFill>
-                  <a:srgbClr val="9CA3AF"/>
-                </a:solidFill>
-                <a:latin typeface="Meiryo UI"/>
-                <a:ea typeface="Meiryo UI"/>
-              </a:rPr>
-              <a:t>技術:</a:t>
-            </a:r>
-          </a:p>
-        </p:txBody>
-      </p:sp>
-      <p:sp>
-        <p:nvSpPr>
-          <p:cNvPr id="60" name="Row5Tech"/>
-          <p:cNvSpPr/>
-          <p:nvPr/>
-        </p:nvSpPr>
-        <p:spPr>
-          <a:xfrm>
-            <a:off x="4229100" y="5753100"/>
-            <a:ext cx="2286000" cy="406400"/>
-          </a:xfrm>
-          <a:prstGeom prst="rect">
-            <a:avLst/>
-          </a:prstGeom>
-          <a:noFill/>
-          <a:ln>
-            <a:noFill/>
-          </a:ln>
-        </p:spPr>
-        <p:txBody>
-          <a:bodyPr wrap="square" lIns="0" tIns="0" rIns="0" bIns="0"/>
-          <a:lstStyle/>
-          <a:p>
-            <a:pPr algn="l"/>
-            <a:r>
-              <a:rPr lang="ja-JP" altLang="en-US" sz="1200" dirty="0">
-                <a:solidFill>
-                  <a:srgbClr val="1A1A2E"/>
-                </a:solidFill>
-                <a:latin typeface="Meiryo UI"/>
-                <a:ea typeface="Meiryo UI"/>
-              </a:rPr>
-              <a:t>各SNS API連携</a:t>
-            </a:r>
-          </a:p>
-        </p:txBody>
-      </p:sp>
-      <p:sp>
-        <p:nvSpPr>
-          <p:cNvPr id="61" name="Row5Period"/>
-          <p:cNvSpPr/>
-          <p:nvPr/>
-        </p:nvSpPr>
-        <p:spPr>
-          <a:xfrm>
-            <a:off x="6769100" y="5549900"/>
-            <a:ext cx="1524000" cy="203200"/>
-          </a:xfrm>
-          <a:prstGeom prst="rect">
-            <a:avLst/>
-          </a:prstGeom>
-          <a:noFill/>
-          <a:ln>
-            <a:noFill/>
-          </a:ln>
-        </p:spPr>
-        <p:txBody>
-          <a:bodyPr wrap="square" lIns="0" tIns="0" rIns="0" bIns="0"/>
-          <a:lstStyle/>
-          <a:p>
-            <a:pPr algn="l"/>
-            <a:r>
-              <a:rPr lang="ja-JP" altLang="en-US" sz="1100" dirty="0">
-                <a:solidFill>
-                  <a:srgbClr val="9CA3AF"/>
-                </a:solidFill>
-                <a:latin typeface="Meiryo UI"/>
-                <a:ea typeface="Meiryo UI"/>
-              </a:rPr>
-              <a:t>期間:</a:t>
-            </a:r>
-          </a:p>
-        </p:txBody>
-      </p:sp>
-      <p:sp>
-        <p:nvSpPr>
-          <p:cNvPr id="62" name="Row5PeriodVal"/>
-          <p:cNvSpPr/>
-          <p:nvPr/>
-        </p:nvSpPr>
-        <p:spPr>
-          <a:xfrm>
-            <a:off x="6769100" y="5753100"/>
-            <a:ext cx="1524000" cy="279400"/>
-          </a:xfrm>
-          <a:prstGeom prst="rect">
-            <a:avLst/>
-          </a:prstGeom>
-          <a:noFill/>
-          <a:ln>
-            <a:noFill/>
-          </a:ln>
-        </p:spPr>
-        <p:txBody>
-          <a:bodyPr wrap="square" lIns="0" tIns="0" rIns="0" bIns="0"/>
-          <a:lstStyle/>
-          <a:p>
-            <a:pPr algn="l"/>
-            <a:r>
-              <a:rPr lang="ja-JP" altLang="en-US" sz="1300" dirty="0">
-                <a:solidFill>
-                  <a:srgbClr val="1A1A2E"/>
-                </a:solidFill>
-                <a:latin typeface="Meiryo UI"/>
-                <a:ea typeface="Meiryo UI"/>
-              </a:rPr>
-              <a:t>2-3週間</a:t>
-            </a:r>
-          </a:p>
-        </p:txBody>
-      </p:sp>
-      <p:sp>
-        <p:nvSpPr>
-          <p:cNvPr id="63" name="Row5Cost"/>
-          <p:cNvSpPr/>
-          <p:nvPr/>
-        </p:nvSpPr>
-        <p:spPr>
-          <a:xfrm>
-            <a:off x="8674100" y="5588000"/>
-            <a:ext cx="2794000" cy="533400"/>
-          </a:xfrm>
-          <a:prstGeom prst="roundRect">
-            <a:avLst>
-              <a:gd name="adj" fmla="val 15000"/>
-            </a:avLst>
-          </a:prstGeom>
-          <a:solidFill>
-            <a:srgbClr val="FFFFFF"/>
-          </a:solidFill>
-          <a:ln w="6350">
-            <a:solidFill>
-              <a:srgbClr val="DC2626"/>
-            </a:solidFill>
-          </a:ln>
-        </p:spPr>
-        <p:txBody>
-          <a:bodyPr wrap="square" lIns="0" tIns="0" rIns="0" bIns="0" anchor="ctr"/>
-          <a:lstStyle/>
-          <a:p>
-            <a:pPr algn="ctr"/>
-            <a:r>
-              <a:rPr lang="ja-JP" altLang="en-US" sz="1400" b="1" dirty="0">
-                <a:solidFill>
-                  <a:srgbClr val="DC2626"/>
-                </a:solidFill>
-                <a:latin typeface="Meiryo UI"/>
-                <a:ea typeface="Meiryo UI"/>
-              </a:rPr>
-              <a:t>約50〜80万円</a:t>
-            </a:r>
-          </a:p>
-        </p:txBody>
-      </p:sp>
-      <p:sp>
-        <p:nvSpPr>
-          <p:cNvPr id="64" name="TotalBar"/>
-          <p:cNvSpPr/>
-          <p:nvPr/>
-        </p:nvSpPr>
-        <p:spPr>
-          <a:xfrm>
-            <a:off x="546100" y="6273800"/>
-            <a:ext cx="11099800" cy="355600"/>
-          </a:xfrm>
-          <a:prstGeom prst="roundRect">
-            <a:avLst>
-              <a:gd name="adj" fmla="val 10000"/>
-            </a:avLst>
-          </a:prstGeom>
-          <a:solidFill>
-            <a:srgbClr val="E63946"/>
-          </a:solidFill>
-          <a:ln>
-            <a:noFill/>
-          </a:ln>
-        </p:spPr>
-        <p:txBody>
-          <a:bodyPr wrap="square" lIns="91440" tIns="0" rIns="91440" bIns="0" anchor="ctr"/>
-          <a:lstStyle/>
-          <a:p>
-            <a:pPr algn="ctr"/>
-            <a:r>
-              <a:rPr lang="ja-JP" altLang="en-US" sz="1400" b="1" dirty="0">
-                <a:solidFill>
-                  <a:srgbClr val="FFFFFF"/>
-                </a:solidFill>
-                <a:latin typeface="Meiryo UI"/>
-                <a:ea typeface="Meiryo UI"/>
-              </a:rPr>
-              <a:t>全拡張の概算合計: 約610〜1,050万円（段階的に投資）</a:t>
-            </a:r>
-          </a:p>
-        </p:txBody>
-      </p:sp>
-      <p:sp>
-        <p:nvSpPr>
-          <p:cNvPr id="65" name="Footer"/>
-          <p:cNvSpPr/>
-          <p:nvPr/>
-        </p:nvSpPr>
-        <p:spPr>
-          <a:xfrm>
-            <a:off x="546100" y="6680200"/>
-            <a:ext cx="11099800" cy="152400"/>
-          </a:xfrm>
-          <a:prstGeom prst="rect">
-            <a:avLst/>
-          </a:prstGeom>
-          <a:noFill/>
-          <a:ln>
-            <a:noFill/>
-          </a:ln>
-        </p:spPr>
-        <p:txBody>
-          <a:bodyPr wrap="square" lIns="0" tIns="0" rIns="0" bIns="0"/>
-          <a:lstStyle/>
-          <a:p>
-            <a:pPr algn="l"/>
-            <a:r>
-              <a:rPr lang="ja-JP" altLang="en-US" sz="900" dirty="0">
-                <a:solidFill>
-                  <a:srgbClr val="9CA3AF"/>
-                </a:solidFill>
-                <a:latin typeface="Meiryo UI"/>
-                <a:ea typeface="Meiryo UI"/>
-              </a:rPr>
-              <a:t>LIVE SPOtCH  |  LIN-NAH株式会社  |  2026年4月</a:t>
+              </a:defRPr>
+            </a:pPr>
+            <a:r>
+              <a:t>LIVE SPOtCH  |  LIN-NAH株式会社  |  2026年5月 v2 改訂版</a:t>
             </a:r>
           </a:p>
         </p:txBody>
       </p:sp>
     </p:spTree>
-    <p:extLst>
-      <p:ext uri="{BB962C8B-B14F-4D97-AF65-F5344CB8AC3E}">
-        <p14:creationId xmlns:p14="http://schemas.microsoft.com/office/powerpoint/2010/main" val="2360329068"/>
-      </p:ext>
-    </p:extLst>
   </p:cSld>
   <p:clrMapOvr>
     <a:masterClrMapping/>
@@ -7991,26 +8191,4 @@
   </a:objectDefaults>
   <a:extraClrSchemeLst/>
 </a:theme>
-</file>
-
-<file path=ppt/webextensions/taskpanes.xml><?xml version="1.0" encoding="utf-8"?>
-<wetp:taskpanes xmlns:wetp="http://schemas.microsoft.com/office/webextensions/taskpanes/2010/11">
-  <wetp:taskpane dockstate="right" visibility="0" width="350" row="0">
-    <wetp:webextensionref xmlns:r="http://schemas.openxmlformats.org/officeDocument/2006/relationships" r:id="rId1"/>
-  </wetp:taskpane>
-</wetp:taskpanes>
-</file>
-
-<file path=ppt/webextensions/webextension1.xml><?xml version="1.0" encoding="utf-8"?>
-<we:webextension xmlns:we="http://schemas.microsoft.com/office/webextensions/webextension/2010/11" id="{D230649E-80E1-6148-9347-6A0631153562}">
-  <we:reference id="wa200010001" version="1.0.0.1" store="ja-JP" storeType="OMEX"/>
-  <we:alternateReferences>
-    <we:reference id="WA200010001" version="1.0.0.1" store="WA200010001" storeType="OMEX"/>
-  </we:alternateReferences>
-  <we:properties>
-    <we:property name="claude.fileId" value="&quot;044c16d4-40a1-4af6-ac55-a695f6ca7f25&quot;"/>
-  </we:properties>
-  <we:bindings/>
-  <we:snapshot xmlns:r="http://schemas.openxmlformats.org/officeDocument/2006/relationships"/>
-</we:webextension>
 </file>